--- a/Final_Review_Mini_Project_Semiconductor_Defects.pptx
+++ b/Final_Review_Mini_Project_Semiconductor_Defects.pptx
@@ -16,12 +16,8 @@
     <p:sldId id="308" r:id="rId7"/>
     <p:sldId id="310" r:id="rId8"/>
     <p:sldId id="311" r:id="rId9"/>
-    <p:sldId id="312" r:id="rId10"/>
-    <p:sldId id="313" r:id="rId11"/>
     <p:sldId id="316" r:id="rId12"/>
-    <p:sldId id="317" r:id="rId13"/>
     <p:sldId id="318" r:id="rId14"/>
-    <p:sldId id="319" r:id="rId15"/>
     <p:sldId id="322" r:id="rId16"/>
     <p:sldId id="323" r:id="rId17"/>
   </p:sldIdLst>
@@ -14875,13 +14871,13 @@
           <a:p>
             <a:pPr algn="l"/>
             <a:r>
-              <a:rPr sz="1400" b="0">
-                <a:solidFill>
-                  <a:srgbClr val="1E293B"/>
+              <a:rPr sz="1400" b="1">
+                <a:solidFill>
+                  <a:srgbClr val="0F172A"/>
                 </a:solidFill>
                 <a:latin typeface="Times New Roman"/>
               </a:rPr>
-              <a:t>Date: October 2026</a:t>
+              <a:t>B.Tech Mini Project Final Internal Review • October 2026</a:t>
             </a:r>
           </a:p>
         </p:txBody>
@@ -14995,10 +14991,15 @@
               </a:spcAft>
               <a:buNone/>
             </a:pPr>
-            <a:fld id="{00000000-1234-1234-1234-123412341234}" type="slidenum">
-              <a:rPr lang="en-US"/>
+            <a:r>
+              <a:rPr sz="1800" b="1">
+                <a:solidFill>
+                  <a:srgbClr val="0F172A"/>
+                </a:solidFill>
+                <a:latin typeface="Times New Roman"/>
+              </a:rPr>
               <a:t>1</a:t>
-            </a:fld>
+            </a:r>
             <a:endParaRPr/>
           </a:p>
         </p:txBody>
@@ -15209,10 +15210,15 @@
               </a:spcAft>
               <a:buNone/>
             </a:pPr>
-            <a:fld id="{00000000-1234-1234-1234-123412341234}" type="slidenum">
-              <a:rPr lang="en-US"/>
-              <a:t>10</a:t>
-            </a:fld>
+            <a:r>
+              <a:rPr sz="1800" b="1">
+                <a:solidFill>
+                  <a:srgbClr val="0F172A"/>
+                </a:solidFill>
+                <a:latin typeface="Times New Roman"/>
+              </a:rPr>
+              <a:t>8</a:t>
+            </a:r>
             <a:endParaRPr/>
           </a:p>
         </p:txBody>
@@ -15846,13 +15852,34 @@
               <a:buNone/>
             </a:pPr>
             <a:r>
-              <a:rPr sz="3400" b="1">
-                <a:solidFill>
-                  <a:srgbClr val="0F172A"/>
-                </a:solidFill>
+              <a:rPr lang="en-US" sz="4000" dirty="0">
+                <a:solidFill>
+                  <a:srgbClr val="181C24"/>
+                </a:solidFill>
+                <a:highlight>
+                  <a:srgbClr val="FFFFFF"/>
+                </a:highlight>
                 <a:latin typeface="Times New Roman"/>
+                <a:ea typeface="Times New Roman"/>
+                <a:cs typeface="Times New Roman"/>
+                <a:sym typeface="Times New Roman"/>
               </a:rPr>
-              <a:t>HARDWARE &amp; SOFTWARE REQUIREMENTS</a:t>
+              <a:t> </a:t>
+            </a:r>
+            <a:r>
+              <a:rPr lang="en-US" sz="3600" b="1" dirty="0">
+                <a:solidFill>
+                  <a:srgbClr val="181C24"/>
+                </a:solidFill>
+                <a:highlight>
+                  <a:srgbClr val="FFFFFF"/>
+                </a:highlight>
+                <a:latin typeface="Times New Roman"/>
+                <a:ea typeface="Times New Roman"/>
+                <a:cs typeface="Times New Roman"/>
+                <a:sym typeface="Times New Roman"/>
+              </a:rPr>
+              <a:t>HARDWARE REQUIREMENTS</a:t>
             </a:r>
             <a:endParaRPr sz="3600" b="1" dirty="0">
               <a:latin typeface="Times New Roman"/>
@@ -15875,8 +15902,8 @@
         </p:nvSpPr>
         <p:spPr>
           <a:xfrm>
-            <a:off x="731520" y="1920240"/>
-            <a:ext cx="10698480" cy="4114800"/>
+            <a:off x="459967" y="2055887"/>
+            <a:ext cx="11128800" cy="4351800"/>
           </a:xfrm>
           <a:prstGeom prst="rect">
             <a:avLst/>
@@ -15897,232 +15924,78 @@
                 <a:spcPct val="100000"/>
               </a:lnSpc>
               <a:spcBef>
-                <a:spcPts val="800"/>
-              </a:spcBef>
-              <a:spcAft>
-                <a:spcPts val="200"/>
-              </a:spcAft>
+                <a:spcPts val="1200"/>
+              </a:spcBef>
               <a:buSzPts val="2600"/>
               <a:buFont typeface="Noto Sans Symbols"/>
               <a:buChar char="⮪"/>
             </a:pPr>
             <a:r>
-              <a:rPr sz="2200" b="1">
-                <a:solidFill>
-                  <a:srgbClr val="0284C7"/>
-                </a:solidFill>
-                <a:latin typeface="Times New Roman"/>
+              <a:rPr lang="en-US" dirty="0">
+                <a:latin typeface="Times New Roman" panose="02020603050405020304" pitchFamily="18" charset="0"/>
+                <a:cs typeface="Times New Roman" panose="02020603050405020304" pitchFamily="18" charset="0"/>
               </a:rPr>
-              <a:t>Software Requirements</a:t>
+              <a:t>Intel i5 Processor (or equivalent)</a:t>
             </a:r>
           </a:p>
           <a:p>
-            <a:pPr>
-              <a:spcBef>
-                <a:spcPts val="200"/>
-              </a:spcBef>
-              <a:spcAft>
-                <a:spcPts val="400"/>
-              </a:spcAft>
+            <a:pPr marL="342900" lvl="0" indent="-342900" algn="l">
+              <a:lnSpc>
+                <a:spcPct val="100000"/>
+              </a:lnSpc>
+              <a:spcBef>
+                <a:spcPts val="1200"/>
+              </a:spcBef>
+              <a:buSzPts val="2600"/>
+              <a:buFont typeface="Noto Sans Symbols"/>
+              <a:buChar char="⮪"/>
             </a:pPr>
             <a:r>
-              <a:rPr sz="1800" b="0">
-                <a:solidFill>
-                  <a:srgbClr val="1E293B"/>
-                </a:solidFill>
-                <a:latin typeface="Times New Roman"/>
+              <a:rPr lang="en-US" dirty="0">
+                <a:latin typeface="Times New Roman" panose="02020603050405020304" pitchFamily="18" charset="0"/>
+                <a:cs typeface="Times New Roman" panose="02020603050405020304" pitchFamily="18" charset="0"/>
               </a:rPr>
-              <a:t>•  Operating System: Windows 11 / Linux (Ubuntu 22.04 LTS)</a:t>
+              <a:t>8 GB RAM</a:t>
             </a:r>
           </a:p>
           <a:p>
-            <a:pPr>
-              <a:spcBef>
-                <a:spcPts val="200"/>
-              </a:spcBef>
-              <a:spcAft>
-                <a:spcPts val="400"/>
-              </a:spcAft>
+            <a:pPr marL="342900" lvl="0" indent="-342900" algn="l">
+              <a:lnSpc>
+                <a:spcPct val="100000"/>
+              </a:lnSpc>
+              <a:spcBef>
+                <a:spcPts val="1200"/>
+              </a:spcBef>
+              <a:buSzPts val="2600"/>
+              <a:buFont typeface="Noto Sans Symbols"/>
+              <a:buChar char="⮪"/>
             </a:pPr>
             <a:r>
-              <a:rPr sz="1800" b="0">
-                <a:solidFill>
-                  <a:srgbClr val="1E293B"/>
-                </a:solidFill>
-                <a:latin typeface="Times New Roman"/>
+              <a:rPr lang="en-US" dirty="0">
+                <a:latin typeface="Times New Roman" panose="02020603050405020304" pitchFamily="18" charset="0"/>
+                <a:cs typeface="Times New Roman" panose="02020603050405020304" pitchFamily="18" charset="0"/>
               </a:rPr>
-              <a:t>•  Programming Language: Python 3.12 / 3.10</a:t>
+              <a:t>256 GB SSD Storage</a:t>
             </a:r>
           </a:p>
           <a:p>
-            <a:pPr>
-              <a:spcBef>
-                <a:spcPts val="200"/>
-              </a:spcBef>
-              <a:spcAft>
-                <a:spcPts val="400"/>
-              </a:spcAft>
+            <a:pPr marL="342900" lvl="0" indent="-342900" algn="l">
+              <a:lnSpc>
+                <a:spcPct val="100000"/>
+              </a:lnSpc>
+              <a:spcBef>
+                <a:spcPts val="1200"/>
+              </a:spcBef>
+              <a:buSzPts val="2600"/>
+              <a:buFont typeface="Noto Sans Symbols"/>
+              <a:buChar char="⮪"/>
             </a:pPr>
             <a:r>
-              <a:rPr sz="1800" b="0">
-                <a:solidFill>
-                  <a:srgbClr val="1E293B"/>
-                </a:solidFill>
-                <a:latin typeface="Times New Roman"/>
+              <a:rPr lang="en-US" dirty="0">
+                <a:latin typeface="Times New Roman" panose="02020603050405020304" pitchFamily="18" charset="0"/>
+                <a:cs typeface="Times New Roman" panose="02020603050405020304" pitchFamily="18" charset="0"/>
               </a:rPr>
-              <a:t>•  Deep Learning Framework: PyTorch 2.x, Torchvision</a:t>
-            </a:r>
-          </a:p>
-          <a:p>
-            <a:pPr>
-              <a:spcBef>
-                <a:spcPts val="200"/>
-              </a:spcBef>
-              <a:spcAft>
-                <a:spcPts val="400"/>
-              </a:spcAft>
-            </a:pPr>
-            <a:r>
-              <a:rPr sz="1800" b="0">
-                <a:solidFill>
-                  <a:srgbClr val="1E293B"/>
-                </a:solidFill>
-                <a:latin typeface="Times New Roman"/>
-              </a:rPr>
-              <a:t>•  Edge Runtime Engine: ONNX Runtime 1.18+</a:t>
-            </a:r>
-          </a:p>
-          <a:p>
-            <a:pPr>
-              <a:spcBef>
-                <a:spcPts val="200"/>
-              </a:spcBef>
-              <a:spcAft>
-                <a:spcPts val="400"/>
-              </a:spcAft>
-            </a:pPr>
-            <a:r>
-              <a:rPr sz="1800" b="0">
-                <a:solidFill>
-                  <a:srgbClr val="1E293B"/>
-                </a:solidFill>
-                <a:latin typeface="Times New Roman"/>
-              </a:rPr>
-              <a:t>•  Computer Vision &amp; Analytics: OpenCV (cv2), NumPy, Scikit-learn, Matplotlib, Seaborn</a:t>
-            </a:r>
-          </a:p>
-          <a:p>
-            <a:pPr>
-              <a:spcBef>
-                <a:spcPts val="200"/>
-              </a:spcBef>
-              <a:spcAft>
-                <a:spcPts val="400"/>
-              </a:spcAft>
-            </a:pPr>
-            <a:r>
-              <a:rPr sz="1800" b="0">
-                <a:solidFill>
-                  <a:srgbClr val="1E293B"/>
-                </a:solidFill>
-                <a:latin typeface="Times New Roman"/>
-              </a:rPr>
-              <a:t>•  Web Application &amp; API: HTML5 Canvas, Vanilla CSS3, JavaScript ES6, Python HTTP Server</a:t>
-            </a:r>
-          </a:p>
-          <a:p>
-            <a:pPr>
-              <a:spcBef>
-                <a:spcPts val="800"/>
-              </a:spcBef>
-              <a:spcAft>
-                <a:spcPts val="200"/>
-              </a:spcAft>
-            </a:pPr>
-            <a:r>
-              <a:rPr sz="2200" b="1">
-                <a:solidFill>
-                  <a:srgbClr val="0284C7"/>
-                </a:solidFill>
-                <a:latin typeface="Times New Roman"/>
-              </a:rPr>
-              <a:t>Hardware Requirements</a:t>
-            </a:r>
-          </a:p>
-          <a:p>
-            <a:pPr>
-              <a:spcBef>
-                <a:spcPts val="200"/>
-              </a:spcBef>
-              <a:spcAft>
-                <a:spcPts val="400"/>
-              </a:spcAft>
-            </a:pPr>
-            <a:r>
-              <a:rPr sz="1800" b="0">
-                <a:solidFill>
-                  <a:srgbClr val="1E293B"/>
-                </a:solidFill>
-                <a:latin typeface="Times New Roman"/>
-              </a:rPr>
-              <a:t>•  Training Platform: Intel Core i5/i7 Processor, 16 GB RAM (optional NVIDIA RTX GPU for training)</a:t>
-            </a:r>
-          </a:p>
-          <a:p>
-            <a:pPr>
-              <a:spcBef>
-                <a:spcPts val="200"/>
-              </a:spcBef>
-              <a:spcAft>
-                <a:spcPts val="400"/>
-              </a:spcAft>
-            </a:pPr>
-            <a:r>
-              <a:rPr sz="1800" b="0">
-                <a:solidFill>
-                  <a:srgbClr val="1E293B"/>
-                </a:solidFill>
-                <a:latin typeface="Times New Roman"/>
-              </a:rPr>
-              <a:t>•  Deployment Station: Standard x86 PC or ARM Single Board Computer (Raspberry Pi 4/5, Intel NUC)</a:t>
-            </a:r>
-          </a:p>
-          <a:p>
-            <a:pPr>
-              <a:spcBef>
-                <a:spcPts val="200"/>
-              </a:spcBef>
-              <a:spcAft>
-                <a:spcPts val="400"/>
-              </a:spcAft>
-            </a:pPr>
-            <a:r>
-              <a:rPr sz="1800" b="0">
-                <a:solidFill>
-                  <a:srgbClr val="1E293B"/>
-                </a:solidFill>
-                <a:latin typeface="Times New Roman"/>
-              </a:rPr>
-              <a:t>•  Storage: 256 GB SSD (dataset repository and evaluation logs)</a:t>
-            </a:r>
-          </a:p>
-          <a:p>
-            <a:pPr>
-              <a:spcBef>
-                <a:spcPts val="200"/>
-              </a:spcBef>
-              <a:spcAft>
-                <a:spcPts val="400"/>
-              </a:spcAft>
-            </a:pPr>
-            <a:r>
-              <a:rPr sz="1800" b="0">
-                <a:solidFill>
-                  <a:srgbClr val="1E293B"/>
-                </a:solidFill>
-                <a:latin typeface="Times New Roman"/>
-              </a:rPr>
-              <a:t>•  Network: Standard Gigabit Ethernet / Wi-Fi for shop-floor scanner transmission</a:t>
+              <a:t>Stable Internet Connection</a:t>
             </a:r>
           </a:p>
         </p:txBody>
@@ -16217,10 +16090,15 @@
               </a:spcAft>
               <a:buNone/>
             </a:pPr>
-            <a:fld id="{00000000-1234-1234-1234-123412341234}" type="slidenum">
-              <a:rPr lang="en-US"/>
-              <a:t>12</a:t>
-            </a:fld>
+            <a:r>
+              <a:rPr sz="1800" b="1">
+                <a:solidFill>
+                  <a:srgbClr val="0F172A"/>
+                </a:solidFill>
+                <a:latin typeface="Times New Roman"/>
+              </a:rPr>
+              <a:t>9</a:t>
+            </a:r>
             <a:endParaRPr/>
           </a:p>
         </p:txBody>
@@ -16815,13 +16693,34 @@
               <a:buNone/>
             </a:pPr>
             <a:r>
-              <a:rPr sz="3400" b="1">
-                <a:solidFill>
-                  <a:srgbClr val="0F172A"/>
-                </a:solidFill>
+              <a:rPr lang="en-US" sz="3600" i="0" dirty="0">
+                <a:solidFill>
+                  <a:srgbClr val="181C24"/>
+                </a:solidFill>
+                <a:highlight>
+                  <a:srgbClr val="FFFFFF"/>
+                </a:highlight>
                 <a:latin typeface="Times New Roman"/>
+                <a:ea typeface="Times New Roman"/>
+                <a:cs typeface="Times New Roman"/>
+                <a:sym typeface="Times New Roman"/>
               </a:rPr>
-              <a:t>PROJECT TIMELINE &amp; TEAM CONTRIBUTIONS</a:t>
+              <a:t>    </a:t>
+            </a:r>
+            <a:r>
+              <a:rPr lang="en-US" sz="3600" b="1" i="0" dirty="0">
+                <a:solidFill>
+                  <a:srgbClr val="181C24"/>
+                </a:solidFill>
+                <a:highlight>
+                  <a:srgbClr val="FFFFFF"/>
+                </a:highlight>
+                <a:latin typeface="Times New Roman"/>
+                <a:ea typeface="Times New Roman"/>
+                <a:cs typeface="Times New Roman"/>
+                <a:sym typeface="Times New Roman"/>
+              </a:rPr>
+              <a:t>PROJECT TIMELINE</a:t>
             </a:r>
             <a:endParaRPr sz="3600" b="1" dirty="0">
               <a:latin typeface="Times New Roman"/>
@@ -16975,219 +16874,6 @@
           </a:p>
         </p:txBody>
       </p:sp>
-      <p:sp>
-        <p:nvSpPr>
-          <p:cNvPr id="170" name="TextBox 169"/>
-          <p:cNvSpPr txBox="1"/>
-          <p:nvPr/>
-        </p:nvSpPr>
-        <p:spPr>
-          <a:xfrm>
-            <a:off x="731520" y="1920240"/>
-            <a:ext cx="10698480" cy="4114800"/>
-          </a:xfrm>
-          <a:prstGeom prst="rect">
-            <a:avLst/>
-          </a:prstGeom>
-          <a:noFill/>
-        </p:spPr>
-        <p:txBody>
-          <a:bodyPr wrap="square">
-            <a:spAutoFit/>
-          </a:bodyPr>
-          <a:lstStyle/>
-          <a:p>
-            <a:pPr>
-              <a:spcBef>
-                <a:spcPts val="800"/>
-              </a:spcBef>
-              <a:spcAft>
-                <a:spcPts val="200"/>
-              </a:spcAft>
-            </a:pPr>
-            <a:r>
-              <a:rPr sz="2200" b="1">
-                <a:solidFill>
-                  <a:srgbClr val="0284C7"/>
-                </a:solidFill>
-                <a:latin typeface="Times New Roman"/>
-              </a:rPr>
-              <a:t>Project Milestone Timeline</a:t>
-            </a:r>
-          </a:p>
-          <a:p>
-            <a:pPr>
-              <a:spcBef>
-                <a:spcPts val="200"/>
-              </a:spcBef>
-              <a:spcAft>
-                <a:spcPts val="400"/>
-              </a:spcAft>
-            </a:pPr>
-            <a:r>
-              <a:rPr sz="1800" b="0">
-                <a:solidFill>
-                  <a:srgbClr val="1E293B"/>
-                </a:solidFill>
-                <a:latin typeface="Times New Roman"/>
-              </a:rPr>
-              <a:t>•  Weeks 1–3: Literature survey, problem formulation, and WM-811K benchmark acquisition.</a:t>
-            </a:r>
-          </a:p>
-          <a:p>
-            <a:pPr>
-              <a:spcBef>
-                <a:spcPts val="200"/>
-              </a:spcBef>
-              <a:spcAft>
-                <a:spcPts val="400"/>
-              </a:spcAft>
-            </a:pPr>
-            <a:r>
-              <a:rPr sz="1800" b="0">
-                <a:solidFill>
-                  <a:srgbClr val="1E293B"/>
-                </a:solidFill>
-                <a:latin typeface="Times New Roman"/>
-              </a:rPr>
-              <a:t>•  Weeks 4–6: Dataset preprocessing, spatial normalization (224x224), and augmentation pipeline.</a:t>
-            </a:r>
-          </a:p>
-          <a:p>
-            <a:pPr>
-              <a:spcBef>
-                <a:spcPts val="200"/>
-              </a:spcBef>
-              <a:spcAft>
-                <a:spcPts val="400"/>
-              </a:spcAft>
-            </a:pPr>
-            <a:r>
-              <a:rPr sz="1800" b="0">
-                <a:solidFill>
-                  <a:srgbClr val="1E293B"/>
-                </a:solidFill>
-                <a:latin typeface="Times New Roman"/>
-              </a:rPr>
-              <a:t>•  Weeks 7–9: MobileNetV3-Small model implementation, transfer learning, and hyperparameter tuning.</a:t>
-            </a:r>
-          </a:p>
-          <a:p>
-            <a:pPr>
-              <a:spcBef>
-                <a:spcPts val="200"/>
-              </a:spcBef>
-              <a:spcAft>
-                <a:spcPts val="400"/>
-              </a:spcAft>
-            </a:pPr>
-            <a:r>
-              <a:rPr sz="1800" b="0">
-                <a:solidFill>
-                  <a:srgbClr val="1E293B"/>
-                </a:solidFill>
-                <a:latin typeface="Times New Roman"/>
-              </a:rPr>
-              <a:t>•  Weeks 10–12: ONNX edge runtime conversion, latency benchmarking, and confusion matrix evaluation.</a:t>
-            </a:r>
-          </a:p>
-          <a:p>
-            <a:pPr>
-              <a:spcBef>
-                <a:spcPts val="200"/>
-              </a:spcBef>
-              <a:spcAft>
-                <a:spcPts val="400"/>
-              </a:spcAft>
-            </a:pPr>
-            <a:r>
-              <a:rPr sz="1800" b="0">
-                <a:solidFill>
-                  <a:srgbClr val="1E293B"/>
-                </a:solidFill>
-                <a:latin typeface="Times New Roman"/>
-              </a:rPr>
-              <a:t>•  Weeks 13–14: Full-stack web AOI demo development, die pass/fail matrix, and defense documentation.</a:t>
-            </a:r>
-          </a:p>
-          <a:p>
-            <a:pPr>
-              <a:spcBef>
-                <a:spcPts val="800"/>
-              </a:spcBef>
-              <a:spcAft>
-                <a:spcPts val="200"/>
-              </a:spcAft>
-            </a:pPr>
-            <a:r>
-              <a:rPr sz="2200" b="1">
-                <a:solidFill>
-                  <a:srgbClr val="0284C7"/>
-                </a:solidFill>
-                <a:latin typeface="Times New Roman"/>
-              </a:rPr>
-              <a:t>Individual Team Member Responsibilities</a:t>
-            </a:r>
-          </a:p>
-          <a:p>
-            <a:pPr>
-              <a:spcBef>
-                <a:spcPts val="200"/>
-              </a:spcBef>
-              <a:spcAft>
-                <a:spcPts val="400"/>
-              </a:spcAft>
-            </a:pPr>
-            <a:r>
-              <a:rPr sz="1800" b="0">
-                <a:solidFill>
-                  <a:srgbClr val="1E293B"/>
-                </a:solidFill>
-                <a:latin typeface="Times New Roman"/>
-              </a:rPr>
-              <a:t>•  ADITHYAN B (MGP23EVLSI001): Model architecture engineering, MobileNetV3-Small training, PyTorch-to-ONNX model optimization, and latency profiling.</a:t>
-            </a:r>
-          </a:p>
-          <a:p>
-            <a:pPr>
-              <a:spcBef>
-                <a:spcPts val="200"/>
-              </a:spcBef>
-              <a:spcAft>
-                <a:spcPts val="400"/>
-              </a:spcAft>
-            </a:pPr>
-            <a:r>
-              <a:rPr sz="1800" b="0">
-                <a:solidFill>
-                  <a:srgbClr val="1E293B"/>
-                </a:solidFill>
-                <a:latin typeface="Times New Roman"/>
-              </a:rPr>
-              <a:t>•  ANNA BOBAN (MGP23EVLSI002): Dataset curation, spatial normalization, data augmentation, evaluation metrics calculation, and confusion matrix validation.</a:t>
-            </a:r>
-          </a:p>
-          <a:p>
-            <a:pPr>
-              <a:spcBef>
-                <a:spcPts val="200"/>
-              </a:spcBef>
-              <a:spcAft>
-                <a:spcPts val="400"/>
-              </a:spcAft>
-            </a:pPr>
-            <a:r>
-              <a:rPr sz="1800" b="0">
-                <a:solidFill>
-                  <a:srgbClr val="1E293B"/>
-                </a:solidFill>
-                <a:latin typeface="Times New Roman"/>
-              </a:rPr>
-              <a:t>•  NOOPA MARIA ROJAN (MGP23EVLSI009): Real-time web deployment, interactive HTML5 wafer canvas, die pass/fail color logic, fab lot simulator, and REST API integration.</a:t>
-            </a:r>
-          </a:p>
-        </p:txBody>
-      </p:sp>
     </p:spTree>
   </p:cSld>
   <p:clrMapOvr>
@@ -17310,10 +16996,15 @@
               </a:spcAft>
               <a:buNone/>
             </a:pPr>
-            <a:fld id="{00000000-1234-1234-1234-123412341234}" type="slidenum">
-              <a:rPr lang="en-US"/>
-              <a:t>14</a:t>
-            </a:fld>
+            <a:r>
+              <a:rPr sz="1800" b="1">
+                <a:solidFill>
+                  <a:srgbClr val="0F172A"/>
+                </a:solidFill>
+                <a:latin typeface="Times New Roman"/>
+              </a:rPr>
+              <a:t>10</a:t>
+            </a:r>
             <a:endParaRPr/>
           </a:p>
         </p:txBody>
@@ -17642,10 +17333,15 @@
               </a:spcAft>
               <a:buNone/>
             </a:pPr>
-            <a:fld id="{00000000-1234-1234-1234-123412341234}" type="slidenum">
-              <a:rPr lang="en-US"/>
-              <a:t>15</a:t>
-            </a:fld>
+            <a:r>
+              <a:rPr sz="1800" b="1">
+                <a:solidFill>
+                  <a:srgbClr val="0F172A"/>
+                </a:solidFill>
+                <a:latin typeface="Times New Roman"/>
+              </a:rPr>
+              <a:t>11</a:t>
+            </a:r>
             <a:endParaRPr/>
           </a:p>
         </p:txBody>
@@ -17928,7 +17624,7 @@
                 </a:solidFill>
                 <a:latin typeface="Times New Roman"/>
               </a:rPr>
-              <a:t>B.Tech Mini Project Final Review • Saintgits College of Engineering (Autonomous)</a:t>
+              <a:t>B.Tech Mini Project Final Internal Review • Saintgits College of Engineering (Autonomous)</a:t>
             </a:r>
           </a:p>
           <a:p>
@@ -18020,10 +17716,15 @@
               </a:spcAft>
               <a:buNone/>
             </a:pPr>
-            <a:fld id="{00000000-1234-1234-1234-123412341234}" type="slidenum">
-              <a:rPr lang="en-US"/>
+            <a:r>
+              <a:rPr sz="1800" b="1">
+                <a:solidFill>
+                  <a:srgbClr val="0F172A"/>
+                </a:solidFill>
+                <a:latin typeface="Times New Roman"/>
+              </a:rPr>
               <a:t>2</a:t>
-            </a:fld>
+            </a:r>
             <a:endParaRPr/>
           </a:p>
         </p:txBody>
@@ -18473,10 +18174,15 @@
               </a:spcAft>
               <a:buNone/>
             </a:pPr>
-            <a:fld id="{00000000-1234-1234-1234-123412341234}" type="slidenum">
-              <a:rPr lang="en-US"/>
+            <a:r>
+              <a:rPr sz="1800" b="1">
+                <a:solidFill>
+                  <a:srgbClr val="0F172A"/>
+                </a:solidFill>
+                <a:latin typeface="Times New Roman"/>
+              </a:rPr>
               <a:t>3</a:t>
-            </a:fld>
+            </a:r>
             <a:endParaRPr/>
           </a:p>
         </p:txBody>
@@ -18926,10 +18632,15 @@
               </a:spcAft>
               <a:buNone/>
             </a:pPr>
-            <a:fld id="{00000000-1234-1234-1234-123412341234}" type="slidenum">
-              <a:rPr lang="en-US"/>
+            <a:r>
+              <a:rPr sz="1800" b="1">
+                <a:solidFill>
+                  <a:srgbClr val="0F172A"/>
+                </a:solidFill>
+                <a:latin typeface="Times New Roman"/>
+              </a:rPr>
               <a:t>4</a:t>
-            </a:fld>
+            </a:r>
             <a:endParaRPr/>
           </a:p>
         </p:txBody>
@@ -19417,10 +19128,15 @@
               </a:spcAft>
               <a:buNone/>
             </a:pPr>
-            <a:fld id="{00000000-1234-1234-1234-123412341234}" type="slidenum">
-              <a:rPr lang="en-US"/>
+            <a:r>
+              <a:rPr sz="1800" b="1">
+                <a:solidFill>
+                  <a:srgbClr val="0F172A"/>
+                </a:solidFill>
+                <a:latin typeface="Times New Roman"/>
+              </a:rPr>
               <a:t>5</a:t>
-            </a:fld>
+            </a:r>
             <a:endParaRPr/>
           </a:p>
         </p:txBody>
@@ -19826,7 +19542,7 @@
                 </a:solidFill>
                 <a:latin typeface="Times New Roman"/>
               </a:rPr>
-              <a:t>EXISTING SYSTEM</a:t>
+              <a:t>END-TO-END SYSTEM ARCHITECTURE</a:t>
             </a:r>
             <a:endParaRPr sz="3600" b="1" dirty="0">
               <a:latin typeface="Times New Roman" panose="02020603050405020304" pitchFamily="18" charset="0"/>
@@ -19853,8 +19569,8 @@
         </p:nvSpPr>
         <p:spPr>
           <a:xfrm>
-            <a:off x="731520" y="1920240"/>
-            <a:ext cx="10698480" cy="4114800"/>
+            <a:off x="-18288000" y="1754042"/>
+            <a:ext cx="10955338" cy="4419668"/>
           </a:xfrm>
           <a:prstGeom prst="rect">
             <a:avLst/>
@@ -19875,176 +19591,12 @@
                 <a:spcPct val="100000"/>
               </a:lnSpc>
               <a:spcBef>
-                <a:spcPts val="800"/>
-              </a:spcBef>
-              <a:spcAft>
-                <a:spcPts val="200"/>
-              </a:spcAft>
+                <a:spcPts val="1200"/>
+              </a:spcBef>
               <a:buSzPts val="2600"/>
               <a:buFont typeface="Noto Sans Symbols"/>
               <a:buChar char="⮪"/>
             </a:pPr>
-            <a:r>
-              <a:rPr sz="2200" b="1">
-                <a:solidFill>
-                  <a:srgbClr val="0284C7"/>
-                </a:solidFill>
-                <a:latin typeface="Times New Roman"/>
-              </a:rPr>
-              <a:t>Current Industrial Inspection Methods</a:t>
-            </a:r>
-          </a:p>
-          <a:p>
-            <a:pPr>
-              <a:spcBef>
-                <a:spcPts val="200"/>
-              </a:spcBef>
-              <a:spcAft>
-                <a:spcPts val="400"/>
-              </a:spcAft>
-            </a:pPr>
-            <a:r>
-              <a:rPr sz="1800" b="0">
-                <a:solidFill>
-                  <a:srgbClr val="1E293B"/>
-                </a:solidFill>
-                <a:latin typeface="Times New Roman"/>
-              </a:rPr>
-              <a:t>•  Manual microscopy visual verification conducted by quality assurance personnel.</a:t>
-            </a:r>
-          </a:p>
-          <a:p>
-            <a:pPr>
-              <a:spcBef>
-                <a:spcPts val="200"/>
-              </a:spcBef>
-              <a:spcAft>
-                <a:spcPts val="400"/>
-              </a:spcAft>
-            </a:pPr>
-            <a:r>
-              <a:rPr sz="1800" b="0">
-                <a:solidFill>
-                  <a:srgbClr val="1E293B"/>
-                </a:solidFill>
-                <a:latin typeface="Times New Roman"/>
-              </a:rPr>
-              <a:t>•  Legacy rule-based computer vision utilizing handcrafted spatial filters, Hough transforms, and template matching.</a:t>
-            </a:r>
-          </a:p>
-          <a:p>
-            <a:pPr>
-              <a:spcBef>
-                <a:spcPts val="800"/>
-              </a:spcBef>
-              <a:spcAft>
-                <a:spcPts val="200"/>
-              </a:spcAft>
-            </a:pPr>
-            <a:r>
-              <a:rPr sz="2200" b="1">
-                <a:solidFill>
-                  <a:srgbClr val="0284C7"/>
-                </a:solidFill>
-                <a:latin typeface="Times New Roman"/>
-              </a:rPr>
-              <a:t>Operational Workflow</a:t>
-            </a:r>
-          </a:p>
-          <a:p>
-            <a:pPr>
-              <a:spcBef>
-                <a:spcPts val="200"/>
-              </a:spcBef>
-              <a:spcAft>
-                <a:spcPts val="400"/>
-              </a:spcAft>
-            </a:pPr>
-            <a:r>
-              <a:rPr sz="1800" b="0">
-                <a:solidFill>
-                  <a:srgbClr val="1E293B"/>
-                </a:solidFill>
-                <a:latin typeface="Times New Roman"/>
-              </a:rPr>
-              <a:t>•  Wafer scan acquired -&gt; Batch saved to server -&gt; Heuristic filters evaluate die failure threshold -&gt; Manual verification triggered for ambiguous patterns.</a:t>
-            </a:r>
-          </a:p>
-          <a:p>
-            <a:pPr>
-              <a:spcBef>
-                <a:spcPts val="800"/>
-              </a:spcBef>
-              <a:spcAft>
-                <a:spcPts val="200"/>
-              </a:spcAft>
-            </a:pPr>
-            <a:r>
-              <a:rPr sz="2200" b="1">
-                <a:solidFill>
-                  <a:srgbClr val="0284C7"/>
-                </a:solidFill>
-                <a:latin typeface="Times New Roman"/>
-              </a:rPr>
-              <a:t>Key Technical Limitations</a:t>
-            </a:r>
-          </a:p>
-          <a:p>
-            <a:pPr>
-              <a:spcBef>
-                <a:spcPts val="200"/>
-              </a:spcBef>
-              <a:spcAft>
-                <a:spcPts val="400"/>
-              </a:spcAft>
-            </a:pPr>
-            <a:r>
-              <a:rPr sz="1800" b="0">
-                <a:solidFill>
-                  <a:srgbClr val="1E293B"/>
-                </a:solidFill>
-                <a:latin typeface="Times New Roman"/>
-              </a:rPr>
-              <a:t>•  High latency (&gt;500 ms per wafer) incompatible with continuous inline fab speed.</a:t>
-            </a:r>
-          </a:p>
-          <a:p>
-            <a:pPr>
-              <a:spcBef>
-                <a:spcPts val="200"/>
-              </a:spcBef>
-              <a:spcAft>
-                <a:spcPts val="400"/>
-              </a:spcAft>
-            </a:pPr>
-            <a:r>
-              <a:rPr sz="1800" b="0">
-                <a:solidFill>
-                  <a:srgbClr val="1E293B"/>
-                </a:solidFill>
-                <a:latin typeface="Times New Roman"/>
-              </a:rPr>
-              <a:t>•  High false-alarm rate on nominal wafers caused by random single-die sensor noise.</a:t>
-            </a:r>
-          </a:p>
-          <a:p>
-            <a:pPr>
-              <a:spcBef>
-                <a:spcPts val="200"/>
-              </a:spcBef>
-              <a:spcAft>
-                <a:spcPts val="400"/>
-              </a:spcAft>
-            </a:pPr>
-            <a:r>
-              <a:rPr sz="1800" b="0">
-                <a:solidFill>
-                  <a:srgbClr val="1E293B"/>
-                </a:solidFill>
-                <a:latin typeface="Times New Roman"/>
-              </a:rPr>
-              <a:t>•  Inability to adapt to amorphous, complex, or rotated spatial cluster patterns.</a:t>
-            </a:r>
           </a:p>
         </p:txBody>
       </p:sp>
@@ -20088,10 +19640,15 @@
               </a:spcAft>
               <a:buNone/>
             </a:pPr>
-            <a:fld id="{00000000-1234-1234-1234-123412341234}" type="slidenum">
-              <a:rPr lang="en-US"/>
+            <a:r>
+              <a:rPr sz="1800" b="1">
+                <a:solidFill>
+                  <a:srgbClr val="0F172A"/>
+                </a:solidFill>
+                <a:latin typeface="Times New Roman"/>
+              </a:rPr>
               <a:t>6</a:t>
-            </a:fld>
+            </a:r>
             <a:endParaRPr/>
           </a:p>
         </p:txBody>
@@ -20257,6 +19814,681 @@
           </a:p>
         </p:txBody>
       </p:sp>
+      <p:sp>
+        <p:nvSpPr>
+          <p:cNvPr id="236" name="Rounded Rectangle 235"/>
+          <p:cNvSpPr/>
+          <p:nvPr/>
+        </p:nvSpPr>
+        <p:spPr>
+          <a:xfrm>
+            <a:off x="548640" y="1828800"/>
+            <a:ext cx="2514600" cy="3291840"/>
+          </a:xfrm>
+          <a:prstGeom prst="roundRect">
+            <a:avLst/>
+          </a:prstGeom>
+          <a:solidFill>
+            <a:srgbClr val="F1F5F9"/>
+          </a:solidFill>
+          <a:ln w="19050">
+            <a:solidFill>
+              <a:srgbClr val="CBD5E1"/>
+            </a:solidFill>
+          </a:ln>
+        </p:spPr>
+        <p:style>
+          <a:lnRef idx="1">
+            <a:schemeClr val="accent1"/>
+          </a:lnRef>
+          <a:fillRef idx="3">
+            <a:schemeClr val="accent1"/>
+          </a:fillRef>
+          <a:effectRef idx="2">
+            <a:schemeClr val="accent1"/>
+          </a:effectRef>
+          <a:fontRef idx="minor">
+            <a:schemeClr val="lt1"/>
+          </a:fontRef>
+        </p:style>
+        <p:txBody>
+          <a:bodyPr rtlCol="0" anchor="ctr" wrap="square" lIns="137160" rIns="137160" tIns="164592"/>
+          <a:lstStyle/>
+          <a:p>
+            <a:pPr algn="ctr">
+              <a:spcAft>
+                <a:spcPts val="800"/>
+              </a:spcAft>
+            </a:pPr>
+            <a:r>
+              <a:rPr sz="1400" b="1">
+                <a:solidFill>
+                  <a:srgbClr val="0284C7"/>
+                </a:solidFill>
+                <a:latin typeface="Times New Roman"/>
+              </a:rPr>
+              <a:t>STAGE A: DATA PIPELINE</a:t>
+            </a:r>
+          </a:p>
+          <a:p>
+            <a:pPr>
+              <a:spcBef>
+                <a:spcPts val="300"/>
+              </a:spcBef>
+              <a:spcAft>
+                <a:spcPts val="300"/>
+              </a:spcAft>
+            </a:pPr>
+            <a:r>
+              <a:rPr sz="1200" b="0">
+                <a:solidFill>
+                  <a:srgbClr val="1E293B"/>
+                </a:solidFill>
+                <a:latin typeface="Times New Roman"/>
+              </a:rPr>
+              <a:t>• Raw LSWMD.pkl parsing</a:t>
+            </a:r>
+          </a:p>
+          <a:p>
+            <a:pPr>
+              <a:spcBef>
+                <a:spcPts val="300"/>
+              </a:spcBef>
+              <a:spcAft>
+                <a:spcPts val="300"/>
+              </a:spcAft>
+            </a:pPr>
+            <a:r>
+              <a:rPr sz="1200" b="0">
+                <a:solidFill>
+                  <a:srgbClr val="1E293B"/>
+                </a:solidFill>
+                <a:latin typeface="Times New Roman"/>
+              </a:rPr>
+              <a:t>• Pandas index patch</a:t>
+            </a:r>
+          </a:p>
+          <a:p>
+            <a:pPr>
+              <a:spcBef>
+                <a:spcPts val="300"/>
+              </a:spcBef>
+              <a:spcAft>
+                <a:spcPts val="300"/>
+              </a:spcAft>
+            </a:pPr>
+            <a:r>
+              <a:rPr sz="1200" b="0">
+                <a:solidFill>
+                  <a:srgbClr val="1E293B"/>
+                </a:solidFill>
+                <a:latin typeface="Times New Roman"/>
+              </a:rPr>
+              <a:t>• Bilinear resize to 224x224</a:t>
+            </a:r>
+          </a:p>
+          <a:p>
+            <a:pPr>
+              <a:spcBef>
+                <a:spcPts val="300"/>
+              </a:spcBef>
+              <a:spcAft>
+                <a:spcPts val="300"/>
+              </a:spcAft>
+            </a:pPr>
+            <a:r>
+              <a:rPr sz="1200" b="0">
+                <a:solidFill>
+                  <a:srgbClr val="1E293B"/>
+                </a:solidFill>
+                <a:latin typeface="Times New Roman"/>
+              </a:rPr>
+              <a:t>• Min-Max normalization (0-255)</a:t>
+            </a:r>
+          </a:p>
+          <a:p>
+            <a:pPr>
+              <a:spcBef>
+                <a:spcPts val="300"/>
+              </a:spcBef>
+              <a:spcAft>
+                <a:spcPts val="300"/>
+              </a:spcAft>
+            </a:pPr>
+            <a:r>
+              <a:rPr sz="1200" b="0">
+                <a:solidFill>
+                  <a:srgbClr val="1E293B"/>
+                </a:solidFill>
+                <a:latin typeface="Times New Roman"/>
+              </a:rPr>
+              <a:t>• 70% / 15% / 15% Stratified split</a:t>
+            </a:r>
+          </a:p>
+        </p:txBody>
+      </p:sp>
+      <p:sp>
+        <p:nvSpPr>
+          <p:cNvPr id="237" name="Rounded Rectangle 236"/>
+          <p:cNvSpPr/>
+          <p:nvPr/>
+        </p:nvSpPr>
+        <p:spPr>
+          <a:xfrm>
+            <a:off x="3246120" y="1828800"/>
+            <a:ext cx="2514600" cy="3291840"/>
+          </a:xfrm>
+          <a:prstGeom prst="roundRect">
+            <a:avLst/>
+          </a:prstGeom>
+          <a:solidFill>
+            <a:srgbClr val="F1F5F9"/>
+          </a:solidFill>
+          <a:ln w="19050">
+            <a:solidFill>
+              <a:srgbClr val="CBD5E1"/>
+            </a:solidFill>
+          </a:ln>
+        </p:spPr>
+        <p:style>
+          <a:lnRef idx="1">
+            <a:schemeClr val="accent1"/>
+          </a:lnRef>
+          <a:fillRef idx="3">
+            <a:schemeClr val="accent1"/>
+          </a:fillRef>
+          <a:effectRef idx="2">
+            <a:schemeClr val="accent1"/>
+          </a:effectRef>
+          <a:fontRef idx="minor">
+            <a:schemeClr val="lt1"/>
+          </a:fontRef>
+        </p:style>
+        <p:txBody>
+          <a:bodyPr rtlCol="0" anchor="ctr" wrap="square" lIns="137160" rIns="137160" tIns="164592"/>
+          <a:lstStyle/>
+          <a:p>
+            <a:pPr algn="ctr">
+              <a:spcAft>
+                <a:spcPts val="800"/>
+              </a:spcAft>
+            </a:pPr>
+            <a:r>
+              <a:rPr sz="1400" b="1">
+                <a:solidFill>
+                  <a:srgbClr val="0284C7"/>
+                </a:solidFill>
+                <a:latin typeface="Times New Roman"/>
+              </a:rPr>
+              <a:t>STAGE B: MODEL TRAINING</a:t>
+            </a:r>
+          </a:p>
+          <a:p>
+            <a:pPr>
+              <a:spcBef>
+                <a:spcPts val="300"/>
+              </a:spcBef>
+              <a:spcAft>
+                <a:spcPts val="300"/>
+              </a:spcAft>
+            </a:pPr>
+            <a:r>
+              <a:rPr sz="1200" b="0">
+                <a:solidFill>
+                  <a:srgbClr val="1E293B"/>
+                </a:solidFill>
+                <a:latin typeface="Times New Roman"/>
+              </a:rPr>
+              <a:t>• Backbone: MobileNetV3-Small</a:t>
+            </a:r>
+          </a:p>
+          <a:p>
+            <a:pPr>
+              <a:spcBef>
+                <a:spcPts val="300"/>
+              </a:spcBef>
+              <a:spcAft>
+                <a:spcPts val="300"/>
+              </a:spcAft>
+            </a:pPr>
+            <a:r>
+              <a:rPr sz="1200" b="0">
+                <a:solidFill>
+                  <a:srgbClr val="1E293B"/>
+                </a:solidFill>
+                <a:latin typeface="Times New Roman"/>
+              </a:rPr>
+              <a:t>• Inverted residual blocks + SE</a:t>
+            </a:r>
+          </a:p>
+          <a:p>
+            <a:pPr>
+              <a:spcBef>
+                <a:spcPts val="300"/>
+              </a:spcBef>
+              <a:spcAft>
+                <a:spcPts val="300"/>
+              </a:spcAft>
+            </a:pPr>
+            <a:r>
+              <a:rPr sz="1200" b="0">
+                <a:solidFill>
+                  <a:srgbClr val="1E293B"/>
+                </a:solidFill>
+                <a:latin typeface="Times New Roman"/>
+              </a:rPr>
+              <a:t>• Custom 8-class linear head</a:t>
+            </a:r>
+          </a:p>
+          <a:p>
+            <a:pPr>
+              <a:spcBef>
+                <a:spcPts val="300"/>
+              </a:spcBef>
+              <a:spcAft>
+                <a:spcPts val="300"/>
+              </a:spcAft>
+            </a:pPr>
+            <a:r>
+              <a:rPr sz="1200" b="0">
+                <a:solidFill>
+                  <a:srgbClr val="1E293B"/>
+                </a:solidFill>
+                <a:latin typeface="Times New Roman"/>
+              </a:rPr>
+              <a:t>• Adam optimizer (lr=3e-4)</a:t>
+            </a:r>
+          </a:p>
+          <a:p>
+            <a:pPr>
+              <a:spcBef>
+                <a:spcPts val="300"/>
+              </a:spcBef>
+              <a:spcAft>
+                <a:spcPts val="300"/>
+              </a:spcAft>
+            </a:pPr>
+            <a:r>
+              <a:rPr sz="1200" b="0">
+                <a:solidFill>
+                  <a:srgbClr val="1E293B"/>
+                </a:solidFill>
+                <a:latin typeface="Times New Roman"/>
+              </a:rPr>
+              <a:t>• Cross-Entropy loss over 8 epochs</a:t>
+            </a:r>
+          </a:p>
+        </p:txBody>
+      </p:sp>
+      <p:sp>
+        <p:nvSpPr>
+          <p:cNvPr id="238" name="Rounded Rectangle 237"/>
+          <p:cNvSpPr/>
+          <p:nvPr/>
+        </p:nvSpPr>
+        <p:spPr>
+          <a:xfrm>
+            <a:off x="5943600" y="1828800"/>
+            <a:ext cx="2514600" cy="3291840"/>
+          </a:xfrm>
+          <a:prstGeom prst="roundRect">
+            <a:avLst/>
+          </a:prstGeom>
+          <a:solidFill>
+            <a:srgbClr val="F1F5F9"/>
+          </a:solidFill>
+          <a:ln w="19050">
+            <a:solidFill>
+              <a:srgbClr val="CBD5E1"/>
+            </a:solidFill>
+          </a:ln>
+        </p:spPr>
+        <p:style>
+          <a:lnRef idx="1">
+            <a:schemeClr val="accent1"/>
+          </a:lnRef>
+          <a:fillRef idx="3">
+            <a:schemeClr val="accent1"/>
+          </a:fillRef>
+          <a:effectRef idx="2">
+            <a:schemeClr val="accent1"/>
+          </a:effectRef>
+          <a:fontRef idx="minor">
+            <a:schemeClr val="lt1"/>
+          </a:fontRef>
+        </p:style>
+        <p:txBody>
+          <a:bodyPr rtlCol="0" anchor="ctr" wrap="square" lIns="137160" rIns="137160" tIns="164592"/>
+          <a:lstStyle/>
+          <a:p>
+            <a:pPr algn="ctr">
+              <a:spcAft>
+                <a:spcPts val="800"/>
+              </a:spcAft>
+            </a:pPr>
+            <a:r>
+              <a:rPr sz="1400" b="1">
+                <a:solidFill>
+                  <a:srgbClr val="0284C7"/>
+                </a:solidFill>
+                <a:latin typeface="Times New Roman"/>
+              </a:rPr>
+              <a:t>STAGE C: ONNX OPTIMIZATION</a:t>
+            </a:r>
+          </a:p>
+          <a:p>
+            <a:pPr>
+              <a:spcBef>
+                <a:spcPts val="300"/>
+              </a:spcBef>
+              <a:spcAft>
+                <a:spcPts val="300"/>
+              </a:spcAft>
+            </a:pPr>
+            <a:r>
+              <a:rPr sz="1200" b="0">
+                <a:solidFill>
+                  <a:srgbClr val="1E293B"/>
+                </a:solidFill>
+                <a:latin typeface="Times New Roman"/>
+              </a:rPr>
+              <a:t>• PyTorch model graph trace</a:t>
+            </a:r>
+          </a:p>
+          <a:p>
+            <a:pPr>
+              <a:spcBef>
+                <a:spcPts val="300"/>
+              </a:spcBef>
+              <a:spcAft>
+                <a:spcPts val="300"/>
+              </a:spcAft>
+            </a:pPr>
+            <a:r>
+              <a:rPr sz="1200" b="0">
+                <a:solidFill>
+                  <a:srgbClr val="1E293B"/>
+                </a:solidFill>
+                <a:latin typeface="Times New Roman"/>
+              </a:rPr>
+              <a:t>• ONNX Opset 12 export</a:t>
+            </a:r>
+          </a:p>
+          <a:p>
+            <a:pPr>
+              <a:spcBef>
+                <a:spcPts val="300"/>
+              </a:spcBef>
+              <a:spcAft>
+                <a:spcPts val="300"/>
+              </a:spcAft>
+            </a:pPr>
+            <a:r>
+              <a:rPr sz="1200" b="0">
+                <a:solidFill>
+                  <a:srgbClr val="1E293B"/>
+                </a:solidFill>
+                <a:latin typeface="Times New Roman"/>
+              </a:rPr>
+              <a:t>• Constant folding &amp; prune</a:t>
+            </a:r>
+          </a:p>
+          <a:p>
+            <a:pPr>
+              <a:spcBef>
+                <a:spcPts val="300"/>
+              </a:spcBef>
+              <a:spcAft>
+                <a:spcPts val="300"/>
+              </a:spcAft>
+            </a:pPr>
+            <a:r>
+              <a:rPr sz="1200" b="0">
+                <a:solidFill>
+                  <a:srgbClr val="1E293B"/>
+                </a:solidFill>
+                <a:latin typeface="Times New Roman"/>
+              </a:rPr>
+              <a:t>• Dynamic batch dimension</a:t>
+            </a:r>
+          </a:p>
+          <a:p>
+            <a:pPr>
+              <a:spcBef>
+                <a:spcPts val="300"/>
+              </a:spcBef>
+              <a:spcAft>
+                <a:spcPts val="300"/>
+              </a:spcAft>
+            </a:pPr>
+            <a:r>
+              <a:rPr sz="1200" b="0">
+                <a:solidFill>
+                  <a:srgbClr val="1E293B"/>
+                </a:solidFill>
+                <a:latin typeface="Times New Roman"/>
+              </a:rPr>
+              <a:t>• Model size: 5.84 MB</a:t>
+            </a:r>
+          </a:p>
+        </p:txBody>
+      </p:sp>
+      <p:sp>
+        <p:nvSpPr>
+          <p:cNvPr id="239" name="Rounded Rectangle 238"/>
+          <p:cNvSpPr/>
+          <p:nvPr/>
+        </p:nvSpPr>
+        <p:spPr>
+          <a:xfrm>
+            <a:off x="8641080" y="1828800"/>
+            <a:ext cx="2514600" cy="3291840"/>
+          </a:xfrm>
+          <a:prstGeom prst="roundRect">
+            <a:avLst/>
+          </a:prstGeom>
+          <a:solidFill>
+            <a:srgbClr val="F1F5F9"/>
+          </a:solidFill>
+          <a:ln w="19050">
+            <a:solidFill>
+              <a:srgbClr val="CBD5E1"/>
+            </a:solidFill>
+          </a:ln>
+        </p:spPr>
+        <p:style>
+          <a:lnRef idx="1">
+            <a:schemeClr val="accent1"/>
+          </a:lnRef>
+          <a:fillRef idx="3">
+            <a:schemeClr val="accent1"/>
+          </a:fillRef>
+          <a:effectRef idx="2">
+            <a:schemeClr val="accent1"/>
+          </a:effectRef>
+          <a:fontRef idx="minor">
+            <a:schemeClr val="lt1"/>
+          </a:fontRef>
+        </p:style>
+        <p:txBody>
+          <a:bodyPr rtlCol="0" anchor="ctr" wrap="square" lIns="137160" rIns="137160" tIns="164592"/>
+          <a:lstStyle/>
+          <a:p>
+            <a:pPr algn="ctr">
+              <a:spcAft>
+                <a:spcPts val="800"/>
+              </a:spcAft>
+            </a:pPr>
+            <a:r>
+              <a:rPr sz="1400" b="1">
+                <a:solidFill>
+                  <a:srgbClr val="0284C7"/>
+                </a:solidFill>
+                <a:latin typeface="Times New Roman"/>
+              </a:rPr>
+              <a:t>STAGE D: EDGE INFERENCE</a:t>
+            </a:r>
+          </a:p>
+          <a:p>
+            <a:pPr>
+              <a:spcBef>
+                <a:spcPts val="300"/>
+              </a:spcBef>
+              <a:spcAft>
+                <a:spcPts val="300"/>
+              </a:spcAft>
+            </a:pPr>
+            <a:r>
+              <a:rPr sz="1200" b="0">
+                <a:solidFill>
+                  <a:srgbClr val="1E293B"/>
+                </a:solidFill>
+                <a:latin typeface="Times New Roman"/>
+              </a:rPr>
+              <a:t>• ONNX Runtime CPU engine</a:t>
+            </a:r>
+          </a:p>
+          <a:p>
+            <a:pPr>
+              <a:spcBef>
+                <a:spcPts val="300"/>
+              </a:spcBef>
+              <a:spcAft>
+                <a:spcPts val="300"/>
+              </a:spcAft>
+            </a:pPr>
+            <a:r>
+              <a:rPr sz="1200" b="0">
+                <a:solidFill>
+                  <a:srgbClr val="1E293B"/>
+                </a:solidFill>
+                <a:latin typeface="Times New Roman"/>
+              </a:rPr>
+              <a:t>• ImageNet tensor normalization</a:t>
+            </a:r>
+          </a:p>
+          <a:p>
+            <a:pPr>
+              <a:spcBef>
+                <a:spcPts val="300"/>
+              </a:spcBef>
+              <a:spcAft>
+                <a:spcPts val="300"/>
+              </a:spcAft>
+            </a:pPr>
+            <a:r>
+              <a:rPr sz="1200" b="0">
+                <a:solidFill>
+                  <a:srgbClr val="1E293B"/>
+                </a:solidFill>
+                <a:latin typeface="Times New Roman"/>
+              </a:rPr>
+              <a:t>• Top-3 confidence scoring</a:t>
+            </a:r>
+          </a:p>
+          <a:p>
+            <a:pPr>
+              <a:spcBef>
+                <a:spcPts val="300"/>
+              </a:spcBef>
+              <a:spcAft>
+                <a:spcPts val="300"/>
+              </a:spcAft>
+            </a:pPr>
+            <a:r>
+              <a:rPr sz="1200" b="0">
+                <a:solidFill>
+                  <a:srgbClr val="1E293B"/>
+                </a:solidFill>
+                <a:latin typeface="Times New Roman"/>
+              </a:rPr>
+              <a:t>• Sub-2ms inference latency</a:t>
+            </a:r>
+          </a:p>
+          <a:p>
+            <a:pPr>
+              <a:spcBef>
+                <a:spcPts val="300"/>
+              </a:spcBef>
+              <a:spcAft>
+                <a:spcPts val="300"/>
+              </a:spcAft>
+            </a:pPr>
+            <a:r>
+              <a:rPr sz="1200" b="0">
+                <a:solidFill>
+                  <a:srgbClr val="1E293B"/>
+                </a:solidFill>
+                <a:latin typeface="Times New Roman"/>
+              </a:rPr>
+              <a:t>• Web demo &amp; CLI runner</a:t>
+            </a:r>
+          </a:p>
+        </p:txBody>
+      </p:sp>
+      <p:sp>
+        <p:nvSpPr>
+          <p:cNvPr id="240" name="Rounded Rectangle 239"/>
+          <p:cNvSpPr/>
+          <p:nvPr/>
+        </p:nvSpPr>
+        <p:spPr>
+          <a:xfrm>
+            <a:off x="548640" y="5257800"/>
+            <a:ext cx="10607040" cy="594360"/>
+          </a:xfrm>
+          <a:prstGeom prst="roundRect">
+            <a:avLst/>
+          </a:prstGeom>
+          <a:solidFill>
+            <a:srgbClr val="0F172A"/>
+          </a:solidFill>
+          <a:ln w="12700">
+            <a:solidFill>
+              <a:srgbClr val="0284C7"/>
+            </a:solidFill>
+          </a:ln>
+        </p:spPr>
+        <p:style>
+          <a:lnRef idx="1">
+            <a:schemeClr val="accent1"/>
+          </a:lnRef>
+          <a:fillRef idx="3">
+            <a:schemeClr val="accent1"/>
+          </a:fillRef>
+          <a:effectRef idx="2">
+            <a:schemeClr val="accent1"/>
+          </a:effectRef>
+          <a:fontRef idx="minor">
+            <a:schemeClr val="lt1"/>
+          </a:fontRef>
+        </p:style>
+        <p:txBody>
+          <a:bodyPr rtlCol="0" anchor="ctr" wrap="square"/>
+          <a:lstStyle/>
+          <a:p>
+            <a:pPr algn="ctr"/>
+            <a:r>
+              <a:rPr sz="1200" b="1">
+                <a:solidFill>
+                  <a:srgbClr val="38BDF8"/>
+                </a:solidFill>
+                <a:latin typeface="Times New Roman"/>
+              </a:rPr>
+              <a:t>Target Defect Classes:  </a:t>
+            </a:r>
+            <a:r>
+              <a:rPr sz="1200" b="0">
+                <a:solidFill>
+                  <a:srgbClr val="F1F5F9"/>
+                </a:solidFill>
+                <a:latin typeface="Times New Roman"/>
+              </a:rPr>
+              <a:t>Center  |  Donut  |  Edge-Loc  |  Edge-Ring  |  Loc  |  Scratch  |  Other  |  Clean (Nominal)</a:t>
+            </a:r>
+          </a:p>
+        </p:txBody>
+      </p:sp>
     </p:spTree>
     <p:extLst>
       <p:ext uri="{BB962C8B-B14F-4D97-AF65-F5344CB8AC3E}">
@@ -20338,7 +20570,7 @@
                 </a:solidFill>
                 <a:latin typeface="Times New Roman"/>
               </a:rPr>
-              <a:t>PROPOSED SYSTEM</a:t>
+              <a:t>WM-811K DATASET &amp; DEFECT PATTERNS</a:t>
             </a:r>
             <a:endParaRPr sz="3600" b="1" dirty="0">
               <a:latin typeface="Times New Roman" panose="02020603050405020304" pitchFamily="18" charset="0"/>
@@ -20365,8 +20597,8 @@
         </p:nvSpPr>
         <p:spPr>
           <a:xfrm>
-            <a:off x="731520" y="1920240"/>
-            <a:ext cx="10698480" cy="4114800"/>
+            <a:off x="-18288000" y="1627991"/>
+            <a:ext cx="10955338" cy="4419668"/>
           </a:xfrm>
           <a:prstGeom prst="rect">
             <a:avLst/>
@@ -20387,195 +20619,12 @@
                 <a:spcPct val="100000"/>
               </a:lnSpc>
               <a:spcBef>
-                <a:spcPts val="800"/>
-              </a:spcBef>
-              <a:spcAft>
-                <a:spcPts val="200"/>
-              </a:spcAft>
+                <a:spcPts val="1200"/>
+              </a:spcBef>
               <a:buSzPts val="2600"/>
               <a:buFont typeface="Noto Sans Symbols"/>
               <a:buChar char="⮪"/>
             </a:pPr>
-            <a:r>
-              <a:rPr sz="2200" b="1">
-                <a:solidFill>
-                  <a:srgbClr val="0284C7"/>
-                </a:solidFill>
-                <a:latin typeface="Times New Roman"/>
-              </a:rPr>
-              <a:t>Our Deep Learning Solution</a:t>
-            </a:r>
-          </a:p>
-          <a:p>
-            <a:pPr>
-              <a:spcBef>
-                <a:spcPts val="200"/>
-              </a:spcBef>
-              <a:spcAft>
-                <a:spcPts val="400"/>
-              </a:spcAft>
-            </a:pPr>
-            <a:r>
-              <a:rPr sz="1800" b="0">
-                <a:solidFill>
-                  <a:srgbClr val="1E293B"/>
-                </a:solidFill>
-                <a:latin typeface="Times New Roman"/>
-              </a:rPr>
-              <a:t>•  An automated, lightweight deep convolutional network (MobileNetV3-Small) optimized through ONNX Runtime for real-time edge execution on commodity CPUs and ARM architectures.</a:t>
-            </a:r>
-          </a:p>
-          <a:p>
-            <a:pPr>
-              <a:spcBef>
-                <a:spcPts val="800"/>
-              </a:spcBef>
-              <a:spcAft>
-                <a:spcPts val="200"/>
-              </a:spcAft>
-            </a:pPr>
-            <a:r>
-              <a:rPr sz="2200" b="1">
-                <a:solidFill>
-                  <a:srgbClr val="0284C7"/>
-                </a:solidFill>
-                <a:latin typeface="Times New Roman"/>
-              </a:rPr>
-              <a:t>Why It Is Superior</a:t>
-            </a:r>
-          </a:p>
-          <a:p>
-            <a:pPr>
-              <a:spcBef>
-                <a:spcPts val="200"/>
-              </a:spcBef>
-              <a:spcAft>
-                <a:spcPts val="400"/>
-              </a:spcAft>
-            </a:pPr>
-            <a:r>
-              <a:rPr sz="1800" b="0">
-                <a:solidFill>
-                  <a:srgbClr val="1E293B"/>
-                </a:solidFill>
-                <a:latin typeface="Times New Roman"/>
-              </a:rPr>
-              <a:t>•  Ultra-Low Latency: Real-time 1.53 ms inference per wafer map (over 300x faster than manual review).</a:t>
-            </a:r>
-          </a:p>
-          <a:p>
-            <a:pPr>
-              <a:spcBef>
-                <a:spcPts val="200"/>
-              </a:spcBef>
-              <a:spcAft>
-                <a:spcPts val="400"/>
-              </a:spcAft>
-            </a:pPr>
-            <a:r>
-              <a:rPr sz="1800" b="0">
-                <a:solidFill>
-                  <a:srgbClr val="1E293B"/>
-                </a:solidFill>
-                <a:latin typeface="Times New Roman"/>
-              </a:rPr>
-              <a:t>•  High Accuracy: 98.02% overall test accuracy across 121,719 test wafer samples.</a:t>
-            </a:r>
-          </a:p>
-          <a:p>
-            <a:pPr>
-              <a:spcBef>
-                <a:spcPts val="200"/>
-              </a:spcBef>
-              <a:spcAft>
-                <a:spcPts val="400"/>
-              </a:spcAft>
-            </a:pPr>
-            <a:r>
-              <a:rPr sz="1800" b="0">
-                <a:solidFill>
-                  <a:srgbClr val="1E293B"/>
-                </a:solidFill>
-                <a:latin typeface="Times New Roman"/>
-              </a:rPr>
-              <a:t>•  Minimal Footprint: 5.84 MB compact ONNX model binary requiring zero GPU hardware.</a:t>
-            </a:r>
-          </a:p>
-          <a:p>
-            <a:pPr>
-              <a:spcBef>
-                <a:spcPts val="800"/>
-              </a:spcBef>
-              <a:spcAft>
-                <a:spcPts val="200"/>
-              </a:spcAft>
-            </a:pPr>
-            <a:r>
-              <a:rPr sz="2200" b="1">
-                <a:solidFill>
-                  <a:srgbClr val="0284C7"/>
-                </a:solidFill>
-                <a:latin typeface="Times New Roman"/>
-              </a:rPr>
-              <a:t>Core Functional Features</a:t>
-            </a:r>
-          </a:p>
-          <a:p>
-            <a:pPr>
-              <a:spcBef>
-                <a:spcPts val="200"/>
-              </a:spcBef>
-              <a:spcAft>
-                <a:spcPts val="400"/>
-              </a:spcAft>
-            </a:pPr>
-            <a:r>
-              <a:rPr sz="1800" b="0">
-                <a:solidFill>
-                  <a:srgbClr val="1E293B"/>
-                </a:solidFill>
-                <a:latin typeface="Times New Roman"/>
-              </a:rPr>
-              <a:t>•  Instant 8-class topological classification with full softmax probability distribution.</a:t>
-            </a:r>
-          </a:p>
-          <a:p>
-            <a:pPr>
-              <a:spcBef>
-                <a:spcPts val="200"/>
-              </a:spcBef>
-              <a:spcAft>
-                <a:spcPts val="400"/>
-              </a:spcAft>
-            </a:pPr>
-            <a:r>
-              <a:rPr sz="1800" b="0">
-                <a:solidFill>
-                  <a:srgbClr val="1E293B"/>
-                </a:solidFill>
-                <a:latin typeface="Times New Roman"/>
-              </a:rPr>
-              <a:t>•  Interactive silicon wafer canvas with die-level pass/fail color mapping (Green = Pass, Red = Fail).</a:t>
-            </a:r>
-          </a:p>
-          <a:p>
-            <a:pPr>
-              <a:spcBef>
-                <a:spcPts val="200"/>
-              </a:spcBef>
-              <a:spcAft>
-                <a:spcPts val="400"/>
-              </a:spcAft>
-            </a:pPr>
-            <a:r>
-              <a:rPr sz="1800" b="0">
-                <a:solidFill>
-                  <a:srgbClr val="1E293B"/>
-                </a:solidFill>
-                <a:latin typeface="Times New Roman"/>
-              </a:rPr>
-              <a:t>•  Automated fab lot screening simulator with live yield tracking and defect counter.</a:t>
-            </a:r>
           </a:p>
         </p:txBody>
       </p:sp>
@@ -20619,10 +20668,15 @@
               </a:spcAft>
               <a:buNone/>
             </a:pPr>
-            <a:fld id="{00000000-1234-1234-1234-123412341234}" type="slidenum">
-              <a:rPr lang="en-US"/>
+            <a:r>
+              <a:rPr sz="1800" b="1">
+                <a:solidFill>
+                  <a:srgbClr val="0F172A"/>
+                </a:solidFill>
+                <a:latin typeface="Times New Roman"/>
+              </a:rPr>
               <a:t>7</a:t>
-            </a:fld>
+            </a:r>
             <a:endParaRPr/>
           </a:p>
         </p:txBody>
@@ -20788,6 +20842,467 @@
           </a:p>
         </p:txBody>
       </p:sp>
+      <p:sp>
+        <p:nvSpPr>
+          <p:cNvPr id="236" name="Rounded Rectangle 235"/>
+          <p:cNvSpPr/>
+          <p:nvPr/>
+        </p:nvSpPr>
+        <p:spPr>
+          <a:xfrm>
+            <a:off x="548640" y="1828800"/>
+            <a:ext cx="5303520" cy="3931920"/>
+          </a:xfrm>
+          <a:prstGeom prst="roundRect">
+            <a:avLst/>
+          </a:prstGeom>
+          <a:solidFill>
+            <a:srgbClr val="F1F5F9"/>
+          </a:solidFill>
+          <a:ln w="19050">
+            <a:solidFill>
+              <a:srgbClr val="CBD5E1"/>
+            </a:solidFill>
+          </a:ln>
+        </p:spPr>
+        <p:style>
+          <a:lnRef idx="1">
+            <a:schemeClr val="accent1"/>
+          </a:lnRef>
+          <a:fillRef idx="3">
+            <a:schemeClr val="accent1"/>
+          </a:fillRef>
+          <a:effectRef idx="2">
+            <a:schemeClr val="accent1"/>
+          </a:effectRef>
+          <a:fontRef idx="minor">
+            <a:schemeClr val="lt1"/>
+          </a:fontRef>
+        </p:style>
+        <p:txBody>
+          <a:bodyPr rtlCol="0" anchor="ctr" wrap="square" lIns="182880" tIns="182880"/>
+          <a:lstStyle/>
+          <a:p>
+            <a:pPr algn="ctr"/>
+            <a:r>
+              <a:rPr sz="1800" b="1">
+                <a:solidFill>
+                  <a:srgbClr val="0284C7"/>
+                </a:solidFill>
+                <a:latin typeface="Times New Roman"/>
+              </a:rPr>
+              <a:t>Dataset Profile &amp; Industrial Challenges</a:t>
+            </a:r>
+          </a:p>
+          <a:p>
+            <a:pPr>
+              <a:spcBef>
+                <a:spcPts val="200"/>
+              </a:spcBef>
+              <a:spcAft>
+                <a:spcPts val="200"/>
+              </a:spcAft>
+            </a:pPr>
+            <a:r>
+              <a:rPr sz="1250" b="0">
+                <a:solidFill>
+                  <a:srgbClr val="1E293B"/>
+                </a:solidFill>
+                <a:latin typeface="Times New Roman"/>
+              </a:rPr>
+              <a:t>• Total Records: 811,472 real semiconductor wafer maps collected from 46,393 fabrication lots.</a:t>
+            </a:r>
+          </a:p>
+          <a:p>
+            <a:pPr>
+              <a:spcBef>
+                <a:spcPts val="200"/>
+              </a:spcBef>
+              <a:spcAft>
+                <a:spcPts val="200"/>
+              </a:spcAft>
+            </a:pPr>
+            <a:r>
+              <a:rPr sz="1250" b="0">
+                <a:solidFill>
+                  <a:srgbClr val="1E293B"/>
+                </a:solidFill>
+                <a:latin typeface="Times New Roman"/>
+              </a:rPr>
+              <a:t>• Labeled Samples: ~172,950 annotated wafers with failure pattern labels.</a:t>
+            </a:r>
+          </a:p>
+          <a:p>
+            <a:pPr>
+              <a:spcBef>
+                <a:spcPts val="200"/>
+              </a:spcBef>
+              <a:spcAft>
+                <a:spcPts val="200"/>
+              </a:spcAft>
+            </a:pPr>
+            <a:r>
+              <a:rPr sz="1250" b="0">
+                <a:solidFill>
+                  <a:srgbClr val="1E293B"/>
+                </a:solidFill>
+                <a:latin typeface="Times New Roman"/>
+              </a:rPr>
+              <a:t>• Extreme Real-World Imbalance: Over 96% of manufactured wafers are defect-free (Clean).</a:t>
+            </a:r>
+          </a:p>
+          <a:p>
+            <a:pPr>
+              <a:spcBef>
+                <a:spcPts val="200"/>
+              </a:spcBef>
+              <a:spcAft>
+                <a:spcPts val="200"/>
+              </a:spcAft>
+            </a:pPr>
+            <a:r>
+              <a:rPr sz="1250" b="0">
+                <a:solidFill>
+                  <a:srgbClr val="1E293B"/>
+                </a:solidFill>
+                <a:latin typeface="Times New Roman"/>
+              </a:rPr>
+              <a:t>• 2D Array Representation: 0 = background/exterior, 1 = normal pass die, 2 = defect die.</a:t>
+            </a:r>
+          </a:p>
+          <a:p>
+            <a:pPr>
+              <a:spcBef>
+                <a:spcPts val="200"/>
+              </a:spcBef>
+              <a:spcAft>
+                <a:spcPts val="200"/>
+              </a:spcAft>
+            </a:pPr>
+            <a:r>
+              <a:rPr sz="1250" b="1">
+                <a:solidFill>
+                  <a:srgbClr val="1E293B"/>
+                </a:solidFill>
+                <a:latin typeface="Times New Roman"/>
+              </a:rPr>
+              <a:t>• Automated Preprocessing Pipeline:</a:t>
+            </a:r>
+          </a:p>
+          <a:p>
+            <a:pPr>
+              <a:spcBef>
+                <a:spcPts val="200"/>
+              </a:spcBef>
+              <a:spcAft>
+                <a:spcPts val="200"/>
+              </a:spcAft>
+            </a:pPr>
+            <a:r>
+              <a:rPr sz="1250" b="0">
+                <a:solidFill>
+                  <a:srgbClr val="1E293B"/>
+                </a:solidFill>
+                <a:latin typeface="Times New Roman"/>
+              </a:rPr>
+              <a:t>    1. Runtime patch for deprecated pandas Int64Index unpickling.</a:t>
+            </a:r>
+          </a:p>
+          <a:p>
+            <a:pPr>
+              <a:spcBef>
+                <a:spcPts val="200"/>
+              </a:spcBef>
+              <a:spcAft>
+                <a:spcPts val="200"/>
+              </a:spcAft>
+            </a:pPr>
+            <a:r>
+              <a:rPr sz="1250" b="0">
+                <a:solidFill>
+                  <a:srgbClr val="1E293B"/>
+                </a:solidFill>
+                <a:latin typeface="Times New Roman"/>
+              </a:rPr>
+              <a:t>    2. Standardize dimensions to 224x224 via bilinear interpolation.</a:t>
+            </a:r>
+          </a:p>
+          <a:p>
+            <a:pPr>
+              <a:spcBef>
+                <a:spcPts val="200"/>
+              </a:spcBef>
+              <a:spcAft>
+                <a:spcPts val="200"/>
+              </a:spcAft>
+            </a:pPr>
+            <a:r>
+              <a:rPr sz="1250" b="0">
+                <a:solidFill>
+                  <a:srgbClr val="1E293B"/>
+                </a:solidFill>
+                <a:latin typeface="Times New Roman"/>
+              </a:rPr>
+              <a:t>    3. Scale die values to 0-255 grayscale PNG images.</a:t>
+            </a:r>
+          </a:p>
+          <a:p>
+            <a:pPr>
+              <a:spcBef>
+                <a:spcPts val="200"/>
+              </a:spcBef>
+              <a:spcAft>
+                <a:spcPts val="200"/>
+              </a:spcAft>
+            </a:pPr>
+            <a:r>
+              <a:rPr sz="1250" b="0">
+                <a:solidFill>
+                  <a:srgbClr val="1E293B"/>
+                </a:solidFill>
+                <a:latin typeface="Times New Roman"/>
+              </a:rPr>
+              <a:t>    4. Stratified Train (70%), Validation (15%), Test (15%) partitions.</a:t>
+            </a:r>
+          </a:p>
+        </p:txBody>
+      </p:sp>
+      <p:pic>
+        <p:nvPicPr>
+          <p:cNvPr id="237" name="Picture 236" descr="image.png"/>
+          <p:cNvPicPr>
+            <a:picLocks noChangeAspect="1"/>
+          </p:cNvPicPr>
+          <p:nvPr/>
+        </p:nvPicPr>
+        <p:blipFill>
+          <a:blip r:embed="rId4"/>
+          <a:stretch>
+            <a:fillRect/>
+          </a:stretch>
+        </p:blipFill>
+        <p:spPr>
+          <a:xfrm>
+            <a:off x="6217920" y="1828800"/>
+            <a:ext cx="2103120" cy="1554480"/>
+          </a:xfrm>
+          <a:prstGeom prst="rect">
+            <a:avLst/>
+          </a:prstGeom>
+        </p:spPr>
+      </p:pic>
+      <p:sp>
+        <p:nvSpPr>
+          <p:cNvPr id="238" name="TextBox 237"/>
+          <p:cNvSpPr txBox="1"/>
+          <p:nvPr/>
+        </p:nvSpPr>
+        <p:spPr>
+          <a:xfrm>
+            <a:off x="6217920" y="3337560"/>
+            <a:ext cx="2103120" cy="320040"/>
+          </a:xfrm>
+          <a:prstGeom prst="rect">
+            <a:avLst/>
+          </a:prstGeom>
+          <a:noFill/>
+        </p:spPr>
+        <p:txBody>
+          <a:bodyPr wrap="none">
+            <a:spAutoFit/>
+          </a:bodyPr>
+          <a:lstStyle/>
+          <a:p>
+            <a:pPr algn="ctr"/>
+            <a:r>
+              <a:rPr sz="1300" b="1">
+                <a:solidFill>
+                  <a:srgbClr val="0F172A"/>
+                </a:solidFill>
+                <a:latin typeface="Times New Roman"/>
+              </a:rPr>
+              <a:t>Center Defect</a:t>
+            </a:r>
+          </a:p>
+        </p:txBody>
+      </p:sp>
+      <p:pic>
+        <p:nvPicPr>
+          <p:cNvPr id="239" name="Picture 238" descr="image.png"/>
+          <p:cNvPicPr>
+            <a:picLocks noChangeAspect="1"/>
+          </p:cNvPicPr>
+          <p:nvPr/>
+        </p:nvPicPr>
+        <p:blipFill>
+          <a:blip r:embed="rId5"/>
+          <a:stretch>
+            <a:fillRect/>
+          </a:stretch>
+        </p:blipFill>
+        <p:spPr>
+          <a:xfrm>
+            <a:off x="8503920" y="1828800"/>
+            <a:ext cx="2103120" cy="1554480"/>
+          </a:xfrm>
+          <a:prstGeom prst="rect">
+            <a:avLst/>
+          </a:prstGeom>
+        </p:spPr>
+      </p:pic>
+      <p:sp>
+        <p:nvSpPr>
+          <p:cNvPr id="240" name="TextBox 239"/>
+          <p:cNvSpPr txBox="1"/>
+          <p:nvPr/>
+        </p:nvSpPr>
+        <p:spPr>
+          <a:xfrm>
+            <a:off x="8503920" y="3337560"/>
+            <a:ext cx="2103120" cy="320040"/>
+          </a:xfrm>
+          <a:prstGeom prst="rect">
+            <a:avLst/>
+          </a:prstGeom>
+          <a:noFill/>
+        </p:spPr>
+        <p:txBody>
+          <a:bodyPr wrap="none">
+            <a:spAutoFit/>
+          </a:bodyPr>
+          <a:lstStyle/>
+          <a:p>
+            <a:pPr algn="ctr"/>
+            <a:r>
+              <a:rPr sz="1300" b="1">
+                <a:solidFill>
+                  <a:srgbClr val="0F172A"/>
+                </a:solidFill>
+                <a:latin typeface="Times New Roman"/>
+              </a:rPr>
+              <a:t>Donut Defect</a:t>
+            </a:r>
+          </a:p>
+        </p:txBody>
+      </p:sp>
+      <p:pic>
+        <p:nvPicPr>
+          <p:cNvPr id="241" name="Picture 240" descr="image.png"/>
+          <p:cNvPicPr>
+            <a:picLocks noChangeAspect="1"/>
+          </p:cNvPicPr>
+          <p:nvPr/>
+        </p:nvPicPr>
+        <p:blipFill>
+          <a:blip r:embed="rId6"/>
+          <a:stretch>
+            <a:fillRect/>
+          </a:stretch>
+        </p:blipFill>
+        <p:spPr>
+          <a:xfrm>
+            <a:off x="6217920" y="3840480"/>
+            <a:ext cx="2103120" cy="1554480"/>
+          </a:xfrm>
+          <a:prstGeom prst="rect">
+            <a:avLst/>
+          </a:prstGeom>
+        </p:spPr>
+      </p:pic>
+      <p:sp>
+        <p:nvSpPr>
+          <p:cNvPr id="242" name="TextBox 241"/>
+          <p:cNvSpPr txBox="1"/>
+          <p:nvPr/>
+        </p:nvSpPr>
+        <p:spPr>
+          <a:xfrm>
+            <a:off x="6217920" y="5349240"/>
+            <a:ext cx="2103120" cy="320040"/>
+          </a:xfrm>
+          <a:prstGeom prst="rect">
+            <a:avLst/>
+          </a:prstGeom>
+          <a:noFill/>
+        </p:spPr>
+        <p:txBody>
+          <a:bodyPr wrap="none">
+            <a:spAutoFit/>
+          </a:bodyPr>
+          <a:lstStyle/>
+          <a:p>
+            <a:pPr algn="ctr"/>
+            <a:r>
+              <a:rPr sz="1300" b="1">
+                <a:solidFill>
+                  <a:srgbClr val="0F172A"/>
+                </a:solidFill>
+                <a:latin typeface="Times New Roman"/>
+              </a:rPr>
+              <a:t>Edge-Loc Defect</a:t>
+            </a:r>
+          </a:p>
+        </p:txBody>
+      </p:sp>
+      <p:pic>
+        <p:nvPicPr>
+          <p:cNvPr id="243" name="Picture 242" descr="image.png"/>
+          <p:cNvPicPr>
+            <a:picLocks noChangeAspect="1"/>
+          </p:cNvPicPr>
+          <p:nvPr/>
+        </p:nvPicPr>
+        <p:blipFill>
+          <a:blip r:embed="rId7"/>
+          <a:stretch>
+            <a:fillRect/>
+          </a:stretch>
+        </p:blipFill>
+        <p:spPr>
+          <a:xfrm>
+            <a:off x="8503920" y="3840480"/>
+            <a:ext cx="2103120" cy="1554480"/>
+          </a:xfrm>
+          <a:prstGeom prst="rect">
+            <a:avLst/>
+          </a:prstGeom>
+        </p:spPr>
+      </p:pic>
+      <p:sp>
+        <p:nvSpPr>
+          <p:cNvPr id="244" name="TextBox 243"/>
+          <p:cNvSpPr txBox="1"/>
+          <p:nvPr/>
+        </p:nvSpPr>
+        <p:spPr>
+          <a:xfrm>
+            <a:off x="8503920" y="5349240"/>
+            <a:ext cx="2103120" cy="320040"/>
+          </a:xfrm>
+          <a:prstGeom prst="rect">
+            <a:avLst/>
+          </a:prstGeom>
+          <a:noFill/>
+        </p:spPr>
+        <p:txBody>
+          <a:bodyPr wrap="none">
+            <a:spAutoFit/>
+          </a:bodyPr>
+          <a:lstStyle/>
+          <a:p>
+            <a:pPr algn="ctr"/>
+            <a:r>
+              <a:rPr sz="1300" b="1">
+                <a:solidFill>
+                  <a:srgbClr val="0F172A"/>
+                </a:solidFill>
+                <a:latin typeface="Times New Roman"/>
+              </a:rPr>
+              <a:t>Scratch Defect</a:t>
+            </a:r>
+          </a:p>
+        </p:txBody>
+      </p:sp>
     </p:spTree>
     <p:extLst>
       <p:ext uri="{BB962C8B-B14F-4D97-AF65-F5344CB8AC3E}">
@@ -21027,11 +21542,32 @@
               <a:buNone/>
             </a:pPr>
             <a:r>
-              <a:rPr sz="3400" b="1">
-                <a:solidFill>
-                  <a:srgbClr val="0F172A"/>
-                </a:solidFill>
+              <a:rPr lang="en-US" sz="4000" dirty="0">
+                <a:solidFill>
+                  <a:srgbClr val="181C24"/>
+                </a:solidFill>
+                <a:highlight>
+                  <a:srgbClr val="FFFFFF"/>
+                </a:highlight>
                 <a:latin typeface="Times New Roman"/>
+                <a:ea typeface="Times New Roman"/>
+                <a:cs typeface="Times New Roman"/>
+                <a:sym typeface="Times New Roman"/>
+              </a:rPr>
+              <a:t> </a:t>
+            </a:r>
+            <a:r>
+              <a:rPr lang="en-US" sz="3600" b="1" dirty="0">
+                <a:solidFill>
+                  <a:srgbClr val="181C24"/>
+                </a:solidFill>
+                <a:highlight>
+                  <a:srgbClr val="FFFFFF"/>
+                </a:highlight>
+                <a:latin typeface="Times New Roman"/>
+                <a:ea typeface="Times New Roman"/>
+                <a:cs typeface="Times New Roman"/>
+                <a:sym typeface="Times New Roman"/>
               </a:rPr>
               <a:t>NOVELTY OF THE PROJECT</a:t>
             </a:r>
@@ -21071,181 +21607,6 @@
           </a:ln>
         </p:spPr>
       </p:pic>
-      <p:sp>
-        <p:nvSpPr>
-          <p:cNvPr id="126" name="TextBox 125"/>
-          <p:cNvSpPr txBox="1"/>
-          <p:nvPr/>
-        </p:nvSpPr>
-        <p:spPr>
-          <a:xfrm>
-            <a:off x="731520" y="1920240"/>
-            <a:ext cx="10698480" cy="4114800"/>
-          </a:xfrm>
-          <a:prstGeom prst="rect">
-            <a:avLst/>
-          </a:prstGeom>
-          <a:noFill/>
-        </p:spPr>
-        <p:txBody>
-          <a:bodyPr wrap="square">
-            <a:spAutoFit/>
-          </a:bodyPr>
-          <a:lstStyle/>
-          <a:p>
-            <a:pPr>
-              <a:spcBef>
-                <a:spcPts val="800"/>
-              </a:spcBef>
-              <a:spcAft>
-                <a:spcPts val="200"/>
-              </a:spcAft>
-            </a:pPr>
-            <a:r>
-              <a:rPr sz="2200" b="1">
-                <a:solidFill>
-                  <a:srgbClr val="0284C7"/>
-                </a:solidFill>
-                <a:latin typeface="Times New Roman"/>
-              </a:rPr>
-              <a:t>Edge-First Deep Architecture Selection</a:t>
-            </a:r>
-          </a:p>
-          <a:p>
-            <a:pPr>
-              <a:spcBef>
-                <a:spcPts val="200"/>
-              </a:spcBef>
-              <a:spcAft>
-                <a:spcPts val="400"/>
-              </a:spcAft>
-            </a:pPr>
-            <a:r>
-              <a:rPr sz="1800" b="0">
-                <a:solidFill>
-                  <a:srgbClr val="1E293B"/>
-                </a:solidFill>
-                <a:latin typeface="Times New Roman"/>
-              </a:rPr>
-              <a:t>•  Replaces bulky architectures (ResNet-50 / VGG) with MobileNetV3-Small, reducing floating-point operations (FLOPs) by &gt;90% while maintaining state-of-the-art accuracy.</a:t>
-            </a:r>
-          </a:p>
-          <a:p>
-            <a:pPr>
-              <a:spcBef>
-                <a:spcPts val="800"/>
-              </a:spcBef>
-              <a:spcAft>
-                <a:spcPts val="200"/>
-              </a:spcAft>
-            </a:pPr>
-            <a:r>
-              <a:rPr sz="2200" b="1">
-                <a:solidFill>
-                  <a:srgbClr val="0284C7"/>
-                </a:solidFill>
-                <a:latin typeface="Times New Roman"/>
-              </a:rPr>
-              <a:t>Squeeze-and-Excitation (SE) Channel Attention</a:t>
-            </a:r>
-          </a:p>
-          <a:p>
-            <a:pPr>
-              <a:spcBef>
-                <a:spcPts val="200"/>
-              </a:spcBef>
-              <a:spcAft>
-                <a:spcPts val="400"/>
-              </a:spcAft>
-            </a:pPr>
-            <a:r>
-              <a:rPr sz="1800" b="0">
-                <a:solidFill>
-                  <a:srgbClr val="1E293B"/>
-                </a:solidFill>
-                <a:latin typeface="Times New Roman"/>
-              </a:rPr>
-              <a:t>•  Dynamically recalibrates feature map channels, allowing the network to isolate narrow defect patterns (such as thin scratches) amidst tens of thousands of operational dies.</a:t>
-            </a:r>
-          </a:p>
-          <a:p>
-            <a:pPr>
-              <a:spcBef>
-                <a:spcPts val="800"/>
-              </a:spcBef>
-              <a:spcAft>
-                <a:spcPts val="200"/>
-              </a:spcAft>
-            </a:pPr>
-            <a:r>
-              <a:rPr sz="2200" b="1">
-                <a:solidFill>
-                  <a:srgbClr val="0284C7"/>
-                </a:solidFill>
-                <a:latin typeface="Times New Roman"/>
-              </a:rPr>
-              <a:t>Hardware-Agnostic ONNX Edge Engine</a:t>
-            </a:r>
-          </a:p>
-          <a:p>
-            <a:pPr>
-              <a:spcBef>
-                <a:spcPts val="200"/>
-              </a:spcBef>
-              <a:spcAft>
-                <a:spcPts val="400"/>
-              </a:spcAft>
-            </a:pPr>
-            <a:r>
-              <a:rPr sz="1800" b="0">
-                <a:solidFill>
-                  <a:srgbClr val="1E293B"/>
-                </a:solidFill>
-                <a:latin typeface="Times New Roman"/>
-              </a:rPr>
-              <a:t>•  Compiled into an open neural network exchange (ONNX) format, allowing seamless execution on industrial x86 PCs, Raspberry Pi 4/5, and smart camera vision systems without Python/PyTorch dependencies.</a:t>
-            </a:r>
-          </a:p>
-          <a:p>
-            <a:pPr>
-              <a:spcBef>
-                <a:spcPts val="800"/>
-              </a:spcBef>
-              <a:spcAft>
-                <a:spcPts val="200"/>
-              </a:spcAft>
-            </a:pPr>
-            <a:r>
-              <a:rPr sz="2200" b="1">
-                <a:solidFill>
-                  <a:srgbClr val="0284C7"/>
-                </a:solidFill>
-                <a:latin typeface="Times New Roman"/>
-              </a:rPr>
-              <a:t>Full-Stack Fab Simulation &amp; Die Matrix Telemetry</a:t>
-            </a:r>
-          </a:p>
-          <a:p>
-            <a:pPr>
-              <a:spcBef>
-                <a:spcPts val="200"/>
-              </a:spcBef>
-              <a:spcAft>
-                <a:spcPts val="400"/>
-              </a:spcAft>
-            </a:pPr>
-            <a:r>
-              <a:rPr sz="1800" b="0">
-                <a:solidFill>
-                  <a:srgbClr val="1E293B"/>
-                </a:solidFill>
-                <a:latin typeface="Times New Roman"/>
-              </a:rPr>
-              <a:t>•  Bridges pure model classification with production fab metrics: computes exact good/bad die yield on a 648-die matrix in real time.</a:t>
-            </a:r>
-          </a:p>
-        </p:txBody>
-      </p:sp>
     </p:spTree>
   </p:cSld>
   <p:clrMapOvr>
@@ -21480,13 +21841,34 @@
               <a:buNone/>
             </a:pPr>
             <a:r>
-              <a:rPr sz="3400" b="1">
-                <a:solidFill>
-                  <a:srgbClr val="0F172A"/>
-                </a:solidFill>
+              <a:rPr lang="en-US" sz="4000" dirty="0">
+                <a:solidFill>
+                  <a:srgbClr val="181C24"/>
+                </a:solidFill>
+                <a:highlight>
+                  <a:srgbClr val="FFFFFF"/>
+                </a:highlight>
                 <a:latin typeface="Times New Roman"/>
+                <a:ea typeface="Times New Roman"/>
+                <a:cs typeface="Times New Roman"/>
+                <a:sym typeface="Times New Roman"/>
               </a:rPr>
-              <a:t>SCOPE OF THE PROJECT</a:t>
+              <a:t> </a:t>
+            </a:r>
+            <a:r>
+              <a:rPr lang="en-US" sz="3600" b="1" dirty="0">
+                <a:solidFill>
+                  <a:srgbClr val="181C24"/>
+                </a:solidFill>
+                <a:highlight>
+                  <a:srgbClr val="FFFFFF"/>
+                </a:highlight>
+                <a:latin typeface="Times New Roman"/>
+                <a:ea typeface="Times New Roman"/>
+                <a:cs typeface="Times New Roman"/>
+                <a:sym typeface="Times New Roman"/>
+              </a:rPr>
+              <a:t>SCOPE</a:t>
             </a:r>
             <a:endParaRPr sz="3600" b="1" dirty="0">
               <a:latin typeface="Times New Roman"/>
@@ -21509,8 +21891,8 @@
         </p:nvSpPr>
         <p:spPr>
           <a:xfrm>
-            <a:off x="731520" y="1920240"/>
-            <a:ext cx="10698480" cy="4114800"/>
+            <a:off x="459967" y="2055887"/>
+            <a:ext cx="11128800" cy="4351800"/>
           </a:xfrm>
           <a:prstGeom prst="rect">
             <a:avLst/>
@@ -21531,175 +21913,72 @@
                 <a:spcPct val="100000"/>
               </a:lnSpc>
               <a:spcBef>
-                <a:spcPts val="800"/>
-              </a:spcBef>
-              <a:spcAft>
-                <a:spcPts val="200"/>
-              </a:spcAft>
+                <a:spcPts val="1200"/>
+              </a:spcBef>
               <a:buSzPts val="2600"/>
               <a:buFont typeface="Noto Sans Symbols"/>
               <a:buChar char="⮪"/>
             </a:pPr>
             <a:r>
-              <a:rPr sz="2200" b="1">
-                <a:solidFill>
-                  <a:srgbClr val="0284C7"/>
-                </a:solidFill>
-                <a:latin typeface="Times New Roman"/>
+              <a:rPr lang="en-US" sz="2800" b="1" dirty="0">
+                <a:latin typeface="Times New Roman" panose="02020603050405020304" pitchFamily="18" charset="0"/>
+                <a:cs typeface="Times New Roman" panose="02020603050405020304" pitchFamily="18" charset="0"/>
               </a:rPr>
-              <a:t>Current Implementation Scope</a:t>
+              <a:t>Current Scope</a:t>
             </a:r>
           </a:p>
           <a:p>
-            <a:pPr>
-              <a:spcBef>
-                <a:spcPts val="200"/>
-              </a:spcBef>
-              <a:spcAft>
-                <a:spcPts val="400"/>
-              </a:spcAft>
+            <a:pPr marL="1054100" lvl="1" indent="-457200" algn="l">
+              <a:spcBef>
+                <a:spcPts val="1200"/>
+              </a:spcBef>
+              <a:buSzPts val="2200"/>
+              <a:buFont typeface="Arial" panose="020B0604020202020204" pitchFamily="34" charset="0"/>
+              <a:buChar char="•"/>
             </a:pPr>
             <a:r>
-              <a:rPr sz="1800" b="0">
-                <a:solidFill>
-                  <a:srgbClr val="1E293B"/>
-                </a:solidFill>
-                <a:latin typeface="Times New Roman"/>
+              <a:rPr lang="en-US" sz="2400" dirty="0">
+                <a:latin typeface="Times New Roman" panose="02020603050405020304" pitchFamily="18" charset="0"/>
+                <a:cs typeface="Times New Roman" panose="02020603050405020304" pitchFamily="18" charset="0"/>
               </a:rPr>
-              <a:t>•  Automated high-precision classification across 8 key defect classes: Center, Clean, Donut, Edge-Loc, Edge-Ring, Loc, Other, Scratch.</a:t>
+              <a:t>Supports secure online examinations with authenticated access, encrypted storage and blockchain-based audit trails for a single institution.</a:t>
             </a:r>
           </a:p>
           <a:p>
-            <a:pPr>
-              <a:spcBef>
-                <a:spcPts val="200"/>
-              </a:spcBef>
-              <a:spcAft>
-                <a:spcPts val="400"/>
-              </a:spcAft>
+            <a:pPr marL="342900" lvl="0" indent="-342900" algn="l">
+              <a:lnSpc>
+                <a:spcPct val="100000"/>
+              </a:lnSpc>
+              <a:spcBef>
+                <a:spcPts val="1200"/>
+              </a:spcBef>
+              <a:buSzPts val="2600"/>
+              <a:buFont typeface="Noto Sans Symbols"/>
+              <a:buChar char="⮪"/>
             </a:pPr>
             <a:r>
-              <a:rPr sz="1800" b="0">
-                <a:solidFill>
-                  <a:srgbClr val="1E293B"/>
-                </a:solidFill>
-                <a:latin typeface="Times New Roman"/>
-              </a:rPr>
-              <a:t>•  Complete validation on 121,719 test wafer maps from the WM-811K benchmark.</a:t>
-            </a:r>
-          </a:p>
-          <a:p>
-            <a:pPr>
-              <a:spcBef>
-                <a:spcPts val="200"/>
-              </a:spcBef>
-              <a:spcAft>
-                <a:spcPts val="400"/>
-              </a:spcAft>
-            </a:pPr>
-            <a:r>
-              <a:rPr sz="1800" b="0">
-                <a:solidFill>
-                  <a:srgbClr val="1E293B"/>
-                </a:solidFill>
-                <a:latin typeface="Times New Roman"/>
-              </a:rPr>
-              <a:t>•  Interactive web-based inspection console with live canvas, lot simulation, and REST inference API.</a:t>
-            </a:r>
-          </a:p>
-          <a:p>
-            <a:pPr>
-              <a:spcBef>
-                <a:spcPts val="200"/>
-              </a:spcBef>
-              <a:spcAft>
-                <a:spcPts val="400"/>
-              </a:spcAft>
-            </a:pPr>
-            <a:r>
-              <a:rPr sz="1800" b="0">
-                <a:solidFill>
-                  <a:srgbClr val="1E293B"/>
-                </a:solidFill>
-                <a:latin typeface="Times New Roman"/>
-              </a:rPr>
-              <a:t>•  Zero-cloud offline deployment capable of running on standard shop-floor laptops or edge processors.</a:t>
-            </a:r>
-          </a:p>
-          <a:p>
-            <a:pPr>
-              <a:spcBef>
-                <a:spcPts val="800"/>
-              </a:spcBef>
-              <a:spcAft>
-                <a:spcPts val="200"/>
-              </a:spcAft>
-            </a:pPr>
-            <a:r>
-              <a:rPr sz="2200" b="1">
-                <a:solidFill>
-                  <a:srgbClr val="0284C7"/>
-                </a:solidFill>
-                <a:latin typeface="Times New Roman"/>
+              <a:rPr lang="en-US" sz="2800" b="1" dirty="0">
+                <a:latin typeface="Times New Roman" panose="02020603050405020304" pitchFamily="18" charset="0"/>
+                <a:cs typeface="Times New Roman" panose="02020603050405020304" pitchFamily="18" charset="0"/>
               </a:rPr>
               <a:t>Future Enhancements</a:t>
             </a:r>
           </a:p>
           <a:p>
-            <a:pPr>
-              <a:spcBef>
-                <a:spcPts val="200"/>
-              </a:spcBef>
-              <a:spcAft>
-                <a:spcPts val="400"/>
-              </a:spcAft>
+            <a:pPr marL="1054100" lvl="1" indent="-457200" algn="l">
+              <a:spcBef>
+                <a:spcPts val="1200"/>
+              </a:spcBef>
+              <a:buSzPts val="2200"/>
+              <a:buFont typeface="Arial" panose="020B0604020202020204" pitchFamily="34" charset="0"/>
+              <a:buChar char="•"/>
             </a:pPr>
             <a:r>
-              <a:rPr sz="1800" b="0">
-                <a:solidFill>
-                  <a:srgbClr val="1E293B"/>
-                </a:solidFill>
-                <a:latin typeface="Times New Roman"/>
+              <a:rPr lang="en-US" sz="2400" dirty="0">
+                <a:latin typeface="Times New Roman" panose="02020603050405020304" pitchFamily="18" charset="0"/>
+                <a:cs typeface="Times New Roman" panose="02020603050405020304" pitchFamily="18" charset="0"/>
               </a:rPr>
-              <a:t>•  Die-level semantic segmentation (U-Net / YOLOv8-seg) for pixel-precise defect contouring.</a:t>
-            </a:r>
-          </a:p>
-          <a:p>
-            <a:pPr>
-              <a:spcBef>
-                <a:spcPts val="200"/>
-              </a:spcBef>
-              <a:spcAft>
-                <a:spcPts val="400"/>
-              </a:spcAft>
-            </a:pPr>
-            <a:r>
-              <a:rPr sz="1800" b="0">
-                <a:solidFill>
-                  <a:srgbClr val="1E293B"/>
-                </a:solidFill>
-                <a:latin typeface="Times New Roman"/>
-              </a:rPr>
-              <a:t>•  Multi-modal fab telemetry fusion combining wafer maps with electrical parametric test (E-test) logs.</a:t>
-            </a:r>
-          </a:p>
-          <a:p>
-            <a:pPr>
-              <a:spcBef>
-                <a:spcPts val="200"/>
-              </a:spcBef>
-              <a:spcAft>
-                <a:spcPts val="400"/>
-              </a:spcAft>
-            </a:pPr>
-            <a:r>
-              <a:rPr sz="1800" b="0">
-                <a:solidFill>
-                  <a:srgbClr val="1E293B"/>
-                </a:solidFill>
-                <a:latin typeface="Times New Roman"/>
-              </a:rPr>
-              <a:t>•  Federated active learning for collaborative multi-fab model continuous improvement.</a:t>
+              <a:t>AI-based proctoring, multi-institution federation, mobile app support and advanced analytics dashboards.</a:t>
             </a:r>
           </a:p>
         </p:txBody>

--- a/Final_Review_Mini_Project_Semiconductor_Defects.pptx
+++ b/Final_Review_Mini_Project_Semiconductor_Defects.pptx
@@ -15160,7 +15160,7 @@
   <p:cSld>
     <p:spTree>
       <p:nvGrpSpPr>
-        <p:cNvPr id="1" name="Shape 119"/>
+        <p:cNvPr id="1" name="Shape 381"/>
         <p:cNvGrpSpPr/>
         <p:nvPr/>
       </p:nvGrpSpPr>
@@ -15174,7 +15174,66 @@
       </p:grpSpPr>
       <p:sp>
         <p:nvSpPr>
-          <p:cNvPr id="120" name="Google Shape;120;p3"/>
+          <p:cNvPr id="382" name="Google Shape;382;p26"/>
+          <p:cNvSpPr txBox="1">
+            <a:spLocks noGrp="1"/>
+          </p:cNvSpPr>
+          <p:nvPr>
+            <p:ph type="title"/>
+          </p:nvPr>
+        </p:nvSpPr>
+        <p:spPr>
+          <a:xfrm>
+            <a:off x="680884" y="743804"/>
+            <a:ext cx="10515600" cy="1325700"/>
+          </a:xfrm>
+          <a:prstGeom prst="rect">
+            <a:avLst/>
+          </a:prstGeom>
+          <a:noFill/>
+          <a:ln>
+            <a:noFill/>
+          </a:ln>
+        </p:spPr>
+        <p:txBody>
+          <a:bodyPr spcFirstLastPara="1" wrap="square" lIns="91425" tIns="45700" rIns="91425" bIns="45700" anchor="ctr" anchorCtr="0">
+            <a:normAutofit/>
+          </a:bodyPr>
+          <a:lstStyle/>
+          <a:p>
+            <a:pPr marL="0" lvl="0" indent="0" algn="l" rtl="0">
+              <a:lnSpc>
+                <a:spcPct val="90000"/>
+              </a:lnSpc>
+              <a:spcBef>
+                <a:spcPts val="0"/>
+              </a:spcBef>
+              <a:spcAft>
+                <a:spcPts val="0"/>
+              </a:spcAft>
+              <a:buClr>
+                <a:schemeClr val="dk1"/>
+              </a:buClr>
+              <a:buSzPts val="3600"/>
+              <a:buFont typeface="Times New Roman"/>
+              <a:buNone/>
+            </a:pPr>
+            <a:r>
+              <a:rPr sz="3400" b="1">
+                <a:solidFill>
+                  <a:srgbClr val="0F172A"/>
+                </a:solidFill>
+                <a:latin typeface="Times New Roman"/>
+              </a:rPr>
+              <a:t>REFERENCES</a:t>
+            </a:r>
+            <a:endParaRPr b="1" dirty="0"/>
+          </a:p>
+        </p:txBody>
+      </p:sp>
+      <p:sp>
+        <p:nvSpPr>
+          <p:cNvPr id="384" name="Google Shape;384;p26"/>
           <p:cNvSpPr txBox="1">
             <a:spLocks noGrp="1"/>
           </p:cNvSpPr>
@@ -15217,7 +15276,7 @@
                 </a:solidFill>
                 <a:latin typeface="Times New Roman"/>
               </a:rPr>
-              <a:t>8</a:t>
+              <a:t>10</a:t>
             </a:r>
             <a:endParaRPr/>
           </a:p>
@@ -15225,12 +15284,39 @@
       </p:sp>
       <p:pic>
         <p:nvPicPr>
-          <p:cNvPr id="121" name="Google Shape;121;p3"/>
+          <p:cNvPr id="385" name="Google Shape;385;p26"/>
           <p:cNvPicPr preferRelativeResize="0"/>
           <p:nvPr/>
         </p:nvPicPr>
         <p:blipFill rotWithShape="1">
           <a:blip r:embed="rId2">
+            <a:alphaModFix/>
+          </a:blip>
+          <a:srcRect/>
+          <a:stretch/>
+        </p:blipFill>
+        <p:spPr>
+          <a:xfrm>
+            <a:off x="159971" y="211556"/>
+            <a:ext cx="4517529" cy="810838"/>
+          </a:xfrm>
+          <a:prstGeom prst="rect">
+            <a:avLst/>
+          </a:prstGeom>
+          <a:noFill/>
+          <a:ln>
+            <a:noFill/>
+          </a:ln>
+        </p:spPr>
+      </p:pic>
+      <p:pic>
+        <p:nvPicPr>
+          <p:cNvPr id="386" name="Google Shape;386;p26"/>
+          <p:cNvPicPr preferRelativeResize="0"/>
+          <p:nvPr/>
+        </p:nvPicPr>
+        <p:blipFill rotWithShape="1">
+          <a:blip r:embed="rId3">
             <a:alphaModFix/>
           </a:blip>
           <a:srcRect/>
@@ -15252,7 +15338,7 @@
       </p:pic>
       <p:sp>
         <p:nvSpPr>
-          <p:cNvPr id="122" name="Google Shape;122;p3"/>
+          <p:cNvPr id="387" name="Google Shape;387;p26"/>
           <p:cNvSpPr/>
           <p:nvPr/>
         </p:nvSpPr>
@@ -15341,77 +15427,9 @@
       </p:sp>
       <p:sp>
         <p:nvSpPr>
-          <p:cNvPr id="123" name="Google Shape;123;p3"/>
-          <p:cNvSpPr txBox="1">
-            <a:spLocks noGrp="1"/>
-          </p:cNvSpPr>
-          <p:nvPr>
-            <p:ph type="ctrTitle"/>
-          </p:nvPr>
-        </p:nvSpPr>
-        <p:spPr>
-          <a:xfrm>
-            <a:off x="459967" y="1100168"/>
-            <a:ext cx="9625800" cy="761400"/>
-          </a:xfrm>
-          <a:prstGeom prst="rect">
-            <a:avLst/>
-          </a:prstGeom>
-          <a:noFill/>
-          <a:ln>
-            <a:noFill/>
-          </a:ln>
-        </p:spPr>
-        <p:txBody>
-          <a:bodyPr spcFirstLastPara="1" wrap="square" lIns="91425" tIns="45700" rIns="91425" bIns="45700" anchor="b" anchorCtr="0">
-            <a:normAutofit/>
-          </a:bodyPr>
-          <a:lstStyle/>
-          <a:p>
-            <a:pPr marL="0" lvl="0" indent="0" algn="l" rtl="0">
-              <a:lnSpc>
-                <a:spcPct val="90000"/>
-              </a:lnSpc>
-              <a:spcBef>
-                <a:spcPts val="0"/>
-              </a:spcBef>
-              <a:spcAft>
-                <a:spcPts val="0"/>
-              </a:spcAft>
-              <a:buClr>
-                <a:srgbClr val="181C24"/>
-              </a:buClr>
-              <a:buSzPts val="4000"/>
-              <a:buFont typeface="Times New Roman"/>
-              <a:buNone/>
-            </a:pPr>
-            <a:r>
-              <a:rPr sz="3400" b="1">
-                <a:solidFill>
-                  <a:srgbClr val="0F172A"/>
-                </a:solidFill>
-                <a:latin typeface="Times New Roman"/>
-              </a:rPr>
-              <a:t>METHODOLOGY &amp; WORKFLOW</a:t>
-            </a:r>
-            <a:endParaRPr sz="3600" b="1" dirty="0">
-              <a:latin typeface="Times New Roman"/>
-              <a:ea typeface="Times New Roman"/>
-              <a:cs typeface="Times New Roman"/>
-              <a:sym typeface="Times New Roman"/>
-            </a:endParaRPr>
-          </a:p>
-        </p:txBody>
-      </p:sp>
-      <p:sp>
-        <p:nvSpPr>
-          <p:cNvPr id="124" name="Google Shape;124;p3"/>
-          <p:cNvSpPr txBox="1">
-            <a:spLocks noGrp="1"/>
-          </p:cNvSpPr>
-          <p:nvPr>
-            <p:ph type="subTitle" idx="1"/>
-          </p:nvPr>
+          <p:cNvPr id="388" name="TextBox 387"/>
+          <p:cNvSpPr txBox="1"/>
+          <p:nvPr/>
         </p:nvSpPr>
         <p:spPr>
           <a:xfrm>
@@ -15422,40 +15440,12 @@
             <a:avLst/>
           </a:prstGeom>
           <a:noFill/>
-          <a:ln>
-            <a:noFill/>
-          </a:ln>
         </p:spPr>
         <p:txBody>
-          <a:bodyPr spcFirstLastPara="1" wrap="square" lIns="91425" tIns="45700" rIns="91425" bIns="45700" anchor="t" anchorCtr="0">
-            <a:normAutofit/>
+          <a:bodyPr wrap="square">
+            <a:spAutoFit/>
           </a:bodyPr>
           <a:lstStyle/>
-          <a:p>
-            <a:pPr marL="342900" lvl="0" indent="-342900" algn="l">
-              <a:lnSpc>
-                <a:spcPct val="100000"/>
-              </a:lnSpc>
-              <a:spcBef>
-                <a:spcPts val="800"/>
-              </a:spcBef>
-              <a:spcAft>
-                <a:spcPts val="200"/>
-              </a:spcAft>
-              <a:buSzPts val="2600"/>
-              <a:buFont typeface="Noto Sans Symbols"/>
-              <a:buChar char="⮪"/>
-            </a:pPr>
-            <a:r>
-              <a:rPr sz="2200" b="1">
-                <a:solidFill>
-                  <a:srgbClr val="0284C7"/>
-                </a:solidFill>
-                <a:latin typeface="Times New Roman"/>
-              </a:rPr>
-              <a:t>Phase 1: Dataset Curation &amp; Preprocessing</a:t>
-            </a:r>
-          </a:p>
           <a:p>
             <a:pPr>
               <a:spcBef>
@@ -15472,26 +15462,7 @@
                 </a:solidFill>
                 <a:latin typeface="Times New Roman"/>
               </a:rPr>
-              <a:t>•  Extracted wafer maps from the WM-811K benchmark; performed spatial bicubic/nearest resizing to 224x224 and tensor normalization (ImageNet mean &amp; std).</a:t>
-            </a:r>
-          </a:p>
-          <a:p>
-            <a:pPr>
-              <a:spcBef>
-                <a:spcPts val="800"/>
-              </a:spcBef>
-              <a:spcAft>
-                <a:spcPts val="200"/>
-              </a:spcAft>
-            </a:pPr>
-            <a:r>
-              <a:rPr sz="2200" b="1">
-                <a:solidFill>
-                  <a:srgbClr val="0284C7"/>
-                </a:solidFill>
-                <a:latin typeface="Times New Roman"/>
-              </a:rPr>
-              <a:t>Phase 2: Transfer Learning &amp; Model Fine-Tuning</a:t>
+              <a:t>•  1. M.-J. Wu, J.-S. R. Jang, and J.-L. Chen, 'Wafer map failure pattern recognition and similarity ranking for large-scale semiconductor manufacturing,' IEEE Transactions on Semiconductor Manufacturing, vol. 28, no. 1, pp. 1–12, 2015.</a:t>
             </a:r>
           </a:p>
           <a:p>
@@ -15510,26 +15481,7 @@
                 </a:solidFill>
                 <a:latin typeface="Times New Roman"/>
               </a:rPr>
-              <a:t>•  Utilized pre-trained MobileNetV3-Small backbone with inverted residual bottlenecks and Hard-Swish activations; replaced the classification head with an 8-output linear layer.</a:t>
-            </a:r>
-          </a:p>
-          <a:p>
-            <a:pPr>
-              <a:spcBef>
-                <a:spcPts val="800"/>
-              </a:spcBef>
-              <a:spcAft>
-                <a:spcPts val="200"/>
-              </a:spcAft>
-            </a:pPr>
-            <a:r>
-              <a:rPr sz="2200" b="1">
-                <a:solidFill>
-                  <a:srgbClr val="0284C7"/>
-                </a:solidFill>
-                <a:latin typeface="Times New Roman"/>
-              </a:rPr>
-              <a:t>Phase 3: Training &amp; Regularization Pipeline</a:t>
+              <a:t>•  2. A. Howard, M. Sandler, G. Chu, L.-C. Chen, B. Chen, M. Tan, W. Wang, Y. Zhu, R. Pang, V. Vasudevan et al., 'Searching for MobileNetV3,' in Proceedings of the IEEE/CVF International Conference on Computer Vision (ICCV), 2019, pp. 1314–1324.</a:t>
             </a:r>
           </a:p>
           <a:p>
@@ -15548,26 +15500,7 @@
                 </a:solidFill>
                 <a:latin typeface="Times New Roman"/>
               </a:rPr>
-              <a:t>•  Trained using Adam optimizer, cross-entropy loss, dropout regularization (p=0.2), and early stopping to prevent overfitting on majority classes.</a:t>
-            </a:r>
-          </a:p>
-          <a:p>
-            <a:pPr>
-              <a:spcBef>
-                <a:spcPts val="800"/>
-              </a:spcBef>
-              <a:spcAft>
-                <a:spcPts val="200"/>
-              </a:spcAft>
-            </a:pPr>
-            <a:r>
-              <a:rPr sz="2200" b="1">
-                <a:solidFill>
-                  <a:srgbClr val="0284C7"/>
-                </a:solidFill>
-                <a:latin typeface="Times New Roman"/>
-              </a:rPr>
-              <a:t>Phase 4: ONNX Compilation &amp; Edge Integration</a:t>
+              <a:t>•  3. T. Nakazawa and D. V. Kulkarni, 'Wafer map defect pattern classification and retrieval using convolutional neural networks,' IEEE Transactions on Semiconductor Manufacturing, vol. 31, no. 2, pp. 309–314, 2018.</a:t>
             </a:r>
           </a:p>
           <a:p>
@@ -15586,38 +15519,30 @@
                 </a:solidFill>
                 <a:latin typeface="Times New Roman"/>
               </a:rPr>
-              <a:t>•  Exported PyTorch computational graph to ONNX with CPU graph optimizations; integrated into a high-concurrency Python REST server and interactive web visualizer.</a:t>
+              <a:t>•  4. S. Cheon, H. Lee, C. O. Kim, and S. H. Lee, 'Convolutional neural network for wafer surface defect classification and the detection of unknown defect classes,' IEEE Transactions on Semiconductor Manufacturing, vol. 32, no. 2, pp. 163–170, 2019.</a:t>
+            </a:r>
+          </a:p>
+          <a:p>
+            <a:pPr>
+              <a:spcBef>
+                <a:spcPts val="200"/>
+              </a:spcBef>
+              <a:spcAft>
+                <a:spcPts val="400"/>
+              </a:spcAft>
+            </a:pPr>
+            <a:r>
+              <a:rPr sz="1800" b="0">
+                <a:solidFill>
+                  <a:srgbClr val="1E293B"/>
+                </a:solidFill>
+                <a:latin typeface="Times New Roman"/>
+              </a:rPr>
+              <a:t>•  5. ONNX Runtime Developers, 'ONNX Runtime: Cross-platform, high performance ML inferencing and training accelerator,' Linux Foundation / Microsoft, 2024. [Online]. Available: https://onnxruntime.ai</a:t>
             </a:r>
           </a:p>
         </p:txBody>
       </p:sp>
-      <p:pic>
-        <p:nvPicPr>
-          <p:cNvPr id="125" name="Google Shape;125;p3"/>
-          <p:cNvPicPr preferRelativeResize="0"/>
-          <p:nvPr/>
-        </p:nvPicPr>
-        <p:blipFill rotWithShape="1">
-          <a:blip r:embed="rId3">
-            <a:alphaModFix/>
-          </a:blip>
-          <a:srcRect l="15320" t="28789" r="16466" b="54857"/>
-          <a:stretch/>
-        </p:blipFill>
-        <p:spPr>
-          <a:xfrm>
-            <a:off x="155527" y="217182"/>
-            <a:ext cx="4521325" cy="812948"/>
-          </a:xfrm>
-          <a:prstGeom prst="rect">
-            <a:avLst/>
-          </a:prstGeom>
-          <a:noFill/>
-          <a:ln>
-            <a:noFill/>
-          </a:ln>
-        </p:spPr>
-      </p:pic>
     </p:spTree>
   </p:cSld>
   <p:clrMapOvr>
@@ -15631,7 +15556,7 @@
   <p:cSld>
     <p:spTree>
       <p:nvGrpSpPr>
-        <p:cNvPr id="1" name="Shape 119"/>
+        <p:cNvPr id="1" name="Shape 391"/>
         <p:cNvGrpSpPr/>
         <p:nvPr/>
       </p:nvGrpSpPr>
@@ -15645,7 +15570,7 @@
       </p:grpSpPr>
       <p:sp>
         <p:nvSpPr>
-          <p:cNvPr id="120" name="Google Shape;120;p3"/>
+          <p:cNvPr id="392" name="Google Shape;392;p27"/>
           <p:cNvSpPr txBox="1">
             <a:spLocks noGrp="1"/>
           </p:cNvSpPr>
@@ -15681,22 +15606,45 @@
               </a:spcAft>
               <a:buNone/>
             </a:pPr>
-            <a:fld id="{00000000-1234-1234-1234-123412341234}" type="slidenum">
-              <a:rPr lang="en-US"/>
-              <a:t>11</a:t>
-            </a:fld>
             <a:endParaRPr/>
           </a:p>
         </p:txBody>
       </p:sp>
       <p:pic>
         <p:nvPicPr>
-          <p:cNvPr id="121" name="Google Shape;121;p3"/>
+          <p:cNvPr id="393" name="Google Shape;393;p27"/>
           <p:cNvPicPr preferRelativeResize="0"/>
           <p:nvPr/>
         </p:nvPicPr>
         <p:blipFill rotWithShape="1">
           <a:blip r:embed="rId2">
+            <a:alphaModFix/>
+          </a:blip>
+          <a:srcRect/>
+          <a:stretch/>
+        </p:blipFill>
+        <p:spPr>
+          <a:xfrm>
+            <a:off x="159971" y="211556"/>
+            <a:ext cx="4517529" cy="810838"/>
+          </a:xfrm>
+          <a:prstGeom prst="rect">
+            <a:avLst/>
+          </a:prstGeom>
+          <a:noFill/>
+          <a:ln>
+            <a:noFill/>
+          </a:ln>
+        </p:spPr>
+      </p:pic>
+      <p:pic>
+        <p:nvPicPr>
+          <p:cNvPr id="394" name="Google Shape;394;p27"/>
+          <p:cNvPicPr preferRelativeResize="0"/>
+          <p:nvPr/>
+        </p:nvPicPr>
+        <p:blipFill rotWithShape="1">
+          <a:blip r:embed="rId3">
             <a:alphaModFix/>
           </a:blip>
           <a:srcRect/>
@@ -15718,7 +15666,7 @@
       </p:pic>
       <p:sp>
         <p:nvSpPr>
-          <p:cNvPr id="122" name="Google Shape;122;p3"/>
+          <p:cNvPr id="395" name="Google Shape;395;p27"/>
           <p:cNvSpPr/>
           <p:nvPr/>
         </p:nvSpPr>
@@ -15807,18 +15755,18 @@
       </p:sp>
       <p:sp>
         <p:nvSpPr>
-          <p:cNvPr id="123" name="Google Shape;123;p3"/>
+          <p:cNvPr id="396" name="Google Shape;396;p27"/>
           <p:cNvSpPr txBox="1">
             <a:spLocks noGrp="1"/>
           </p:cNvSpPr>
           <p:nvPr>
-            <p:ph type="ctrTitle"/>
+            <p:ph type="title"/>
           </p:nvPr>
         </p:nvSpPr>
         <p:spPr>
           <a:xfrm>
-            <a:off x="459967" y="1100168"/>
-            <a:ext cx="9625800" cy="761400"/>
+            <a:off x="914400" y="2560320"/>
+            <a:ext cx="10332720" cy="2011680"/>
           </a:xfrm>
           <a:prstGeom prst="rect">
             <a:avLst/>
@@ -15829,12 +15777,12 @@
           </a:ln>
         </p:spPr>
         <p:txBody>
-          <a:bodyPr spcFirstLastPara="1" wrap="square" lIns="91425" tIns="45700" rIns="91425" bIns="45700" anchor="b" anchorCtr="0">
+          <a:bodyPr spcFirstLastPara="1" wrap="square" lIns="91425" tIns="45700" rIns="91425" bIns="45700" anchor="ctr" anchorCtr="0">
             <a:normAutofit/>
           </a:bodyPr>
           <a:lstStyle/>
           <a:p>
-            <a:pPr marL="0" lvl="0" indent="0" algn="l" rtl="0">
+            <a:pPr marL="0" lvl="0" indent="0" algn="ctr" rtl="0">
               <a:lnSpc>
                 <a:spcPct val="90000"/>
               </a:lnSpc>
@@ -15845,43 +15793,22 @@
                 <a:spcPts val="0"/>
               </a:spcAft>
               <a:buClr>
-                <a:srgbClr val="181C24"/>
-              </a:buClr>
-              <a:buSzPts val="4000"/>
+                <a:schemeClr val="dk1"/>
+              </a:buClr>
+              <a:buSzPts val="4400"/>
               <a:buFont typeface="Times New Roman"/>
               <a:buNone/>
             </a:pPr>
             <a:r>
-              <a:rPr lang="en-US" sz="4000" dirty="0">
-                <a:solidFill>
-                  <a:srgbClr val="181C24"/>
-                </a:solidFill>
-                <a:highlight>
-                  <a:srgbClr val="FFFFFF"/>
-                </a:highlight>
+              <a:rPr sz="6400" b="1">
+                <a:solidFill>
+                  <a:srgbClr val="0F172A"/>
+                </a:solidFill>
                 <a:latin typeface="Times New Roman"/>
-                <a:ea typeface="Times New Roman"/>
-                <a:cs typeface="Times New Roman"/>
-                <a:sym typeface="Times New Roman"/>
               </a:rPr>
-              <a:t> </a:t>
+              <a:t>THANK YOU</a:t>
             </a:r>
-            <a:r>
-              <a:rPr lang="en-US" sz="3600" b="1" dirty="0">
-                <a:solidFill>
-                  <a:srgbClr val="181C24"/>
-                </a:solidFill>
-                <a:highlight>
-                  <a:srgbClr val="FFFFFF"/>
-                </a:highlight>
-                <a:latin typeface="Times New Roman"/>
-                <a:ea typeface="Times New Roman"/>
-                <a:cs typeface="Times New Roman"/>
-                <a:sym typeface="Times New Roman"/>
-              </a:rPr>
-              <a:t>HARDWARE REQUIREMENTS</a:t>
-            </a:r>
-            <a:endParaRPr sz="3600" b="1" dirty="0">
+            <a:endParaRPr i="1">
               <a:latin typeface="Times New Roman"/>
               <a:ea typeface="Times New Roman"/>
               <a:cs typeface="Times New Roman"/>
@@ -15892,18 +15819,14 @@
       </p:sp>
       <p:sp>
         <p:nvSpPr>
-          <p:cNvPr id="124" name="Google Shape;124;p3"/>
-          <p:cNvSpPr txBox="1">
-            <a:spLocks noGrp="1"/>
-          </p:cNvSpPr>
-          <p:nvPr>
-            <p:ph type="subTitle" idx="1"/>
-          </p:nvPr>
+          <p:cNvPr id="397" name="Questions Subtitle"/>
+          <p:cNvSpPr txBox="1"/>
+          <p:nvPr/>
         </p:nvSpPr>
         <p:spPr>
           <a:xfrm>
-            <a:off x="459967" y="2055887"/>
-            <a:ext cx="11128800" cy="4351800"/>
+            <a:off x="-18288000" y="4000000"/>
+            <a:ext cx="10515600" cy="700000"/>
           </a:xfrm>
           <a:prstGeom prst="rect">
             <a:avLst/>
@@ -15919,114 +15842,21 @@
           </a:bodyPr>
           <a:lstStyle/>
           <a:p>
-            <a:pPr marL="342900" lvl="0" indent="-342900" algn="l">
-              <a:lnSpc>
-                <a:spcPct val="100000"/>
-              </a:lnSpc>
-              <a:spcBef>
-                <a:spcPts val="1200"/>
-              </a:spcBef>
-              <a:buSzPts val="2600"/>
-              <a:buFont typeface="Noto Sans Symbols"/>
-              <a:buChar char="⮪"/>
+            <a:pPr marL="0" lvl="0" indent="0" algn="ctr" rtl="0">
+              <a:spcBef>
+                <a:spcPts val="0"/>
+              </a:spcBef>
+              <a:buNone/>
             </a:pPr>
-            <a:r>
-              <a:rPr lang="en-US" dirty="0">
-                <a:latin typeface="Times New Roman" panose="02020603050405020304" pitchFamily="18" charset="0"/>
-                <a:cs typeface="Times New Roman" panose="02020603050405020304" pitchFamily="18" charset="0"/>
-              </a:rPr>
-              <a:t>Intel i5 Processor (or equivalent)</a:t>
-            </a:r>
-          </a:p>
-          <a:p>
-            <a:pPr marL="342900" lvl="0" indent="-342900" algn="l">
-              <a:lnSpc>
-                <a:spcPct val="100000"/>
-              </a:lnSpc>
-              <a:spcBef>
-                <a:spcPts val="1200"/>
-              </a:spcBef>
-              <a:buSzPts val="2600"/>
-              <a:buFont typeface="Noto Sans Symbols"/>
-              <a:buChar char="⮪"/>
-            </a:pPr>
-            <a:r>
-              <a:rPr lang="en-US" dirty="0">
-                <a:latin typeface="Times New Roman" panose="02020603050405020304" pitchFamily="18" charset="0"/>
-                <a:cs typeface="Times New Roman" panose="02020603050405020304" pitchFamily="18" charset="0"/>
-              </a:rPr>
-              <a:t>8 GB RAM</a:t>
-            </a:r>
-          </a:p>
-          <a:p>
-            <a:pPr marL="342900" lvl="0" indent="-342900" algn="l">
-              <a:lnSpc>
-                <a:spcPct val="100000"/>
-              </a:lnSpc>
-              <a:spcBef>
-                <a:spcPts val="1200"/>
-              </a:spcBef>
-              <a:buSzPts val="2600"/>
-              <a:buFont typeface="Noto Sans Symbols"/>
-              <a:buChar char="⮪"/>
-            </a:pPr>
-            <a:r>
-              <a:rPr lang="en-US" dirty="0">
-                <a:latin typeface="Times New Roman" panose="02020603050405020304" pitchFamily="18" charset="0"/>
-                <a:cs typeface="Times New Roman" panose="02020603050405020304" pitchFamily="18" charset="0"/>
-              </a:rPr>
-              <a:t>256 GB SSD Storage</a:t>
-            </a:r>
-          </a:p>
-          <a:p>
-            <a:pPr marL="342900" lvl="0" indent="-342900" algn="l">
-              <a:lnSpc>
-                <a:spcPct val="100000"/>
-              </a:lnSpc>
-              <a:spcBef>
-                <a:spcPts val="1200"/>
-              </a:spcBef>
-              <a:buSzPts val="2600"/>
-              <a:buFont typeface="Noto Sans Symbols"/>
-              <a:buChar char="⮪"/>
-            </a:pPr>
-            <a:r>
-              <a:rPr lang="en-US" dirty="0">
-                <a:latin typeface="Times New Roman" panose="02020603050405020304" pitchFamily="18" charset="0"/>
-                <a:cs typeface="Times New Roman" panose="02020603050405020304" pitchFamily="18" charset="0"/>
-              </a:rPr>
-              <a:t>Stable Internet Connection</a:t>
-            </a:r>
+            <a:endParaRPr sz="2800" dirty="0">
+              <a:latin typeface="Times New Roman"/>
+              <a:ea typeface="Times New Roman"/>
+              <a:cs typeface="Times New Roman"/>
+              <a:sym typeface="Times New Roman"/>
+            </a:endParaRPr>
           </a:p>
         </p:txBody>
       </p:sp>
-      <p:pic>
-        <p:nvPicPr>
-          <p:cNvPr id="125" name="Google Shape;125;p3"/>
-          <p:cNvPicPr preferRelativeResize="0"/>
-          <p:nvPr/>
-        </p:nvPicPr>
-        <p:blipFill rotWithShape="1">
-          <a:blip r:embed="rId3">
-            <a:alphaModFix/>
-          </a:blip>
-          <a:srcRect l="15320" t="28789" r="16466" b="54857"/>
-          <a:stretch/>
-        </p:blipFill>
-        <p:spPr>
-          <a:xfrm>
-            <a:off x="155527" y="217182"/>
-            <a:ext cx="4521325" cy="812948"/>
-          </a:xfrm>
-          <a:prstGeom prst="rect">
-            <a:avLst/>
-          </a:prstGeom>
-          <a:noFill/>
-          <a:ln>
-            <a:noFill/>
-          </a:ln>
-        </p:spPr>
-      </p:pic>
     </p:spTree>
   </p:cSld>
   <p:clrMapOvr>
@@ -16035,12 +15865,12 @@
 </p:sld>
 </file>
 
-<file path=ppt/slides/slide12.xml><?xml version="1.0" encoding="utf-8"?>
+<file path=ppt/slides/slide11.xml><?xml version="1.0" encoding="utf-8"?>
 <p:sld xmlns:a="http://schemas.openxmlformats.org/drawingml/2006/main" xmlns:r="http://schemas.openxmlformats.org/officeDocument/2006/relationships" xmlns:p="http://schemas.openxmlformats.org/presentationml/2006/main">
   <p:cSld>
     <p:spTree>
       <p:nvGrpSpPr>
-        <p:cNvPr id="1" name="Shape 119"/>
+        <p:cNvPr id="1" name="Shape 391"/>
         <p:cNvGrpSpPr/>
         <p:nvPr/>
       </p:nvGrpSpPr>
@@ -16054,7 +15884,7 @@
       </p:grpSpPr>
       <p:sp>
         <p:nvSpPr>
-          <p:cNvPr id="120" name="Google Shape;120;p3"/>
+          <p:cNvPr id="392" name="Google Shape;392;p27"/>
           <p:cNvSpPr txBox="1">
             <a:spLocks noGrp="1"/>
           </p:cNvSpPr>
@@ -16090,27 +15920,45 @@
               </a:spcAft>
               <a:buNone/>
             </a:pPr>
-            <a:r>
-              <a:rPr sz="1800" b="1">
-                <a:solidFill>
-                  <a:srgbClr val="0F172A"/>
-                </a:solidFill>
-                <a:latin typeface="Times New Roman"/>
-              </a:rPr>
-              <a:t>9</a:t>
-            </a:r>
             <a:endParaRPr/>
           </a:p>
         </p:txBody>
       </p:sp>
       <p:pic>
         <p:nvPicPr>
-          <p:cNvPr id="121" name="Google Shape;121;p3"/>
+          <p:cNvPr id="393" name="Google Shape;393;p27"/>
           <p:cNvPicPr preferRelativeResize="0"/>
           <p:nvPr/>
         </p:nvPicPr>
         <p:blipFill rotWithShape="1">
           <a:blip r:embed="rId2">
+            <a:alphaModFix/>
+          </a:blip>
+          <a:srcRect/>
+          <a:stretch/>
+        </p:blipFill>
+        <p:spPr>
+          <a:xfrm>
+            <a:off x="159971" y="211556"/>
+            <a:ext cx="4517529" cy="810838"/>
+          </a:xfrm>
+          <a:prstGeom prst="rect">
+            <a:avLst/>
+          </a:prstGeom>
+          <a:noFill/>
+          <a:ln>
+            <a:noFill/>
+          </a:ln>
+        </p:spPr>
+      </p:pic>
+      <p:pic>
+        <p:nvPicPr>
+          <p:cNvPr id="394" name="Google Shape;394;p27"/>
+          <p:cNvPicPr preferRelativeResize="0"/>
+          <p:nvPr/>
+        </p:nvPicPr>
+        <p:blipFill rotWithShape="1">
+          <a:blip r:embed="rId3">
             <a:alphaModFix/>
           </a:blip>
           <a:srcRect/>
@@ -16132,7 +15980,7 @@
       </p:pic>
       <p:sp>
         <p:nvSpPr>
-          <p:cNvPr id="122" name="Google Shape;122;p3"/>
+          <p:cNvPr id="395" name="Google Shape;395;p27"/>
           <p:cNvSpPr/>
           <p:nvPr/>
         </p:nvSpPr>
@@ -16221,18 +16069,18 @@
       </p:sp>
       <p:sp>
         <p:nvSpPr>
-          <p:cNvPr id="123" name="Google Shape;123;p3"/>
+          <p:cNvPr id="396" name="Google Shape;396;p27"/>
           <p:cNvSpPr txBox="1">
             <a:spLocks noGrp="1"/>
           </p:cNvSpPr>
           <p:nvPr>
-            <p:ph type="ctrTitle"/>
+            <p:ph type="title"/>
           </p:nvPr>
         </p:nvSpPr>
         <p:spPr>
           <a:xfrm>
-            <a:off x="459967" y="1100168"/>
-            <a:ext cx="9625800" cy="761400"/>
+            <a:off x="914400" y="2560320"/>
+            <a:ext cx="10332720" cy="2011680"/>
           </a:xfrm>
           <a:prstGeom prst="rect">
             <a:avLst/>
@@ -16243,12 +16091,12 @@
           </a:ln>
         </p:spPr>
         <p:txBody>
-          <a:bodyPr spcFirstLastPara="1" wrap="square" lIns="91425" tIns="45700" rIns="91425" bIns="45700" anchor="b" anchorCtr="0">
+          <a:bodyPr spcFirstLastPara="1" wrap="square" lIns="91425" tIns="45700" rIns="91425" bIns="45700" anchor="ctr" anchorCtr="0">
             <a:normAutofit/>
           </a:bodyPr>
           <a:lstStyle/>
           <a:p>
-            <a:pPr marL="0" lvl="0" indent="0" algn="l" rtl="0">
+            <a:pPr marL="0" lvl="0" indent="0" algn="ctr" rtl="0">
               <a:lnSpc>
                 <a:spcPct val="90000"/>
               </a:lnSpc>
@@ -16259,22 +16107,22 @@
                 <a:spcPts val="0"/>
               </a:spcAft>
               <a:buClr>
-                <a:srgbClr val="181C24"/>
-              </a:buClr>
-              <a:buSzPts val="4000"/>
+                <a:schemeClr val="dk1"/>
+              </a:buClr>
+              <a:buSzPts val="4400"/>
               <a:buFont typeface="Times New Roman"/>
               <a:buNone/>
             </a:pPr>
             <a:r>
-              <a:rPr sz="3400" b="1">
+              <a:rPr sz="6400" b="1">
                 <a:solidFill>
                   <a:srgbClr val="0F172A"/>
                 </a:solidFill>
                 <a:latin typeface="Times New Roman"/>
               </a:rPr>
-              <a:t>EXPERIMENTAL RESULTS &amp; OUTCOMES</a:t>
+              <a:t>THANK YOU</a:t>
             </a:r>
-            <a:endParaRPr sz="3600" b="1" dirty="0">
+            <a:endParaRPr i="1">
               <a:latin typeface="Times New Roman"/>
               <a:ea typeface="Times New Roman"/>
               <a:cs typeface="Times New Roman"/>
@@ -16285,18 +16133,14 @@
       </p:sp>
       <p:sp>
         <p:nvSpPr>
-          <p:cNvPr id="124" name="Google Shape;124;p3"/>
-          <p:cNvSpPr txBox="1">
-            <a:spLocks noGrp="1"/>
-          </p:cNvSpPr>
-          <p:nvPr>
-            <p:ph type="subTitle" idx="1"/>
-          </p:nvPr>
+          <p:cNvPr id="397" name="Questions Subtitle"/>
+          <p:cNvSpPr txBox="1"/>
+          <p:nvPr/>
         </p:nvSpPr>
         <p:spPr>
           <a:xfrm>
-            <a:off x="731520" y="1828800"/>
-            <a:ext cx="6217920" cy="4114800"/>
+            <a:off x="-18288000" y="4000000"/>
+            <a:ext cx="10515600" cy="700000"/>
           </a:xfrm>
           <a:prstGeom prst="rect">
             <a:avLst/>
@@ -16312,273 +16156,21 @@
           </a:bodyPr>
           <a:lstStyle/>
           <a:p>
-            <a:pPr marL="342900" lvl="0" indent="-342900" algn="l">
-              <a:lnSpc>
-                <a:spcPct val="100000"/>
-              </a:lnSpc>
-              <a:spcBef>
-                <a:spcPts val="600"/>
-              </a:spcBef>
-              <a:spcAft>
-                <a:spcPts val="200"/>
-              </a:spcAft>
-              <a:buSzPts val="2600"/>
-              <a:buFont typeface="Noto Sans Symbols"/>
-              <a:buChar char="⮪"/>
+            <a:pPr marL="0" lvl="0" indent="0" algn="ctr" rtl="0">
+              <a:spcBef>
+                <a:spcPts val="0"/>
+              </a:spcBef>
+              <a:buNone/>
             </a:pPr>
-            <a:r>
-              <a:rPr sz="2000" b="1">
-                <a:solidFill>
-                  <a:srgbClr val="0284C7"/>
-                </a:solidFill>
-                <a:latin typeface="Times New Roman"/>
-              </a:rPr>
-              <a:t>Key Performance Metrics</a:t>
-            </a:r>
-          </a:p>
-          <a:p>
-            <a:pPr>
-              <a:spcBef>
-                <a:spcPts val="200"/>
-              </a:spcBef>
-              <a:spcAft>
-                <a:spcPts val="300"/>
-              </a:spcAft>
-            </a:pPr>
-            <a:r>
-              <a:rPr sz="1500" b="0">
-                <a:solidFill>
-                  <a:srgbClr val="1E293B"/>
-                </a:solidFill>
-                <a:latin typeface="Times New Roman"/>
-              </a:rPr>
-              <a:t>•  Overall Test Set Accuracy: 98.02% across 121,719 test wafer samples.</a:t>
-            </a:r>
-          </a:p>
-          <a:p>
-            <a:pPr>
-              <a:spcBef>
-                <a:spcPts val="200"/>
-              </a:spcBef>
-              <a:spcAft>
-                <a:spcPts val="300"/>
-              </a:spcAft>
-            </a:pPr>
-            <a:r>
-              <a:rPr sz="1500" b="0">
-                <a:solidFill>
-                  <a:srgbClr val="1E293B"/>
-                </a:solidFill>
-                <a:latin typeface="Times New Roman"/>
-              </a:rPr>
-              <a:t>•  Macro Precision: 0.6897  |  Macro Recall: 0.6177</a:t>
-            </a:r>
-          </a:p>
-          <a:p>
-            <a:pPr>
-              <a:spcBef>
-                <a:spcPts val="200"/>
-              </a:spcBef>
-              <a:spcAft>
-                <a:spcPts val="300"/>
-              </a:spcAft>
-            </a:pPr>
-            <a:r>
-              <a:rPr sz="1500" b="0">
-                <a:solidFill>
-                  <a:srgbClr val="1E293B"/>
-                </a:solidFill>
-                <a:latin typeface="Times New Roman"/>
-              </a:rPr>
-              <a:t>•  Inference Latency: 1.53 ms on standard CPU (zero GPU requirement).</a:t>
-            </a:r>
-          </a:p>
-          <a:p>
-            <a:pPr>
-              <a:spcBef>
-                <a:spcPts val="200"/>
-              </a:spcBef>
-              <a:spcAft>
-                <a:spcPts val="300"/>
-              </a:spcAft>
-            </a:pPr>
-            <a:r>
-              <a:rPr sz="1500" b="0">
-                <a:solidFill>
-                  <a:srgbClr val="1E293B"/>
-                </a:solidFill>
-                <a:latin typeface="Times New Roman"/>
-              </a:rPr>
-              <a:t>•  Model Binary Footprint: 5.84 MB (ultra-compact ONNX engine).</a:t>
-            </a:r>
-          </a:p>
-          <a:p>
-            <a:pPr>
-              <a:spcBef>
-                <a:spcPts val="600"/>
-              </a:spcBef>
-              <a:spcAft>
-                <a:spcPts val="200"/>
-              </a:spcAft>
-            </a:pPr>
-            <a:r>
-              <a:rPr sz="2000" b="1">
-                <a:solidFill>
-                  <a:srgbClr val="0284C7"/>
-                </a:solidFill>
-                <a:latin typeface="Times New Roman"/>
-              </a:rPr>
-              <a:t>Per-Class Defect Verification Highlights</a:t>
-            </a:r>
-          </a:p>
-          <a:p>
-            <a:pPr>
-              <a:spcBef>
-                <a:spcPts val="200"/>
-              </a:spcBef>
-              <a:spcAft>
-                <a:spcPts val="300"/>
-              </a:spcAft>
-            </a:pPr>
-            <a:r>
-              <a:rPr sz="1500" b="0">
-                <a:solidFill>
-                  <a:srgbClr val="1E293B"/>
-                </a:solidFill>
-                <a:latin typeface="Times New Roman"/>
-              </a:rPr>
-              <a:t>•  Clean (Nominal): 99.98% Precision, 100% Detection Rate (Near-zero false alarms).</a:t>
-            </a:r>
-          </a:p>
-          <a:p>
-            <a:pPr>
-              <a:spcBef>
-                <a:spcPts val="200"/>
-              </a:spcBef>
-              <a:spcAft>
-                <a:spcPts val="300"/>
-              </a:spcAft>
-            </a:pPr>
-            <a:r>
-              <a:rPr sz="1500" b="0">
-                <a:solidFill>
-                  <a:srgbClr val="1E293B"/>
-                </a:solidFill>
-                <a:latin typeface="Times New Roman"/>
-              </a:rPr>
-              <a:t>•  Scratch: 99.92% Confidence with clear linear scratch isolation.</a:t>
-            </a:r>
-          </a:p>
-          <a:p>
-            <a:pPr>
-              <a:spcBef>
-                <a:spcPts val="200"/>
-              </a:spcBef>
-              <a:spcAft>
-                <a:spcPts val="300"/>
-              </a:spcAft>
-            </a:pPr>
-            <a:r>
-              <a:rPr sz="1500" b="0">
-                <a:solidFill>
-                  <a:srgbClr val="1E293B"/>
-                </a:solidFill>
-                <a:latin typeface="Times New Roman"/>
-              </a:rPr>
-              <a:t>•  Donut: 99.99% Confidence detecting radial thermal ring defects.</a:t>
-            </a:r>
-          </a:p>
-          <a:p>
-            <a:pPr>
-              <a:spcBef>
-                <a:spcPts val="200"/>
-              </a:spcBef>
-              <a:spcAft>
-                <a:spcPts val="300"/>
-              </a:spcAft>
-            </a:pPr>
-            <a:r>
-              <a:rPr sz="1500" b="0">
-                <a:solidFill>
-                  <a:srgbClr val="1E293B"/>
-                </a:solidFill>
-                <a:latin typeface="Times New Roman"/>
-              </a:rPr>
-              <a:t>•  Center Cluster: 98.01% Confidence detecting CMP slurry anomalies.</a:t>
-            </a:r>
-          </a:p>
-          <a:p>
-            <a:pPr>
-              <a:spcBef>
-                <a:spcPts val="200"/>
-              </a:spcBef>
-              <a:spcAft>
-                <a:spcPts val="300"/>
-              </a:spcAft>
-            </a:pPr>
-            <a:r>
-              <a:rPr sz="1500" b="0">
-                <a:solidFill>
-                  <a:srgbClr val="1E293B"/>
-                </a:solidFill>
-                <a:latin typeface="Times New Roman"/>
-              </a:rPr>
-              <a:t>•  Edge-Loc &amp; Loc: &gt;99.2% Confidence identifying localized clusters.</a:t>
-            </a:r>
+            <a:endParaRPr sz="2800" dirty="0">
+              <a:latin typeface="Times New Roman"/>
+              <a:ea typeface="Times New Roman"/>
+              <a:cs typeface="Times New Roman"/>
+              <a:sym typeface="Times New Roman"/>
+            </a:endParaRPr>
           </a:p>
         </p:txBody>
       </p:sp>
-      <p:pic>
-        <p:nvPicPr>
-          <p:cNvPr id="125" name="Google Shape;125;p3"/>
-          <p:cNvPicPr preferRelativeResize="0"/>
-          <p:nvPr/>
-        </p:nvPicPr>
-        <p:blipFill rotWithShape="1">
-          <a:blip r:embed="rId3">
-            <a:alphaModFix/>
-          </a:blip>
-          <a:srcRect l="15320" t="28789" r="16466" b="54857"/>
-          <a:stretch/>
-        </p:blipFill>
-        <p:spPr>
-          <a:xfrm>
-            <a:off x="155527" y="217182"/>
-            <a:ext cx="4521325" cy="812948"/>
-          </a:xfrm>
-          <a:prstGeom prst="rect">
-            <a:avLst/>
-          </a:prstGeom>
-          <a:noFill/>
-          <a:ln>
-            <a:noFill/>
-          </a:ln>
-        </p:spPr>
-      </p:pic>
-      <p:pic>
-        <p:nvPicPr>
-          <p:cNvPr id="126" name="Picture 125" descr="confusion_matrix.png"/>
-          <p:cNvPicPr>
-            <a:picLocks noChangeAspect="1"/>
-          </p:cNvPicPr>
-          <p:nvPr/>
-        </p:nvPicPr>
-        <p:blipFill>
-          <a:blip r:embed="rId4"/>
-          <a:stretch>
-            <a:fillRect/>
-          </a:stretch>
-        </p:blipFill>
-        <p:spPr>
-          <a:xfrm>
-            <a:off x="7132320" y="1920240"/>
-            <a:ext cx="4206240" cy="3840480"/>
-          </a:xfrm>
-          <a:prstGeom prst="rect">
-            <a:avLst/>
-          </a:prstGeom>
-        </p:spPr>
-      </p:pic>
     </p:spTree>
   </p:cSld>
   <p:clrMapOvr>
@@ -16871,785 +16463,6 @@
               <a:cs typeface="Calibri"/>
               <a:sym typeface="Calibri"/>
             </a:endParaRPr>
-          </a:p>
-        </p:txBody>
-      </p:sp>
-    </p:spTree>
-  </p:cSld>
-  <p:clrMapOvr>
-    <a:masterClrMapping/>
-  </p:clrMapOvr>
-</p:sld>
-</file>
-
-<file path=ppt/slides/slide14.xml><?xml version="1.0" encoding="utf-8"?>
-<p:sld xmlns:a="http://schemas.openxmlformats.org/drawingml/2006/main" xmlns:r="http://schemas.openxmlformats.org/officeDocument/2006/relationships" xmlns:p="http://schemas.openxmlformats.org/presentationml/2006/main">
-  <p:cSld>
-    <p:spTree>
-      <p:nvGrpSpPr>
-        <p:cNvPr id="1" name="Shape 381"/>
-        <p:cNvGrpSpPr/>
-        <p:nvPr/>
-      </p:nvGrpSpPr>
-      <p:grpSpPr>
-        <a:xfrm>
-          <a:off x="0" y="0"/>
-          <a:ext cx="0" cy="0"/>
-          <a:chOff x="0" y="0"/>
-          <a:chExt cx="0" cy="0"/>
-        </a:xfrm>
-      </p:grpSpPr>
-      <p:sp>
-        <p:nvSpPr>
-          <p:cNvPr id="382" name="Google Shape;382;p26"/>
-          <p:cNvSpPr txBox="1">
-            <a:spLocks noGrp="1"/>
-          </p:cNvSpPr>
-          <p:nvPr>
-            <p:ph type="title"/>
-          </p:nvPr>
-        </p:nvSpPr>
-        <p:spPr>
-          <a:xfrm>
-            <a:off x="680884" y="743804"/>
-            <a:ext cx="10515600" cy="1325700"/>
-          </a:xfrm>
-          <a:prstGeom prst="rect">
-            <a:avLst/>
-          </a:prstGeom>
-          <a:noFill/>
-          <a:ln>
-            <a:noFill/>
-          </a:ln>
-        </p:spPr>
-        <p:txBody>
-          <a:bodyPr spcFirstLastPara="1" wrap="square" lIns="91425" tIns="45700" rIns="91425" bIns="45700" anchor="ctr" anchorCtr="0">
-            <a:normAutofit/>
-          </a:bodyPr>
-          <a:lstStyle/>
-          <a:p>
-            <a:pPr marL="0" lvl="0" indent="0" algn="l" rtl="0">
-              <a:lnSpc>
-                <a:spcPct val="90000"/>
-              </a:lnSpc>
-              <a:spcBef>
-                <a:spcPts val="0"/>
-              </a:spcBef>
-              <a:spcAft>
-                <a:spcPts val="0"/>
-              </a:spcAft>
-              <a:buClr>
-                <a:schemeClr val="dk1"/>
-              </a:buClr>
-              <a:buSzPts val="3600"/>
-              <a:buFont typeface="Times New Roman"/>
-              <a:buNone/>
-            </a:pPr>
-            <a:r>
-              <a:rPr sz="3400" b="1">
-                <a:solidFill>
-                  <a:srgbClr val="0F172A"/>
-                </a:solidFill>
-                <a:latin typeface="Times New Roman"/>
-              </a:rPr>
-              <a:t>REFERENCES</a:t>
-            </a:r>
-            <a:endParaRPr b="1" dirty="0"/>
-          </a:p>
-        </p:txBody>
-      </p:sp>
-      <p:sp>
-        <p:nvSpPr>
-          <p:cNvPr id="384" name="Google Shape;384;p26"/>
-          <p:cNvSpPr txBox="1">
-            <a:spLocks noGrp="1"/>
-          </p:cNvSpPr>
-          <p:nvPr>
-            <p:ph type="sldNum" idx="12"/>
-          </p:nvPr>
-        </p:nvSpPr>
-        <p:spPr>
-          <a:xfrm>
-            <a:off x="8610600" y="6356350"/>
-            <a:ext cx="2743200" cy="365100"/>
-          </a:xfrm>
-          <a:prstGeom prst="rect">
-            <a:avLst/>
-          </a:prstGeom>
-          <a:noFill/>
-          <a:ln>
-            <a:noFill/>
-          </a:ln>
-        </p:spPr>
-        <p:txBody>
-          <a:bodyPr spcFirstLastPara="1" wrap="square" lIns="91425" tIns="45700" rIns="91425" bIns="45700" anchor="ctr" anchorCtr="0">
-            <a:noAutofit/>
-          </a:bodyPr>
-          <a:lstStyle/>
-          <a:p>
-            <a:pPr marL="0" lvl="0" indent="0" algn="r" rtl="0">
-              <a:spcBef>
-                <a:spcPts val="0"/>
-              </a:spcBef>
-              <a:spcAft>
-                <a:spcPts val="0"/>
-              </a:spcAft>
-              <a:buNone/>
-            </a:pPr>
-            <a:r>
-              <a:rPr sz="1800" b="1">
-                <a:solidFill>
-                  <a:srgbClr val="0F172A"/>
-                </a:solidFill>
-                <a:latin typeface="Times New Roman"/>
-              </a:rPr>
-              <a:t>10</a:t>
-            </a:r>
-            <a:endParaRPr/>
-          </a:p>
-        </p:txBody>
-      </p:sp>
-      <p:pic>
-        <p:nvPicPr>
-          <p:cNvPr id="385" name="Google Shape;385;p26"/>
-          <p:cNvPicPr preferRelativeResize="0"/>
-          <p:nvPr/>
-        </p:nvPicPr>
-        <p:blipFill rotWithShape="1">
-          <a:blip r:embed="rId2">
-            <a:alphaModFix/>
-          </a:blip>
-          <a:srcRect/>
-          <a:stretch/>
-        </p:blipFill>
-        <p:spPr>
-          <a:xfrm>
-            <a:off x="159971" y="211556"/>
-            <a:ext cx="4517529" cy="810838"/>
-          </a:xfrm>
-          <a:prstGeom prst="rect">
-            <a:avLst/>
-          </a:prstGeom>
-          <a:noFill/>
-          <a:ln>
-            <a:noFill/>
-          </a:ln>
-        </p:spPr>
-      </p:pic>
-      <p:pic>
-        <p:nvPicPr>
-          <p:cNvPr id="386" name="Google Shape;386;p26"/>
-          <p:cNvPicPr preferRelativeResize="0"/>
-          <p:nvPr/>
-        </p:nvPicPr>
-        <p:blipFill rotWithShape="1">
-          <a:blip r:embed="rId3">
-            <a:alphaModFix/>
-          </a:blip>
-          <a:srcRect/>
-          <a:stretch/>
-        </p:blipFill>
-        <p:spPr>
-          <a:xfrm>
-            <a:off x="11072819" y="154753"/>
-            <a:ext cx="816174" cy="930568"/>
-          </a:xfrm>
-          <a:prstGeom prst="rect">
-            <a:avLst/>
-          </a:prstGeom>
-          <a:noFill/>
-          <a:ln>
-            <a:noFill/>
-          </a:ln>
-        </p:spPr>
-      </p:pic>
-      <p:sp>
-        <p:nvSpPr>
-          <p:cNvPr id="387" name="Google Shape;387;p26"/>
-          <p:cNvSpPr/>
-          <p:nvPr/>
-        </p:nvSpPr>
-        <p:spPr>
-          <a:xfrm>
-            <a:off x="0" y="6407689"/>
-            <a:ext cx="7684389" cy="461665"/>
-          </a:xfrm>
-          <a:custGeom>
-            <a:avLst/>
-            <a:gdLst/>
-            <a:ahLst/>
-            <a:cxnLst/>
-            <a:rect l="l" t="t" r="r" b="b"/>
-            <a:pathLst>
-              <a:path w="6172200" h="369332" extrusionOk="0">
-                <a:moveTo>
-                  <a:pt x="0" y="0"/>
-                </a:moveTo>
-                <a:lnTo>
-                  <a:pt x="5791200" y="0"/>
-                </a:lnTo>
-                <a:lnTo>
-                  <a:pt x="6172200" y="369332"/>
-                </a:lnTo>
-                <a:lnTo>
-                  <a:pt x="0" y="369332"/>
-                </a:lnTo>
-                <a:lnTo>
-                  <a:pt x="0" y="0"/>
-                </a:lnTo>
-                <a:close/>
-              </a:path>
-            </a:pathLst>
-          </a:custGeom>
-          <a:solidFill>
-            <a:schemeClr val="accent1"/>
-          </a:solidFill>
-          <a:ln>
-            <a:noFill/>
-          </a:ln>
-        </p:spPr>
-        <p:txBody>
-          <a:bodyPr spcFirstLastPara="1" wrap="square" lIns="91425" tIns="45700" rIns="91425" bIns="45700" anchor="t" anchorCtr="0">
-            <a:spAutoFit/>
-          </a:bodyPr>
-          <a:lstStyle/>
-          <a:p>
-            <a:pPr marL="0" marR="0" lvl="0" indent="0" algn="ctr" rtl="0">
-              <a:spcBef>
-                <a:spcPts val="0"/>
-              </a:spcBef>
-              <a:spcAft>
-                <a:spcPts val="0"/>
-              </a:spcAft>
-              <a:buClr>
-                <a:schemeClr val="lt1"/>
-              </a:buClr>
-              <a:buSzPts val="2400"/>
-              <a:buFont typeface="Gill Sans"/>
-              <a:buNone/>
-            </a:pPr>
-            <a:r>
-              <a:rPr lang="en-US" sz="2400">
-                <a:solidFill>
-                  <a:schemeClr val="lt1"/>
-                </a:solidFill>
-                <a:latin typeface="Gill Sans"/>
-                <a:ea typeface="Gill Sans"/>
-                <a:cs typeface="Gill Sans"/>
-                <a:sym typeface="Gill Sans"/>
-              </a:rPr>
-              <a:t>LEARN . GROW . EXCEL</a:t>
-            </a:r>
-            <a:endParaRPr sz="1800">
-              <a:solidFill>
-                <a:schemeClr val="dk1"/>
-              </a:solidFill>
-              <a:latin typeface="Calibri"/>
-              <a:ea typeface="Calibri"/>
-              <a:cs typeface="Calibri"/>
-              <a:sym typeface="Calibri"/>
-            </a:endParaRPr>
-          </a:p>
-        </p:txBody>
-      </p:sp>
-      <p:sp>
-        <p:nvSpPr>
-          <p:cNvPr id="388" name="TextBox 387"/>
-          <p:cNvSpPr txBox="1"/>
-          <p:nvPr/>
-        </p:nvSpPr>
-        <p:spPr>
-          <a:xfrm>
-            <a:off x="731520" y="1920240"/>
-            <a:ext cx="10698480" cy="4114800"/>
-          </a:xfrm>
-          <a:prstGeom prst="rect">
-            <a:avLst/>
-          </a:prstGeom>
-          <a:noFill/>
-        </p:spPr>
-        <p:txBody>
-          <a:bodyPr wrap="square">
-            <a:spAutoFit/>
-          </a:bodyPr>
-          <a:lstStyle/>
-          <a:p>
-            <a:pPr>
-              <a:spcBef>
-                <a:spcPts val="200"/>
-              </a:spcBef>
-              <a:spcAft>
-                <a:spcPts val="400"/>
-              </a:spcAft>
-            </a:pPr>
-            <a:r>
-              <a:rPr sz="1800" b="0">
-                <a:solidFill>
-                  <a:srgbClr val="1E293B"/>
-                </a:solidFill>
-                <a:latin typeface="Times New Roman"/>
-              </a:rPr>
-              <a:t>•  1. M.-J. Wu, J.-S. R. Jang, and J.-L. Chen, 'Wafer map failure pattern recognition and similarity ranking for large-scale semiconductor manufacturing,' IEEE Transactions on Semiconductor Manufacturing, vol. 28, no. 1, pp. 1–12, 2015.</a:t>
-            </a:r>
-          </a:p>
-          <a:p>
-            <a:pPr>
-              <a:spcBef>
-                <a:spcPts val="200"/>
-              </a:spcBef>
-              <a:spcAft>
-                <a:spcPts val="400"/>
-              </a:spcAft>
-            </a:pPr>
-            <a:r>
-              <a:rPr sz="1800" b="0">
-                <a:solidFill>
-                  <a:srgbClr val="1E293B"/>
-                </a:solidFill>
-                <a:latin typeface="Times New Roman"/>
-              </a:rPr>
-              <a:t>•  2. A. Howard, M. Sandler, G. Chu, L.-C. Chen, B. Chen, M. Tan, W. Wang, Y. Zhu, R. Pang, V. Vasudevan et al., 'Searching for MobileNetV3,' in Proceedings of the IEEE/CVF International Conference on Computer Vision (ICCV), 2019, pp. 1314–1324.</a:t>
-            </a:r>
-          </a:p>
-          <a:p>
-            <a:pPr>
-              <a:spcBef>
-                <a:spcPts val="200"/>
-              </a:spcBef>
-              <a:spcAft>
-                <a:spcPts val="400"/>
-              </a:spcAft>
-            </a:pPr>
-            <a:r>
-              <a:rPr sz="1800" b="0">
-                <a:solidFill>
-                  <a:srgbClr val="1E293B"/>
-                </a:solidFill>
-                <a:latin typeface="Times New Roman"/>
-              </a:rPr>
-              <a:t>•  3. T. Nakazawa and D. V. Kulkarni, 'Wafer map defect pattern classification and retrieval using convolutional neural networks,' IEEE Transactions on Semiconductor Manufacturing, vol. 31, no. 2, pp. 309–314, 2018.</a:t>
-            </a:r>
-          </a:p>
-          <a:p>
-            <a:pPr>
-              <a:spcBef>
-                <a:spcPts val="200"/>
-              </a:spcBef>
-              <a:spcAft>
-                <a:spcPts val="400"/>
-              </a:spcAft>
-            </a:pPr>
-            <a:r>
-              <a:rPr sz="1800" b="0">
-                <a:solidFill>
-                  <a:srgbClr val="1E293B"/>
-                </a:solidFill>
-                <a:latin typeface="Times New Roman"/>
-              </a:rPr>
-              <a:t>•  4. S. Cheon, H. Lee, C. O. Kim, and S. H. Lee, 'Convolutional neural network for wafer surface defect classification and the detection of unknown defect classes,' IEEE Transactions on Semiconductor Manufacturing, vol. 32, no. 2, pp. 163–170, 2019.</a:t>
-            </a:r>
-          </a:p>
-          <a:p>
-            <a:pPr>
-              <a:spcBef>
-                <a:spcPts val="200"/>
-              </a:spcBef>
-              <a:spcAft>
-                <a:spcPts val="400"/>
-              </a:spcAft>
-            </a:pPr>
-            <a:r>
-              <a:rPr sz="1800" b="0">
-                <a:solidFill>
-                  <a:srgbClr val="1E293B"/>
-                </a:solidFill>
-                <a:latin typeface="Times New Roman"/>
-              </a:rPr>
-              <a:t>•  5. ONNX Runtime Developers, 'ONNX Runtime: Cross-platform, high performance ML inferencing and training accelerator,' Linux Foundation / Microsoft, 2024. [Online]. Available: https://onnxruntime.ai</a:t>
-            </a:r>
-          </a:p>
-        </p:txBody>
-      </p:sp>
-    </p:spTree>
-  </p:cSld>
-  <p:clrMapOvr>
-    <a:masterClrMapping/>
-  </p:clrMapOvr>
-</p:sld>
-</file>
-
-<file path=ppt/slides/slide15.xml><?xml version="1.0" encoding="utf-8"?>
-<p:sld xmlns:a="http://schemas.openxmlformats.org/drawingml/2006/main" xmlns:r="http://schemas.openxmlformats.org/officeDocument/2006/relationships" xmlns:p="http://schemas.openxmlformats.org/presentationml/2006/main">
-  <p:cSld>
-    <p:spTree>
-      <p:nvGrpSpPr>
-        <p:cNvPr id="1" name="Shape 391"/>
-        <p:cNvGrpSpPr/>
-        <p:nvPr/>
-      </p:nvGrpSpPr>
-      <p:grpSpPr>
-        <a:xfrm>
-          <a:off x="0" y="0"/>
-          <a:ext cx="0" cy="0"/>
-          <a:chOff x="0" y="0"/>
-          <a:chExt cx="0" cy="0"/>
-        </a:xfrm>
-      </p:grpSpPr>
-      <p:sp>
-        <p:nvSpPr>
-          <p:cNvPr id="392" name="Google Shape;392;p27"/>
-          <p:cNvSpPr txBox="1">
-            <a:spLocks noGrp="1"/>
-          </p:cNvSpPr>
-          <p:nvPr>
-            <p:ph type="sldNum" idx="12"/>
-          </p:nvPr>
-        </p:nvSpPr>
-        <p:spPr>
-          <a:xfrm>
-            <a:off x="8610600" y="6356350"/>
-            <a:ext cx="2743200" cy="365100"/>
-          </a:xfrm>
-          <a:prstGeom prst="rect">
-            <a:avLst/>
-          </a:prstGeom>
-          <a:noFill/>
-          <a:ln>
-            <a:noFill/>
-          </a:ln>
-        </p:spPr>
-        <p:txBody>
-          <a:bodyPr spcFirstLastPara="1" wrap="square" lIns="91425" tIns="45700" rIns="91425" bIns="45700" anchor="ctr" anchorCtr="0">
-            <a:noAutofit/>
-          </a:bodyPr>
-          <a:lstStyle/>
-          <a:p>
-            <a:pPr marL="0" lvl="0" indent="0" algn="r" rtl="0">
-              <a:spcBef>
-                <a:spcPts val="0"/>
-              </a:spcBef>
-              <a:spcAft>
-                <a:spcPts val="0"/>
-              </a:spcAft>
-              <a:buNone/>
-            </a:pPr>
-            <a:r>
-              <a:rPr sz="1800" b="1">
-                <a:solidFill>
-                  <a:srgbClr val="0F172A"/>
-                </a:solidFill>
-                <a:latin typeface="Times New Roman"/>
-              </a:rPr>
-              <a:t>11</a:t>
-            </a:r>
-            <a:endParaRPr/>
-          </a:p>
-        </p:txBody>
-      </p:sp>
-      <p:pic>
-        <p:nvPicPr>
-          <p:cNvPr id="393" name="Google Shape;393;p27"/>
-          <p:cNvPicPr preferRelativeResize="0"/>
-          <p:nvPr/>
-        </p:nvPicPr>
-        <p:blipFill rotWithShape="1">
-          <a:blip r:embed="rId2">
-            <a:alphaModFix/>
-          </a:blip>
-          <a:srcRect/>
-          <a:stretch/>
-        </p:blipFill>
-        <p:spPr>
-          <a:xfrm>
-            <a:off x="159971" y="211556"/>
-            <a:ext cx="4517529" cy="810838"/>
-          </a:xfrm>
-          <a:prstGeom prst="rect">
-            <a:avLst/>
-          </a:prstGeom>
-          <a:noFill/>
-          <a:ln>
-            <a:noFill/>
-          </a:ln>
-        </p:spPr>
-      </p:pic>
-      <p:pic>
-        <p:nvPicPr>
-          <p:cNvPr id="394" name="Google Shape;394;p27"/>
-          <p:cNvPicPr preferRelativeResize="0"/>
-          <p:nvPr/>
-        </p:nvPicPr>
-        <p:blipFill rotWithShape="1">
-          <a:blip r:embed="rId3">
-            <a:alphaModFix/>
-          </a:blip>
-          <a:srcRect/>
-          <a:stretch/>
-        </p:blipFill>
-        <p:spPr>
-          <a:xfrm>
-            <a:off x="11072819" y="154753"/>
-            <a:ext cx="816174" cy="930568"/>
-          </a:xfrm>
-          <a:prstGeom prst="rect">
-            <a:avLst/>
-          </a:prstGeom>
-          <a:noFill/>
-          <a:ln>
-            <a:noFill/>
-          </a:ln>
-        </p:spPr>
-      </p:pic>
-      <p:sp>
-        <p:nvSpPr>
-          <p:cNvPr id="395" name="Google Shape;395;p27"/>
-          <p:cNvSpPr/>
-          <p:nvPr/>
-        </p:nvSpPr>
-        <p:spPr>
-          <a:xfrm>
-            <a:off x="0" y="6407689"/>
-            <a:ext cx="7684389" cy="461665"/>
-          </a:xfrm>
-          <a:custGeom>
-            <a:avLst/>
-            <a:gdLst/>
-            <a:ahLst/>
-            <a:cxnLst/>
-            <a:rect l="l" t="t" r="r" b="b"/>
-            <a:pathLst>
-              <a:path w="6172200" h="369332" extrusionOk="0">
-                <a:moveTo>
-                  <a:pt x="0" y="0"/>
-                </a:moveTo>
-                <a:lnTo>
-                  <a:pt x="5791200" y="0"/>
-                </a:lnTo>
-                <a:lnTo>
-                  <a:pt x="6172200" y="369332"/>
-                </a:lnTo>
-                <a:lnTo>
-                  <a:pt x="0" y="369332"/>
-                </a:lnTo>
-                <a:lnTo>
-                  <a:pt x="0" y="0"/>
-                </a:lnTo>
-                <a:close/>
-              </a:path>
-            </a:pathLst>
-          </a:custGeom>
-          <a:solidFill>
-            <a:schemeClr val="accent1"/>
-          </a:solidFill>
-          <a:ln>
-            <a:noFill/>
-          </a:ln>
-        </p:spPr>
-        <p:txBody>
-          <a:bodyPr spcFirstLastPara="1" wrap="square" lIns="91425" tIns="45700" rIns="91425" bIns="45700" anchor="t" anchorCtr="0">
-            <a:spAutoFit/>
-          </a:bodyPr>
-          <a:lstStyle/>
-          <a:p>
-            <a:pPr marL="0" marR="0" lvl="0" indent="0" algn="ctr" rtl="0">
-              <a:spcBef>
-                <a:spcPts val="0"/>
-              </a:spcBef>
-              <a:spcAft>
-                <a:spcPts val="0"/>
-              </a:spcAft>
-              <a:buClr>
-                <a:schemeClr val="lt1"/>
-              </a:buClr>
-              <a:buSzPts val="2400"/>
-              <a:buFont typeface="Gill Sans"/>
-              <a:buNone/>
-            </a:pPr>
-            <a:r>
-              <a:rPr lang="en-US" sz="2400">
-                <a:solidFill>
-                  <a:schemeClr val="lt1"/>
-                </a:solidFill>
-                <a:latin typeface="Gill Sans"/>
-                <a:ea typeface="Gill Sans"/>
-                <a:cs typeface="Gill Sans"/>
-                <a:sym typeface="Gill Sans"/>
-              </a:rPr>
-              <a:t>LEARN . GROW . EXCEL</a:t>
-            </a:r>
-            <a:endParaRPr sz="1800">
-              <a:solidFill>
-                <a:schemeClr val="dk1"/>
-              </a:solidFill>
-              <a:latin typeface="Calibri"/>
-              <a:ea typeface="Calibri"/>
-              <a:cs typeface="Calibri"/>
-              <a:sym typeface="Calibri"/>
-            </a:endParaRPr>
-          </a:p>
-        </p:txBody>
-      </p:sp>
-      <p:sp>
-        <p:nvSpPr>
-          <p:cNvPr id="396" name="Google Shape;396;p27"/>
-          <p:cNvSpPr txBox="1">
-            <a:spLocks noGrp="1"/>
-          </p:cNvSpPr>
-          <p:nvPr>
-            <p:ph type="title"/>
-          </p:nvPr>
-        </p:nvSpPr>
-        <p:spPr>
-          <a:xfrm>
-            <a:off x="754224" y="2665957"/>
-            <a:ext cx="10515600" cy="1325700"/>
-          </a:xfrm>
-          <a:prstGeom prst="rect">
-            <a:avLst/>
-          </a:prstGeom>
-          <a:noFill/>
-          <a:ln>
-            <a:noFill/>
-          </a:ln>
-        </p:spPr>
-        <p:txBody>
-          <a:bodyPr spcFirstLastPara="1" wrap="square" lIns="91425" tIns="45700" rIns="91425" bIns="45700" anchor="ctr" anchorCtr="0">
-            <a:normAutofit/>
-          </a:bodyPr>
-          <a:lstStyle/>
-          <a:p>
-            <a:pPr marL="0" lvl="0" indent="0" algn="ctr" rtl="0">
-              <a:lnSpc>
-                <a:spcPct val="90000"/>
-              </a:lnSpc>
-              <a:spcBef>
-                <a:spcPts val="0"/>
-              </a:spcBef>
-              <a:spcAft>
-                <a:spcPts val="0"/>
-              </a:spcAft>
-              <a:buClr>
-                <a:schemeClr val="dk1"/>
-              </a:buClr>
-              <a:buSzPts val="4400"/>
-              <a:buFont typeface="Times New Roman"/>
-              <a:buNone/>
-            </a:pPr>
-            <a:r>
-              <a:rPr sz="5400" b="1">
-                <a:solidFill>
-                  <a:srgbClr val="0F172A"/>
-                </a:solidFill>
-                <a:latin typeface="Times New Roman"/>
-              </a:rPr>
-              <a:t>THANK YOU</a:t>
-            </a:r>
-            <a:endParaRPr i="1">
-              <a:latin typeface="Times New Roman"/>
-              <a:ea typeface="Times New Roman"/>
-              <a:cs typeface="Times New Roman"/>
-              <a:sym typeface="Times New Roman"/>
-            </a:endParaRPr>
-          </a:p>
-        </p:txBody>
-      </p:sp>
-      <p:sp>
-        <p:nvSpPr>
-          <p:cNvPr id="397" name="Questions Subtitle"/>
-          <p:cNvSpPr txBox="1"/>
-          <p:nvPr/>
-        </p:nvSpPr>
-        <p:spPr>
-          <a:xfrm>
-            <a:off x="754224" y="4000000"/>
-            <a:ext cx="10515600" cy="700000"/>
-          </a:xfrm>
-          <a:prstGeom prst="rect">
-            <a:avLst/>
-          </a:prstGeom>
-          <a:noFill/>
-          <a:ln>
-            <a:noFill/>
-          </a:ln>
-        </p:spPr>
-        <p:txBody>
-          <a:bodyPr spcFirstLastPara="1" wrap="square" lIns="91425" tIns="45700" rIns="91425" bIns="45700" anchor="t" anchorCtr="0">
-            <a:normAutofit/>
-          </a:bodyPr>
-          <a:lstStyle/>
-          <a:p>
-            <a:pPr marL="0" lvl="0" indent="0" algn="ctr" rtl="0">
-              <a:spcBef>
-                <a:spcPts val="0"/>
-              </a:spcBef>
-              <a:buNone/>
-            </a:pPr>
-            <a:r>
-              <a:rPr sz="2600" b="1">
-                <a:solidFill>
-                  <a:srgbClr val="0284C7"/>
-                </a:solidFill>
-                <a:latin typeface="Times New Roman"/>
-              </a:rPr>
-              <a:t>Questions &amp; Discussion</a:t>
-            </a:r>
-            <a:endParaRPr sz="2800" dirty="0">
-              <a:latin typeface="Times New Roman"/>
-              <a:ea typeface="Times New Roman"/>
-              <a:cs typeface="Times New Roman"/>
-              <a:sym typeface="Times New Roman"/>
-            </a:endParaRPr>
-          </a:p>
-          <a:p>
-            <a:pPr algn="ctr"/>
-          </a:p>
-          <a:p>
-            <a:pPr algn="ctr"/>
-            <a:r>
-              <a:rPr sz="2000" b="1">
-                <a:solidFill>
-                  <a:srgbClr val="0F172A"/>
-                </a:solidFill>
-                <a:latin typeface="Times New Roman"/>
-              </a:rPr>
-              <a:t>Automated Semiconductor Wafer Defect Inspection System</a:t>
-            </a:r>
-          </a:p>
-          <a:p>
-            <a:pPr algn="ctr"/>
-            <a:r>
-              <a:rPr sz="1600" b="0">
-                <a:solidFill>
-                  <a:srgbClr val="1E293B"/>
-                </a:solidFill>
-                <a:latin typeface="Times New Roman"/>
-              </a:rPr>
-              <a:t>B.Tech Mini Project Final Internal Review • Saintgits College of Engineering (Autonomous)</a:t>
-            </a:r>
-          </a:p>
-          <a:p>
-            <a:pPr algn="ctr"/>
-            <a:r>
-              <a:rPr sz="1600" b="0">
-                <a:solidFill>
-                  <a:srgbClr val="1E293B"/>
-                </a:solidFill>
-                <a:latin typeface="Times New Roman"/>
-              </a:rPr>
-              <a:t>Team: Adithyan B • Anna Boban • Noopa Maria Rojan</a:t>
-            </a:r>
-          </a:p>
-          <a:p>
-            <a:pPr algn="ctr"/>
-            <a:r>
-              <a:rPr sz="1600" b="0">
-                <a:solidFill>
-                  <a:srgbClr val="1E293B"/>
-                </a:solidFill>
-                <a:latin typeface="Times New Roman"/>
-              </a:rPr>
-              <a:t>Supervisor: Er. Justin Mathew, Assistant Professor, Dept. of ECE</a:t>
-            </a:r>
           </a:p>
         </p:txBody>
       </p:sp>
@@ -21371,10 +20184,15 @@
               </a:spcAft>
               <a:buNone/>
             </a:pPr>
-            <a:fld id="{00000000-1234-1234-1234-123412341234}" type="slidenum">
-              <a:rPr lang="en-US"/>
+            <a:r>
+              <a:rPr sz="1800" b="1">
+                <a:solidFill>
+                  <a:srgbClr val="0F172A"/>
+                </a:solidFill>
+                <a:latin typeface="Times New Roman"/>
+              </a:rPr>
               <a:t>8</a:t>
-            </a:fld>
+            </a:r>
             <a:endParaRPr/>
           </a:p>
         </p:txBody>
@@ -21542,34 +20360,13 @@
               <a:buNone/>
             </a:pPr>
             <a:r>
-              <a:rPr lang="en-US" sz="4000" dirty="0">
-                <a:solidFill>
-                  <a:srgbClr val="181C24"/>
-                </a:solidFill>
-                <a:highlight>
-                  <a:srgbClr val="FFFFFF"/>
-                </a:highlight>
+              <a:rPr sz="3400" b="1">
+                <a:solidFill>
+                  <a:srgbClr val="0F172A"/>
+                </a:solidFill>
                 <a:latin typeface="Times New Roman"/>
-                <a:ea typeface="Times New Roman"/>
-                <a:cs typeface="Times New Roman"/>
-                <a:sym typeface="Times New Roman"/>
               </a:rPr>
-              <a:t> </a:t>
-            </a:r>
-            <a:r>
-              <a:rPr lang="en-US" sz="3600" b="1" dirty="0">
-                <a:solidFill>
-                  <a:srgbClr val="181C24"/>
-                </a:solidFill>
-                <a:highlight>
-                  <a:srgbClr val="FFFFFF"/>
-                </a:highlight>
-                <a:latin typeface="Times New Roman"/>
-                <a:ea typeface="Times New Roman"/>
-                <a:cs typeface="Times New Roman"/>
-                <a:sym typeface="Times New Roman"/>
-              </a:rPr>
-              <a:t>NOVELTY OF THE PROJECT</a:t>
+              <a:t>METHODOLOGY &amp; WORKFLOW</a:t>
             </a:r>
             <a:endParaRPr sz="3600" b="1" dirty="0">
               <a:latin typeface="Times New Roman"/>
@@ -21577,6 +20374,665 @@
               <a:cs typeface="Times New Roman"/>
               <a:sym typeface="Times New Roman"/>
             </a:endParaRPr>
+          </a:p>
+        </p:txBody>
+      </p:sp>
+      <p:sp>
+        <p:nvSpPr>
+          <p:cNvPr id="124" name="Google Shape;124;p3"/>
+          <p:cNvSpPr txBox="1">
+            <a:spLocks noGrp="1"/>
+          </p:cNvSpPr>
+          <p:nvPr>
+            <p:ph type="subTitle" idx="1"/>
+          </p:nvPr>
+        </p:nvSpPr>
+        <p:spPr>
+          <a:xfrm>
+            <a:off x="731520" y="1920240"/>
+            <a:ext cx="10698480" cy="4114800"/>
+          </a:xfrm>
+          <a:prstGeom prst="rect">
+            <a:avLst/>
+          </a:prstGeom>
+          <a:noFill/>
+          <a:ln>
+            <a:noFill/>
+          </a:ln>
+        </p:spPr>
+        <p:txBody>
+          <a:bodyPr spcFirstLastPara="1" wrap="square" lIns="91425" tIns="45700" rIns="91425" bIns="45700" anchor="t" anchorCtr="0">
+            <a:normAutofit/>
+          </a:bodyPr>
+          <a:lstStyle/>
+          <a:p>
+            <a:pPr marL="342900" lvl="0" indent="-342900" algn="l">
+              <a:lnSpc>
+                <a:spcPct val="100000"/>
+              </a:lnSpc>
+              <a:spcBef>
+                <a:spcPts val="800"/>
+              </a:spcBef>
+              <a:spcAft>
+                <a:spcPts val="200"/>
+              </a:spcAft>
+              <a:buSzPts val="2600"/>
+              <a:buFont typeface="Noto Sans Symbols"/>
+              <a:buChar char="⮪"/>
+            </a:pPr>
+            <a:r>
+              <a:rPr sz="2200" b="1">
+                <a:solidFill>
+                  <a:srgbClr val="0284C7"/>
+                </a:solidFill>
+                <a:latin typeface="Times New Roman"/>
+              </a:rPr>
+              <a:t>Phase 1: Dataset Curation &amp; Preprocessing</a:t>
+            </a:r>
+          </a:p>
+          <a:p>
+            <a:pPr>
+              <a:spcBef>
+                <a:spcPts val="200"/>
+              </a:spcBef>
+              <a:spcAft>
+                <a:spcPts val="400"/>
+              </a:spcAft>
+            </a:pPr>
+            <a:r>
+              <a:rPr sz="1800" b="0">
+                <a:solidFill>
+                  <a:srgbClr val="1E293B"/>
+                </a:solidFill>
+                <a:latin typeface="Times New Roman"/>
+              </a:rPr>
+              <a:t>•  Extracted wafer maps from the WM-811K benchmark; performed spatial bicubic/nearest resizing to 224x224 and tensor normalization (ImageNet mean &amp; std).</a:t>
+            </a:r>
+          </a:p>
+          <a:p>
+            <a:pPr>
+              <a:spcBef>
+                <a:spcPts val="800"/>
+              </a:spcBef>
+              <a:spcAft>
+                <a:spcPts val="200"/>
+              </a:spcAft>
+            </a:pPr>
+            <a:r>
+              <a:rPr sz="2200" b="1">
+                <a:solidFill>
+                  <a:srgbClr val="0284C7"/>
+                </a:solidFill>
+                <a:latin typeface="Times New Roman"/>
+              </a:rPr>
+              <a:t>Phase 2: Transfer Learning &amp; Model Fine-Tuning</a:t>
+            </a:r>
+          </a:p>
+          <a:p>
+            <a:pPr>
+              <a:spcBef>
+                <a:spcPts val="200"/>
+              </a:spcBef>
+              <a:spcAft>
+                <a:spcPts val="400"/>
+              </a:spcAft>
+            </a:pPr>
+            <a:r>
+              <a:rPr sz="1800" b="0">
+                <a:solidFill>
+                  <a:srgbClr val="1E293B"/>
+                </a:solidFill>
+                <a:latin typeface="Times New Roman"/>
+              </a:rPr>
+              <a:t>•  Utilized pre-trained MobileNetV3-Small backbone with inverted residual bottlenecks and Hard-Swish activations; replaced the classification head with an 8-output linear layer.</a:t>
+            </a:r>
+          </a:p>
+          <a:p>
+            <a:pPr>
+              <a:spcBef>
+                <a:spcPts val="800"/>
+              </a:spcBef>
+              <a:spcAft>
+                <a:spcPts val="200"/>
+              </a:spcAft>
+            </a:pPr>
+            <a:r>
+              <a:rPr sz="2200" b="1">
+                <a:solidFill>
+                  <a:srgbClr val="0284C7"/>
+                </a:solidFill>
+                <a:latin typeface="Times New Roman"/>
+              </a:rPr>
+              <a:t>Phase 3: Training &amp; Regularization Pipeline</a:t>
+            </a:r>
+          </a:p>
+          <a:p>
+            <a:pPr>
+              <a:spcBef>
+                <a:spcPts val="200"/>
+              </a:spcBef>
+              <a:spcAft>
+                <a:spcPts val="400"/>
+              </a:spcAft>
+            </a:pPr>
+            <a:r>
+              <a:rPr sz="1800" b="0">
+                <a:solidFill>
+                  <a:srgbClr val="1E293B"/>
+                </a:solidFill>
+                <a:latin typeface="Times New Roman"/>
+              </a:rPr>
+              <a:t>•  Trained using Adam optimizer, cross-entropy loss, dropout regularization (p=0.2), and early stopping to prevent overfitting on majority classes.</a:t>
+            </a:r>
+          </a:p>
+          <a:p>
+            <a:pPr>
+              <a:spcBef>
+                <a:spcPts val="800"/>
+              </a:spcBef>
+              <a:spcAft>
+                <a:spcPts val="200"/>
+              </a:spcAft>
+            </a:pPr>
+            <a:r>
+              <a:rPr sz="2200" b="1">
+                <a:solidFill>
+                  <a:srgbClr val="0284C7"/>
+                </a:solidFill>
+                <a:latin typeface="Times New Roman"/>
+              </a:rPr>
+              <a:t>Phase 4: ONNX Compilation &amp; Edge Integration</a:t>
+            </a:r>
+          </a:p>
+          <a:p>
+            <a:pPr>
+              <a:spcBef>
+                <a:spcPts val="200"/>
+              </a:spcBef>
+              <a:spcAft>
+                <a:spcPts val="400"/>
+              </a:spcAft>
+            </a:pPr>
+            <a:r>
+              <a:rPr sz="1800" b="0">
+                <a:solidFill>
+                  <a:srgbClr val="1E293B"/>
+                </a:solidFill>
+                <a:latin typeface="Times New Roman"/>
+              </a:rPr>
+              <a:t>•  Exported PyTorch computational graph to ONNX with CPU graph optimizations; integrated into a high-concurrency Python REST server and interactive web visualizer.</a:t>
+            </a:r>
+          </a:p>
+        </p:txBody>
+      </p:sp>
+      <p:pic>
+        <p:nvPicPr>
+          <p:cNvPr id="125" name="Google Shape;125;p3"/>
+          <p:cNvPicPr preferRelativeResize="0"/>
+          <p:nvPr/>
+        </p:nvPicPr>
+        <p:blipFill rotWithShape="1">
+          <a:blip r:embed="rId3">
+            <a:alphaModFix/>
+          </a:blip>
+          <a:srcRect l="15320" t="28789" r="16466" b="54857"/>
+          <a:stretch/>
+        </p:blipFill>
+        <p:spPr>
+          <a:xfrm>
+            <a:off x="155527" y="217182"/>
+            <a:ext cx="4521325" cy="812948"/>
+          </a:xfrm>
+          <a:prstGeom prst="rect">
+            <a:avLst/>
+          </a:prstGeom>
+          <a:noFill/>
+          <a:ln>
+            <a:noFill/>
+          </a:ln>
+        </p:spPr>
+      </p:pic>
+    </p:spTree>
+  </p:cSld>
+  <p:clrMapOvr>
+    <a:masterClrMapping/>
+  </p:clrMapOvr>
+</p:sld>
+</file>
+
+<file path=ppt/slides/slide8.xml><?xml version="1.0" encoding="utf-8"?>
+<p:sld xmlns:a="http://schemas.openxmlformats.org/drawingml/2006/main" xmlns:r="http://schemas.openxmlformats.org/officeDocument/2006/relationships" xmlns:p="http://schemas.openxmlformats.org/presentationml/2006/main">
+  <p:cSld>
+    <p:spTree>
+      <p:nvGrpSpPr>
+        <p:cNvPr id="1" name="Shape 119"/>
+        <p:cNvGrpSpPr/>
+        <p:nvPr/>
+      </p:nvGrpSpPr>
+      <p:grpSpPr>
+        <a:xfrm>
+          <a:off x="0" y="0"/>
+          <a:ext cx="0" cy="0"/>
+          <a:chOff x="0" y="0"/>
+          <a:chExt cx="0" cy="0"/>
+        </a:xfrm>
+      </p:grpSpPr>
+      <p:sp>
+        <p:nvSpPr>
+          <p:cNvPr id="120" name="Google Shape;120;p3"/>
+          <p:cNvSpPr txBox="1">
+            <a:spLocks noGrp="1"/>
+          </p:cNvSpPr>
+          <p:nvPr>
+            <p:ph type="sldNum" idx="12"/>
+          </p:nvPr>
+        </p:nvSpPr>
+        <p:spPr>
+          <a:xfrm>
+            <a:off x="8610600" y="6356350"/>
+            <a:ext cx="2743200" cy="365100"/>
+          </a:xfrm>
+          <a:prstGeom prst="rect">
+            <a:avLst/>
+          </a:prstGeom>
+          <a:noFill/>
+          <a:ln>
+            <a:noFill/>
+          </a:ln>
+        </p:spPr>
+        <p:txBody>
+          <a:bodyPr spcFirstLastPara="1" wrap="square" lIns="91425" tIns="45700" rIns="91425" bIns="45700" anchor="ctr" anchorCtr="0">
+            <a:noAutofit/>
+          </a:bodyPr>
+          <a:lstStyle/>
+          <a:p>
+            <a:pPr marL="0" lvl="0" indent="0" algn="r" rtl="0">
+              <a:spcBef>
+                <a:spcPts val="0"/>
+              </a:spcBef>
+              <a:spcAft>
+                <a:spcPts val="0"/>
+              </a:spcAft>
+              <a:buNone/>
+            </a:pPr>
+            <a:r>
+              <a:rPr sz="1800" b="1">
+                <a:solidFill>
+                  <a:srgbClr val="0F172A"/>
+                </a:solidFill>
+                <a:latin typeface="Times New Roman"/>
+              </a:rPr>
+              <a:t>8</a:t>
+            </a:r>
+            <a:endParaRPr/>
+          </a:p>
+        </p:txBody>
+      </p:sp>
+      <p:pic>
+        <p:nvPicPr>
+          <p:cNvPr id="121" name="Google Shape;121;p3"/>
+          <p:cNvPicPr preferRelativeResize="0"/>
+          <p:nvPr/>
+        </p:nvPicPr>
+        <p:blipFill rotWithShape="1">
+          <a:blip r:embed="rId2">
+            <a:alphaModFix/>
+          </a:blip>
+          <a:srcRect/>
+          <a:stretch/>
+        </p:blipFill>
+        <p:spPr>
+          <a:xfrm>
+            <a:off x="11072819" y="154753"/>
+            <a:ext cx="816174" cy="930568"/>
+          </a:xfrm>
+          <a:prstGeom prst="rect">
+            <a:avLst/>
+          </a:prstGeom>
+          <a:noFill/>
+          <a:ln>
+            <a:noFill/>
+          </a:ln>
+        </p:spPr>
+      </p:pic>
+      <p:sp>
+        <p:nvSpPr>
+          <p:cNvPr id="122" name="Google Shape;122;p3"/>
+          <p:cNvSpPr/>
+          <p:nvPr/>
+        </p:nvSpPr>
+        <p:spPr>
+          <a:xfrm>
+            <a:off x="0" y="6407689"/>
+            <a:ext cx="7684389" cy="461665"/>
+          </a:xfrm>
+          <a:custGeom>
+            <a:avLst/>
+            <a:gdLst/>
+            <a:ahLst/>
+            <a:cxnLst/>
+            <a:rect l="l" t="t" r="r" b="b"/>
+            <a:pathLst>
+              <a:path w="6172200" h="369332" extrusionOk="0">
+                <a:moveTo>
+                  <a:pt x="0" y="0"/>
+                </a:moveTo>
+                <a:lnTo>
+                  <a:pt x="5791200" y="0"/>
+                </a:lnTo>
+                <a:lnTo>
+                  <a:pt x="6172200" y="369332"/>
+                </a:lnTo>
+                <a:lnTo>
+                  <a:pt x="0" y="369332"/>
+                </a:lnTo>
+                <a:lnTo>
+                  <a:pt x="0" y="0"/>
+                </a:lnTo>
+                <a:close/>
+              </a:path>
+            </a:pathLst>
+          </a:custGeom>
+          <a:solidFill>
+            <a:schemeClr val="accent1"/>
+          </a:solidFill>
+          <a:ln>
+            <a:noFill/>
+          </a:ln>
+        </p:spPr>
+        <p:txBody>
+          <a:bodyPr spcFirstLastPara="1" wrap="square" lIns="91425" tIns="45700" rIns="91425" bIns="45700" anchor="t" anchorCtr="0">
+            <a:spAutoFit/>
+          </a:bodyPr>
+          <a:lstStyle/>
+          <a:p>
+            <a:pPr marL="0" marR="0" lvl="0" indent="0" algn="ctr" rtl="0">
+              <a:spcBef>
+                <a:spcPts val="0"/>
+              </a:spcBef>
+              <a:spcAft>
+                <a:spcPts val="0"/>
+              </a:spcAft>
+              <a:buClr>
+                <a:schemeClr val="lt1"/>
+              </a:buClr>
+              <a:buSzPts val="2400"/>
+              <a:buFont typeface="Gill Sans"/>
+              <a:buNone/>
+            </a:pPr>
+            <a:r>
+              <a:rPr lang="en-US" sz="2400">
+                <a:solidFill>
+                  <a:schemeClr val="lt1"/>
+                </a:solidFill>
+                <a:latin typeface="Gill Sans"/>
+                <a:ea typeface="Gill Sans"/>
+                <a:cs typeface="Gill Sans"/>
+                <a:sym typeface="Gill Sans"/>
+              </a:rPr>
+              <a:t>LEARN . GROW . EXCEL</a:t>
+            </a:r>
+            <a:endParaRPr sz="1800">
+              <a:solidFill>
+                <a:schemeClr val="dk1"/>
+              </a:solidFill>
+              <a:latin typeface="Calibri"/>
+              <a:ea typeface="Calibri"/>
+              <a:cs typeface="Calibri"/>
+              <a:sym typeface="Calibri"/>
+            </a:endParaRPr>
+          </a:p>
+        </p:txBody>
+      </p:sp>
+      <p:sp>
+        <p:nvSpPr>
+          <p:cNvPr id="123" name="Google Shape;123;p3"/>
+          <p:cNvSpPr txBox="1">
+            <a:spLocks noGrp="1"/>
+          </p:cNvSpPr>
+          <p:nvPr>
+            <p:ph type="ctrTitle"/>
+          </p:nvPr>
+        </p:nvSpPr>
+        <p:spPr>
+          <a:xfrm>
+            <a:off x="459967" y="1100168"/>
+            <a:ext cx="9625800" cy="761400"/>
+          </a:xfrm>
+          <a:prstGeom prst="rect">
+            <a:avLst/>
+          </a:prstGeom>
+          <a:noFill/>
+          <a:ln>
+            <a:noFill/>
+          </a:ln>
+        </p:spPr>
+        <p:txBody>
+          <a:bodyPr spcFirstLastPara="1" wrap="square" lIns="91425" tIns="45700" rIns="91425" bIns="45700" anchor="b" anchorCtr="0">
+            <a:normAutofit/>
+          </a:bodyPr>
+          <a:lstStyle/>
+          <a:p>
+            <a:pPr marL="0" lvl="0" indent="0" algn="l" rtl="0">
+              <a:lnSpc>
+                <a:spcPct val="90000"/>
+              </a:lnSpc>
+              <a:spcBef>
+                <a:spcPts val="0"/>
+              </a:spcBef>
+              <a:spcAft>
+                <a:spcPts val="0"/>
+              </a:spcAft>
+              <a:buClr>
+                <a:srgbClr val="181C24"/>
+              </a:buClr>
+              <a:buSzPts val="4000"/>
+              <a:buFont typeface="Times New Roman"/>
+              <a:buNone/>
+            </a:pPr>
+            <a:r>
+              <a:rPr sz="3400" b="1">
+                <a:solidFill>
+                  <a:srgbClr val="0F172A"/>
+                </a:solidFill>
+                <a:latin typeface="Times New Roman"/>
+              </a:rPr>
+              <a:t>METHODOLOGY &amp; WORKFLOW</a:t>
+            </a:r>
+            <a:endParaRPr sz="3600" b="1" dirty="0">
+              <a:latin typeface="Times New Roman"/>
+              <a:ea typeface="Times New Roman"/>
+              <a:cs typeface="Times New Roman"/>
+              <a:sym typeface="Times New Roman"/>
+            </a:endParaRPr>
+          </a:p>
+        </p:txBody>
+      </p:sp>
+      <p:sp>
+        <p:nvSpPr>
+          <p:cNvPr id="124" name="Google Shape;124;p3"/>
+          <p:cNvSpPr txBox="1">
+            <a:spLocks noGrp="1"/>
+          </p:cNvSpPr>
+          <p:nvPr>
+            <p:ph type="subTitle" idx="1"/>
+          </p:nvPr>
+        </p:nvSpPr>
+        <p:spPr>
+          <a:xfrm>
+            <a:off x="731520" y="1920240"/>
+            <a:ext cx="10698480" cy="4114800"/>
+          </a:xfrm>
+          <a:prstGeom prst="rect">
+            <a:avLst/>
+          </a:prstGeom>
+          <a:noFill/>
+          <a:ln>
+            <a:noFill/>
+          </a:ln>
+        </p:spPr>
+        <p:txBody>
+          <a:bodyPr spcFirstLastPara="1" wrap="square" lIns="91425" tIns="45700" rIns="91425" bIns="45700" anchor="t" anchorCtr="0">
+            <a:normAutofit/>
+          </a:bodyPr>
+          <a:lstStyle/>
+          <a:p>
+            <a:pPr marL="342900" lvl="0" indent="-342900" algn="l">
+              <a:lnSpc>
+                <a:spcPct val="100000"/>
+              </a:lnSpc>
+              <a:spcBef>
+                <a:spcPts val="800"/>
+              </a:spcBef>
+              <a:spcAft>
+                <a:spcPts val="200"/>
+              </a:spcAft>
+              <a:buSzPts val="2600"/>
+              <a:buFont typeface="Noto Sans Symbols"/>
+              <a:buChar char="⮪"/>
+            </a:pPr>
+            <a:r>
+              <a:rPr sz="2200" b="1">
+                <a:solidFill>
+                  <a:srgbClr val="0284C7"/>
+                </a:solidFill>
+                <a:latin typeface="Times New Roman"/>
+              </a:rPr>
+              <a:t>Phase 1: Dataset Curation &amp; Preprocessing</a:t>
+            </a:r>
+          </a:p>
+          <a:p>
+            <a:pPr>
+              <a:spcBef>
+                <a:spcPts val="200"/>
+              </a:spcBef>
+              <a:spcAft>
+                <a:spcPts val="400"/>
+              </a:spcAft>
+            </a:pPr>
+            <a:r>
+              <a:rPr sz="1800" b="0">
+                <a:solidFill>
+                  <a:srgbClr val="1E293B"/>
+                </a:solidFill>
+                <a:latin typeface="Times New Roman"/>
+              </a:rPr>
+              <a:t>•  Extracted wafer maps from the WM-811K benchmark; performed spatial bicubic/nearest resizing to 224x224 and tensor normalization (ImageNet mean &amp; std).</a:t>
+            </a:r>
+          </a:p>
+          <a:p>
+            <a:pPr>
+              <a:spcBef>
+                <a:spcPts val="800"/>
+              </a:spcBef>
+              <a:spcAft>
+                <a:spcPts val="200"/>
+              </a:spcAft>
+            </a:pPr>
+            <a:r>
+              <a:rPr sz="2200" b="1">
+                <a:solidFill>
+                  <a:srgbClr val="0284C7"/>
+                </a:solidFill>
+                <a:latin typeface="Times New Roman"/>
+              </a:rPr>
+              <a:t>Phase 2: Transfer Learning &amp; Model Fine-Tuning</a:t>
+            </a:r>
+          </a:p>
+          <a:p>
+            <a:pPr>
+              <a:spcBef>
+                <a:spcPts val="200"/>
+              </a:spcBef>
+              <a:spcAft>
+                <a:spcPts val="400"/>
+              </a:spcAft>
+            </a:pPr>
+            <a:r>
+              <a:rPr sz="1800" b="0">
+                <a:solidFill>
+                  <a:srgbClr val="1E293B"/>
+                </a:solidFill>
+                <a:latin typeface="Times New Roman"/>
+              </a:rPr>
+              <a:t>•  Utilized pre-trained MobileNetV3-Small backbone with inverted residual bottlenecks and Hard-Swish activations; replaced the classification head with an 8-output linear layer.</a:t>
+            </a:r>
+          </a:p>
+          <a:p>
+            <a:pPr>
+              <a:spcBef>
+                <a:spcPts val="800"/>
+              </a:spcBef>
+              <a:spcAft>
+                <a:spcPts val="200"/>
+              </a:spcAft>
+            </a:pPr>
+            <a:r>
+              <a:rPr sz="2200" b="1">
+                <a:solidFill>
+                  <a:srgbClr val="0284C7"/>
+                </a:solidFill>
+                <a:latin typeface="Times New Roman"/>
+              </a:rPr>
+              <a:t>Phase 3: Training &amp; Regularization Pipeline</a:t>
+            </a:r>
+          </a:p>
+          <a:p>
+            <a:pPr>
+              <a:spcBef>
+                <a:spcPts val="200"/>
+              </a:spcBef>
+              <a:spcAft>
+                <a:spcPts val="400"/>
+              </a:spcAft>
+            </a:pPr>
+            <a:r>
+              <a:rPr sz="1800" b="0">
+                <a:solidFill>
+                  <a:srgbClr val="1E293B"/>
+                </a:solidFill>
+                <a:latin typeface="Times New Roman"/>
+              </a:rPr>
+              <a:t>•  Trained using Adam optimizer, cross-entropy loss, dropout regularization (p=0.2), and early stopping to prevent overfitting on majority classes.</a:t>
+            </a:r>
+          </a:p>
+          <a:p>
+            <a:pPr>
+              <a:spcBef>
+                <a:spcPts val="800"/>
+              </a:spcBef>
+              <a:spcAft>
+                <a:spcPts val="200"/>
+              </a:spcAft>
+            </a:pPr>
+            <a:r>
+              <a:rPr sz="2200" b="1">
+                <a:solidFill>
+                  <a:srgbClr val="0284C7"/>
+                </a:solidFill>
+                <a:latin typeface="Times New Roman"/>
+              </a:rPr>
+              <a:t>Phase 4: ONNX Compilation &amp; Edge Integration</a:t>
+            </a:r>
+          </a:p>
+          <a:p>
+            <a:pPr>
+              <a:spcBef>
+                <a:spcPts val="200"/>
+              </a:spcBef>
+              <a:spcAft>
+                <a:spcPts val="400"/>
+              </a:spcAft>
+            </a:pPr>
+            <a:r>
+              <a:rPr sz="1800" b="0">
+                <a:solidFill>
+                  <a:srgbClr val="1E293B"/>
+                </a:solidFill>
+                <a:latin typeface="Times New Roman"/>
+              </a:rPr>
+              <a:t>•  Exported PyTorch computational graph to ONNX with CPU graph optimizations; integrated into a high-concurrency Python REST server and interactive web visualizer.</a:t>
+            </a:r>
           </a:p>
         </p:txBody>
       </p:sp>
@@ -21670,10 +21126,15 @@
               </a:spcAft>
               <a:buNone/>
             </a:pPr>
-            <a:fld id="{00000000-1234-1234-1234-123412341234}" type="slidenum">
-              <a:rPr lang="en-US"/>
+            <a:r>
+              <a:rPr sz="1800" b="1">
+                <a:solidFill>
+                  <a:srgbClr val="0F172A"/>
+                </a:solidFill>
+                <a:latin typeface="Times New Roman"/>
+              </a:rPr>
               <a:t>9</a:t>
-            </a:fld>
+            </a:r>
             <a:endParaRPr/>
           </a:p>
         </p:txBody>
@@ -21841,34 +21302,13 @@
               <a:buNone/>
             </a:pPr>
             <a:r>
-              <a:rPr lang="en-US" sz="4000" dirty="0">
-                <a:solidFill>
-                  <a:srgbClr val="181C24"/>
-                </a:solidFill>
-                <a:highlight>
-                  <a:srgbClr val="FFFFFF"/>
-                </a:highlight>
+              <a:rPr sz="3400" b="1">
+                <a:solidFill>
+                  <a:srgbClr val="0F172A"/>
+                </a:solidFill>
                 <a:latin typeface="Times New Roman"/>
-                <a:ea typeface="Times New Roman"/>
-                <a:cs typeface="Times New Roman"/>
-                <a:sym typeface="Times New Roman"/>
               </a:rPr>
-              <a:t> </a:t>
-            </a:r>
-            <a:r>
-              <a:rPr lang="en-US" sz="3600" b="1" dirty="0">
-                <a:solidFill>
-                  <a:srgbClr val="181C24"/>
-                </a:solidFill>
-                <a:highlight>
-                  <a:srgbClr val="FFFFFF"/>
-                </a:highlight>
-                <a:latin typeface="Times New Roman"/>
-                <a:ea typeface="Times New Roman"/>
-                <a:cs typeface="Times New Roman"/>
-                <a:sym typeface="Times New Roman"/>
-              </a:rPr>
-              <a:t>SCOPE</a:t>
+              <a:t>EXPERIMENTAL RESULTS &amp; OUTCOMES</a:t>
             </a:r>
             <a:endParaRPr sz="3600" b="1" dirty="0">
               <a:latin typeface="Times New Roman"/>
@@ -21891,8 +21331,8 @@
         </p:nvSpPr>
         <p:spPr>
           <a:xfrm>
-            <a:off x="459967" y="2055887"/>
-            <a:ext cx="11128800" cy="4351800"/>
+            <a:off x="731520" y="1828800"/>
+            <a:ext cx="6217920" cy="4114800"/>
           </a:xfrm>
           <a:prstGeom prst="rect">
             <a:avLst/>
@@ -21913,72 +21353,213 @@
                 <a:spcPct val="100000"/>
               </a:lnSpc>
               <a:spcBef>
-                <a:spcPts val="1200"/>
-              </a:spcBef>
+                <a:spcPts val="600"/>
+              </a:spcBef>
+              <a:spcAft>
+                <a:spcPts val="200"/>
+              </a:spcAft>
               <a:buSzPts val="2600"/>
               <a:buFont typeface="Noto Sans Symbols"/>
               <a:buChar char="⮪"/>
             </a:pPr>
             <a:r>
-              <a:rPr lang="en-US" sz="2800" b="1" dirty="0">
-                <a:latin typeface="Times New Roman" panose="02020603050405020304" pitchFamily="18" charset="0"/>
-                <a:cs typeface="Times New Roman" panose="02020603050405020304" pitchFamily="18" charset="0"/>
+              <a:rPr sz="2000" b="1">
+                <a:solidFill>
+                  <a:srgbClr val="0284C7"/>
+                </a:solidFill>
+                <a:latin typeface="Times New Roman"/>
               </a:rPr>
-              <a:t>Current Scope</a:t>
+              <a:t>Key Performance Metrics</a:t>
             </a:r>
           </a:p>
           <a:p>
-            <a:pPr marL="1054100" lvl="1" indent="-457200" algn="l">
-              <a:spcBef>
-                <a:spcPts val="1200"/>
-              </a:spcBef>
-              <a:buSzPts val="2200"/>
-              <a:buFont typeface="Arial" panose="020B0604020202020204" pitchFamily="34" charset="0"/>
-              <a:buChar char="•"/>
+            <a:pPr>
+              <a:spcBef>
+                <a:spcPts val="200"/>
+              </a:spcBef>
+              <a:spcAft>
+                <a:spcPts val="300"/>
+              </a:spcAft>
             </a:pPr>
             <a:r>
-              <a:rPr lang="en-US" sz="2400" dirty="0">
-                <a:latin typeface="Times New Roman" panose="02020603050405020304" pitchFamily="18" charset="0"/>
-                <a:cs typeface="Times New Roman" panose="02020603050405020304" pitchFamily="18" charset="0"/>
+              <a:rPr sz="1500" b="0">
+                <a:solidFill>
+                  <a:srgbClr val="1E293B"/>
+                </a:solidFill>
+                <a:latin typeface="Times New Roman"/>
               </a:rPr>
-              <a:t>Supports secure online examinations with authenticated access, encrypted storage and blockchain-based audit trails for a single institution.</a:t>
+              <a:t>•  Overall Test Set Accuracy: 98.02% across 121,719 test wafer samples.</a:t>
             </a:r>
           </a:p>
           <a:p>
-            <a:pPr marL="342900" lvl="0" indent="-342900" algn="l">
-              <a:lnSpc>
-                <a:spcPct val="100000"/>
-              </a:lnSpc>
-              <a:spcBef>
-                <a:spcPts val="1200"/>
-              </a:spcBef>
-              <a:buSzPts val="2600"/>
-              <a:buFont typeface="Noto Sans Symbols"/>
-              <a:buChar char="⮪"/>
+            <a:pPr>
+              <a:spcBef>
+                <a:spcPts val="200"/>
+              </a:spcBef>
+              <a:spcAft>
+                <a:spcPts val="300"/>
+              </a:spcAft>
             </a:pPr>
             <a:r>
-              <a:rPr lang="en-US" sz="2800" b="1" dirty="0">
-                <a:latin typeface="Times New Roman" panose="02020603050405020304" pitchFamily="18" charset="0"/>
-                <a:cs typeface="Times New Roman" panose="02020603050405020304" pitchFamily="18" charset="0"/>
+              <a:rPr sz="1500" b="0">
+                <a:solidFill>
+                  <a:srgbClr val="1E293B"/>
+                </a:solidFill>
+                <a:latin typeface="Times New Roman"/>
               </a:rPr>
-              <a:t>Future Enhancements</a:t>
+              <a:t>•  Macro Precision: 0.6897  |  Macro Recall: 0.6177</a:t>
             </a:r>
           </a:p>
           <a:p>
-            <a:pPr marL="1054100" lvl="1" indent="-457200" algn="l">
-              <a:spcBef>
-                <a:spcPts val="1200"/>
-              </a:spcBef>
-              <a:buSzPts val="2200"/>
-              <a:buFont typeface="Arial" panose="020B0604020202020204" pitchFamily="34" charset="0"/>
-              <a:buChar char="•"/>
+            <a:pPr>
+              <a:spcBef>
+                <a:spcPts val="200"/>
+              </a:spcBef>
+              <a:spcAft>
+                <a:spcPts val="300"/>
+              </a:spcAft>
             </a:pPr>
             <a:r>
-              <a:rPr lang="en-US" sz="2400" dirty="0">
-                <a:latin typeface="Times New Roman" panose="02020603050405020304" pitchFamily="18" charset="0"/>
-                <a:cs typeface="Times New Roman" panose="02020603050405020304" pitchFamily="18" charset="0"/>
+              <a:rPr sz="1500" b="0">
+                <a:solidFill>
+                  <a:srgbClr val="1E293B"/>
+                </a:solidFill>
+                <a:latin typeface="Times New Roman"/>
               </a:rPr>
-              <a:t>AI-based proctoring, multi-institution federation, mobile app support and advanced analytics dashboards.</a:t>
+              <a:t>•  Inference Latency: 1.53 ms on standard CPU (zero GPU requirement).</a:t>
+            </a:r>
+          </a:p>
+          <a:p>
+            <a:pPr>
+              <a:spcBef>
+                <a:spcPts val="200"/>
+              </a:spcBef>
+              <a:spcAft>
+                <a:spcPts val="300"/>
+              </a:spcAft>
+            </a:pPr>
+            <a:r>
+              <a:rPr sz="1500" b="0">
+                <a:solidFill>
+                  <a:srgbClr val="1E293B"/>
+                </a:solidFill>
+                <a:latin typeface="Times New Roman"/>
+              </a:rPr>
+              <a:t>•  Model Binary Footprint: 5.84 MB (ultra-compact ONNX engine).</a:t>
+            </a:r>
+          </a:p>
+          <a:p>
+            <a:pPr>
+              <a:spcBef>
+                <a:spcPts val="600"/>
+              </a:spcBef>
+              <a:spcAft>
+                <a:spcPts val="200"/>
+              </a:spcAft>
+            </a:pPr>
+            <a:r>
+              <a:rPr sz="2000" b="1">
+                <a:solidFill>
+                  <a:srgbClr val="0284C7"/>
+                </a:solidFill>
+                <a:latin typeface="Times New Roman"/>
+              </a:rPr>
+              <a:t>Per-Class Defect Verification Highlights</a:t>
+            </a:r>
+          </a:p>
+          <a:p>
+            <a:pPr>
+              <a:spcBef>
+                <a:spcPts val="200"/>
+              </a:spcBef>
+              <a:spcAft>
+                <a:spcPts val="300"/>
+              </a:spcAft>
+            </a:pPr>
+            <a:r>
+              <a:rPr sz="1500" b="0">
+                <a:solidFill>
+                  <a:srgbClr val="1E293B"/>
+                </a:solidFill>
+                <a:latin typeface="Times New Roman"/>
+              </a:rPr>
+              <a:t>•  Clean (Nominal): 99.98% Precision, 100% Detection Rate (Near-zero false alarms).</a:t>
+            </a:r>
+          </a:p>
+          <a:p>
+            <a:pPr>
+              <a:spcBef>
+                <a:spcPts val="200"/>
+              </a:spcBef>
+              <a:spcAft>
+                <a:spcPts val="300"/>
+              </a:spcAft>
+            </a:pPr>
+            <a:r>
+              <a:rPr sz="1500" b="0">
+                <a:solidFill>
+                  <a:srgbClr val="1E293B"/>
+                </a:solidFill>
+                <a:latin typeface="Times New Roman"/>
+              </a:rPr>
+              <a:t>•  Scratch: 99.92% Confidence with clear linear scratch isolation.</a:t>
+            </a:r>
+          </a:p>
+          <a:p>
+            <a:pPr>
+              <a:spcBef>
+                <a:spcPts val="200"/>
+              </a:spcBef>
+              <a:spcAft>
+                <a:spcPts val="300"/>
+              </a:spcAft>
+            </a:pPr>
+            <a:r>
+              <a:rPr sz="1500" b="0">
+                <a:solidFill>
+                  <a:srgbClr val="1E293B"/>
+                </a:solidFill>
+                <a:latin typeface="Times New Roman"/>
+              </a:rPr>
+              <a:t>•  Donut: 99.99% Confidence detecting radial thermal ring defects.</a:t>
+            </a:r>
+          </a:p>
+          <a:p>
+            <a:pPr>
+              <a:spcBef>
+                <a:spcPts val="200"/>
+              </a:spcBef>
+              <a:spcAft>
+                <a:spcPts val="300"/>
+              </a:spcAft>
+            </a:pPr>
+            <a:r>
+              <a:rPr sz="1500" b="0">
+                <a:solidFill>
+                  <a:srgbClr val="1E293B"/>
+                </a:solidFill>
+                <a:latin typeface="Times New Roman"/>
+              </a:rPr>
+              <a:t>•  Center Cluster: 98.01% Confidence detecting CMP slurry anomalies.</a:t>
+            </a:r>
+          </a:p>
+          <a:p>
+            <a:pPr>
+              <a:spcBef>
+                <a:spcPts val="200"/>
+              </a:spcBef>
+              <a:spcAft>
+                <a:spcPts val="300"/>
+              </a:spcAft>
+            </a:pPr>
+            <a:r>
+              <a:rPr sz="1500" b="0">
+                <a:solidFill>
+                  <a:srgbClr val="1E293B"/>
+                </a:solidFill>
+                <a:latin typeface="Times New Roman"/>
+              </a:rPr>
+              <a:t>•  Edge-Loc &amp; Loc: &gt;99.2% Confidence identifying localized clusters.</a:t>
             </a:r>
           </a:p>
         </p:txBody>
@@ -22008,6 +21589,582 @@
           <a:ln>
             <a:noFill/>
           </a:ln>
+        </p:spPr>
+      </p:pic>
+      <p:pic>
+        <p:nvPicPr>
+          <p:cNvPr id="126" name="Picture 125" descr="confusion_matrix.png"/>
+          <p:cNvPicPr>
+            <a:picLocks noChangeAspect="1"/>
+          </p:cNvPicPr>
+          <p:nvPr/>
+        </p:nvPicPr>
+        <p:blipFill>
+          <a:blip r:embed="rId4"/>
+          <a:stretch>
+            <a:fillRect/>
+          </a:stretch>
+        </p:blipFill>
+        <p:spPr>
+          <a:xfrm>
+            <a:off x="7132320" y="1920240"/>
+            <a:ext cx="4206240" cy="3840480"/>
+          </a:xfrm>
+          <a:prstGeom prst="rect">
+            <a:avLst/>
+          </a:prstGeom>
+        </p:spPr>
+      </p:pic>
+    </p:spTree>
+  </p:cSld>
+  <p:clrMapOvr>
+    <a:masterClrMapping/>
+  </p:clrMapOvr>
+</p:sld>
+</file>
+
+<file path=ppt/slides/slide9.xml><?xml version="1.0" encoding="utf-8"?>
+<p:sld xmlns:a="http://schemas.openxmlformats.org/drawingml/2006/main" xmlns:r="http://schemas.openxmlformats.org/officeDocument/2006/relationships" xmlns:p="http://schemas.openxmlformats.org/presentationml/2006/main">
+  <p:cSld>
+    <p:spTree>
+      <p:nvGrpSpPr>
+        <p:cNvPr id="1" name="Shape 119"/>
+        <p:cNvGrpSpPr/>
+        <p:nvPr/>
+      </p:nvGrpSpPr>
+      <p:grpSpPr>
+        <a:xfrm>
+          <a:off x="0" y="0"/>
+          <a:ext cx="0" cy="0"/>
+          <a:chOff x="0" y="0"/>
+          <a:chExt cx="0" cy="0"/>
+        </a:xfrm>
+      </p:grpSpPr>
+      <p:sp>
+        <p:nvSpPr>
+          <p:cNvPr id="120" name="Google Shape;120;p3"/>
+          <p:cNvSpPr txBox="1">
+            <a:spLocks noGrp="1"/>
+          </p:cNvSpPr>
+          <p:nvPr>
+            <p:ph type="sldNum" idx="12"/>
+          </p:nvPr>
+        </p:nvSpPr>
+        <p:spPr>
+          <a:xfrm>
+            <a:off x="8610600" y="6356350"/>
+            <a:ext cx="2743200" cy="365100"/>
+          </a:xfrm>
+          <a:prstGeom prst="rect">
+            <a:avLst/>
+          </a:prstGeom>
+          <a:noFill/>
+          <a:ln>
+            <a:noFill/>
+          </a:ln>
+        </p:spPr>
+        <p:txBody>
+          <a:bodyPr spcFirstLastPara="1" wrap="square" lIns="91425" tIns="45700" rIns="91425" bIns="45700" anchor="ctr" anchorCtr="0">
+            <a:noAutofit/>
+          </a:bodyPr>
+          <a:lstStyle/>
+          <a:p>
+            <a:pPr marL="0" lvl="0" indent="0" algn="r" rtl="0">
+              <a:spcBef>
+                <a:spcPts val="0"/>
+              </a:spcBef>
+              <a:spcAft>
+                <a:spcPts val="0"/>
+              </a:spcAft>
+              <a:buNone/>
+            </a:pPr>
+            <a:r>
+              <a:rPr sz="1800" b="1">
+                <a:solidFill>
+                  <a:srgbClr val="0F172A"/>
+                </a:solidFill>
+                <a:latin typeface="Times New Roman"/>
+              </a:rPr>
+              <a:t>9</a:t>
+            </a:r>
+            <a:endParaRPr/>
+          </a:p>
+        </p:txBody>
+      </p:sp>
+      <p:pic>
+        <p:nvPicPr>
+          <p:cNvPr id="121" name="Google Shape;121;p3"/>
+          <p:cNvPicPr preferRelativeResize="0"/>
+          <p:nvPr/>
+        </p:nvPicPr>
+        <p:blipFill rotWithShape="1">
+          <a:blip r:embed="rId2">
+            <a:alphaModFix/>
+          </a:blip>
+          <a:srcRect/>
+          <a:stretch/>
+        </p:blipFill>
+        <p:spPr>
+          <a:xfrm>
+            <a:off x="11072819" y="154753"/>
+            <a:ext cx="816174" cy="930568"/>
+          </a:xfrm>
+          <a:prstGeom prst="rect">
+            <a:avLst/>
+          </a:prstGeom>
+          <a:noFill/>
+          <a:ln>
+            <a:noFill/>
+          </a:ln>
+        </p:spPr>
+      </p:pic>
+      <p:sp>
+        <p:nvSpPr>
+          <p:cNvPr id="122" name="Google Shape;122;p3"/>
+          <p:cNvSpPr/>
+          <p:nvPr/>
+        </p:nvSpPr>
+        <p:spPr>
+          <a:xfrm>
+            <a:off x="0" y="6407689"/>
+            <a:ext cx="7684389" cy="461665"/>
+          </a:xfrm>
+          <a:custGeom>
+            <a:avLst/>
+            <a:gdLst/>
+            <a:ahLst/>
+            <a:cxnLst/>
+            <a:rect l="l" t="t" r="r" b="b"/>
+            <a:pathLst>
+              <a:path w="6172200" h="369332" extrusionOk="0">
+                <a:moveTo>
+                  <a:pt x="0" y="0"/>
+                </a:moveTo>
+                <a:lnTo>
+                  <a:pt x="5791200" y="0"/>
+                </a:lnTo>
+                <a:lnTo>
+                  <a:pt x="6172200" y="369332"/>
+                </a:lnTo>
+                <a:lnTo>
+                  <a:pt x="0" y="369332"/>
+                </a:lnTo>
+                <a:lnTo>
+                  <a:pt x="0" y="0"/>
+                </a:lnTo>
+                <a:close/>
+              </a:path>
+            </a:pathLst>
+          </a:custGeom>
+          <a:solidFill>
+            <a:schemeClr val="accent1"/>
+          </a:solidFill>
+          <a:ln>
+            <a:noFill/>
+          </a:ln>
+        </p:spPr>
+        <p:txBody>
+          <a:bodyPr spcFirstLastPara="1" wrap="square" lIns="91425" tIns="45700" rIns="91425" bIns="45700" anchor="t" anchorCtr="0">
+            <a:spAutoFit/>
+          </a:bodyPr>
+          <a:lstStyle/>
+          <a:p>
+            <a:pPr marL="0" marR="0" lvl="0" indent="0" algn="ctr" rtl="0">
+              <a:spcBef>
+                <a:spcPts val="0"/>
+              </a:spcBef>
+              <a:spcAft>
+                <a:spcPts val="0"/>
+              </a:spcAft>
+              <a:buClr>
+                <a:schemeClr val="lt1"/>
+              </a:buClr>
+              <a:buSzPts val="2400"/>
+              <a:buFont typeface="Gill Sans"/>
+              <a:buNone/>
+            </a:pPr>
+            <a:r>
+              <a:rPr lang="en-US" sz="2400">
+                <a:solidFill>
+                  <a:schemeClr val="lt1"/>
+                </a:solidFill>
+                <a:latin typeface="Gill Sans"/>
+                <a:ea typeface="Gill Sans"/>
+                <a:cs typeface="Gill Sans"/>
+                <a:sym typeface="Gill Sans"/>
+              </a:rPr>
+              <a:t>LEARN . GROW . EXCEL</a:t>
+            </a:r>
+            <a:endParaRPr sz="1800">
+              <a:solidFill>
+                <a:schemeClr val="dk1"/>
+              </a:solidFill>
+              <a:latin typeface="Calibri"/>
+              <a:ea typeface="Calibri"/>
+              <a:cs typeface="Calibri"/>
+              <a:sym typeface="Calibri"/>
+            </a:endParaRPr>
+          </a:p>
+        </p:txBody>
+      </p:sp>
+      <p:sp>
+        <p:nvSpPr>
+          <p:cNvPr id="123" name="Google Shape;123;p3"/>
+          <p:cNvSpPr txBox="1">
+            <a:spLocks noGrp="1"/>
+          </p:cNvSpPr>
+          <p:nvPr>
+            <p:ph type="ctrTitle"/>
+          </p:nvPr>
+        </p:nvSpPr>
+        <p:spPr>
+          <a:xfrm>
+            <a:off x="459967" y="1100168"/>
+            <a:ext cx="9625800" cy="761400"/>
+          </a:xfrm>
+          <a:prstGeom prst="rect">
+            <a:avLst/>
+          </a:prstGeom>
+          <a:noFill/>
+          <a:ln>
+            <a:noFill/>
+          </a:ln>
+        </p:spPr>
+        <p:txBody>
+          <a:bodyPr spcFirstLastPara="1" wrap="square" lIns="91425" tIns="45700" rIns="91425" bIns="45700" anchor="b" anchorCtr="0">
+            <a:normAutofit/>
+          </a:bodyPr>
+          <a:lstStyle/>
+          <a:p>
+            <a:pPr marL="0" lvl="0" indent="0" algn="l" rtl="0">
+              <a:lnSpc>
+                <a:spcPct val="90000"/>
+              </a:lnSpc>
+              <a:spcBef>
+                <a:spcPts val="0"/>
+              </a:spcBef>
+              <a:spcAft>
+                <a:spcPts val="0"/>
+              </a:spcAft>
+              <a:buClr>
+                <a:srgbClr val="181C24"/>
+              </a:buClr>
+              <a:buSzPts val="4000"/>
+              <a:buFont typeface="Times New Roman"/>
+              <a:buNone/>
+            </a:pPr>
+            <a:r>
+              <a:rPr sz="3400" b="1">
+                <a:solidFill>
+                  <a:srgbClr val="0F172A"/>
+                </a:solidFill>
+                <a:latin typeface="Times New Roman"/>
+              </a:rPr>
+              <a:t>EXPERIMENTAL RESULTS &amp; OUTCOMES</a:t>
+            </a:r>
+            <a:endParaRPr sz="3600" b="1" dirty="0">
+              <a:latin typeface="Times New Roman"/>
+              <a:ea typeface="Times New Roman"/>
+              <a:cs typeface="Times New Roman"/>
+              <a:sym typeface="Times New Roman"/>
+            </a:endParaRPr>
+          </a:p>
+        </p:txBody>
+      </p:sp>
+      <p:sp>
+        <p:nvSpPr>
+          <p:cNvPr id="124" name="Google Shape;124;p3"/>
+          <p:cNvSpPr txBox="1">
+            <a:spLocks noGrp="1"/>
+          </p:cNvSpPr>
+          <p:nvPr>
+            <p:ph type="subTitle" idx="1"/>
+          </p:nvPr>
+        </p:nvSpPr>
+        <p:spPr>
+          <a:xfrm>
+            <a:off x="731520" y="1828800"/>
+            <a:ext cx="6217920" cy="4114800"/>
+          </a:xfrm>
+          <a:prstGeom prst="rect">
+            <a:avLst/>
+          </a:prstGeom>
+          <a:noFill/>
+          <a:ln>
+            <a:noFill/>
+          </a:ln>
+        </p:spPr>
+        <p:txBody>
+          <a:bodyPr spcFirstLastPara="1" wrap="square" lIns="91425" tIns="45700" rIns="91425" bIns="45700" anchor="t" anchorCtr="0">
+            <a:normAutofit/>
+          </a:bodyPr>
+          <a:lstStyle/>
+          <a:p>
+            <a:pPr marL="342900" lvl="0" indent="-342900" algn="l">
+              <a:lnSpc>
+                <a:spcPct val="100000"/>
+              </a:lnSpc>
+              <a:spcBef>
+                <a:spcPts val="600"/>
+              </a:spcBef>
+              <a:spcAft>
+                <a:spcPts val="200"/>
+              </a:spcAft>
+              <a:buSzPts val="2600"/>
+              <a:buFont typeface="Noto Sans Symbols"/>
+              <a:buChar char="⮪"/>
+            </a:pPr>
+            <a:r>
+              <a:rPr sz="2000" b="1">
+                <a:solidFill>
+                  <a:srgbClr val="0284C7"/>
+                </a:solidFill>
+                <a:latin typeface="Times New Roman"/>
+              </a:rPr>
+              <a:t>Key Performance Metrics</a:t>
+            </a:r>
+          </a:p>
+          <a:p>
+            <a:pPr>
+              <a:spcBef>
+                <a:spcPts val="200"/>
+              </a:spcBef>
+              <a:spcAft>
+                <a:spcPts val="300"/>
+              </a:spcAft>
+            </a:pPr>
+            <a:r>
+              <a:rPr sz="1500" b="0">
+                <a:solidFill>
+                  <a:srgbClr val="1E293B"/>
+                </a:solidFill>
+                <a:latin typeface="Times New Roman"/>
+              </a:rPr>
+              <a:t>•  Overall Test Set Accuracy: 98.02% across 121,719 test wafer samples.</a:t>
+            </a:r>
+          </a:p>
+          <a:p>
+            <a:pPr>
+              <a:spcBef>
+                <a:spcPts val="200"/>
+              </a:spcBef>
+              <a:spcAft>
+                <a:spcPts val="300"/>
+              </a:spcAft>
+            </a:pPr>
+            <a:r>
+              <a:rPr sz="1500" b="0">
+                <a:solidFill>
+                  <a:srgbClr val="1E293B"/>
+                </a:solidFill>
+                <a:latin typeface="Times New Roman"/>
+              </a:rPr>
+              <a:t>•  Macro Precision: 0.6897  |  Macro Recall: 0.6177</a:t>
+            </a:r>
+          </a:p>
+          <a:p>
+            <a:pPr>
+              <a:spcBef>
+                <a:spcPts val="200"/>
+              </a:spcBef>
+              <a:spcAft>
+                <a:spcPts val="300"/>
+              </a:spcAft>
+            </a:pPr>
+            <a:r>
+              <a:rPr sz="1500" b="0">
+                <a:solidFill>
+                  <a:srgbClr val="1E293B"/>
+                </a:solidFill>
+                <a:latin typeface="Times New Roman"/>
+              </a:rPr>
+              <a:t>•  Inference Latency: 1.53 ms on standard CPU (zero GPU requirement).</a:t>
+            </a:r>
+          </a:p>
+          <a:p>
+            <a:pPr>
+              <a:spcBef>
+                <a:spcPts val="200"/>
+              </a:spcBef>
+              <a:spcAft>
+                <a:spcPts val="300"/>
+              </a:spcAft>
+            </a:pPr>
+            <a:r>
+              <a:rPr sz="1500" b="0">
+                <a:solidFill>
+                  <a:srgbClr val="1E293B"/>
+                </a:solidFill>
+                <a:latin typeface="Times New Roman"/>
+              </a:rPr>
+              <a:t>•  Model Binary Footprint: 5.84 MB (ultra-compact ONNX engine).</a:t>
+            </a:r>
+          </a:p>
+          <a:p>
+            <a:pPr>
+              <a:spcBef>
+                <a:spcPts val="600"/>
+              </a:spcBef>
+              <a:spcAft>
+                <a:spcPts val="200"/>
+              </a:spcAft>
+            </a:pPr>
+            <a:r>
+              <a:rPr sz="2000" b="1">
+                <a:solidFill>
+                  <a:srgbClr val="0284C7"/>
+                </a:solidFill>
+                <a:latin typeface="Times New Roman"/>
+              </a:rPr>
+              <a:t>Per-Class Defect Verification Highlights</a:t>
+            </a:r>
+          </a:p>
+          <a:p>
+            <a:pPr>
+              <a:spcBef>
+                <a:spcPts val="200"/>
+              </a:spcBef>
+              <a:spcAft>
+                <a:spcPts val="300"/>
+              </a:spcAft>
+            </a:pPr>
+            <a:r>
+              <a:rPr sz="1500" b="0">
+                <a:solidFill>
+                  <a:srgbClr val="1E293B"/>
+                </a:solidFill>
+                <a:latin typeface="Times New Roman"/>
+              </a:rPr>
+              <a:t>•  Clean (Nominal): 99.98% Precision, 100% Detection Rate (Near-zero false alarms).</a:t>
+            </a:r>
+          </a:p>
+          <a:p>
+            <a:pPr>
+              <a:spcBef>
+                <a:spcPts val="200"/>
+              </a:spcBef>
+              <a:spcAft>
+                <a:spcPts val="300"/>
+              </a:spcAft>
+            </a:pPr>
+            <a:r>
+              <a:rPr sz="1500" b="0">
+                <a:solidFill>
+                  <a:srgbClr val="1E293B"/>
+                </a:solidFill>
+                <a:latin typeface="Times New Roman"/>
+              </a:rPr>
+              <a:t>•  Scratch: 99.92% Confidence with clear linear scratch isolation.</a:t>
+            </a:r>
+          </a:p>
+          <a:p>
+            <a:pPr>
+              <a:spcBef>
+                <a:spcPts val="200"/>
+              </a:spcBef>
+              <a:spcAft>
+                <a:spcPts val="300"/>
+              </a:spcAft>
+            </a:pPr>
+            <a:r>
+              <a:rPr sz="1500" b="0">
+                <a:solidFill>
+                  <a:srgbClr val="1E293B"/>
+                </a:solidFill>
+                <a:latin typeface="Times New Roman"/>
+              </a:rPr>
+              <a:t>•  Donut: 99.99% Confidence detecting radial thermal ring defects.</a:t>
+            </a:r>
+          </a:p>
+          <a:p>
+            <a:pPr>
+              <a:spcBef>
+                <a:spcPts val="200"/>
+              </a:spcBef>
+              <a:spcAft>
+                <a:spcPts val="300"/>
+              </a:spcAft>
+            </a:pPr>
+            <a:r>
+              <a:rPr sz="1500" b="0">
+                <a:solidFill>
+                  <a:srgbClr val="1E293B"/>
+                </a:solidFill>
+                <a:latin typeface="Times New Roman"/>
+              </a:rPr>
+              <a:t>•  Center Cluster: 98.01% Confidence detecting CMP slurry anomalies.</a:t>
+            </a:r>
+          </a:p>
+          <a:p>
+            <a:pPr>
+              <a:spcBef>
+                <a:spcPts val="200"/>
+              </a:spcBef>
+              <a:spcAft>
+                <a:spcPts val="300"/>
+              </a:spcAft>
+            </a:pPr>
+            <a:r>
+              <a:rPr sz="1500" b="0">
+                <a:solidFill>
+                  <a:srgbClr val="1E293B"/>
+                </a:solidFill>
+                <a:latin typeface="Times New Roman"/>
+              </a:rPr>
+              <a:t>•  Edge-Loc &amp; Loc: &gt;99.2% Confidence identifying localized clusters.</a:t>
+            </a:r>
+          </a:p>
+        </p:txBody>
+      </p:sp>
+      <p:pic>
+        <p:nvPicPr>
+          <p:cNvPr id="125" name="Google Shape;125;p3"/>
+          <p:cNvPicPr preferRelativeResize="0"/>
+          <p:nvPr/>
+        </p:nvPicPr>
+        <p:blipFill rotWithShape="1">
+          <a:blip r:embed="rId3">
+            <a:alphaModFix/>
+          </a:blip>
+          <a:srcRect l="15320" t="28789" r="16466" b="54857"/>
+          <a:stretch/>
+        </p:blipFill>
+        <p:spPr>
+          <a:xfrm>
+            <a:off x="155527" y="217182"/>
+            <a:ext cx="4521325" cy="812948"/>
+          </a:xfrm>
+          <a:prstGeom prst="rect">
+            <a:avLst/>
+          </a:prstGeom>
+          <a:noFill/>
+          <a:ln>
+            <a:noFill/>
+          </a:ln>
+        </p:spPr>
+      </p:pic>
+      <p:pic>
+        <p:nvPicPr>
+          <p:cNvPr id="126" name="Picture 125" descr="confusion_matrix.png"/>
+          <p:cNvPicPr>
+            <a:picLocks noChangeAspect="1"/>
+          </p:cNvPicPr>
+          <p:nvPr/>
+        </p:nvPicPr>
+        <p:blipFill>
+          <a:blip r:embed="rId4"/>
+          <a:stretch>
+            <a:fillRect/>
+          </a:stretch>
+        </p:blipFill>
+        <p:spPr>
+          <a:xfrm>
+            <a:off x="7132320" y="1920240"/>
+            <a:ext cx="4206240" cy="3840480"/>
+          </a:xfrm>
+          <a:prstGeom prst="rect">
+            <a:avLst/>
+          </a:prstGeom>
         </p:spPr>
       </p:pic>
     </p:spTree>

--- a/Final_Review_Mini_Project_Semiconductor_Defects.pptx
+++ b/Final_Review_Mini_Project_Semiconductor_Defects.pptx
@@ -6,7 +6,7 @@
     <p:sldMasterId id="2147483660" r:id="rId2"/>
   </p:sldMasterIdLst>
   <p:notesMasterIdLst>
-    <p:notesMasterId r:id="rId18"/>
+    <p:notesMasterId r:id="rId14"/>
   </p:notesMasterIdLst>
   <p:sldIdLst>
     <p:sldId id="304" r:id="rId3"/>
@@ -14,20 +14,20 @@
     <p:sldId id="306" r:id="rId5"/>
     <p:sldId id="307" r:id="rId6"/>
     <p:sldId id="308" r:id="rId7"/>
-    <p:sldId id="310" r:id="rId8"/>
-    <p:sldId id="311" r:id="rId9"/>
-    <p:sldId id="316" r:id="rId12"/>
-    <p:sldId id="318" r:id="rId14"/>
-    <p:sldId id="322" r:id="rId16"/>
-    <p:sldId id="323" r:id="rId17"/>
+    <p:sldId id="324" r:id="rId8"/>
+    <p:sldId id="325" r:id="rId9"/>
+    <p:sldId id="316" r:id="rId10"/>
+    <p:sldId id="318" r:id="rId11"/>
+    <p:sldId id="322" r:id="rId12"/>
+    <p:sldId id="323" r:id="rId13"/>
   </p:sldIdLst>
   <p:sldSz cx="12192000" cy="6858000"/>
   <p:notesSz cx="6858000" cy="9144000"/>
   <p:embeddedFontLst>
     <p:embeddedFont>
       <p:font typeface="Gill Sans" panose="020B0604020202020204" charset="0"/>
-      <p:regular r:id="rId19"/>
-      <p:bold r:id="rId20"/>
+      <p:regular r:id="rId15"/>
+      <p:bold r:id="rId16"/>
     </p:embeddedFont>
   </p:embeddedFontLst>
   <p:defaultTextStyle>
@@ -264,18 +264,10 @@
       <p15:sldGuideLst xmlns:p15="http://schemas.microsoft.com/office/powerpoint/2012/main"/>
     </p:ext>
     <p:ext uri="GoogleSlidesCustomDataVersion2">
-      <go:slidesCustomData xmlns="" xmlns:mc="http://schemas.openxmlformats.org/markup-compatibility/2006" xmlns:mv="urn:schemas-microsoft-com:mac:vml" xmlns:c="http://schemas.openxmlformats.org/drawingml/2006/chart" xmlns:dgm="http://schemas.openxmlformats.org/drawingml/2006/diagram" xmlns:o="urn:schemas-microsoft-com:office:office" xmlns:v="urn:schemas-microsoft-com:vml" xmlns:pvml="urn:schemas-microsoft-com:office:powerpoint" xmlns:com="http://schemas.openxmlformats.org/drawingml/2006/compatibility" xmlns:p14="http://schemas.microsoft.com/office/powerpoint/2010/main" xmlns:p15="http://schemas.microsoft.com/office/powerpoint/2012/main" xmlns:ahyp="http://schemas.microsoft.com/office/drawing/2018/hyperlinkcolor" xmlns:go="http://customooxmlschemas.google.com/" r:id="rId38" roundtripDataSignature="AMtx7mjBb728hTyzQUlTTKdw7QOtHtbLWA=="/>
+      <go:slidesCustomData xmlns:go="http://customooxmlschemas.google.com/" xmlns:ahyp="http://schemas.microsoft.com/office/drawing/2018/hyperlinkcolor" xmlns:p15="http://schemas.microsoft.com/office/powerpoint/2012/main" xmlns:p14="http://schemas.microsoft.com/office/powerpoint/2010/main" xmlns:com="http://schemas.openxmlformats.org/drawingml/2006/compatibility" xmlns:pvml="urn:schemas-microsoft-com:office:powerpoint" xmlns:v="urn:schemas-microsoft-com:vml" xmlns:o="urn:schemas-microsoft-com:office:office" xmlns:dgm="http://schemas.openxmlformats.org/drawingml/2006/diagram" xmlns:c="http://schemas.openxmlformats.org/drawingml/2006/chart" xmlns:mv="urn:schemas-microsoft-com:mac:vml" xmlns:mc="http://schemas.openxmlformats.org/markup-compatibility/2006" xmlns="" r:id="rId38" roundtripDataSignature="AMtx7mjBb728hTyzQUlTTKdw7QOtHtbLWA=="/>
     </p:ext>
   </p:extLst>
 </p:presentation>
-</file>
-
-<file path=ppt/revisionInfo.xml><?xml version="1.0" encoding="utf-8"?>
-<p1510:revInfo xmlns:a="http://schemas.openxmlformats.org/drawingml/2006/main" xmlns:r="http://schemas.openxmlformats.org/officeDocument/2006/relationships" xmlns:p1510="http://schemas.microsoft.com/office/powerpoint/2015/10/main">
-  <p1510:revLst>
-    <p1510:client id="{7B24EAD6-1D21-4CFA-A1BF-962E5395714D}" v="18" dt="2025-08-27T07:02:55.175"/>
-  </p1510:revLst>
-</p1510:revInfo>
 </file>
 
 <file path=ppt/notesMasters/notesMaster1.xml><?xml version="1.0" encoding="utf-8"?>
@@ -2200,1460 +2192,6 @@
 </file>
 
 <file path=ppt/slideLayouts/slideLayout10.xml><?xml version="1.0" encoding="utf-8"?>
-<p:sldLayout xmlns:a="http://schemas.openxmlformats.org/drawingml/2006/main" xmlns:r="http://schemas.openxmlformats.org/officeDocument/2006/relationships" xmlns:p="http://schemas.openxmlformats.org/presentationml/2006/main" matchingName="Title and Vertical Text" type="vertTx">
-  <p:cSld name="VERTICAL_TEXT">
-    <p:spTree>
-      <p:nvGrpSpPr>
-        <p:cNvPr id="1" name="Shape 72"/>
-        <p:cNvGrpSpPr/>
-        <p:nvPr/>
-      </p:nvGrpSpPr>
-      <p:grpSpPr>
-        <a:xfrm>
-          <a:off x="0" y="0"/>
-          <a:ext cx="0" cy="0"/>
-          <a:chOff x="0" y="0"/>
-          <a:chExt cx="0" cy="0"/>
-        </a:xfrm>
-      </p:grpSpPr>
-      <p:sp>
-        <p:nvSpPr>
-          <p:cNvPr id="73" name="Google Shape;73;p40"/>
-          <p:cNvSpPr txBox="1">
-            <a:spLocks noGrp="1"/>
-          </p:cNvSpPr>
-          <p:nvPr>
-            <p:ph type="title"/>
-          </p:nvPr>
-        </p:nvSpPr>
-        <p:spPr>
-          <a:xfrm>
-            <a:off x="838200" y="365125"/>
-            <a:ext cx="10515600" cy="1325563"/>
-          </a:xfrm>
-          <a:prstGeom prst="rect">
-            <a:avLst/>
-          </a:prstGeom>
-          <a:noFill/>
-          <a:ln>
-            <a:noFill/>
-          </a:ln>
-        </p:spPr>
-        <p:txBody>
-          <a:bodyPr spcFirstLastPara="1" wrap="square" lIns="91425" tIns="45700" rIns="91425" bIns="45700" anchor="ctr" anchorCtr="0">
-            <a:normAutofit/>
-          </a:bodyPr>
-          <a:lstStyle>
-            <a:lvl1pPr lvl="0" algn="l">
-              <a:lnSpc>
-                <a:spcPct val="90000"/>
-              </a:lnSpc>
-              <a:spcBef>
-                <a:spcPts val="0"/>
-              </a:spcBef>
-              <a:spcAft>
-                <a:spcPts val="0"/>
-              </a:spcAft>
-              <a:buClr>
-                <a:schemeClr val="dk1"/>
-              </a:buClr>
-              <a:buSzPts val="1800"/>
-              <a:buNone/>
-              <a:defRPr/>
-            </a:lvl1pPr>
-            <a:lvl2pPr lvl="1">
-              <a:spcBef>
-                <a:spcPts val="0"/>
-              </a:spcBef>
-              <a:spcAft>
-                <a:spcPts val="0"/>
-              </a:spcAft>
-              <a:buSzPts val="1400"/>
-              <a:buNone/>
-              <a:defRPr/>
-            </a:lvl2pPr>
-            <a:lvl3pPr lvl="2">
-              <a:spcBef>
-                <a:spcPts val="0"/>
-              </a:spcBef>
-              <a:spcAft>
-                <a:spcPts val="0"/>
-              </a:spcAft>
-              <a:buSzPts val="1400"/>
-              <a:buNone/>
-              <a:defRPr/>
-            </a:lvl3pPr>
-            <a:lvl4pPr lvl="3">
-              <a:spcBef>
-                <a:spcPts val="0"/>
-              </a:spcBef>
-              <a:spcAft>
-                <a:spcPts val="0"/>
-              </a:spcAft>
-              <a:buSzPts val="1400"/>
-              <a:buNone/>
-              <a:defRPr/>
-            </a:lvl4pPr>
-            <a:lvl5pPr lvl="4">
-              <a:spcBef>
-                <a:spcPts val="0"/>
-              </a:spcBef>
-              <a:spcAft>
-                <a:spcPts val="0"/>
-              </a:spcAft>
-              <a:buSzPts val="1400"/>
-              <a:buNone/>
-              <a:defRPr/>
-            </a:lvl5pPr>
-            <a:lvl6pPr lvl="5">
-              <a:spcBef>
-                <a:spcPts val="0"/>
-              </a:spcBef>
-              <a:spcAft>
-                <a:spcPts val="0"/>
-              </a:spcAft>
-              <a:buSzPts val="1400"/>
-              <a:buNone/>
-              <a:defRPr/>
-            </a:lvl6pPr>
-            <a:lvl7pPr lvl="6">
-              <a:spcBef>
-                <a:spcPts val="0"/>
-              </a:spcBef>
-              <a:spcAft>
-                <a:spcPts val="0"/>
-              </a:spcAft>
-              <a:buSzPts val="1400"/>
-              <a:buNone/>
-              <a:defRPr/>
-            </a:lvl7pPr>
-            <a:lvl8pPr lvl="7">
-              <a:spcBef>
-                <a:spcPts val="0"/>
-              </a:spcBef>
-              <a:spcAft>
-                <a:spcPts val="0"/>
-              </a:spcAft>
-              <a:buSzPts val="1400"/>
-              <a:buNone/>
-              <a:defRPr/>
-            </a:lvl8pPr>
-            <a:lvl9pPr lvl="8">
-              <a:spcBef>
-                <a:spcPts val="0"/>
-              </a:spcBef>
-              <a:spcAft>
-                <a:spcPts val="0"/>
-              </a:spcAft>
-              <a:buSzPts val="1400"/>
-              <a:buNone/>
-              <a:defRPr/>
-            </a:lvl9pPr>
-          </a:lstStyle>
-          <a:p>
-            <a:endParaRPr/>
-          </a:p>
-        </p:txBody>
-      </p:sp>
-      <p:sp>
-        <p:nvSpPr>
-          <p:cNvPr id="74" name="Google Shape;74;p40"/>
-          <p:cNvSpPr txBox="1">
-            <a:spLocks noGrp="1"/>
-          </p:cNvSpPr>
-          <p:nvPr>
-            <p:ph type="body" idx="1"/>
-          </p:nvPr>
-        </p:nvSpPr>
-        <p:spPr>
-          <a:xfrm rot="5400000">
-            <a:off x="3920331" y="-1256506"/>
-            <a:ext cx="4351338" cy="10515600"/>
-          </a:xfrm>
-          <a:prstGeom prst="rect">
-            <a:avLst/>
-          </a:prstGeom>
-          <a:noFill/>
-          <a:ln>
-            <a:noFill/>
-          </a:ln>
-        </p:spPr>
-        <p:txBody>
-          <a:bodyPr spcFirstLastPara="1" wrap="square" lIns="91425" tIns="45700" rIns="91425" bIns="45700" anchor="t" anchorCtr="0">
-            <a:normAutofit/>
-          </a:bodyPr>
-          <a:lstStyle>
-            <a:lvl1pPr marL="457200" lvl="0" indent="-342900" algn="l">
-              <a:lnSpc>
-                <a:spcPct val="90000"/>
-              </a:lnSpc>
-              <a:spcBef>
-                <a:spcPts val="1000"/>
-              </a:spcBef>
-              <a:spcAft>
-                <a:spcPts val="0"/>
-              </a:spcAft>
-              <a:buClr>
-                <a:schemeClr val="dk1"/>
-              </a:buClr>
-              <a:buSzPts val="1800"/>
-              <a:buChar char="•"/>
-              <a:defRPr/>
-            </a:lvl1pPr>
-            <a:lvl2pPr marL="914400" lvl="1" indent="-342900" algn="l">
-              <a:lnSpc>
-                <a:spcPct val="90000"/>
-              </a:lnSpc>
-              <a:spcBef>
-                <a:spcPts val="500"/>
-              </a:spcBef>
-              <a:spcAft>
-                <a:spcPts val="0"/>
-              </a:spcAft>
-              <a:buClr>
-                <a:schemeClr val="dk1"/>
-              </a:buClr>
-              <a:buSzPts val="1800"/>
-              <a:buChar char="•"/>
-              <a:defRPr/>
-            </a:lvl2pPr>
-            <a:lvl3pPr marL="1371600" lvl="2" indent="-342900" algn="l">
-              <a:lnSpc>
-                <a:spcPct val="90000"/>
-              </a:lnSpc>
-              <a:spcBef>
-                <a:spcPts val="500"/>
-              </a:spcBef>
-              <a:spcAft>
-                <a:spcPts val="0"/>
-              </a:spcAft>
-              <a:buClr>
-                <a:schemeClr val="dk1"/>
-              </a:buClr>
-              <a:buSzPts val="1800"/>
-              <a:buChar char="•"/>
-              <a:defRPr/>
-            </a:lvl3pPr>
-            <a:lvl4pPr marL="1828800" lvl="3" indent="-342900" algn="l">
-              <a:lnSpc>
-                <a:spcPct val="90000"/>
-              </a:lnSpc>
-              <a:spcBef>
-                <a:spcPts val="500"/>
-              </a:spcBef>
-              <a:spcAft>
-                <a:spcPts val="0"/>
-              </a:spcAft>
-              <a:buClr>
-                <a:schemeClr val="dk1"/>
-              </a:buClr>
-              <a:buSzPts val="1800"/>
-              <a:buChar char="•"/>
-              <a:defRPr/>
-            </a:lvl4pPr>
-            <a:lvl5pPr marL="2286000" lvl="4" indent="-342900" algn="l">
-              <a:lnSpc>
-                <a:spcPct val="90000"/>
-              </a:lnSpc>
-              <a:spcBef>
-                <a:spcPts val="500"/>
-              </a:spcBef>
-              <a:spcAft>
-                <a:spcPts val="0"/>
-              </a:spcAft>
-              <a:buClr>
-                <a:schemeClr val="dk1"/>
-              </a:buClr>
-              <a:buSzPts val="1800"/>
-              <a:buChar char="•"/>
-              <a:defRPr/>
-            </a:lvl5pPr>
-            <a:lvl6pPr marL="2743200" lvl="5" indent="-342900" algn="l">
-              <a:lnSpc>
-                <a:spcPct val="90000"/>
-              </a:lnSpc>
-              <a:spcBef>
-                <a:spcPts val="500"/>
-              </a:spcBef>
-              <a:spcAft>
-                <a:spcPts val="0"/>
-              </a:spcAft>
-              <a:buClr>
-                <a:schemeClr val="dk1"/>
-              </a:buClr>
-              <a:buSzPts val="1800"/>
-              <a:buChar char="•"/>
-              <a:defRPr/>
-            </a:lvl6pPr>
-            <a:lvl7pPr marL="3200400" lvl="6" indent="-342900" algn="l">
-              <a:lnSpc>
-                <a:spcPct val="90000"/>
-              </a:lnSpc>
-              <a:spcBef>
-                <a:spcPts val="500"/>
-              </a:spcBef>
-              <a:spcAft>
-                <a:spcPts val="0"/>
-              </a:spcAft>
-              <a:buClr>
-                <a:schemeClr val="dk1"/>
-              </a:buClr>
-              <a:buSzPts val="1800"/>
-              <a:buChar char="•"/>
-              <a:defRPr/>
-            </a:lvl7pPr>
-            <a:lvl8pPr marL="3657600" lvl="7" indent="-342900" algn="l">
-              <a:lnSpc>
-                <a:spcPct val="90000"/>
-              </a:lnSpc>
-              <a:spcBef>
-                <a:spcPts val="500"/>
-              </a:spcBef>
-              <a:spcAft>
-                <a:spcPts val="0"/>
-              </a:spcAft>
-              <a:buClr>
-                <a:schemeClr val="dk1"/>
-              </a:buClr>
-              <a:buSzPts val="1800"/>
-              <a:buChar char="•"/>
-              <a:defRPr/>
-            </a:lvl8pPr>
-            <a:lvl9pPr marL="4114800" lvl="8" indent="-342900" algn="l">
-              <a:lnSpc>
-                <a:spcPct val="90000"/>
-              </a:lnSpc>
-              <a:spcBef>
-                <a:spcPts val="500"/>
-              </a:spcBef>
-              <a:spcAft>
-                <a:spcPts val="0"/>
-              </a:spcAft>
-              <a:buClr>
-                <a:schemeClr val="dk1"/>
-              </a:buClr>
-              <a:buSzPts val="1800"/>
-              <a:buChar char="•"/>
-              <a:defRPr/>
-            </a:lvl9pPr>
-          </a:lstStyle>
-          <a:p>
-            <a:endParaRPr/>
-          </a:p>
-        </p:txBody>
-      </p:sp>
-      <p:sp>
-        <p:nvSpPr>
-          <p:cNvPr id="75" name="Google Shape;75;p40"/>
-          <p:cNvSpPr txBox="1">
-            <a:spLocks noGrp="1"/>
-          </p:cNvSpPr>
-          <p:nvPr>
-            <p:ph type="dt" idx="10"/>
-          </p:nvPr>
-        </p:nvSpPr>
-        <p:spPr>
-          <a:xfrm>
-            <a:off x="838200" y="6356350"/>
-            <a:ext cx="2743200" cy="365125"/>
-          </a:xfrm>
-          <a:prstGeom prst="rect">
-            <a:avLst/>
-          </a:prstGeom>
-          <a:noFill/>
-          <a:ln>
-            <a:noFill/>
-          </a:ln>
-        </p:spPr>
-        <p:txBody>
-          <a:bodyPr spcFirstLastPara="1" wrap="square" lIns="91425" tIns="45700" rIns="91425" bIns="45700" anchor="ctr" anchorCtr="0">
-            <a:noAutofit/>
-          </a:bodyPr>
-          <a:lstStyle>
-            <a:lvl1pPr lvl="0" algn="l">
-              <a:spcBef>
-                <a:spcPts val="0"/>
-              </a:spcBef>
-              <a:spcAft>
-                <a:spcPts val="0"/>
-              </a:spcAft>
-              <a:buSzPts val="1400"/>
-              <a:buNone/>
-              <a:defRPr/>
-            </a:lvl1pPr>
-            <a:lvl2pPr lvl="1" algn="l">
-              <a:spcBef>
-                <a:spcPts val="0"/>
-              </a:spcBef>
-              <a:spcAft>
-                <a:spcPts val="0"/>
-              </a:spcAft>
-              <a:buSzPts val="1400"/>
-              <a:buNone/>
-              <a:defRPr/>
-            </a:lvl2pPr>
-            <a:lvl3pPr lvl="2" algn="l">
-              <a:spcBef>
-                <a:spcPts val="0"/>
-              </a:spcBef>
-              <a:spcAft>
-                <a:spcPts val="0"/>
-              </a:spcAft>
-              <a:buSzPts val="1400"/>
-              <a:buNone/>
-              <a:defRPr/>
-            </a:lvl3pPr>
-            <a:lvl4pPr lvl="3" algn="l">
-              <a:spcBef>
-                <a:spcPts val="0"/>
-              </a:spcBef>
-              <a:spcAft>
-                <a:spcPts val="0"/>
-              </a:spcAft>
-              <a:buSzPts val="1400"/>
-              <a:buNone/>
-              <a:defRPr/>
-            </a:lvl4pPr>
-            <a:lvl5pPr lvl="4" algn="l">
-              <a:spcBef>
-                <a:spcPts val="0"/>
-              </a:spcBef>
-              <a:spcAft>
-                <a:spcPts val="0"/>
-              </a:spcAft>
-              <a:buSzPts val="1400"/>
-              <a:buNone/>
-              <a:defRPr/>
-            </a:lvl5pPr>
-            <a:lvl6pPr lvl="5" algn="l">
-              <a:spcBef>
-                <a:spcPts val="0"/>
-              </a:spcBef>
-              <a:spcAft>
-                <a:spcPts val="0"/>
-              </a:spcAft>
-              <a:buSzPts val="1400"/>
-              <a:buNone/>
-              <a:defRPr/>
-            </a:lvl6pPr>
-            <a:lvl7pPr lvl="6" algn="l">
-              <a:spcBef>
-                <a:spcPts val="0"/>
-              </a:spcBef>
-              <a:spcAft>
-                <a:spcPts val="0"/>
-              </a:spcAft>
-              <a:buSzPts val="1400"/>
-              <a:buNone/>
-              <a:defRPr/>
-            </a:lvl7pPr>
-            <a:lvl8pPr lvl="7" algn="l">
-              <a:spcBef>
-                <a:spcPts val="0"/>
-              </a:spcBef>
-              <a:spcAft>
-                <a:spcPts val="0"/>
-              </a:spcAft>
-              <a:buSzPts val="1400"/>
-              <a:buNone/>
-              <a:defRPr/>
-            </a:lvl8pPr>
-            <a:lvl9pPr lvl="8" algn="l">
-              <a:spcBef>
-                <a:spcPts val="0"/>
-              </a:spcBef>
-              <a:spcAft>
-                <a:spcPts val="0"/>
-              </a:spcAft>
-              <a:buSzPts val="1400"/>
-              <a:buNone/>
-              <a:defRPr/>
-            </a:lvl9pPr>
-          </a:lstStyle>
-          <a:p>
-            <a:endParaRPr/>
-          </a:p>
-        </p:txBody>
-      </p:sp>
-      <p:sp>
-        <p:nvSpPr>
-          <p:cNvPr id="76" name="Google Shape;76;p40"/>
-          <p:cNvSpPr txBox="1">
-            <a:spLocks noGrp="1"/>
-          </p:cNvSpPr>
-          <p:nvPr>
-            <p:ph type="ftr" idx="11"/>
-          </p:nvPr>
-        </p:nvSpPr>
-        <p:spPr>
-          <a:xfrm>
-            <a:off x="4038600" y="6356350"/>
-            <a:ext cx="4114800" cy="365125"/>
-          </a:xfrm>
-          <a:prstGeom prst="rect">
-            <a:avLst/>
-          </a:prstGeom>
-          <a:noFill/>
-          <a:ln>
-            <a:noFill/>
-          </a:ln>
-        </p:spPr>
-        <p:txBody>
-          <a:bodyPr spcFirstLastPara="1" wrap="square" lIns="91425" tIns="45700" rIns="91425" bIns="45700" anchor="ctr" anchorCtr="0">
-            <a:noAutofit/>
-          </a:bodyPr>
-          <a:lstStyle>
-            <a:lvl1pPr lvl="0" algn="ctr">
-              <a:spcBef>
-                <a:spcPts val="0"/>
-              </a:spcBef>
-              <a:spcAft>
-                <a:spcPts val="0"/>
-              </a:spcAft>
-              <a:buSzPts val="1400"/>
-              <a:buNone/>
-              <a:defRPr/>
-            </a:lvl1pPr>
-            <a:lvl2pPr lvl="1" algn="l">
-              <a:spcBef>
-                <a:spcPts val="0"/>
-              </a:spcBef>
-              <a:spcAft>
-                <a:spcPts val="0"/>
-              </a:spcAft>
-              <a:buSzPts val="1400"/>
-              <a:buNone/>
-              <a:defRPr/>
-            </a:lvl2pPr>
-            <a:lvl3pPr lvl="2" algn="l">
-              <a:spcBef>
-                <a:spcPts val="0"/>
-              </a:spcBef>
-              <a:spcAft>
-                <a:spcPts val="0"/>
-              </a:spcAft>
-              <a:buSzPts val="1400"/>
-              <a:buNone/>
-              <a:defRPr/>
-            </a:lvl3pPr>
-            <a:lvl4pPr lvl="3" algn="l">
-              <a:spcBef>
-                <a:spcPts val="0"/>
-              </a:spcBef>
-              <a:spcAft>
-                <a:spcPts val="0"/>
-              </a:spcAft>
-              <a:buSzPts val="1400"/>
-              <a:buNone/>
-              <a:defRPr/>
-            </a:lvl4pPr>
-            <a:lvl5pPr lvl="4" algn="l">
-              <a:spcBef>
-                <a:spcPts val="0"/>
-              </a:spcBef>
-              <a:spcAft>
-                <a:spcPts val="0"/>
-              </a:spcAft>
-              <a:buSzPts val="1400"/>
-              <a:buNone/>
-              <a:defRPr/>
-            </a:lvl5pPr>
-            <a:lvl6pPr lvl="5" algn="l">
-              <a:spcBef>
-                <a:spcPts val="0"/>
-              </a:spcBef>
-              <a:spcAft>
-                <a:spcPts val="0"/>
-              </a:spcAft>
-              <a:buSzPts val="1400"/>
-              <a:buNone/>
-              <a:defRPr/>
-            </a:lvl6pPr>
-            <a:lvl7pPr lvl="6" algn="l">
-              <a:spcBef>
-                <a:spcPts val="0"/>
-              </a:spcBef>
-              <a:spcAft>
-                <a:spcPts val="0"/>
-              </a:spcAft>
-              <a:buSzPts val="1400"/>
-              <a:buNone/>
-              <a:defRPr/>
-            </a:lvl7pPr>
-            <a:lvl8pPr lvl="7" algn="l">
-              <a:spcBef>
-                <a:spcPts val="0"/>
-              </a:spcBef>
-              <a:spcAft>
-                <a:spcPts val="0"/>
-              </a:spcAft>
-              <a:buSzPts val="1400"/>
-              <a:buNone/>
-              <a:defRPr/>
-            </a:lvl8pPr>
-            <a:lvl9pPr lvl="8" algn="l">
-              <a:spcBef>
-                <a:spcPts val="0"/>
-              </a:spcBef>
-              <a:spcAft>
-                <a:spcPts val="0"/>
-              </a:spcAft>
-              <a:buSzPts val="1400"/>
-              <a:buNone/>
-              <a:defRPr/>
-            </a:lvl9pPr>
-          </a:lstStyle>
-          <a:p>
-            <a:endParaRPr/>
-          </a:p>
-        </p:txBody>
-      </p:sp>
-      <p:sp>
-        <p:nvSpPr>
-          <p:cNvPr id="77" name="Google Shape;77;p40"/>
-          <p:cNvSpPr txBox="1">
-            <a:spLocks noGrp="1"/>
-          </p:cNvSpPr>
-          <p:nvPr>
-            <p:ph type="sldNum" idx="12"/>
-          </p:nvPr>
-        </p:nvSpPr>
-        <p:spPr>
-          <a:xfrm>
-            <a:off x="8610600" y="6356350"/>
-            <a:ext cx="2743200" cy="365125"/>
-          </a:xfrm>
-          <a:prstGeom prst="rect">
-            <a:avLst/>
-          </a:prstGeom>
-          <a:noFill/>
-          <a:ln>
-            <a:noFill/>
-          </a:ln>
-        </p:spPr>
-        <p:txBody>
-          <a:bodyPr spcFirstLastPara="1" wrap="square" lIns="91425" tIns="45700" rIns="91425" bIns="45700" anchor="ctr" anchorCtr="0">
-            <a:noAutofit/>
-          </a:bodyPr>
-          <a:lstStyle>
-            <a:lvl1pPr marL="0" lvl="0" indent="0" algn="r">
-              <a:spcBef>
-                <a:spcPts val="0"/>
-              </a:spcBef>
-              <a:buNone/>
-              <a:defRPr/>
-            </a:lvl1pPr>
-            <a:lvl2pPr marL="0" lvl="1" indent="0" algn="r">
-              <a:spcBef>
-                <a:spcPts val="0"/>
-              </a:spcBef>
-              <a:buNone/>
-              <a:defRPr/>
-            </a:lvl2pPr>
-            <a:lvl3pPr marL="0" lvl="2" indent="0" algn="r">
-              <a:spcBef>
-                <a:spcPts val="0"/>
-              </a:spcBef>
-              <a:buNone/>
-              <a:defRPr/>
-            </a:lvl3pPr>
-            <a:lvl4pPr marL="0" lvl="3" indent="0" algn="r">
-              <a:spcBef>
-                <a:spcPts val="0"/>
-              </a:spcBef>
-              <a:buNone/>
-              <a:defRPr/>
-            </a:lvl4pPr>
-            <a:lvl5pPr marL="0" lvl="4" indent="0" algn="r">
-              <a:spcBef>
-                <a:spcPts val="0"/>
-              </a:spcBef>
-              <a:buNone/>
-              <a:defRPr/>
-            </a:lvl5pPr>
-            <a:lvl6pPr marL="0" lvl="5" indent="0" algn="r">
-              <a:spcBef>
-                <a:spcPts val="0"/>
-              </a:spcBef>
-              <a:buNone/>
-              <a:defRPr/>
-            </a:lvl6pPr>
-            <a:lvl7pPr marL="0" lvl="6" indent="0" algn="r">
-              <a:spcBef>
-                <a:spcPts val="0"/>
-              </a:spcBef>
-              <a:buNone/>
-              <a:defRPr/>
-            </a:lvl7pPr>
-            <a:lvl8pPr marL="0" lvl="7" indent="0" algn="r">
-              <a:spcBef>
-                <a:spcPts val="0"/>
-              </a:spcBef>
-              <a:buNone/>
-              <a:defRPr/>
-            </a:lvl8pPr>
-            <a:lvl9pPr marL="0" lvl="8" indent="0" algn="r">
-              <a:spcBef>
-                <a:spcPts val="0"/>
-              </a:spcBef>
-              <a:buNone/>
-              <a:defRPr/>
-            </a:lvl9pPr>
-          </a:lstStyle>
-          <a:p>
-            <a:pPr marL="0" lvl="0" indent="0" algn="r" rtl="0">
-              <a:spcBef>
-                <a:spcPts val="0"/>
-              </a:spcBef>
-              <a:spcAft>
-                <a:spcPts val="0"/>
-              </a:spcAft>
-              <a:buNone/>
-            </a:pPr>
-            <a:fld id="{00000000-1234-1234-1234-123412341234}" type="slidenum">
-              <a:rPr lang="en-US"/>
-              <a:t>‹#›</a:t>
-            </a:fld>
-            <a:endParaRPr/>
-          </a:p>
-        </p:txBody>
-      </p:sp>
-    </p:spTree>
-  </p:cSld>
-  <p:clrMapOvr>
-    <a:masterClrMapping/>
-  </p:clrMapOvr>
-</p:sldLayout>
-</file>
-
-<file path=ppt/slideLayouts/slideLayout11.xml><?xml version="1.0" encoding="utf-8"?>
-<p:sldLayout xmlns:a="http://schemas.openxmlformats.org/drawingml/2006/main" xmlns:r="http://schemas.openxmlformats.org/officeDocument/2006/relationships" xmlns:p="http://schemas.openxmlformats.org/presentationml/2006/main" matchingName="Vertical Title and Text" type="vertTitleAndTx">
-  <p:cSld name="VERTICAL_TITLE_AND_VERTICAL_TEXT">
-    <p:spTree>
-      <p:nvGrpSpPr>
-        <p:cNvPr id="1" name="Shape 78"/>
-        <p:cNvGrpSpPr/>
-        <p:nvPr/>
-      </p:nvGrpSpPr>
-      <p:grpSpPr>
-        <a:xfrm>
-          <a:off x="0" y="0"/>
-          <a:ext cx="0" cy="0"/>
-          <a:chOff x="0" y="0"/>
-          <a:chExt cx="0" cy="0"/>
-        </a:xfrm>
-      </p:grpSpPr>
-      <p:sp>
-        <p:nvSpPr>
-          <p:cNvPr id="79" name="Google Shape;79;p41"/>
-          <p:cNvSpPr txBox="1">
-            <a:spLocks noGrp="1"/>
-          </p:cNvSpPr>
-          <p:nvPr>
-            <p:ph type="title"/>
-          </p:nvPr>
-        </p:nvSpPr>
-        <p:spPr>
-          <a:xfrm rot="5400000">
-            <a:off x="7133431" y="1956594"/>
-            <a:ext cx="5811838" cy="2628900"/>
-          </a:xfrm>
-          <a:prstGeom prst="rect">
-            <a:avLst/>
-          </a:prstGeom>
-          <a:noFill/>
-          <a:ln>
-            <a:noFill/>
-          </a:ln>
-        </p:spPr>
-        <p:txBody>
-          <a:bodyPr spcFirstLastPara="1" wrap="square" lIns="91425" tIns="45700" rIns="91425" bIns="45700" anchor="ctr" anchorCtr="0">
-            <a:normAutofit/>
-          </a:bodyPr>
-          <a:lstStyle>
-            <a:lvl1pPr lvl="0" algn="l">
-              <a:lnSpc>
-                <a:spcPct val="90000"/>
-              </a:lnSpc>
-              <a:spcBef>
-                <a:spcPts val="0"/>
-              </a:spcBef>
-              <a:spcAft>
-                <a:spcPts val="0"/>
-              </a:spcAft>
-              <a:buClr>
-                <a:schemeClr val="dk1"/>
-              </a:buClr>
-              <a:buSzPts val="1800"/>
-              <a:buNone/>
-              <a:defRPr/>
-            </a:lvl1pPr>
-            <a:lvl2pPr lvl="1">
-              <a:spcBef>
-                <a:spcPts val="0"/>
-              </a:spcBef>
-              <a:spcAft>
-                <a:spcPts val="0"/>
-              </a:spcAft>
-              <a:buSzPts val="1400"/>
-              <a:buNone/>
-              <a:defRPr/>
-            </a:lvl2pPr>
-            <a:lvl3pPr lvl="2">
-              <a:spcBef>
-                <a:spcPts val="0"/>
-              </a:spcBef>
-              <a:spcAft>
-                <a:spcPts val="0"/>
-              </a:spcAft>
-              <a:buSzPts val="1400"/>
-              <a:buNone/>
-              <a:defRPr/>
-            </a:lvl3pPr>
-            <a:lvl4pPr lvl="3">
-              <a:spcBef>
-                <a:spcPts val="0"/>
-              </a:spcBef>
-              <a:spcAft>
-                <a:spcPts val="0"/>
-              </a:spcAft>
-              <a:buSzPts val="1400"/>
-              <a:buNone/>
-              <a:defRPr/>
-            </a:lvl4pPr>
-            <a:lvl5pPr lvl="4">
-              <a:spcBef>
-                <a:spcPts val="0"/>
-              </a:spcBef>
-              <a:spcAft>
-                <a:spcPts val="0"/>
-              </a:spcAft>
-              <a:buSzPts val="1400"/>
-              <a:buNone/>
-              <a:defRPr/>
-            </a:lvl5pPr>
-            <a:lvl6pPr lvl="5">
-              <a:spcBef>
-                <a:spcPts val="0"/>
-              </a:spcBef>
-              <a:spcAft>
-                <a:spcPts val="0"/>
-              </a:spcAft>
-              <a:buSzPts val="1400"/>
-              <a:buNone/>
-              <a:defRPr/>
-            </a:lvl6pPr>
-            <a:lvl7pPr lvl="6">
-              <a:spcBef>
-                <a:spcPts val="0"/>
-              </a:spcBef>
-              <a:spcAft>
-                <a:spcPts val="0"/>
-              </a:spcAft>
-              <a:buSzPts val="1400"/>
-              <a:buNone/>
-              <a:defRPr/>
-            </a:lvl7pPr>
-            <a:lvl8pPr lvl="7">
-              <a:spcBef>
-                <a:spcPts val="0"/>
-              </a:spcBef>
-              <a:spcAft>
-                <a:spcPts val="0"/>
-              </a:spcAft>
-              <a:buSzPts val="1400"/>
-              <a:buNone/>
-              <a:defRPr/>
-            </a:lvl8pPr>
-            <a:lvl9pPr lvl="8">
-              <a:spcBef>
-                <a:spcPts val="0"/>
-              </a:spcBef>
-              <a:spcAft>
-                <a:spcPts val="0"/>
-              </a:spcAft>
-              <a:buSzPts val="1400"/>
-              <a:buNone/>
-              <a:defRPr/>
-            </a:lvl9pPr>
-          </a:lstStyle>
-          <a:p>
-            <a:endParaRPr/>
-          </a:p>
-        </p:txBody>
-      </p:sp>
-      <p:sp>
-        <p:nvSpPr>
-          <p:cNvPr id="80" name="Google Shape;80;p41"/>
-          <p:cNvSpPr txBox="1">
-            <a:spLocks noGrp="1"/>
-          </p:cNvSpPr>
-          <p:nvPr>
-            <p:ph type="body" idx="1"/>
-          </p:nvPr>
-        </p:nvSpPr>
-        <p:spPr>
-          <a:xfrm rot="5400000">
-            <a:off x="1799431" y="-596106"/>
-            <a:ext cx="5811838" cy="7734300"/>
-          </a:xfrm>
-          <a:prstGeom prst="rect">
-            <a:avLst/>
-          </a:prstGeom>
-          <a:noFill/>
-          <a:ln>
-            <a:noFill/>
-          </a:ln>
-        </p:spPr>
-        <p:txBody>
-          <a:bodyPr spcFirstLastPara="1" wrap="square" lIns="91425" tIns="45700" rIns="91425" bIns="45700" anchor="t" anchorCtr="0">
-            <a:normAutofit/>
-          </a:bodyPr>
-          <a:lstStyle>
-            <a:lvl1pPr marL="457200" lvl="0" indent="-342900" algn="l">
-              <a:lnSpc>
-                <a:spcPct val="90000"/>
-              </a:lnSpc>
-              <a:spcBef>
-                <a:spcPts val="1000"/>
-              </a:spcBef>
-              <a:spcAft>
-                <a:spcPts val="0"/>
-              </a:spcAft>
-              <a:buClr>
-                <a:schemeClr val="dk1"/>
-              </a:buClr>
-              <a:buSzPts val="1800"/>
-              <a:buChar char="•"/>
-              <a:defRPr/>
-            </a:lvl1pPr>
-            <a:lvl2pPr marL="914400" lvl="1" indent="-342900" algn="l">
-              <a:lnSpc>
-                <a:spcPct val="90000"/>
-              </a:lnSpc>
-              <a:spcBef>
-                <a:spcPts val="500"/>
-              </a:spcBef>
-              <a:spcAft>
-                <a:spcPts val="0"/>
-              </a:spcAft>
-              <a:buClr>
-                <a:schemeClr val="dk1"/>
-              </a:buClr>
-              <a:buSzPts val="1800"/>
-              <a:buChar char="•"/>
-              <a:defRPr/>
-            </a:lvl2pPr>
-            <a:lvl3pPr marL="1371600" lvl="2" indent="-342900" algn="l">
-              <a:lnSpc>
-                <a:spcPct val="90000"/>
-              </a:lnSpc>
-              <a:spcBef>
-                <a:spcPts val="500"/>
-              </a:spcBef>
-              <a:spcAft>
-                <a:spcPts val="0"/>
-              </a:spcAft>
-              <a:buClr>
-                <a:schemeClr val="dk1"/>
-              </a:buClr>
-              <a:buSzPts val="1800"/>
-              <a:buChar char="•"/>
-              <a:defRPr/>
-            </a:lvl3pPr>
-            <a:lvl4pPr marL="1828800" lvl="3" indent="-342900" algn="l">
-              <a:lnSpc>
-                <a:spcPct val="90000"/>
-              </a:lnSpc>
-              <a:spcBef>
-                <a:spcPts val="500"/>
-              </a:spcBef>
-              <a:spcAft>
-                <a:spcPts val="0"/>
-              </a:spcAft>
-              <a:buClr>
-                <a:schemeClr val="dk1"/>
-              </a:buClr>
-              <a:buSzPts val="1800"/>
-              <a:buChar char="•"/>
-              <a:defRPr/>
-            </a:lvl4pPr>
-            <a:lvl5pPr marL="2286000" lvl="4" indent="-342900" algn="l">
-              <a:lnSpc>
-                <a:spcPct val="90000"/>
-              </a:lnSpc>
-              <a:spcBef>
-                <a:spcPts val="500"/>
-              </a:spcBef>
-              <a:spcAft>
-                <a:spcPts val="0"/>
-              </a:spcAft>
-              <a:buClr>
-                <a:schemeClr val="dk1"/>
-              </a:buClr>
-              <a:buSzPts val="1800"/>
-              <a:buChar char="•"/>
-              <a:defRPr/>
-            </a:lvl5pPr>
-            <a:lvl6pPr marL="2743200" lvl="5" indent="-342900" algn="l">
-              <a:lnSpc>
-                <a:spcPct val="90000"/>
-              </a:lnSpc>
-              <a:spcBef>
-                <a:spcPts val="500"/>
-              </a:spcBef>
-              <a:spcAft>
-                <a:spcPts val="0"/>
-              </a:spcAft>
-              <a:buClr>
-                <a:schemeClr val="dk1"/>
-              </a:buClr>
-              <a:buSzPts val="1800"/>
-              <a:buChar char="•"/>
-              <a:defRPr/>
-            </a:lvl6pPr>
-            <a:lvl7pPr marL="3200400" lvl="6" indent="-342900" algn="l">
-              <a:lnSpc>
-                <a:spcPct val="90000"/>
-              </a:lnSpc>
-              <a:spcBef>
-                <a:spcPts val="500"/>
-              </a:spcBef>
-              <a:spcAft>
-                <a:spcPts val="0"/>
-              </a:spcAft>
-              <a:buClr>
-                <a:schemeClr val="dk1"/>
-              </a:buClr>
-              <a:buSzPts val="1800"/>
-              <a:buChar char="•"/>
-              <a:defRPr/>
-            </a:lvl7pPr>
-            <a:lvl8pPr marL="3657600" lvl="7" indent="-342900" algn="l">
-              <a:lnSpc>
-                <a:spcPct val="90000"/>
-              </a:lnSpc>
-              <a:spcBef>
-                <a:spcPts val="500"/>
-              </a:spcBef>
-              <a:spcAft>
-                <a:spcPts val="0"/>
-              </a:spcAft>
-              <a:buClr>
-                <a:schemeClr val="dk1"/>
-              </a:buClr>
-              <a:buSzPts val="1800"/>
-              <a:buChar char="•"/>
-              <a:defRPr/>
-            </a:lvl8pPr>
-            <a:lvl9pPr marL="4114800" lvl="8" indent="-342900" algn="l">
-              <a:lnSpc>
-                <a:spcPct val="90000"/>
-              </a:lnSpc>
-              <a:spcBef>
-                <a:spcPts val="500"/>
-              </a:spcBef>
-              <a:spcAft>
-                <a:spcPts val="0"/>
-              </a:spcAft>
-              <a:buClr>
-                <a:schemeClr val="dk1"/>
-              </a:buClr>
-              <a:buSzPts val="1800"/>
-              <a:buChar char="•"/>
-              <a:defRPr/>
-            </a:lvl9pPr>
-          </a:lstStyle>
-          <a:p>
-            <a:endParaRPr/>
-          </a:p>
-        </p:txBody>
-      </p:sp>
-      <p:sp>
-        <p:nvSpPr>
-          <p:cNvPr id="81" name="Google Shape;81;p41"/>
-          <p:cNvSpPr txBox="1">
-            <a:spLocks noGrp="1"/>
-          </p:cNvSpPr>
-          <p:nvPr>
-            <p:ph type="dt" idx="10"/>
-          </p:nvPr>
-        </p:nvSpPr>
-        <p:spPr>
-          <a:xfrm>
-            <a:off x="838200" y="6356350"/>
-            <a:ext cx="2743200" cy="365125"/>
-          </a:xfrm>
-          <a:prstGeom prst="rect">
-            <a:avLst/>
-          </a:prstGeom>
-          <a:noFill/>
-          <a:ln>
-            <a:noFill/>
-          </a:ln>
-        </p:spPr>
-        <p:txBody>
-          <a:bodyPr spcFirstLastPara="1" wrap="square" lIns="91425" tIns="45700" rIns="91425" bIns="45700" anchor="ctr" anchorCtr="0">
-            <a:noAutofit/>
-          </a:bodyPr>
-          <a:lstStyle>
-            <a:lvl1pPr lvl="0" algn="l">
-              <a:spcBef>
-                <a:spcPts val="0"/>
-              </a:spcBef>
-              <a:spcAft>
-                <a:spcPts val="0"/>
-              </a:spcAft>
-              <a:buSzPts val="1400"/>
-              <a:buNone/>
-              <a:defRPr/>
-            </a:lvl1pPr>
-            <a:lvl2pPr lvl="1" algn="l">
-              <a:spcBef>
-                <a:spcPts val="0"/>
-              </a:spcBef>
-              <a:spcAft>
-                <a:spcPts val="0"/>
-              </a:spcAft>
-              <a:buSzPts val="1400"/>
-              <a:buNone/>
-              <a:defRPr/>
-            </a:lvl2pPr>
-            <a:lvl3pPr lvl="2" algn="l">
-              <a:spcBef>
-                <a:spcPts val="0"/>
-              </a:spcBef>
-              <a:spcAft>
-                <a:spcPts val="0"/>
-              </a:spcAft>
-              <a:buSzPts val="1400"/>
-              <a:buNone/>
-              <a:defRPr/>
-            </a:lvl3pPr>
-            <a:lvl4pPr lvl="3" algn="l">
-              <a:spcBef>
-                <a:spcPts val="0"/>
-              </a:spcBef>
-              <a:spcAft>
-                <a:spcPts val="0"/>
-              </a:spcAft>
-              <a:buSzPts val="1400"/>
-              <a:buNone/>
-              <a:defRPr/>
-            </a:lvl4pPr>
-            <a:lvl5pPr lvl="4" algn="l">
-              <a:spcBef>
-                <a:spcPts val="0"/>
-              </a:spcBef>
-              <a:spcAft>
-                <a:spcPts val="0"/>
-              </a:spcAft>
-              <a:buSzPts val="1400"/>
-              <a:buNone/>
-              <a:defRPr/>
-            </a:lvl5pPr>
-            <a:lvl6pPr lvl="5" algn="l">
-              <a:spcBef>
-                <a:spcPts val="0"/>
-              </a:spcBef>
-              <a:spcAft>
-                <a:spcPts val="0"/>
-              </a:spcAft>
-              <a:buSzPts val="1400"/>
-              <a:buNone/>
-              <a:defRPr/>
-            </a:lvl6pPr>
-            <a:lvl7pPr lvl="6" algn="l">
-              <a:spcBef>
-                <a:spcPts val="0"/>
-              </a:spcBef>
-              <a:spcAft>
-                <a:spcPts val="0"/>
-              </a:spcAft>
-              <a:buSzPts val="1400"/>
-              <a:buNone/>
-              <a:defRPr/>
-            </a:lvl7pPr>
-            <a:lvl8pPr lvl="7" algn="l">
-              <a:spcBef>
-                <a:spcPts val="0"/>
-              </a:spcBef>
-              <a:spcAft>
-                <a:spcPts val="0"/>
-              </a:spcAft>
-              <a:buSzPts val="1400"/>
-              <a:buNone/>
-              <a:defRPr/>
-            </a:lvl8pPr>
-            <a:lvl9pPr lvl="8" algn="l">
-              <a:spcBef>
-                <a:spcPts val="0"/>
-              </a:spcBef>
-              <a:spcAft>
-                <a:spcPts val="0"/>
-              </a:spcAft>
-              <a:buSzPts val="1400"/>
-              <a:buNone/>
-              <a:defRPr/>
-            </a:lvl9pPr>
-          </a:lstStyle>
-          <a:p>
-            <a:endParaRPr/>
-          </a:p>
-        </p:txBody>
-      </p:sp>
-      <p:sp>
-        <p:nvSpPr>
-          <p:cNvPr id="82" name="Google Shape;82;p41"/>
-          <p:cNvSpPr txBox="1">
-            <a:spLocks noGrp="1"/>
-          </p:cNvSpPr>
-          <p:nvPr>
-            <p:ph type="ftr" idx="11"/>
-          </p:nvPr>
-        </p:nvSpPr>
-        <p:spPr>
-          <a:xfrm>
-            <a:off x="4038600" y="6356350"/>
-            <a:ext cx="4114800" cy="365125"/>
-          </a:xfrm>
-          <a:prstGeom prst="rect">
-            <a:avLst/>
-          </a:prstGeom>
-          <a:noFill/>
-          <a:ln>
-            <a:noFill/>
-          </a:ln>
-        </p:spPr>
-        <p:txBody>
-          <a:bodyPr spcFirstLastPara="1" wrap="square" lIns="91425" tIns="45700" rIns="91425" bIns="45700" anchor="ctr" anchorCtr="0">
-            <a:noAutofit/>
-          </a:bodyPr>
-          <a:lstStyle>
-            <a:lvl1pPr lvl="0" algn="ctr">
-              <a:spcBef>
-                <a:spcPts val="0"/>
-              </a:spcBef>
-              <a:spcAft>
-                <a:spcPts val="0"/>
-              </a:spcAft>
-              <a:buSzPts val="1400"/>
-              <a:buNone/>
-              <a:defRPr/>
-            </a:lvl1pPr>
-            <a:lvl2pPr lvl="1" algn="l">
-              <a:spcBef>
-                <a:spcPts val="0"/>
-              </a:spcBef>
-              <a:spcAft>
-                <a:spcPts val="0"/>
-              </a:spcAft>
-              <a:buSzPts val="1400"/>
-              <a:buNone/>
-              <a:defRPr/>
-            </a:lvl2pPr>
-            <a:lvl3pPr lvl="2" algn="l">
-              <a:spcBef>
-                <a:spcPts val="0"/>
-              </a:spcBef>
-              <a:spcAft>
-                <a:spcPts val="0"/>
-              </a:spcAft>
-              <a:buSzPts val="1400"/>
-              <a:buNone/>
-              <a:defRPr/>
-            </a:lvl3pPr>
-            <a:lvl4pPr lvl="3" algn="l">
-              <a:spcBef>
-                <a:spcPts val="0"/>
-              </a:spcBef>
-              <a:spcAft>
-                <a:spcPts val="0"/>
-              </a:spcAft>
-              <a:buSzPts val="1400"/>
-              <a:buNone/>
-              <a:defRPr/>
-            </a:lvl4pPr>
-            <a:lvl5pPr lvl="4" algn="l">
-              <a:spcBef>
-                <a:spcPts val="0"/>
-              </a:spcBef>
-              <a:spcAft>
-                <a:spcPts val="0"/>
-              </a:spcAft>
-              <a:buSzPts val="1400"/>
-              <a:buNone/>
-              <a:defRPr/>
-            </a:lvl5pPr>
-            <a:lvl6pPr lvl="5" algn="l">
-              <a:spcBef>
-                <a:spcPts val="0"/>
-              </a:spcBef>
-              <a:spcAft>
-                <a:spcPts val="0"/>
-              </a:spcAft>
-              <a:buSzPts val="1400"/>
-              <a:buNone/>
-              <a:defRPr/>
-            </a:lvl6pPr>
-            <a:lvl7pPr lvl="6" algn="l">
-              <a:spcBef>
-                <a:spcPts val="0"/>
-              </a:spcBef>
-              <a:spcAft>
-                <a:spcPts val="0"/>
-              </a:spcAft>
-              <a:buSzPts val="1400"/>
-              <a:buNone/>
-              <a:defRPr/>
-            </a:lvl7pPr>
-            <a:lvl8pPr lvl="7" algn="l">
-              <a:spcBef>
-                <a:spcPts val="0"/>
-              </a:spcBef>
-              <a:spcAft>
-                <a:spcPts val="0"/>
-              </a:spcAft>
-              <a:buSzPts val="1400"/>
-              <a:buNone/>
-              <a:defRPr/>
-            </a:lvl8pPr>
-            <a:lvl9pPr lvl="8" algn="l">
-              <a:spcBef>
-                <a:spcPts val="0"/>
-              </a:spcBef>
-              <a:spcAft>
-                <a:spcPts val="0"/>
-              </a:spcAft>
-              <a:buSzPts val="1400"/>
-              <a:buNone/>
-              <a:defRPr/>
-            </a:lvl9pPr>
-          </a:lstStyle>
-          <a:p>
-            <a:endParaRPr/>
-          </a:p>
-        </p:txBody>
-      </p:sp>
-      <p:sp>
-        <p:nvSpPr>
-          <p:cNvPr id="83" name="Google Shape;83;p41"/>
-          <p:cNvSpPr txBox="1">
-            <a:spLocks noGrp="1"/>
-          </p:cNvSpPr>
-          <p:nvPr>
-            <p:ph type="sldNum" idx="12"/>
-          </p:nvPr>
-        </p:nvSpPr>
-        <p:spPr>
-          <a:xfrm>
-            <a:off x="8610600" y="6356350"/>
-            <a:ext cx="2743200" cy="365125"/>
-          </a:xfrm>
-          <a:prstGeom prst="rect">
-            <a:avLst/>
-          </a:prstGeom>
-          <a:noFill/>
-          <a:ln>
-            <a:noFill/>
-          </a:ln>
-        </p:spPr>
-        <p:txBody>
-          <a:bodyPr spcFirstLastPara="1" wrap="square" lIns="91425" tIns="45700" rIns="91425" bIns="45700" anchor="ctr" anchorCtr="0">
-            <a:noAutofit/>
-          </a:bodyPr>
-          <a:lstStyle>
-            <a:lvl1pPr marL="0" lvl="0" indent="0" algn="r">
-              <a:spcBef>
-                <a:spcPts val="0"/>
-              </a:spcBef>
-              <a:buNone/>
-              <a:defRPr/>
-            </a:lvl1pPr>
-            <a:lvl2pPr marL="0" lvl="1" indent="0" algn="r">
-              <a:spcBef>
-                <a:spcPts val="0"/>
-              </a:spcBef>
-              <a:buNone/>
-              <a:defRPr/>
-            </a:lvl2pPr>
-            <a:lvl3pPr marL="0" lvl="2" indent="0" algn="r">
-              <a:spcBef>
-                <a:spcPts val="0"/>
-              </a:spcBef>
-              <a:buNone/>
-              <a:defRPr/>
-            </a:lvl3pPr>
-            <a:lvl4pPr marL="0" lvl="3" indent="0" algn="r">
-              <a:spcBef>
-                <a:spcPts val="0"/>
-              </a:spcBef>
-              <a:buNone/>
-              <a:defRPr/>
-            </a:lvl4pPr>
-            <a:lvl5pPr marL="0" lvl="4" indent="0" algn="r">
-              <a:spcBef>
-                <a:spcPts val="0"/>
-              </a:spcBef>
-              <a:buNone/>
-              <a:defRPr/>
-            </a:lvl5pPr>
-            <a:lvl6pPr marL="0" lvl="5" indent="0" algn="r">
-              <a:spcBef>
-                <a:spcPts val="0"/>
-              </a:spcBef>
-              <a:buNone/>
-              <a:defRPr/>
-            </a:lvl6pPr>
-            <a:lvl7pPr marL="0" lvl="6" indent="0" algn="r">
-              <a:spcBef>
-                <a:spcPts val="0"/>
-              </a:spcBef>
-              <a:buNone/>
-              <a:defRPr/>
-            </a:lvl7pPr>
-            <a:lvl8pPr marL="0" lvl="7" indent="0" algn="r">
-              <a:spcBef>
-                <a:spcPts val="0"/>
-              </a:spcBef>
-              <a:buNone/>
-              <a:defRPr/>
-            </a:lvl8pPr>
-            <a:lvl9pPr marL="0" lvl="8" indent="0" algn="r">
-              <a:spcBef>
-                <a:spcPts val="0"/>
-              </a:spcBef>
-              <a:buNone/>
-              <a:defRPr/>
-            </a:lvl9pPr>
-          </a:lstStyle>
-          <a:p>
-            <a:pPr marL="0" lvl="0" indent="0" algn="r" rtl="0">
-              <a:spcBef>
-                <a:spcPts val="0"/>
-              </a:spcBef>
-              <a:spcAft>
-                <a:spcPts val="0"/>
-              </a:spcAft>
-              <a:buNone/>
-            </a:pPr>
-            <a:fld id="{00000000-1234-1234-1234-123412341234}" type="slidenum">
-              <a:rPr lang="en-US"/>
-              <a:t>‹#›</a:t>
-            </a:fld>
-            <a:endParaRPr/>
-          </a:p>
-        </p:txBody>
-      </p:sp>
-    </p:spTree>
-  </p:cSld>
-  <p:clrMapOvr>
-    <a:masterClrMapping/>
-  </p:clrMapOvr>
-</p:sldLayout>
-</file>
-
-<file path=ppt/slideLayouts/slideLayout12.xml><?xml version="1.0" encoding="utf-8"?>
 <p:sldLayout xmlns:a="http://schemas.openxmlformats.org/drawingml/2006/main" xmlns:r="http://schemas.openxmlformats.org/officeDocument/2006/relationships" xmlns:p="http://schemas.openxmlformats.org/presentationml/2006/main" matchingName="Title Slide" type="title">
   <p:cSld name="TITLE">
     <p:spTree>
@@ -8855,407 +7393,6 @@
 </file>
 
 <file path=ppt/slideLayouts/slideLayout7.xml><?xml version="1.0" encoding="utf-8"?>
-<p:sldLayout xmlns:a="http://schemas.openxmlformats.org/drawingml/2006/main" xmlns:r="http://schemas.openxmlformats.org/officeDocument/2006/relationships" xmlns:p="http://schemas.openxmlformats.org/presentationml/2006/main" matchingName="Blank" type="blank">
-  <p:cSld name="BLANK">
-    <p:spTree>
-      <p:nvGrpSpPr>
-        <p:cNvPr id="1" name="Shape 54"/>
-        <p:cNvGrpSpPr/>
-        <p:nvPr/>
-      </p:nvGrpSpPr>
-      <p:grpSpPr>
-        <a:xfrm>
-          <a:off x="0" y="0"/>
-          <a:ext cx="0" cy="0"/>
-          <a:chOff x="0" y="0"/>
-          <a:chExt cx="0" cy="0"/>
-        </a:xfrm>
-      </p:grpSpPr>
-      <p:sp>
-        <p:nvSpPr>
-          <p:cNvPr id="55" name="Google Shape;55;p37"/>
-          <p:cNvSpPr txBox="1">
-            <a:spLocks noGrp="1"/>
-          </p:cNvSpPr>
-          <p:nvPr>
-            <p:ph type="dt" idx="10"/>
-          </p:nvPr>
-        </p:nvSpPr>
-        <p:spPr>
-          <a:xfrm>
-            <a:off x="838200" y="6356350"/>
-            <a:ext cx="2743200" cy="365125"/>
-          </a:xfrm>
-          <a:prstGeom prst="rect">
-            <a:avLst/>
-          </a:prstGeom>
-          <a:noFill/>
-          <a:ln>
-            <a:noFill/>
-          </a:ln>
-        </p:spPr>
-        <p:txBody>
-          <a:bodyPr spcFirstLastPara="1" wrap="square" lIns="91425" tIns="45700" rIns="91425" bIns="45700" anchor="ctr" anchorCtr="0">
-            <a:noAutofit/>
-          </a:bodyPr>
-          <a:lstStyle>
-            <a:lvl1pPr lvl="0" algn="l">
-              <a:spcBef>
-                <a:spcPts val="0"/>
-              </a:spcBef>
-              <a:spcAft>
-                <a:spcPts val="0"/>
-              </a:spcAft>
-              <a:buSzPts val="1400"/>
-              <a:buNone/>
-              <a:defRPr/>
-            </a:lvl1pPr>
-            <a:lvl2pPr lvl="1" algn="l">
-              <a:spcBef>
-                <a:spcPts val="0"/>
-              </a:spcBef>
-              <a:spcAft>
-                <a:spcPts val="0"/>
-              </a:spcAft>
-              <a:buSzPts val="1400"/>
-              <a:buNone/>
-              <a:defRPr/>
-            </a:lvl2pPr>
-            <a:lvl3pPr lvl="2" algn="l">
-              <a:spcBef>
-                <a:spcPts val="0"/>
-              </a:spcBef>
-              <a:spcAft>
-                <a:spcPts val="0"/>
-              </a:spcAft>
-              <a:buSzPts val="1400"/>
-              <a:buNone/>
-              <a:defRPr/>
-            </a:lvl3pPr>
-            <a:lvl4pPr lvl="3" algn="l">
-              <a:spcBef>
-                <a:spcPts val="0"/>
-              </a:spcBef>
-              <a:spcAft>
-                <a:spcPts val="0"/>
-              </a:spcAft>
-              <a:buSzPts val="1400"/>
-              <a:buNone/>
-              <a:defRPr/>
-            </a:lvl4pPr>
-            <a:lvl5pPr lvl="4" algn="l">
-              <a:spcBef>
-                <a:spcPts val="0"/>
-              </a:spcBef>
-              <a:spcAft>
-                <a:spcPts val="0"/>
-              </a:spcAft>
-              <a:buSzPts val="1400"/>
-              <a:buNone/>
-              <a:defRPr/>
-            </a:lvl5pPr>
-            <a:lvl6pPr lvl="5" algn="l">
-              <a:spcBef>
-                <a:spcPts val="0"/>
-              </a:spcBef>
-              <a:spcAft>
-                <a:spcPts val="0"/>
-              </a:spcAft>
-              <a:buSzPts val="1400"/>
-              <a:buNone/>
-              <a:defRPr/>
-            </a:lvl6pPr>
-            <a:lvl7pPr lvl="6" algn="l">
-              <a:spcBef>
-                <a:spcPts val="0"/>
-              </a:spcBef>
-              <a:spcAft>
-                <a:spcPts val="0"/>
-              </a:spcAft>
-              <a:buSzPts val="1400"/>
-              <a:buNone/>
-              <a:defRPr/>
-            </a:lvl7pPr>
-            <a:lvl8pPr lvl="7" algn="l">
-              <a:spcBef>
-                <a:spcPts val="0"/>
-              </a:spcBef>
-              <a:spcAft>
-                <a:spcPts val="0"/>
-              </a:spcAft>
-              <a:buSzPts val="1400"/>
-              <a:buNone/>
-              <a:defRPr/>
-            </a:lvl8pPr>
-            <a:lvl9pPr lvl="8" algn="l">
-              <a:spcBef>
-                <a:spcPts val="0"/>
-              </a:spcBef>
-              <a:spcAft>
-                <a:spcPts val="0"/>
-              </a:spcAft>
-              <a:buSzPts val="1400"/>
-              <a:buNone/>
-              <a:defRPr/>
-            </a:lvl9pPr>
-          </a:lstStyle>
-          <a:p>
-            <a:endParaRPr/>
-          </a:p>
-        </p:txBody>
-      </p:sp>
-      <p:sp>
-        <p:nvSpPr>
-          <p:cNvPr id="56" name="Google Shape;56;p37"/>
-          <p:cNvSpPr txBox="1">
-            <a:spLocks noGrp="1"/>
-          </p:cNvSpPr>
-          <p:nvPr>
-            <p:ph type="ftr" idx="11"/>
-          </p:nvPr>
-        </p:nvSpPr>
-        <p:spPr>
-          <a:xfrm>
-            <a:off x="4038600" y="6356350"/>
-            <a:ext cx="4114800" cy="365125"/>
-          </a:xfrm>
-          <a:prstGeom prst="rect">
-            <a:avLst/>
-          </a:prstGeom>
-          <a:noFill/>
-          <a:ln>
-            <a:noFill/>
-          </a:ln>
-        </p:spPr>
-        <p:txBody>
-          <a:bodyPr spcFirstLastPara="1" wrap="square" lIns="91425" tIns="45700" rIns="91425" bIns="45700" anchor="ctr" anchorCtr="0">
-            <a:noAutofit/>
-          </a:bodyPr>
-          <a:lstStyle>
-            <a:lvl1pPr lvl="0" algn="ctr">
-              <a:spcBef>
-                <a:spcPts val="0"/>
-              </a:spcBef>
-              <a:spcAft>
-                <a:spcPts val="0"/>
-              </a:spcAft>
-              <a:buSzPts val="1400"/>
-              <a:buNone/>
-              <a:defRPr/>
-            </a:lvl1pPr>
-            <a:lvl2pPr lvl="1" algn="l">
-              <a:spcBef>
-                <a:spcPts val="0"/>
-              </a:spcBef>
-              <a:spcAft>
-                <a:spcPts val="0"/>
-              </a:spcAft>
-              <a:buSzPts val="1400"/>
-              <a:buNone/>
-              <a:defRPr/>
-            </a:lvl2pPr>
-            <a:lvl3pPr lvl="2" algn="l">
-              <a:spcBef>
-                <a:spcPts val="0"/>
-              </a:spcBef>
-              <a:spcAft>
-                <a:spcPts val="0"/>
-              </a:spcAft>
-              <a:buSzPts val="1400"/>
-              <a:buNone/>
-              <a:defRPr/>
-            </a:lvl3pPr>
-            <a:lvl4pPr lvl="3" algn="l">
-              <a:spcBef>
-                <a:spcPts val="0"/>
-              </a:spcBef>
-              <a:spcAft>
-                <a:spcPts val="0"/>
-              </a:spcAft>
-              <a:buSzPts val="1400"/>
-              <a:buNone/>
-              <a:defRPr/>
-            </a:lvl4pPr>
-            <a:lvl5pPr lvl="4" algn="l">
-              <a:spcBef>
-                <a:spcPts val="0"/>
-              </a:spcBef>
-              <a:spcAft>
-                <a:spcPts val="0"/>
-              </a:spcAft>
-              <a:buSzPts val="1400"/>
-              <a:buNone/>
-              <a:defRPr/>
-            </a:lvl5pPr>
-            <a:lvl6pPr lvl="5" algn="l">
-              <a:spcBef>
-                <a:spcPts val="0"/>
-              </a:spcBef>
-              <a:spcAft>
-                <a:spcPts val="0"/>
-              </a:spcAft>
-              <a:buSzPts val="1400"/>
-              <a:buNone/>
-              <a:defRPr/>
-            </a:lvl6pPr>
-            <a:lvl7pPr lvl="6" algn="l">
-              <a:spcBef>
-                <a:spcPts val="0"/>
-              </a:spcBef>
-              <a:spcAft>
-                <a:spcPts val="0"/>
-              </a:spcAft>
-              <a:buSzPts val="1400"/>
-              <a:buNone/>
-              <a:defRPr/>
-            </a:lvl7pPr>
-            <a:lvl8pPr lvl="7" algn="l">
-              <a:spcBef>
-                <a:spcPts val="0"/>
-              </a:spcBef>
-              <a:spcAft>
-                <a:spcPts val="0"/>
-              </a:spcAft>
-              <a:buSzPts val="1400"/>
-              <a:buNone/>
-              <a:defRPr/>
-            </a:lvl8pPr>
-            <a:lvl9pPr lvl="8" algn="l">
-              <a:spcBef>
-                <a:spcPts val="0"/>
-              </a:spcBef>
-              <a:spcAft>
-                <a:spcPts val="0"/>
-              </a:spcAft>
-              <a:buSzPts val="1400"/>
-              <a:buNone/>
-              <a:defRPr/>
-            </a:lvl9pPr>
-          </a:lstStyle>
-          <a:p>
-            <a:endParaRPr/>
-          </a:p>
-        </p:txBody>
-      </p:sp>
-      <p:sp>
-        <p:nvSpPr>
-          <p:cNvPr id="57" name="Google Shape;57;p37"/>
-          <p:cNvSpPr txBox="1">
-            <a:spLocks noGrp="1"/>
-          </p:cNvSpPr>
-          <p:nvPr>
-            <p:ph type="sldNum" idx="12"/>
-          </p:nvPr>
-        </p:nvSpPr>
-        <p:spPr>
-          <a:xfrm>
-            <a:off x="8610600" y="6356350"/>
-            <a:ext cx="2743200" cy="365125"/>
-          </a:xfrm>
-          <a:prstGeom prst="rect">
-            <a:avLst/>
-          </a:prstGeom>
-          <a:noFill/>
-          <a:ln>
-            <a:noFill/>
-          </a:ln>
-        </p:spPr>
-        <p:txBody>
-          <a:bodyPr spcFirstLastPara="1" wrap="square" lIns="91425" tIns="45700" rIns="91425" bIns="45700" anchor="ctr" anchorCtr="0">
-            <a:noAutofit/>
-          </a:bodyPr>
-          <a:lstStyle>
-            <a:lvl1pPr marL="0" lvl="0" indent="0" algn="r">
-              <a:spcBef>
-                <a:spcPts val="0"/>
-              </a:spcBef>
-              <a:buNone/>
-              <a:defRPr/>
-            </a:lvl1pPr>
-            <a:lvl2pPr marL="0" lvl="1" indent="0" algn="r">
-              <a:spcBef>
-                <a:spcPts val="0"/>
-              </a:spcBef>
-              <a:buNone/>
-              <a:defRPr/>
-            </a:lvl2pPr>
-            <a:lvl3pPr marL="0" lvl="2" indent="0" algn="r">
-              <a:spcBef>
-                <a:spcPts val="0"/>
-              </a:spcBef>
-              <a:buNone/>
-              <a:defRPr/>
-            </a:lvl3pPr>
-            <a:lvl4pPr marL="0" lvl="3" indent="0" algn="r">
-              <a:spcBef>
-                <a:spcPts val="0"/>
-              </a:spcBef>
-              <a:buNone/>
-              <a:defRPr/>
-            </a:lvl4pPr>
-            <a:lvl5pPr marL="0" lvl="4" indent="0" algn="r">
-              <a:spcBef>
-                <a:spcPts val="0"/>
-              </a:spcBef>
-              <a:buNone/>
-              <a:defRPr/>
-            </a:lvl5pPr>
-            <a:lvl6pPr marL="0" lvl="5" indent="0" algn="r">
-              <a:spcBef>
-                <a:spcPts val="0"/>
-              </a:spcBef>
-              <a:buNone/>
-              <a:defRPr/>
-            </a:lvl6pPr>
-            <a:lvl7pPr marL="0" lvl="6" indent="0" algn="r">
-              <a:spcBef>
-                <a:spcPts val="0"/>
-              </a:spcBef>
-              <a:buNone/>
-              <a:defRPr/>
-            </a:lvl7pPr>
-            <a:lvl8pPr marL="0" lvl="7" indent="0" algn="r">
-              <a:spcBef>
-                <a:spcPts val="0"/>
-              </a:spcBef>
-              <a:buNone/>
-              <a:defRPr/>
-            </a:lvl8pPr>
-            <a:lvl9pPr marL="0" lvl="8" indent="0" algn="r">
-              <a:spcBef>
-                <a:spcPts val="0"/>
-              </a:spcBef>
-              <a:buNone/>
-              <a:defRPr/>
-            </a:lvl9pPr>
-          </a:lstStyle>
-          <a:p>
-            <a:pPr marL="0" lvl="0" indent="0" algn="r" rtl="0">
-              <a:spcBef>
-                <a:spcPts val="0"/>
-              </a:spcBef>
-              <a:spcAft>
-                <a:spcPts val="0"/>
-              </a:spcAft>
-              <a:buNone/>
-            </a:pPr>
-            <a:fld id="{00000000-1234-1234-1234-123412341234}" type="slidenum">
-              <a:rPr lang="en-US"/>
-              <a:t>‹#›</a:t>
-            </a:fld>
-            <a:endParaRPr/>
-          </a:p>
-        </p:txBody>
-      </p:sp>
-    </p:spTree>
-  </p:cSld>
-  <p:clrMapOvr>
-    <a:masterClrMapping/>
-  </p:clrMapOvr>
-</p:sldLayout>
-</file>
-
-<file path=ppt/slideLayouts/slideLayout8.xml><?xml version="1.0" encoding="utf-8"?>
 <p:sldLayout xmlns:a="http://schemas.openxmlformats.org/drawingml/2006/main" xmlns:r="http://schemas.openxmlformats.org/officeDocument/2006/relationships" xmlns:p="http://schemas.openxmlformats.org/presentationml/2006/main" matchingName="Content with Caption" type="objTx">
   <p:cSld name="OBJECT_WITH_CAPTION_TEXT">
     <p:spTree>
@@ -10170,12 +8307,12 @@
 </p:sldLayout>
 </file>
 
-<file path=ppt/slideLayouts/slideLayout9.xml><?xml version="1.0" encoding="utf-8"?>
-<p:sldLayout xmlns:a="http://schemas.openxmlformats.org/drawingml/2006/main" xmlns:r="http://schemas.openxmlformats.org/officeDocument/2006/relationships" xmlns:p="http://schemas.openxmlformats.org/presentationml/2006/main" matchingName="Picture with Caption" type="picTx">
-  <p:cSld name="PICTURE_WITH_CAPTION_TEXT">
+<file path=ppt/slideLayouts/slideLayout8.xml><?xml version="1.0" encoding="utf-8"?>
+<p:sldLayout xmlns:a="http://schemas.openxmlformats.org/drawingml/2006/main" xmlns:r="http://schemas.openxmlformats.org/officeDocument/2006/relationships" xmlns:p="http://schemas.openxmlformats.org/presentationml/2006/main" matchingName="Title and Vertical Text" type="vertTx">
+  <p:cSld name="VERTICAL_TEXT">
     <p:spTree>
       <p:nvGrpSpPr>
-        <p:cNvPr id="1" name="Shape 65"/>
+        <p:cNvPr id="1" name="Shape 72"/>
         <p:cNvGrpSpPr/>
         <p:nvPr/>
       </p:nvGrpSpPr>
@@ -10189,7 +8326,7 @@
       </p:grpSpPr>
       <p:sp>
         <p:nvSpPr>
-          <p:cNvPr id="66" name="Google Shape;66;p39"/>
+          <p:cNvPr id="73" name="Google Shape;73;p40"/>
           <p:cNvSpPr txBox="1">
             <a:spLocks noGrp="1"/>
           </p:cNvSpPr>
@@ -10199,8 +8336,8 @@
         </p:nvSpPr>
         <p:spPr>
           <a:xfrm>
-            <a:off x="839788" y="457200"/>
-            <a:ext cx="3932237" cy="1600200"/>
+            <a:off x="838200" y="365125"/>
+            <a:ext cx="10515600" cy="1325563"/>
           </a:xfrm>
           <a:prstGeom prst="rect">
             <a:avLst/>
@@ -10211,7 +8348,7 @@
           </a:ln>
         </p:spPr>
         <p:txBody>
-          <a:bodyPr spcFirstLastPara="1" wrap="square" lIns="91425" tIns="45700" rIns="91425" bIns="45700" anchor="b" anchorCtr="0">
+          <a:bodyPr spcFirstLastPara="1" wrap="square" lIns="91425" tIns="45700" rIns="91425" bIns="45700" anchor="ctr" anchorCtr="0">
             <a:normAutofit/>
           </a:bodyPr>
           <a:lstStyle>
@@ -10228,10 +8365,9 @@
               <a:buClr>
                 <a:schemeClr val="dk1"/>
               </a:buClr>
-              <a:buSzPts val="3200"/>
-              <a:buFont typeface="Calibri"/>
-              <a:buNone/>
-              <a:defRPr sz="3200"/>
+              <a:buSzPts val="1800"/>
+              <a:buNone/>
+              <a:defRPr/>
             </a:lvl1pPr>
             <a:lvl2pPr lvl="1">
               <a:spcBef>
@@ -10329,31 +8465,7 @@
       </p:sp>
       <p:sp>
         <p:nvSpPr>
-          <p:cNvPr id="67" name="Google Shape;67;p39"/>
-          <p:cNvSpPr>
-            <a:spLocks noGrp="1"/>
-          </p:cNvSpPr>
-          <p:nvPr>
-            <p:ph type="pic" idx="2"/>
-          </p:nvPr>
-        </p:nvSpPr>
-        <p:spPr>
-          <a:xfrm>
-            <a:off x="5183188" y="987425"/>
-            <a:ext cx="6172200" cy="4873625"/>
-          </a:xfrm>
-          <a:prstGeom prst="rect">
-            <a:avLst/>
-          </a:prstGeom>
-          <a:noFill/>
-          <a:ln>
-            <a:noFill/>
-          </a:ln>
-        </p:spPr>
-      </p:sp>
-      <p:sp>
-        <p:nvSpPr>
-          <p:cNvPr id="68" name="Google Shape;68;p39"/>
+          <p:cNvPr id="74" name="Google Shape;74;p40"/>
           <p:cNvSpPr txBox="1">
             <a:spLocks noGrp="1"/>
           </p:cNvSpPr>
@@ -10362,9 +8474,9 @@
           </p:nvPr>
         </p:nvSpPr>
         <p:spPr>
-          <a:xfrm>
-            <a:off x="839788" y="2057400"/>
-            <a:ext cx="3932237" cy="3811588"/>
+          <a:xfrm rot="5400000">
+            <a:off x="3920331" y="-1256506"/>
+            <a:ext cx="4351338" cy="10515600"/>
           </a:xfrm>
           <a:prstGeom prst="rect">
             <a:avLst/>
@@ -10379,7 +8491,7 @@
             <a:normAutofit/>
           </a:bodyPr>
           <a:lstStyle>
-            <a:lvl1pPr marL="457200" lvl="0" indent="-228600" algn="l">
+            <a:lvl1pPr marL="457200" lvl="0" indent="-342900" algn="l">
               <a:lnSpc>
                 <a:spcPct val="90000"/>
               </a:lnSpc>
@@ -10392,11 +8504,11 @@
               <a:buClr>
                 <a:schemeClr val="dk1"/>
               </a:buClr>
-              <a:buSzPts val="1600"/>
-              <a:buNone/>
-              <a:defRPr sz="1600"/>
+              <a:buSzPts val="1800"/>
+              <a:buChar char="•"/>
+              <a:defRPr/>
             </a:lvl1pPr>
-            <a:lvl2pPr marL="914400" lvl="1" indent="-228600" algn="l">
+            <a:lvl2pPr marL="914400" lvl="1" indent="-342900" algn="l">
               <a:lnSpc>
                 <a:spcPct val="90000"/>
               </a:lnSpc>
@@ -10409,11 +8521,11 @@
               <a:buClr>
                 <a:schemeClr val="dk1"/>
               </a:buClr>
-              <a:buSzPts val="1400"/>
-              <a:buNone/>
-              <a:defRPr sz="1400"/>
+              <a:buSzPts val="1800"/>
+              <a:buChar char="•"/>
+              <a:defRPr/>
             </a:lvl2pPr>
-            <a:lvl3pPr marL="1371600" lvl="2" indent="-228600" algn="l">
+            <a:lvl3pPr marL="1371600" lvl="2" indent="-342900" algn="l">
               <a:lnSpc>
                 <a:spcPct val="90000"/>
               </a:lnSpc>
@@ -10426,11 +8538,11 @@
               <a:buClr>
                 <a:schemeClr val="dk1"/>
               </a:buClr>
-              <a:buSzPts val="1200"/>
-              <a:buNone/>
-              <a:defRPr sz="1200"/>
+              <a:buSzPts val="1800"/>
+              <a:buChar char="•"/>
+              <a:defRPr/>
             </a:lvl3pPr>
-            <a:lvl4pPr marL="1828800" lvl="3" indent="-228600" algn="l">
+            <a:lvl4pPr marL="1828800" lvl="3" indent="-342900" algn="l">
               <a:lnSpc>
                 <a:spcPct val="90000"/>
               </a:lnSpc>
@@ -10443,11 +8555,11 @@
               <a:buClr>
                 <a:schemeClr val="dk1"/>
               </a:buClr>
-              <a:buSzPts val="1000"/>
-              <a:buNone/>
-              <a:defRPr sz="1000"/>
+              <a:buSzPts val="1800"/>
+              <a:buChar char="•"/>
+              <a:defRPr/>
             </a:lvl4pPr>
-            <a:lvl5pPr marL="2286000" lvl="4" indent="-228600" algn="l">
+            <a:lvl5pPr marL="2286000" lvl="4" indent="-342900" algn="l">
               <a:lnSpc>
                 <a:spcPct val="90000"/>
               </a:lnSpc>
@@ -10460,11 +8572,11 @@
               <a:buClr>
                 <a:schemeClr val="dk1"/>
               </a:buClr>
-              <a:buSzPts val="1000"/>
-              <a:buNone/>
-              <a:defRPr sz="1000"/>
+              <a:buSzPts val="1800"/>
+              <a:buChar char="•"/>
+              <a:defRPr/>
             </a:lvl5pPr>
-            <a:lvl6pPr marL="2743200" lvl="5" indent="-228600" algn="l">
+            <a:lvl6pPr marL="2743200" lvl="5" indent="-342900" algn="l">
               <a:lnSpc>
                 <a:spcPct val="90000"/>
               </a:lnSpc>
@@ -10477,11 +8589,11 @@
               <a:buClr>
                 <a:schemeClr val="dk1"/>
               </a:buClr>
-              <a:buSzPts val="1000"/>
-              <a:buNone/>
-              <a:defRPr sz="1000"/>
+              <a:buSzPts val="1800"/>
+              <a:buChar char="•"/>
+              <a:defRPr/>
             </a:lvl6pPr>
-            <a:lvl7pPr marL="3200400" lvl="6" indent="-228600" algn="l">
+            <a:lvl7pPr marL="3200400" lvl="6" indent="-342900" algn="l">
               <a:lnSpc>
                 <a:spcPct val="90000"/>
               </a:lnSpc>
@@ -10494,11 +8606,11 @@
               <a:buClr>
                 <a:schemeClr val="dk1"/>
               </a:buClr>
-              <a:buSzPts val="1000"/>
-              <a:buNone/>
-              <a:defRPr sz="1000"/>
+              <a:buSzPts val="1800"/>
+              <a:buChar char="•"/>
+              <a:defRPr/>
             </a:lvl7pPr>
-            <a:lvl8pPr marL="3657600" lvl="7" indent="-228600" algn="l">
+            <a:lvl8pPr marL="3657600" lvl="7" indent="-342900" algn="l">
               <a:lnSpc>
                 <a:spcPct val="90000"/>
               </a:lnSpc>
@@ -10511,11 +8623,11 @@
               <a:buClr>
                 <a:schemeClr val="dk1"/>
               </a:buClr>
-              <a:buSzPts val="1000"/>
-              <a:buNone/>
-              <a:defRPr sz="1000"/>
+              <a:buSzPts val="1800"/>
+              <a:buChar char="•"/>
+              <a:defRPr/>
             </a:lvl8pPr>
-            <a:lvl9pPr marL="4114800" lvl="8" indent="-228600" algn="l">
+            <a:lvl9pPr marL="4114800" lvl="8" indent="-342900" algn="l">
               <a:lnSpc>
                 <a:spcPct val="90000"/>
               </a:lnSpc>
@@ -10528,9 +8640,9 @@
               <a:buClr>
                 <a:schemeClr val="dk1"/>
               </a:buClr>
-              <a:buSzPts val="1000"/>
-              <a:buNone/>
-              <a:defRPr sz="1000"/>
+              <a:buSzPts val="1800"/>
+              <a:buChar char="•"/>
+              <a:defRPr/>
             </a:lvl9pPr>
           </a:lstStyle>
           <a:p>
@@ -10540,7 +8652,7 @@
       </p:sp>
       <p:sp>
         <p:nvSpPr>
-          <p:cNvPr id="69" name="Google Shape;69;p39"/>
+          <p:cNvPr id="75" name="Google Shape;75;p40"/>
           <p:cNvSpPr txBox="1">
             <a:spLocks noGrp="1"/>
           </p:cNvSpPr>
@@ -10673,7 +8785,7 @@
       </p:sp>
       <p:sp>
         <p:nvSpPr>
-          <p:cNvPr id="70" name="Google Shape;70;p39"/>
+          <p:cNvPr id="76" name="Google Shape;76;p40"/>
           <p:cNvSpPr txBox="1">
             <a:spLocks noGrp="1"/>
           </p:cNvSpPr>
@@ -10806,7 +8918,734 @@
       </p:sp>
       <p:sp>
         <p:nvSpPr>
-          <p:cNvPr id="71" name="Google Shape;71;p39"/>
+          <p:cNvPr id="77" name="Google Shape;77;p40"/>
+          <p:cNvSpPr txBox="1">
+            <a:spLocks noGrp="1"/>
+          </p:cNvSpPr>
+          <p:nvPr>
+            <p:ph type="sldNum" idx="12"/>
+          </p:nvPr>
+        </p:nvSpPr>
+        <p:spPr>
+          <a:xfrm>
+            <a:off x="8610600" y="6356350"/>
+            <a:ext cx="2743200" cy="365125"/>
+          </a:xfrm>
+          <a:prstGeom prst="rect">
+            <a:avLst/>
+          </a:prstGeom>
+          <a:noFill/>
+          <a:ln>
+            <a:noFill/>
+          </a:ln>
+        </p:spPr>
+        <p:txBody>
+          <a:bodyPr spcFirstLastPara="1" wrap="square" lIns="91425" tIns="45700" rIns="91425" bIns="45700" anchor="ctr" anchorCtr="0">
+            <a:noAutofit/>
+          </a:bodyPr>
+          <a:lstStyle>
+            <a:lvl1pPr marL="0" lvl="0" indent="0" algn="r">
+              <a:spcBef>
+                <a:spcPts val="0"/>
+              </a:spcBef>
+              <a:buNone/>
+              <a:defRPr/>
+            </a:lvl1pPr>
+            <a:lvl2pPr marL="0" lvl="1" indent="0" algn="r">
+              <a:spcBef>
+                <a:spcPts val="0"/>
+              </a:spcBef>
+              <a:buNone/>
+              <a:defRPr/>
+            </a:lvl2pPr>
+            <a:lvl3pPr marL="0" lvl="2" indent="0" algn="r">
+              <a:spcBef>
+                <a:spcPts val="0"/>
+              </a:spcBef>
+              <a:buNone/>
+              <a:defRPr/>
+            </a:lvl3pPr>
+            <a:lvl4pPr marL="0" lvl="3" indent="0" algn="r">
+              <a:spcBef>
+                <a:spcPts val="0"/>
+              </a:spcBef>
+              <a:buNone/>
+              <a:defRPr/>
+            </a:lvl4pPr>
+            <a:lvl5pPr marL="0" lvl="4" indent="0" algn="r">
+              <a:spcBef>
+                <a:spcPts val="0"/>
+              </a:spcBef>
+              <a:buNone/>
+              <a:defRPr/>
+            </a:lvl5pPr>
+            <a:lvl6pPr marL="0" lvl="5" indent="0" algn="r">
+              <a:spcBef>
+                <a:spcPts val="0"/>
+              </a:spcBef>
+              <a:buNone/>
+              <a:defRPr/>
+            </a:lvl6pPr>
+            <a:lvl7pPr marL="0" lvl="6" indent="0" algn="r">
+              <a:spcBef>
+                <a:spcPts val="0"/>
+              </a:spcBef>
+              <a:buNone/>
+              <a:defRPr/>
+            </a:lvl7pPr>
+            <a:lvl8pPr marL="0" lvl="7" indent="0" algn="r">
+              <a:spcBef>
+                <a:spcPts val="0"/>
+              </a:spcBef>
+              <a:buNone/>
+              <a:defRPr/>
+            </a:lvl8pPr>
+            <a:lvl9pPr marL="0" lvl="8" indent="0" algn="r">
+              <a:spcBef>
+                <a:spcPts val="0"/>
+              </a:spcBef>
+              <a:buNone/>
+              <a:defRPr/>
+            </a:lvl9pPr>
+          </a:lstStyle>
+          <a:p>
+            <a:pPr marL="0" lvl="0" indent="0" algn="r" rtl="0">
+              <a:spcBef>
+                <a:spcPts val="0"/>
+              </a:spcBef>
+              <a:spcAft>
+                <a:spcPts val="0"/>
+              </a:spcAft>
+              <a:buNone/>
+            </a:pPr>
+            <a:fld id="{00000000-1234-1234-1234-123412341234}" type="slidenum">
+              <a:rPr lang="en-US"/>
+              <a:t>‹#›</a:t>
+            </a:fld>
+            <a:endParaRPr/>
+          </a:p>
+        </p:txBody>
+      </p:sp>
+    </p:spTree>
+  </p:cSld>
+  <p:clrMapOvr>
+    <a:masterClrMapping/>
+  </p:clrMapOvr>
+</p:sldLayout>
+</file>
+
+<file path=ppt/slideLayouts/slideLayout9.xml><?xml version="1.0" encoding="utf-8"?>
+<p:sldLayout xmlns:a="http://schemas.openxmlformats.org/drawingml/2006/main" xmlns:r="http://schemas.openxmlformats.org/officeDocument/2006/relationships" xmlns:p="http://schemas.openxmlformats.org/presentationml/2006/main" matchingName="Vertical Title and Text" type="vertTitleAndTx">
+  <p:cSld name="VERTICAL_TITLE_AND_VERTICAL_TEXT">
+    <p:spTree>
+      <p:nvGrpSpPr>
+        <p:cNvPr id="1" name="Shape 78"/>
+        <p:cNvGrpSpPr/>
+        <p:nvPr/>
+      </p:nvGrpSpPr>
+      <p:grpSpPr>
+        <a:xfrm>
+          <a:off x="0" y="0"/>
+          <a:ext cx="0" cy="0"/>
+          <a:chOff x="0" y="0"/>
+          <a:chExt cx="0" cy="0"/>
+        </a:xfrm>
+      </p:grpSpPr>
+      <p:sp>
+        <p:nvSpPr>
+          <p:cNvPr id="79" name="Google Shape;79;p41"/>
+          <p:cNvSpPr txBox="1">
+            <a:spLocks noGrp="1"/>
+          </p:cNvSpPr>
+          <p:nvPr>
+            <p:ph type="title"/>
+          </p:nvPr>
+        </p:nvSpPr>
+        <p:spPr>
+          <a:xfrm rot="5400000">
+            <a:off x="7133431" y="1956594"/>
+            <a:ext cx="5811838" cy="2628900"/>
+          </a:xfrm>
+          <a:prstGeom prst="rect">
+            <a:avLst/>
+          </a:prstGeom>
+          <a:noFill/>
+          <a:ln>
+            <a:noFill/>
+          </a:ln>
+        </p:spPr>
+        <p:txBody>
+          <a:bodyPr spcFirstLastPara="1" wrap="square" lIns="91425" tIns="45700" rIns="91425" bIns="45700" anchor="ctr" anchorCtr="0">
+            <a:normAutofit/>
+          </a:bodyPr>
+          <a:lstStyle>
+            <a:lvl1pPr lvl="0" algn="l">
+              <a:lnSpc>
+                <a:spcPct val="90000"/>
+              </a:lnSpc>
+              <a:spcBef>
+                <a:spcPts val="0"/>
+              </a:spcBef>
+              <a:spcAft>
+                <a:spcPts val="0"/>
+              </a:spcAft>
+              <a:buClr>
+                <a:schemeClr val="dk1"/>
+              </a:buClr>
+              <a:buSzPts val="1800"/>
+              <a:buNone/>
+              <a:defRPr/>
+            </a:lvl1pPr>
+            <a:lvl2pPr lvl="1">
+              <a:spcBef>
+                <a:spcPts val="0"/>
+              </a:spcBef>
+              <a:spcAft>
+                <a:spcPts val="0"/>
+              </a:spcAft>
+              <a:buSzPts val="1400"/>
+              <a:buNone/>
+              <a:defRPr/>
+            </a:lvl2pPr>
+            <a:lvl3pPr lvl="2">
+              <a:spcBef>
+                <a:spcPts val="0"/>
+              </a:spcBef>
+              <a:spcAft>
+                <a:spcPts val="0"/>
+              </a:spcAft>
+              <a:buSzPts val="1400"/>
+              <a:buNone/>
+              <a:defRPr/>
+            </a:lvl3pPr>
+            <a:lvl4pPr lvl="3">
+              <a:spcBef>
+                <a:spcPts val="0"/>
+              </a:spcBef>
+              <a:spcAft>
+                <a:spcPts val="0"/>
+              </a:spcAft>
+              <a:buSzPts val="1400"/>
+              <a:buNone/>
+              <a:defRPr/>
+            </a:lvl4pPr>
+            <a:lvl5pPr lvl="4">
+              <a:spcBef>
+                <a:spcPts val="0"/>
+              </a:spcBef>
+              <a:spcAft>
+                <a:spcPts val="0"/>
+              </a:spcAft>
+              <a:buSzPts val="1400"/>
+              <a:buNone/>
+              <a:defRPr/>
+            </a:lvl5pPr>
+            <a:lvl6pPr lvl="5">
+              <a:spcBef>
+                <a:spcPts val="0"/>
+              </a:spcBef>
+              <a:spcAft>
+                <a:spcPts val="0"/>
+              </a:spcAft>
+              <a:buSzPts val="1400"/>
+              <a:buNone/>
+              <a:defRPr/>
+            </a:lvl6pPr>
+            <a:lvl7pPr lvl="6">
+              <a:spcBef>
+                <a:spcPts val="0"/>
+              </a:spcBef>
+              <a:spcAft>
+                <a:spcPts val="0"/>
+              </a:spcAft>
+              <a:buSzPts val="1400"/>
+              <a:buNone/>
+              <a:defRPr/>
+            </a:lvl7pPr>
+            <a:lvl8pPr lvl="7">
+              <a:spcBef>
+                <a:spcPts val="0"/>
+              </a:spcBef>
+              <a:spcAft>
+                <a:spcPts val="0"/>
+              </a:spcAft>
+              <a:buSzPts val="1400"/>
+              <a:buNone/>
+              <a:defRPr/>
+            </a:lvl8pPr>
+            <a:lvl9pPr lvl="8">
+              <a:spcBef>
+                <a:spcPts val="0"/>
+              </a:spcBef>
+              <a:spcAft>
+                <a:spcPts val="0"/>
+              </a:spcAft>
+              <a:buSzPts val="1400"/>
+              <a:buNone/>
+              <a:defRPr/>
+            </a:lvl9pPr>
+          </a:lstStyle>
+          <a:p>
+            <a:endParaRPr/>
+          </a:p>
+        </p:txBody>
+      </p:sp>
+      <p:sp>
+        <p:nvSpPr>
+          <p:cNvPr id="80" name="Google Shape;80;p41"/>
+          <p:cNvSpPr txBox="1">
+            <a:spLocks noGrp="1"/>
+          </p:cNvSpPr>
+          <p:nvPr>
+            <p:ph type="body" idx="1"/>
+          </p:nvPr>
+        </p:nvSpPr>
+        <p:spPr>
+          <a:xfrm rot="5400000">
+            <a:off x="1799431" y="-596106"/>
+            <a:ext cx="5811838" cy="7734300"/>
+          </a:xfrm>
+          <a:prstGeom prst="rect">
+            <a:avLst/>
+          </a:prstGeom>
+          <a:noFill/>
+          <a:ln>
+            <a:noFill/>
+          </a:ln>
+        </p:spPr>
+        <p:txBody>
+          <a:bodyPr spcFirstLastPara="1" wrap="square" lIns="91425" tIns="45700" rIns="91425" bIns="45700" anchor="t" anchorCtr="0">
+            <a:normAutofit/>
+          </a:bodyPr>
+          <a:lstStyle>
+            <a:lvl1pPr marL="457200" lvl="0" indent="-342900" algn="l">
+              <a:lnSpc>
+                <a:spcPct val="90000"/>
+              </a:lnSpc>
+              <a:spcBef>
+                <a:spcPts val="1000"/>
+              </a:spcBef>
+              <a:spcAft>
+                <a:spcPts val="0"/>
+              </a:spcAft>
+              <a:buClr>
+                <a:schemeClr val="dk1"/>
+              </a:buClr>
+              <a:buSzPts val="1800"/>
+              <a:buChar char="•"/>
+              <a:defRPr/>
+            </a:lvl1pPr>
+            <a:lvl2pPr marL="914400" lvl="1" indent="-342900" algn="l">
+              <a:lnSpc>
+                <a:spcPct val="90000"/>
+              </a:lnSpc>
+              <a:spcBef>
+                <a:spcPts val="500"/>
+              </a:spcBef>
+              <a:spcAft>
+                <a:spcPts val="0"/>
+              </a:spcAft>
+              <a:buClr>
+                <a:schemeClr val="dk1"/>
+              </a:buClr>
+              <a:buSzPts val="1800"/>
+              <a:buChar char="•"/>
+              <a:defRPr/>
+            </a:lvl2pPr>
+            <a:lvl3pPr marL="1371600" lvl="2" indent="-342900" algn="l">
+              <a:lnSpc>
+                <a:spcPct val="90000"/>
+              </a:lnSpc>
+              <a:spcBef>
+                <a:spcPts val="500"/>
+              </a:spcBef>
+              <a:spcAft>
+                <a:spcPts val="0"/>
+              </a:spcAft>
+              <a:buClr>
+                <a:schemeClr val="dk1"/>
+              </a:buClr>
+              <a:buSzPts val="1800"/>
+              <a:buChar char="•"/>
+              <a:defRPr/>
+            </a:lvl3pPr>
+            <a:lvl4pPr marL="1828800" lvl="3" indent="-342900" algn="l">
+              <a:lnSpc>
+                <a:spcPct val="90000"/>
+              </a:lnSpc>
+              <a:spcBef>
+                <a:spcPts val="500"/>
+              </a:spcBef>
+              <a:spcAft>
+                <a:spcPts val="0"/>
+              </a:spcAft>
+              <a:buClr>
+                <a:schemeClr val="dk1"/>
+              </a:buClr>
+              <a:buSzPts val="1800"/>
+              <a:buChar char="•"/>
+              <a:defRPr/>
+            </a:lvl4pPr>
+            <a:lvl5pPr marL="2286000" lvl="4" indent="-342900" algn="l">
+              <a:lnSpc>
+                <a:spcPct val="90000"/>
+              </a:lnSpc>
+              <a:spcBef>
+                <a:spcPts val="500"/>
+              </a:spcBef>
+              <a:spcAft>
+                <a:spcPts val="0"/>
+              </a:spcAft>
+              <a:buClr>
+                <a:schemeClr val="dk1"/>
+              </a:buClr>
+              <a:buSzPts val="1800"/>
+              <a:buChar char="•"/>
+              <a:defRPr/>
+            </a:lvl5pPr>
+            <a:lvl6pPr marL="2743200" lvl="5" indent="-342900" algn="l">
+              <a:lnSpc>
+                <a:spcPct val="90000"/>
+              </a:lnSpc>
+              <a:spcBef>
+                <a:spcPts val="500"/>
+              </a:spcBef>
+              <a:spcAft>
+                <a:spcPts val="0"/>
+              </a:spcAft>
+              <a:buClr>
+                <a:schemeClr val="dk1"/>
+              </a:buClr>
+              <a:buSzPts val="1800"/>
+              <a:buChar char="•"/>
+              <a:defRPr/>
+            </a:lvl6pPr>
+            <a:lvl7pPr marL="3200400" lvl="6" indent="-342900" algn="l">
+              <a:lnSpc>
+                <a:spcPct val="90000"/>
+              </a:lnSpc>
+              <a:spcBef>
+                <a:spcPts val="500"/>
+              </a:spcBef>
+              <a:spcAft>
+                <a:spcPts val="0"/>
+              </a:spcAft>
+              <a:buClr>
+                <a:schemeClr val="dk1"/>
+              </a:buClr>
+              <a:buSzPts val="1800"/>
+              <a:buChar char="•"/>
+              <a:defRPr/>
+            </a:lvl7pPr>
+            <a:lvl8pPr marL="3657600" lvl="7" indent="-342900" algn="l">
+              <a:lnSpc>
+                <a:spcPct val="90000"/>
+              </a:lnSpc>
+              <a:spcBef>
+                <a:spcPts val="500"/>
+              </a:spcBef>
+              <a:spcAft>
+                <a:spcPts val="0"/>
+              </a:spcAft>
+              <a:buClr>
+                <a:schemeClr val="dk1"/>
+              </a:buClr>
+              <a:buSzPts val="1800"/>
+              <a:buChar char="•"/>
+              <a:defRPr/>
+            </a:lvl8pPr>
+            <a:lvl9pPr marL="4114800" lvl="8" indent="-342900" algn="l">
+              <a:lnSpc>
+                <a:spcPct val="90000"/>
+              </a:lnSpc>
+              <a:spcBef>
+                <a:spcPts val="500"/>
+              </a:spcBef>
+              <a:spcAft>
+                <a:spcPts val="0"/>
+              </a:spcAft>
+              <a:buClr>
+                <a:schemeClr val="dk1"/>
+              </a:buClr>
+              <a:buSzPts val="1800"/>
+              <a:buChar char="•"/>
+              <a:defRPr/>
+            </a:lvl9pPr>
+          </a:lstStyle>
+          <a:p>
+            <a:endParaRPr/>
+          </a:p>
+        </p:txBody>
+      </p:sp>
+      <p:sp>
+        <p:nvSpPr>
+          <p:cNvPr id="81" name="Google Shape;81;p41"/>
+          <p:cNvSpPr txBox="1">
+            <a:spLocks noGrp="1"/>
+          </p:cNvSpPr>
+          <p:nvPr>
+            <p:ph type="dt" idx="10"/>
+          </p:nvPr>
+        </p:nvSpPr>
+        <p:spPr>
+          <a:xfrm>
+            <a:off x="838200" y="6356350"/>
+            <a:ext cx="2743200" cy="365125"/>
+          </a:xfrm>
+          <a:prstGeom prst="rect">
+            <a:avLst/>
+          </a:prstGeom>
+          <a:noFill/>
+          <a:ln>
+            <a:noFill/>
+          </a:ln>
+        </p:spPr>
+        <p:txBody>
+          <a:bodyPr spcFirstLastPara="1" wrap="square" lIns="91425" tIns="45700" rIns="91425" bIns="45700" anchor="ctr" anchorCtr="0">
+            <a:noAutofit/>
+          </a:bodyPr>
+          <a:lstStyle>
+            <a:lvl1pPr lvl="0" algn="l">
+              <a:spcBef>
+                <a:spcPts val="0"/>
+              </a:spcBef>
+              <a:spcAft>
+                <a:spcPts val="0"/>
+              </a:spcAft>
+              <a:buSzPts val="1400"/>
+              <a:buNone/>
+              <a:defRPr/>
+            </a:lvl1pPr>
+            <a:lvl2pPr lvl="1" algn="l">
+              <a:spcBef>
+                <a:spcPts val="0"/>
+              </a:spcBef>
+              <a:spcAft>
+                <a:spcPts val="0"/>
+              </a:spcAft>
+              <a:buSzPts val="1400"/>
+              <a:buNone/>
+              <a:defRPr/>
+            </a:lvl2pPr>
+            <a:lvl3pPr lvl="2" algn="l">
+              <a:spcBef>
+                <a:spcPts val="0"/>
+              </a:spcBef>
+              <a:spcAft>
+                <a:spcPts val="0"/>
+              </a:spcAft>
+              <a:buSzPts val="1400"/>
+              <a:buNone/>
+              <a:defRPr/>
+            </a:lvl3pPr>
+            <a:lvl4pPr lvl="3" algn="l">
+              <a:spcBef>
+                <a:spcPts val="0"/>
+              </a:spcBef>
+              <a:spcAft>
+                <a:spcPts val="0"/>
+              </a:spcAft>
+              <a:buSzPts val="1400"/>
+              <a:buNone/>
+              <a:defRPr/>
+            </a:lvl4pPr>
+            <a:lvl5pPr lvl="4" algn="l">
+              <a:spcBef>
+                <a:spcPts val="0"/>
+              </a:spcBef>
+              <a:spcAft>
+                <a:spcPts val="0"/>
+              </a:spcAft>
+              <a:buSzPts val="1400"/>
+              <a:buNone/>
+              <a:defRPr/>
+            </a:lvl5pPr>
+            <a:lvl6pPr lvl="5" algn="l">
+              <a:spcBef>
+                <a:spcPts val="0"/>
+              </a:spcBef>
+              <a:spcAft>
+                <a:spcPts val="0"/>
+              </a:spcAft>
+              <a:buSzPts val="1400"/>
+              <a:buNone/>
+              <a:defRPr/>
+            </a:lvl6pPr>
+            <a:lvl7pPr lvl="6" algn="l">
+              <a:spcBef>
+                <a:spcPts val="0"/>
+              </a:spcBef>
+              <a:spcAft>
+                <a:spcPts val="0"/>
+              </a:spcAft>
+              <a:buSzPts val="1400"/>
+              <a:buNone/>
+              <a:defRPr/>
+            </a:lvl7pPr>
+            <a:lvl8pPr lvl="7" algn="l">
+              <a:spcBef>
+                <a:spcPts val="0"/>
+              </a:spcBef>
+              <a:spcAft>
+                <a:spcPts val="0"/>
+              </a:spcAft>
+              <a:buSzPts val="1400"/>
+              <a:buNone/>
+              <a:defRPr/>
+            </a:lvl8pPr>
+            <a:lvl9pPr lvl="8" algn="l">
+              <a:spcBef>
+                <a:spcPts val="0"/>
+              </a:spcBef>
+              <a:spcAft>
+                <a:spcPts val="0"/>
+              </a:spcAft>
+              <a:buSzPts val="1400"/>
+              <a:buNone/>
+              <a:defRPr/>
+            </a:lvl9pPr>
+          </a:lstStyle>
+          <a:p>
+            <a:endParaRPr/>
+          </a:p>
+        </p:txBody>
+      </p:sp>
+      <p:sp>
+        <p:nvSpPr>
+          <p:cNvPr id="82" name="Google Shape;82;p41"/>
+          <p:cNvSpPr txBox="1">
+            <a:spLocks noGrp="1"/>
+          </p:cNvSpPr>
+          <p:nvPr>
+            <p:ph type="ftr" idx="11"/>
+          </p:nvPr>
+        </p:nvSpPr>
+        <p:spPr>
+          <a:xfrm>
+            <a:off x="4038600" y="6356350"/>
+            <a:ext cx="4114800" cy="365125"/>
+          </a:xfrm>
+          <a:prstGeom prst="rect">
+            <a:avLst/>
+          </a:prstGeom>
+          <a:noFill/>
+          <a:ln>
+            <a:noFill/>
+          </a:ln>
+        </p:spPr>
+        <p:txBody>
+          <a:bodyPr spcFirstLastPara="1" wrap="square" lIns="91425" tIns="45700" rIns="91425" bIns="45700" anchor="ctr" anchorCtr="0">
+            <a:noAutofit/>
+          </a:bodyPr>
+          <a:lstStyle>
+            <a:lvl1pPr lvl="0" algn="ctr">
+              <a:spcBef>
+                <a:spcPts val="0"/>
+              </a:spcBef>
+              <a:spcAft>
+                <a:spcPts val="0"/>
+              </a:spcAft>
+              <a:buSzPts val="1400"/>
+              <a:buNone/>
+              <a:defRPr/>
+            </a:lvl1pPr>
+            <a:lvl2pPr lvl="1" algn="l">
+              <a:spcBef>
+                <a:spcPts val="0"/>
+              </a:spcBef>
+              <a:spcAft>
+                <a:spcPts val="0"/>
+              </a:spcAft>
+              <a:buSzPts val="1400"/>
+              <a:buNone/>
+              <a:defRPr/>
+            </a:lvl2pPr>
+            <a:lvl3pPr lvl="2" algn="l">
+              <a:spcBef>
+                <a:spcPts val="0"/>
+              </a:spcBef>
+              <a:spcAft>
+                <a:spcPts val="0"/>
+              </a:spcAft>
+              <a:buSzPts val="1400"/>
+              <a:buNone/>
+              <a:defRPr/>
+            </a:lvl3pPr>
+            <a:lvl4pPr lvl="3" algn="l">
+              <a:spcBef>
+                <a:spcPts val="0"/>
+              </a:spcBef>
+              <a:spcAft>
+                <a:spcPts val="0"/>
+              </a:spcAft>
+              <a:buSzPts val="1400"/>
+              <a:buNone/>
+              <a:defRPr/>
+            </a:lvl4pPr>
+            <a:lvl5pPr lvl="4" algn="l">
+              <a:spcBef>
+                <a:spcPts val="0"/>
+              </a:spcBef>
+              <a:spcAft>
+                <a:spcPts val="0"/>
+              </a:spcAft>
+              <a:buSzPts val="1400"/>
+              <a:buNone/>
+              <a:defRPr/>
+            </a:lvl5pPr>
+            <a:lvl6pPr lvl="5" algn="l">
+              <a:spcBef>
+                <a:spcPts val="0"/>
+              </a:spcBef>
+              <a:spcAft>
+                <a:spcPts val="0"/>
+              </a:spcAft>
+              <a:buSzPts val="1400"/>
+              <a:buNone/>
+              <a:defRPr/>
+            </a:lvl6pPr>
+            <a:lvl7pPr lvl="6" algn="l">
+              <a:spcBef>
+                <a:spcPts val="0"/>
+              </a:spcBef>
+              <a:spcAft>
+                <a:spcPts val="0"/>
+              </a:spcAft>
+              <a:buSzPts val="1400"/>
+              <a:buNone/>
+              <a:defRPr/>
+            </a:lvl7pPr>
+            <a:lvl8pPr lvl="7" algn="l">
+              <a:spcBef>
+                <a:spcPts val="0"/>
+              </a:spcBef>
+              <a:spcAft>
+                <a:spcPts val="0"/>
+              </a:spcAft>
+              <a:buSzPts val="1400"/>
+              <a:buNone/>
+              <a:defRPr/>
+            </a:lvl8pPr>
+            <a:lvl9pPr lvl="8" algn="l">
+              <a:spcBef>
+                <a:spcPts val="0"/>
+              </a:spcBef>
+              <a:spcAft>
+                <a:spcPts val="0"/>
+              </a:spcAft>
+              <a:buSzPts val="1400"/>
+              <a:buNone/>
+              <a:defRPr/>
+            </a:lvl9pPr>
+          </a:lstStyle>
+          <a:p>
+            <a:endParaRPr/>
+          </a:p>
+        </p:txBody>
+      </p:sp>
+      <p:sp>
+        <p:nvSpPr>
+          <p:cNvPr id="83" name="Google Shape;83;p41"/>
           <p:cNvSpPr txBox="1">
             <a:spLocks noGrp="1"/>
           </p:cNvSpPr>
@@ -11965,11 +10804,9 @@
     <p:sldLayoutId id="2147483652" r:id="rId4"/>
     <p:sldLayoutId id="2147483653" r:id="rId5"/>
     <p:sldLayoutId id="2147483654" r:id="rId6"/>
-    <p:sldLayoutId id="2147483655" r:id="rId7"/>
-    <p:sldLayoutId id="2147483656" r:id="rId8"/>
-    <p:sldLayoutId id="2147483657" r:id="rId9"/>
-    <p:sldLayoutId id="2147483658" r:id="rId10"/>
-    <p:sldLayoutId id="2147483659" r:id="rId11"/>
+    <p:sldLayoutId id="2147483656" r:id="rId7"/>
+    <p:sldLayoutId id="2147483658" r:id="rId8"/>
+    <p:sldLayoutId id="2147483659" r:id="rId9"/>
   </p:sldLayoutIdLst>
   <p:hf hdr="0" ftr="0" dt="0"/>
   <p:txStyles>
@@ -14702,11 +13539,11 @@
         </p:spPr>
         <p:txBody>
           <a:bodyPr spcFirstLastPara="1" wrap="square" lIns="91425" tIns="45700" rIns="91425" bIns="45700" anchor="b" anchorCtr="0">
-            <a:normAutofit/>
+            <a:noAutofit/>
           </a:bodyPr>
           <a:lstStyle/>
           <a:p>
-            <a:pPr marL="0" lvl="0" indent="0" rtl="0" algn="l">
+            <a:pPr marL="0" lvl="0" indent="0" rtl="0">
               <a:lnSpc>
                 <a:spcPct val="90000"/>
               </a:lnSpc>
@@ -14724,16 +13561,22 @@
               <a:buNone/>
             </a:pPr>
             <a:r>
-              <a:rPr sz="2600" b="1">
-                <a:solidFill>
-                  <a:srgbClr val="0F172A"/>
-                </a:solidFill>
-                <a:latin typeface="Times New Roman"/>
+              <a:rPr lang="en-US" sz="2400" b="1">
+                <a:solidFill>
+                  <a:srgbClr val="181C24"/>
+                </a:solidFill>
+                <a:latin typeface="Times New Roman" panose="02020603050405020304" pitchFamily="18" charset="0"/>
+                <a:ea typeface="Times New Roman"/>
+                <a:cs typeface="Times New Roman"/>
+                <a:sym typeface="Times New Roman"/>
               </a:rPr>
               <a:t>AUTOMATED SEMICONDUCTOR WAFER DEFECT CLASSIFICATION USING DEEP LEARNING FOR REAL-TIME AOI SYSTEMS</a:t>
             </a:r>
-            <a:endParaRPr sz="4400" b="1" dirty="0">
-              <a:latin typeface="Times New Roman"/>
+            <a:endParaRPr sz="2400" b="1" dirty="0">
+              <a:solidFill>
+                <a:srgbClr val="181C24"/>
+              </a:solidFill>
+              <a:latin typeface="Times New Roman" panose="02020603050405020304" pitchFamily="18" charset="0"/>
               <a:ea typeface="Times New Roman"/>
               <a:cs typeface="Times New Roman"/>
               <a:sym typeface="Times New Roman"/>
@@ -14787,98 +13630,29 @@
               <a:buNone/>
             </a:pPr>
             <a:r>
-              <a:rPr sz="1800" b="1">
-                <a:solidFill>
-                  <a:srgbClr val="0F172A"/>
-                </a:solidFill>
-                <a:latin typeface="Times New Roman"/>
+              <a:rPr lang="en-US" sz="1400">
+                <a:solidFill>
+                  <a:srgbClr val="181C24"/>
+                </a:solidFill>
+                <a:latin typeface="Times New Roman" panose="02020603050405020304" pitchFamily="18" charset="0"/>
+                <a:ea typeface="Times New Roman"/>
+                <a:cs typeface="Times New Roman"/>
+                <a:sym typeface="Times New Roman"/>
               </a:rPr>
-              <a:t>PROJECT ASSOCIATES:</a:t>
+              <a:t>PROJECT ASSOCIATES:
+• ADITHYAN B (Reg No: MGP23EVLSI001)
+• ANNA BOBAN (Reg No: MGP23EVLSI002)
+• NOOPA MARIA ROJAN (Reg No: MGP23EVLSI009)
+Department of Electronics &amp; Communication Engineering
+Saintgits College of Engineering (Autonomous), Kottayam
+B.Tech Mini Project Final Internal Review • October 2026</a:t>
             </a:r>
-            <a:endParaRPr sz="2000" dirty="0">
+            <a:endParaRPr sz="1400" dirty="0">
               <a:solidFill>
-                <a:schemeClr val="dk1"/>
+                <a:srgbClr val="181C24"/>
               </a:solidFill>
-              <a:latin typeface="Times New Roman"/>
-              <a:ea typeface="Times New Roman"/>
-              <a:cs typeface="Times New Roman"/>
-              <a:sym typeface="Times New Roman"/>
+              <a:latin typeface="Times New Roman" panose="02020603050405020304" pitchFamily="18" charset="0"/>
             </a:endParaRPr>
-          </a:p>
-          <a:p>
-            <a:pPr algn="l"/>
-            <a:r>
-              <a:rPr sz="1600" b="0">
-                <a:solidFill>
-                  <a:srgbClr val="1E293B"/>
-                </a:solidFill>
-                <a:latin typeface="Times New Roman"/>
-              </a:rPr>
-              <a:t>• ADITHYAN B (Reg No: MGP23EVLSI001)</a:t>
-            </a:r>
-          </a:p>
-          <a:p>
-            <a:pPr algn="l"/>
-            <a:r>
-              <a:rPr sz="1600" b="0">
-                <a:solidFill>
-                  <a:srgbClr val="1E293B"/>
-                </a:solidFill>
-                <a:latin typeface="Times New Roman"/>
-              </a:rPr>
-              <a:t>• ANNA BOBAN (Reg No: MGP23EVLSI002)</a:t>
-            </a:r>
-          </a:p>
-          <a:p>
-            <a:pPr algn="l"/>
-            <a:r>
-              <a:rPr sz="1600" b="0">
-                <a:solidFill>
-                  <a:srgbClr val="1E293B"/>
-                </a:solidFill>
-                <a:latin typeface="Times New Roman"/>
-              </a:rPr>
-              <a:t>• NOOPA MARIA ROJAN (Reg No: MGP23EVLSI009)</a:t>
-            </a:r>
-          </a:p>
-          <a:p>
-            <a:pPr algn="l"/>
-          </a:p>
-          <a:p>
-            <a:pPr algn="l"/>
-            <a:r>
-              <a:rPr sz="1600" b="1">
-                <a:solidFill>
-                  <a:srgbClr val="0284C7"/>
-                </a:solidFill>
-                <a:latin typeface="Times New Roman"/>
-              </a:rPr>
-              <a:t>Department of Electronics &amp; Communication Engineering</a:t>
-            </a:r>
-          </a:p>
-          <a:p>
-            <a:pPr algn="l"/>
-            <a:r>
-              <a:rPr sz="1500" b="0">
-                <a:solidFill>
-                  <a:srgbClr val="1E293B"/>
-                </a:solidFill>
-                <a:latin typeface="Times New Roman"/>
-              </a:rPr>
-              <a:t>Saintgits College of Engineering (Autonomous), Kottayam</a:t>
-            </a:r>
-          </a:p>
-          <a:p>
-            <a:pPr algn="l"/>
-            <a:r>
-              <a:rPr sz="1400" b="1">
-                <a:solidFill>
-                  <a:srgbClr val="0F172A"/>
-                </a:solidFill>
-                <a:latin typeface="Times New Roman"/>
-              </a:rPr>
-              <a:t>B.Tech Mini Project Final Internal Review • October 2026</a:t>
-            </a:r>
           </a:p>
         </p:txBody>
       </p:sp>
@@ -14891,7 +13665,7 @@
         <p:spPr>
           <a:xfrm>
             <a:off x="540774" y="4368955"/>
-            <a:ext cx="3519900" cy="708000"/>
+            <a:ext cx="3519900" cy="784790"/>
           </a:xfrm>
           <a:prstGeom prst="rect">
             <a:avLst/>
@@ -14917,39 +13691,25 @@
               <a:buNone/>
             </a:pPr>
             <a:r>
-              <a:rPr sz="1800" b="1">
-                <a:solidFill>
-                  <a:srgbClr val="0F172A"/>
-                </a:solidFill>
-                <a:latin typeface="Times New Roman"/>
+              <a:rPr lang="en-US" sz="1500" b="1" i="0" u="none" strike="noStrike" cap="none">
+                <a:solidFill>
+                  <a:srgbClr val="0284C7"/>
+                </a:solidFill>
+                <a:latin typeface="Times New Roman" panose="02020603050405020304" pitchFamily="18" charset="0"/>
+                <a:ea typeface="Times New Roman"/>
+                <a:cs typeface="Times New Roman"/>
+                <a:sym typeface="Times New Roman"/>
               </a:rPr>
-              <a:t>PROJECT SUPERVISOR:</a:t>
+              <a:t>PROJECT SUPERVISOR:
+Er. JUSTIN MATHEW
+Assistant Professor, Dept. of ECE</a:t>
             </a:r>
-            <a:endParaRPr sz="2000" dirty="0"/>
-          </a:p>
-          <a:p>
-            <a:pPr algn="l"/>
-            <a:r>
-              <a:rPr sz="1800" b="1">
-                <a:solidFill>
-                  <a:srgbClr val="0284C7"/>
-                </a:solidFill>
-                <a:latin typeface="Times New Roman"/>
-              </a:rPr>
-              <a:t>Er. JUSTIN MATHEW</a:t>
-            </a:r>
-          </a:p>
-          <a:p>
-            <a:pPr algn="l"/>
-            <a:r>
-              <a:rPr sz="1500" b="0">
-                <a:solidFill>
-                  <a:srgbClr val="1E293B"/>
-                </a:solidFill>
-                <a:latin typeface="Times New Roman"/>
-              </a:rPr>
-              <a:t>Assistant Professor, Dept. of ECE</a:t>
-            </a:r>
+            <a:endParaRPr sz="1500" b="1" dirty="0">
+              <a:solidFill>
+                <a:srgbClr val="0284C7"/>
+              </a:solidFill>
+              <a:latin typeface="Times New Roman" panose="02020603050405020304" pitchFamily="18" charset="0"/>
+            </a:endParaRPr>
           </a:p>
         </p:txBody>
       </p:sp>
@@ -14991,15 +13751,10 @@
               </a:spcAft>
               <a:buNone/>
             </a:pPr>
-            <a:r>
-              <a:rPr sz="1800" b="1">
-                <a:solidFill>
-                  <a:srgbClr val="0F172A"/>
-                </a:solidFill>
-                <a:latin typeface="Times New Roman"/>
-              </a:rPr>
+            <a:fld id="{00000000-1234-1234-1234-123412341234}" type="slidenum">
+              <a:rPr lang="en-US"/>
               <a:t>1</a:t>
-            </a:r>
+            </a:fld>
             <a:endParaRPr/>
           </a:p>
         </p:txBody>
@@ -15219,15 +13974,23 @@
               <a:buNone/>
             </a:pPr>
             <a:r>
-              <a:rPr sz="3400" b="1">
-                <a:solidFill>
-                  <a:srgbClr val="0F172A"/>
-                </a:solidFill>
-                <a:latin typeface="Times New Roman"/>
+              <a:rPr lang="en-US" sz="3400" b="1">
+                <a:solidFill>
+                  <a:srgbClr val="181C24"/>
+                </a:solidFill>
+                <a:latin typeface="Times New Roman" panose="02020603050405020304" pitchFamily="18" charset="0"/>
+                <a:ea typeface="Times New Roman"/>
+                <a:cs typeface="Times New Roman"/>
+                <a:sym typeface="Times New Roman"/>
               </a:rPr>
               <a:t>REFERENCES</a:t>
             </a:r>
-            <a:endParaRPr b="1" dirty="0"/>
+            <a:endParaRPr sz="3400" b="1" dirty="0">
+              <a:solidFill>
+                <a:srgbClr val="181C24"/>
+              </a:solidFill>
+              <a:latin typeface="Times New Roman" panose="02020603050405020304" pitchFamily="18" charset="0"/>
+            </a:endParaRPr>
           </a:p>
         </p:txBody>
       </p:sp>
@@ -15269,15 +14032,10 @@
               </a:spcAft>
               <a:buNone/>
             </a:pPr>
-            <a:r>
-              <a:rPr sz="1800" b="1">
-                <a:solidFill>
-                  <a:srgbClr val="0F172A"/>
-                </a:solidFill>
-                <a:latin typeface="Times New Roman"/>
-              </a:rPr>
+            <a:fld id="{00000000-1234-1234-1234-123412341234}" type="slidenum">
+              <a:rPr lang="en-US"/>
               <a:t>10</a:t>
-            </a:r>
+            </a:fld>
             <a:endParaRPr/>
           </a:p>
         </p:txBody>
@@ -15427,14 +14185,20 @@
       </p:sp>
       <p:sp>
         <p:nvSpPr>
-          <p:cNvPr id="388" name="TextBox 387"/>
+          <p:cNvPr id="2" name="TextBox 1">
+            <a:extLst>
+              <a:ext uri="{FF2B5EF4-FFF2-40B4-BE49-F238E27FC236}">
+                <a16:creationId xmlns:a16="http://schemas.microsoft.com/office/drawing/2014/main" id="{6BC21E17-780D-4E8A-709F-79F92F8C1033}"/>
+              </a:ext>
+            </a:extLst>
+          </p:cNvPr>
           <p:cNvSpPr txBox="1"/>
           <p:nvPr/>
         </p:nvSpPr>
         <p:spPr>
           <a:xfrm>
-            <a:off x="731520" y="1920240"/>
-            <a:ext cx="10698480" cy="4114800"/>
+            <a:off x="571500" y="1778000"/>
+            <a:ext cx="9779000" cy="2893100"/>
           </a:xfrm>
           <a:prstGeom prst="rect">
             <a:avLst/>
@@ -15442,103 +14206,23 @@
           <a:noFill/>
         </p:spPr>
         <p:txBody>
-          <a:bodyPr wrap="square">
+          <a:bodyPr vert="horz" wrap="square" rtlCol="0">
             <a:spAutoFit/>
           </a:bodyPr>
           <a:lstStyle/>
           <a:p>
-            <a:pPr>
-              <a:spcBef>
-                <a:spcPts val="200"/>
-              </a:spcBef>
-              <a:spcAft>
-                <a:spcPts val="400"/>
-              </a:spcAft>
-            </a:pPr>
             <a:r>
-              <a:rPr sz="1800" b="0">
-                <a:solidFill>
-                  <a:srgbClr val="1E293B"/>
-                </a:solidFill>
-                <a:latin typeface="Times New Roman"/>
+              <a:rPr lang="en-IN" sz="1300">
+                <a:solidFill>
+                  <a:srgbClr val="181C24"/>
+                </a:solidFill>
+                <a:latin typeface="Times New Roman" panose="02020603050405020304" pitchFamily="18" charset="0"/>
               </a:rPr>
-              <a:t>•  1. M.-J. Wu, J.-S. R. Jang, and J.-L. Chen, 'Wafer map failure pattern recognition and similarity ranking for large-scale semiconductor manufacturing,' IEEE Transactions on Semiconductor Manufacturing, vol. 28, no. 1, pp. 1–12, 2015.</a:t>
-            </a:r>
-          </a:p>
-          <a:p>
-            <a:pPr>
-              <a:spcBef>
-                <a:spcPts val="200"/>
-              </a:spcBef>
-              <a:spcAft>
-                <a:spcPts val="400"/>
-              </a:spcAft>
-            </a:pPr>
-            <a:r>
-              <a:rPr sz="1800" b="0">
-                <a:solidFill>
-                  <a:srgbClr val="1E293B"/>
-                </a:solidFill>
-                <a:latin typeface="Times New Roman"/>
-              </a:rPr>
-              <a:t>•  2. A. Howard, M. Sandler, G. Chu, L.-C. Chen, B. Chen, M. Tan, W. Wang, Y. Zhu, R. Pang, V. Vasudevan et al., 'Searching for MobileNetV3,' in Proceedings of the IEEE/CVF International Conference on Computer Vision (ICCV), 2019, pp. 1314–1324.</a:t>
-            </a:r>
-          </a:p>
-          <a:p>
-            <a:pPr>
-              <a:spcBef>
-                <a:spcPts val="200"/>
-              </a:spcBef>
-              <a:spcAft>
-                <a:spcPts val="400"/>
-              </a:spcAft>
-            </a:pPr>
-            <a:r>
-              <a:rPr sz="1800" b="0">
-                <a:solidFill>
-                  <a:srgbClr val="1E293B"/>
-                </a:solidFill>
-                <a:latin typeface="Times New Roman"/>
-              </a:rPr>
-              <a:t>•  3. T. Nakazawa and D. V. Kulkarni, 'Wafer map defect pattern classification and retrieval using convolutional neural networks,' IEEE Transactions on Semiconductor Manufacturing, vol. 31, no. 2, pp. 309–314, 2018.</a:t>
-            </a:r>
-          </a:p>
-          <a:p>
-            <a:pPr>
-              <a:spcBef>
-                <a:spcPts val="200"/>
-              </a:spcBef>
-              <a:spcAft>
-                <a:spcPts val="400"/>
-              </a:spcAft>
-            </a:pPr>
-            <a:r>
-              <a:rPr sz="1800" b="0">
-                <a:solidFill>
-                  <a:srgbClr val="1E293B"/>
-                </a:solidFill>
-                <a:latin typeface="Times New Roman"/>
-              </a:rPr>
-              <a:t>•  4. S. Cheon, H. Lee, C. O. Kim, and S. H. Lee, 'Convolutional neural network for wafer surface defect classification and the detection of unknown defect classes,' IEEE Transactions on Semiconductor Manufacturing, vol. 32, no. 2, pp. 163–170, 2019.</a:t>
-            </a:r>
-          </a:p>
-          <a:p>
-            <a:pPr>
-              <a:spcBef>
-                <a:spcPts val="200"/>
-              </a:spcBef>
-              <a:spcAft>
-                <a:spcPts val="400"/>
-              </a:spcAft>
-            </a:pPr>
-            <a:r>
-              <a:rPr sz="1800" b="0">
-                <a:solidFill>
-                  <a:srgbClr val="1E293B"/>
-                </a:solidFill>
-                <a:latin typeface="Times New Roman"/>
-              </a:rPr>
-              <a:t>•  5. ONNX Runtime Developers, 'ONNX Runtime: Cross-platform, high performance ML inferencing and training accelerator,' Linux Foundation / Microsoft, 2024. [Online]. Available: https://onnxruntime.ai</a:t>
+              <a:t>1. M.-J. Wu, J.-S. R. Jang, and J.-L. Chen, 'Wafer map failure pattern recognition and similarity ranking for large-scale semiconductor manufacturing,' IEEE Transactions on Semiconductor Manufacturing, vol. 28, no. 1, pp. 1–12, 2015.
+2. A. Howard, M. Sandler, G. Chu, L.-C. Chen, B. Chen, M. Tan, W. Wang, Y. Zhu, R. Pang, V. Vasudevan et al., 'Searching for MobileNetV3,' in Proceedings of the IEEE/CVF International Conference on Computer Vision (ICCV), 2019, pp. 1314–1324.
+3. T. Nakazawa and D. V. Kulkarni, 'Wafer map defect pattern classification and retrieval using convolutional neural networks,' IEEE Transactions on Semiconductor Manufacturing, vol. 31, no. 2, pp. 309–314, 2018.
+4. S. Cheon, H. Lee, C. O. Kim, and S. H. Lee, 'Convolutional neural network for wafer surface defect classification and the detection of unknown defect classes,' IEEE Transactions on Semiconductor Manufacturing, vol. 32, no. 2, pp. 163–170, 2019.
+5. ONNX Runtime Developers, 'ONNX Runtime: Cross-platform, high performance ML inferencing and training accelerator,' Linux Foundation / Microsoft, 2024. [Online]. Available: https://onnxruntime.ai</a:t>
             </a:r>
           </a:p>
         </p:txBody>
@@ -15568,48 +14252,6 @@
           <a:chExt cx="0" cy="0"/>
         </a:xfrm>
       </p:grpSpPr>
-      <p:sp>
-        <p:nvSpPr>
-          <p:cNvPr id="392" name="Google Shape;392;p27"/>
-          <p:cNvSpPr txBox="1">
-            <a:spLocks noGrp="1"/>
-          </p:cNvSpPr>
-          <p:nvPr>
-            <p:ph type="sldNum" idx="12"/>
-          </p:nvPr>
-        </p:nvSpPr>
-        <p:spPr>
-          <a:xfrm>
-            <a:off x="8610600" y="6356350"/>
-            <a:ext cx="2743200" cy="365100"/>
-          </a:xfrm>
-          <a:prstGeom prst="rect">
-            <a:avLst/>
-          </a:prstGeom>
-          <a:noFill/>
-          <a:ln>
-            <a:noFill/>
-          </a:ln>
-        </p:spPr>
-        <p:txBody>
-          <a:bodyPr spcFirstLastPara="1" wrap="square" lIns="91425" tIns="45700" rIns="91425" bIns="45700" anchor="ctr" anchorCtr="0">
-            <a:noAutofit/>
-          </a:bodyPr>
-          <a:lstStyle/>
-          <a:p>
-            <a:pPr marL="0" lvl="0" indent="0" algn="r" rtl="0">
-              <a:spcBef>
-                <a:spcPts val="0"/>
-              </a:spcBef>
-              <a:spcAft>
-                <a:spcPts val="0"/>
-              </a:spcAft>
-              <a:buNone/>
-            </a:pPr>
-            <a:endParaRPr/>
-          </a:p>
-        </p:txBody>
-      </p:sp>
       <p:pic>
         <p:nvPicPr>
           <p:cNvPr id="393" name="Google Shape;393;p27"/>
@@ -15755,714 +14397,67 @@
       </p:sp>
       <p:sp>
         <p:nvSpPr>
-          <p:cNvPr id="396" name="Google Shape;396;p27"/>
-          <p:cNvSpPr txBox="1">
+          <p:cNvPr id="3" name="Title 2">
+            <a:extLst>
+              <a:ext uri="{FF2B5EF4-FFF2-40B4-BE49-F238E27FC236}">
+                <a16:creationId xmlns:a16="http://schemas.microsoft.com/office/drawing/2014/main" id="{E9F644EF-2CA3-C202-C514-DC6009B2A5AE}"/>
+              </a:ext>
+            </a:extLst>
+          </p:cNvPr>
+          <p:cNvSpPr>
             <a:spLocks noGrp="1"/>
           </p:cNvSpPr>
           <p:nvPr>
             <p:ph type="title"/>
           </p:nvPr>
         </p:nvSpPr>
+        <p:spPr/>
+        <p:txBody>
+          <a:bodyPr/>
+          <a:lstStyle/>
+          <a:p>
+            <a:endParaRPr lang="en-IN"/>
+          </a:p>
+        </p:txBody>
+      </p:sp>
+      <p:sp>
+        <p:nvSpPr>
+          <p:cNvPr id="4" name="TextBox 3">
+            <a:extLst>
+              <a:ext uri="{FF2B5EF4-FFF2-40B4-BE49-F238E27FC236}">
+                <a16:creationId xmlns:a16="http://schemas.microsoft.com/office/drawing/2014/main" id="{DBAE5156-966F-63CB-D3DA-1B8EFED0F493}"/>
+              </a:ext>
+            </a:extLst>
+          </p:cNvPr>
+          <p:cNvSpPr txBox="1"/>
+          <p:nvPr/>
+        </p:nvSpPr>
         <p:spPr>
           <a:xfrm>
-            <a:off x="914400" y="2560320"/>
-            <a:ext cx="10332720" cy="2011680"/>
+            <a:off x="635000" y="2413000"/>
+            <a:ext cx="9588500" cy="1077218"/>
           </a:xfrm>
           <a:prstGeom prst="rect">
             <a:avLst/>
           </a:prstGeom>
           <a:noFill/>
-          <a:ln>
-            <a:noFill/>
-          </a:ln>
         </p:spPr>
         <p:txBody>
-          <a:bodyPr spcFirstLastPara="1" wrap="square" lIns="91425" tIns="45700" rIns="91425" bIns="45700" anchor="ctr" anchorCtr="0">
-            <a:normAutofit/>
-          </a:bodyPr>
-          <a:lstStyle/>
-          <a:p>
-            <a:pPr marL="0" lvl="0" indent="0" algn="ctr" rtl="0">
-              <a:lnSpc>
-                <a:spcPct val="90000"/>
-              </a:lnSpc>
-              <a:spcBef>
-                <a:spcPts val="0"/>
-              </a:spcBef>
-              <a:spcAft>
-                <a:spcPts val="0"/>
-              </a:spcAft>
-              <a:buClr>
-                <a:schemeClr val="dk1"/>
-              </a:buClr>
-              <a:buSzPts val="4400"/>
-              <a:buFont typeface="Times New Roman"/>
-              <a:buNone/>
-            </a:pPr>
-            <a:r>
-              <a:rPr sz="6400" b="1">
-                <a:solidFill>
-                  <a:srgbClr val="0F172A"/>
-                </a:solidFill>
-                <a:latin typeface="Times New Roman"/>
-              </a:rPr>
-              <a:t>THANK YOU</a:t>
-            </a:r>
-            <a:endParaRPr i="1">
-              <a:latin typeface="Times New Roman"/>
-              <a:ea typeface="Times New Roman"/>
-              <a:cs typeface="Times New Roman"/>
-              <a:sym typeface="Times New Roman"/>
-            </a:endParaRPr>
-          </a:p>
-        </p:txBody>
-      </p:sp>
-      <p:sp>
-        <p:nvSpPr>
-          <p:cNvPr id="397" name="Questions Subtitle"/>
-          <p:cNvSpPr txBox="1"/>
-          <p:nvPr/>
-        </p:nvSpPr>
-        <p:spPr>
-          <a:xfrm>
-            <a:off x="-18288000" y="4000000"/>
-            <a:ext cx="10515600" cy="700000"/>
-          </a:xfrm>
-          <a:prstGeom prst="rect">
-            <a:avLst/>
-          </a:prstGeom>
-          <a:noFill/>
-          <a:ln>
-            <a:noFill/>
-          </a:ln>
-        </p:spPr>
-        <p:txBody>
-          <a:bodyPr spcFirstLastPara="1" wrap="square" lIns="91425" tIns="45700" rIns="91425" bIns="45700" anchor="t" anchorCtr="0">
-            <a:normAutofit/>
-          </a:bodyPr>
-          <a:lstStyle/>
-          <a:p>
-            <a:pPr marL="0" lvl="0" indent="0" algn="ctr" rtl="0">
-              <a:spcBef>
-                <a:spcPts val="0"/>
-              </a:spcBef>
-              <a:buNone/>
-            </a:pPr>
-            <a:endParaRPr sz="2800" dirty="0">
-              <a:latin typeface="Times New Roman"/>
-              <a:ea typeface="Times New Roman"/>
-              <a:cs typeface="Times New Roman"/>
-              <a:sym typeface="Times New Roman"/>
-            </a:endParaRPr>
-          </a:p>
-        </p:txBody>
-      </p:sp>
-    </p:spTree>
-  </p:cSld>
-  <p:clrMapOvr>
-    <a:masterClrMapping/>
-  </p:clrMapOvr>
-</p:sld>
-</file>
-
-<file path=ppt/slides/slide11.xml><?xml version="1.0" encoding="utf-8"?>
-<p:sld xmlns:a="http://schemas.openxmlformats.org/drawingml/2006/main" xmlns:r="http://schemas.openxmlformats.org/officeDocument/2006/relationships" xmlns:p="http://schemas.openxmlformats.org/presentationml/2006/main">
-  <p:cSld>
-    <p:spTree>
-      <p:nvGrpSpPr>
-        <p:cNvPr id="1" name="Shape 391"/>
-        <p:cNvGrpSpPr/>
-        <p:nvPr/>
-      </p:nvGrpSpPr>
-      <p:grpSpPr>
-        <a:xfrm>
-          <a:off x="0" y="0"/>
-          <a:ext cx="0" cy="0"/>
-          <a:chOff x="0" y="0"/>
-          <a:chExt cx="0" cy="0"/>
-        </a:xfrm>
-      </p:grpSpPr>
-      <p:sp>
-        <p:nvSpPr>
-          <p:cNvPr id="392" name="Google Shape;392;p27"/>
-          <p:cNvSpPr txBox="1">
-            <a:spLocks noGrp="1"/>
-          </p:cNvSpPr>
-          <p:nvPr>
-            <p:ph type="sldNum" idx="12"/>
-          </p:nvPr>
-        </p:nvSpPr>
-        <p:spPr>
-          <a:xfrm>
-            <a:off x="8610600" y="6356350"/>
-            <a:ext cx="2743200" cy="365100"/>
-          </a:xfrm>
-          <a:prstGeom prst="rect">
-            <a:avLst/>
-          </a:prstGeom>
-          <a:noFill/>
-          <a:ln>
-            <a:noFill/>
-          </a:ln>
-        </p:spPr>
-        <p:txBody>
-          <a:bodyPr spcFirstLastPara="1" wrap="square" lIns="91425" tIns="45700" rIns="91425" bIns="45700" anchor="ctr" anchorCtr="0">
-            <a:noAutofit/>
-          </a:bodyPr>
-          <a:lstStyle/>
-          <a:p>
-            <a:pPr marL="0" lvl="0" indent="0" algn="r" rtl="0">
-              <a:spcBef>
-                <a:spcPts val="0"/>
-              </a:spcBef>
-              <a:spcAft>
-                <a:spcPts val="0"/>
-              </a:spcAft>
-              <a:buNone/>
-            </a:pPr>
-            <a:endParaRPr/>
-          </a:p>
-        </p:txBody>
-      </p:sp>
-      <p:pic>
-        <p:nvPicPr>
-          <p:cNvPr id="393" name="Google Shape;393;p27"/>
-          <p:cNvPicPr preferRelativeResize="0"/>
-          <p:nvPr/>
-        </p:nvPicPr>
-        <p:blipFill rotWithShape="1">
-          <a:blip r:embed="rId2">
-            <a:alphaModFix/>
-          </a:blip>
-          <a:srcRect/>
-          <a:stretch/>
-        </p:blipFill>
-        <p:spPr>
-          <a:xfrm>
-            <a:off x="159971" y="211556"/>
-            <a:ext cx="4517529" cy="810838"/>
-          </a:xfrm>
-          <a:prstGeom prst="rect">
-            <a:avLst/>
-          </a:prstGeom>
-          <a:noFill/>
-          <a:ln>
-            <a:noFill/>
-          </a:ln>
-        </p:spPr>
-      </p:pic>
-      <p:pic>
-        <p:nvPicPr>
-          <p:cNvPr id="394" name="Google Shape;394;p27"/>
-          <p:cNvPicPr preferRelativeResize="0"/>
-          <p:nvPr/>
-        </p:nvPicPr>
-        <p:blipFill rotWithShape="1">
-          <a:blip r:embed="rId3">
-            <a:alphaModFix/>
-          </a:blip>
-          <a:srcRect/>
-          <a:stretch/>
-        </p:blipFill>
-        <p:spPr>
-          <a:xfrm>
-            <a:off x="11072819" y="154753"/>
-            <a:ext cx="816174" cy="930568"/>
-          </a:xfrm>
-          <a:prstGeom prst="rect">
-            <a:avLst/>
-          </a:prstGeom>
-          <a:noFill/>
-          <a:ln>
-            <a:noFill/>
-          </a:ln>
-        </p:spPr>
-      </p:pic>
-      <p:sp>
-        <p:nvSpPr>
-          <p:cNvPr id="395" name="Google Shape;395;p27"/>
-          <p:cNvSpPr/>
-          <p:nvPr/>
-        </p:nvSpPr>
-        <p:spPr>
-          <a:xfrm>
-            <a:off x="0" y="6407689"/>
-            <a:ext cx="7684389" cy="461665"/>
-          </a:xfrm>
-          <a:custGeom>
-            <a:avLst/>
-            <a:gdLst/>
-            <a:ahLst/>
-            <a:cxnLst/>
-            <a:rect l="l" t="t" r="r" b="b"/>
-            <a:pathLst>
-              <a:path w="6172200" h="369332" extrusionOk="0">
-                <a:moveTo>
-                  <a:pt x="0" y="0"/>
-                </a:moveTo>
-                <a:lnTo>
-                  <a:pt x="5791200" y="0"/>
-                </a:lnTo>
-                <a:lnTo>
-                  <a:pt x="6172200" y="369332"/>
-                </a:lnTo>
-                <a:lnTo>
-                  <a:pt x="0" y="369332"/>
-                </a:lnTo>
-                <a:lnTo>
-                  <a:pt x="0" y="0"/>
-                </a:lnTo>
-                <a:close/>
-              </a:path>
-            </a:pathLst>
-          </a:custGeom>
-          <a:solidFill>
-            <a:schemeClr val="accent1"/>
-          </a:solidFill>
-          <a:ln>
-            <a:noFill/>
-          </a:ln>
-        </p:spPr>
-        <p:txBody>
-          <a:bodyPr spcFirstLastPara="1" wrap="square" lIns="91425" tIns="45700" rIns="91425" bIns="45700" anchor="t" anchorCtr="0">
+          <a:bodyPr vert="horz" wrap="square" rtlCol="0">
             <a:spAutoFit/>
           </a:bodyPr>
           <a:lstStyle/>
           <a:p>
-            <a:pPr marL="0" marR="0" lvl="0" indent="0" algn="ctr" rtl="0">
-              <a:spcBef>
-                <a:spcPts val="0"/>
-              </a:spcBef>
-              <a:spcAft>
-                <a:spcPts val="0"/>
-              </a:spcAft>
-              <a:buClr>
-                <a:schemeClr val="lt1"/>
-              </a:buClr>
-              <a:buSzPts val="2400"/>
-              <a:buFont typeface="Gill Sans"/>
-              <a:buNone/>
-            </a:pPr>
+            <a:pPr algn="ctr"/>
             <a:r>
-              <a:rPr lang="en-US" sz="2400">
-                <a:solidFill>
-                  <a:schemeClr val="lt1"/>
-                </a:solidFill>
-                <a:latin typeface="Gill Sans"/>
-                <a:ea typeface="Gill Sans"/>
-                <a:cs typeface="Gill Sans"/>
-                <a:sym typeface="Gill Sans"/>
-              </a:rPr>
-              <a:t>LEARN . GROW . EXCEL</a:t>
-            </a:r>
-            <a:endParaRPr sz="1800">
-              <a:solidFill>
-                <a:schemeClr val="dk1"/>
-              </a:solidFill>
-              <a:latin typeface="Calibri"/>
-              <a:ea typeface="Calibri"/>
-              <a:cs typeface="Calibri"/>
-              <a:sym typeface="Calibri"/>
-            </a:endParaRPr>
-          </a:p>
-        </p:txBody>
-      </p:sp>
-      <p:sp>
-        <p:nvSpPr>
-          <p:cNvPr id="396" name="Google Shape;396;p27"/>
-          <p:cNvSpPr txBox="1">
-            <a:spLocks noGrp="1"/>
-          </p:cNvSpPr>
-          <p:nvPr>
-            <p:ph type="title"/>
-          </p:nvPr>
-        </p:nvSpPr>
-        <p:spPr>
-          <a:xfrm>
-            <a:off x="914400" y="2560320"/>
-            <a:ext cx="10332720" cy="2011680"/>
-          </a:xfrm>
-          <a:prstGeom prst="rect">
-            <a:avLst/>
-          </a:prstGeom>
-          <a:noFill/>
-          <a:ln>
-            <a:noFill/>
-          </a:ln>
-        </p:spPr>
-        <p:txBody>
-          <a:bodyPr spcFirstLastPara="1" wrap="square" lIns="91425" tIns="45700" rIns="91425" bIns="45700" anchor="ctr" anchorCtr="0">
-            <a:normAutofit/>
-          </a:bodyPr>
-          <a:lstStyle/>
-          <a:p>
-            <a:pPr marL="0" lvl="0" indent="0" algn="ctr" rtl="0">
-              <a:lnSpc>
-                <a:spcPct val="90000"/>
-              </a:lnSpc>
-              <a:spcBef>
-                <a:spcPts val="0"/>
-              </a:spcBef>
-              <a:spcAft>
-                <a:spcPts val="0"/>
-              </a:spcAft>
-              <a:buClr>
-                <a:schemeClr val="dk1"/>
-              </a:buClr>
-              <a:buSzPts val="4400"/>
-              <a:buFont typeface="Times New Roman"/>
-              <a:buNone/>
-            </a:pPr>
-            <a:r>
-              <a:rPr sz="6400" b="1">
-                <a:solidFill>
-                  <a:srgbClr val="0F172A"/>
-                </a:solidFill>
-                <a:latin typeface="Times New Roman"/>
+              <a:rPr lang="en-IN" sz="6400" b="1">
+                <a:solidFill>
+                  <a:srgbClr val="181C24"/>
+                </a:solidFill>
+                <a:latin typeface="Times New Roman" panose="02020603050405020304" pitchFamily="18" charset="0"/>
               </a:rPr>
               <a:t>THANK YOU</a:t>
             </a:r>
-            <a:endParaRPr i="1">
-              <a:latin typeface="Times New Roman"/>
-              <a:ea typeface="Times New Roman"/>
-              <a:cs typeface="Times New Roman"/>
-              <a:sym typeface="Times New Roman"/>
-            </a:endParaRPr>
-          </a:p>
-        </p:txBody>
-      </p:sp>
-      <p:sp>
-        <p:nvSpPr>
-          <p:cNvPr id="397" name="Questions Subtitle"/>
-          <p:cNvSpPr txBox="1"/>
-          <p:nvPr/>
-        </p:nvSpPr>
-        <p:spPr>
-          <a:xfrm>
-            <a:off x="-18288000" y="4000000"/>
-            <a:ext cx="10515600" cy="700000"/>
-          </a:xfrm>
-          <a:prstGeom prst="rect">
-            <a:avLst/>
-          </a:prstGeom>
-          <a:noFill/>
-          <a:ln>
-            <a:noFill/>
-          </a:ln>
-        </p:spPr>
-        <p:txBody>
-          <a:bodyPr spcFirstLastPara="1" wrap="square" lIns="91425" tIns="45700" rIns="91425" bIns="45700" anchor="t" anchorCtr="0">
-            <a:normAutofit/>
-          </a:bodyPr>
-          <a:lstStyle/>
-          <a:p>
-            <a:pPr marL="0" lvl="0" indent="0" algn="ctr" rtl="0">
-              <a:spcBef>
-                <a:spcPts val="0"/>
-              </a:spcBef>
-              <a:buNone/>
-            </a:pPr>
-            <a:endParaRPr sz="2800" dirty="0">
-              <a:latin typeface="Times New Roman"/>
-              <a:ea typeface="Times New Roman"/>
-              <a:cs typeface="Times New Roman"/>
-              <a:sym typeface="Times New Roman"/>
-            </a:endParaRPr>
-          </a:p>
-        </p:txBody>
-      </p:sp>
-    </p:spTree>
-  </p:cSld>
-  <p:clrMapOvr>
-    <a:masterClrMapping/>
-  </p:clrMapOvr>
-</p:sld>
-</file>
-
-<file path=ppt/slides/slide13.xml><?xml version="1.0" encoding="utf-8"?>
-<p:sld xmlns:a="http://schemas.openxmlformats.org/drawingml/2006/main" xmlns:r="http://schemas.openxmlformats.org/officeDocument/2006/relationships" xmlns:p="http://schemas.openxmlformats.org/presentationml/2006/main">
-  <p:cSld>
-    <p:spTree>
-      <p:nvGrpSpPr>
-        <p:cNvPr id="1" name="Shape 163"/>
-        <p:cNvGrpSpPr/>
-        <p:nvPr/>
-      </p:nvGrpSpPr>
-      <p:grpSpPr>
-        <a:xfrm>
-          <a:off x="0" y="0"/>
-          <a:ext cx="0" cy="0"/>
-          <a:chOff x="0" y="0"/>
-          <a:chExt cx="0" cy="0"/>
-        </a:xfrm>
-      </p:grpSpPr>
-      <p:sp>
-        <p:nvSpPr>
-          <p:cNvPr id="166" name="Google Shape;166;p7"/>
-          <p:cNvSpPr txBox="1">
-            <a:spLocks noGrp="1"/>
-          </p:cNvSpPr>
-          <p:nvPr>
-            <p:ph type="sldNum" idx="12"/>
-          </p:nvPr>
-        </p:nvSpPr>
-        <p:spPr>
-          <a:prstGeom prst="rect">
-            <a:avLst/>
-          </a:prstGeom>
-          <a:noFill/>
-          <a:ln>
-            <a:noFill/>
-          </a:ln>
-        </p:spPr>
-        <p:txBody>
-          <a:bodyPr spcFirstLastPara="1" wrap="square" lIns="91425" tIns="45700" rIns="91425" bIns="45700" anchor="ctr" anchorCtr="0">
-            <a:noAutofit/>
-          </a:bodyPr>
-          <a:lstStyle/>
-          <a:p>
-            <a:pPr marL="0" lvl="0" indent="0" algn="r" rtl="0">
-              <a:spcBef>
-                <a:spcPts val="0"/>
-              </a:spcBef>
-              <a:spcAft>
-                <a:spcPts val="0"/>
-              </a:spcAft>
-              <a:buNone/>
-            </a:pPr>
-            <a:fld id="{00000000-1234-1234-1234-123412341234}" type="slidenum">
-              <a:rPr lang="en-US"/>
-              <a:t>13</a:t>
-            </a:fld>
-            <a:endParaRPr/>
-          </a:p>
-        </p:txBody>
-      </p:sp>
-      <p:sp>
-        <p:nvSpPr>
-          <p:cNvPr id="164" name="Google Shape;164;p7"/>
-          <p:cNvSpPr txBox="1">
-            <a:spLocks noGrp="1"/>
-          </p:cNvSpPr>
-          <p:nvPr>
-            <p:ph type="title" idx="4294967295"/>
-          </p:nvPr>
-        </p:nvSpPr>
-        <p:spPr>
-          <a:xfrm>
-            <a:off x="0" y="708025"/>
-            <a:ext cx="10515600" cy="1325563"/>
-          </a:xfrm>
-          <a:prstGeom prst="rect">
-            <a:avLst/>
-          </a:prstGeom>
-          <a:noFill/>
-          <a:ln>
-            <a:noFill/>
-          </a:ln>
-        </p:spPr>
-        <p:txBody>
-          <a:bodyPr spcFirstLastPara="1" wrap="square" lIns="91425" tIns="45700" rIns="91425" bIns="45700" anchor="ctr" anchorCtr="0">
-            <a:normAutofit/>
-          </a:bodyPr>
-          <a:lstStyle/>
-          <a:p>
-            <a:pPr marL="0" lvl="0" indent="0" algn="l" rtl="0">
-              <a:lnSpc>
-                <a:spcPct val="90000"/>
-              </a:lnSpc>
-              <a:spcBef>
-                <a:spcPts val="0"/>
-              </a:spcBef>
-              <a:spcAft>
-                <a:spcPts val="0"/>
-              </a:spcAft>
-              <a:buClr>
-                <a:srgbClr val="181C24"/>
-              </a:buClr>
-              <a:buSzPts val="3600"/>
-              <a:buFont typeface="Times New Roman"/>
-              <a:buNone/>
-            </a:pPr>
-            <a:r>
-              <a:rPr lang="en-US" sz="3600" i="0" dirty="0">
-                <a:solidFill>
-                  <a:srgbClr val="181C24"/>
-                </a:solidFill>
-                <a:highlight>
-                  <a:srgbClr val="FFFFFF"/>
-                </a:highlight>
-                <a:latin typeface="Times New Roman"/>
-                <a:ea typeface="Times New Roman"/>
-                <a:cs typeface="Times New Roman"/>
-                <a:sym typeface="Times New Roman"/>
-              </a:rPr>
-              <a:t>    </a:t>
-            </a:r>
-            <a:r>
-              <a:rPr lang="en-US" sz="3600" b="1" i="0" dirty="0">
-                <a:solidFill>
-                  <a:srgbClr val="181C24"/>
-                </a:solidFill>
-                <a:highlight>
-                  <a:srgbClr val="FFFFFF"/>
-                </a:highlight>
-                <a:latin typeface="Times New Roman"/>
-                <a:ea typeface="Times New Roman"/>
-                <a:cs typeface="Times New Roman"/>
-                <a:sym typeface="Times New Roman"/>
-              </a:rPr>
-              <a:t>PROJECT TIMELINE</a:t>
-            </a:r>
-            <a:endParaRPr sz="3600" b="1" dirty="0">
-              <a:latin typeface="Times New Roman"/>
-              <a:ea typeface="Times New Roman"/>
-              <a:cs typeface="Times New Roman"/>
-              <a:sym typeface="Times New Roman"/>
-            </a:endParaRPr>
-          </a:p>
-        </p:txBody>
-      </p:sp>
-      <p:pic>
-        <p:nvPicPr>
-          <p:cNvPr id="167" name="Google Shape;167;p7"/>
-          <p:cNvPicPr preferRelativeResize="0"/>
-          <p:nvPr/>
-        </p:nvPicPr>
-        <p:blipFill rotWithShape="1">
-          <a:blip r:embed="rId2">
-            <a:alphaModFix/>
-          </a:blip>
-          <a:srcRect/>
-          <a:stretch/>
-        </p:blipFill>
-        <p:spPr>
-          <a:xfrm>
-            <a:off x="159971" y="211556"/>
-            <a:ext cx="4290731" cy="770131"/>
-          </a:xfrm>
-          <a:prstGeom prst="rect">
-            <a:avLst/>
-          </a:prstGeom>
-          <a:noFill/>
-          <a:ln>
-            <a:noFill/>
-          </a:ln>
-        </p:spPr>
-      </p:pic>
-      <p:pic>
-        <p:nvPicPr>
-          <p:cNvPr id="168" name="Google Shape;168;p7"/>
-          <p:cNvPicPr preferRelativeResize="0"/>
-          <p:nvPr/>
-        </p:nvPicPr>
-        <p:blipFill rotWithShape="1">
-          <a:blip r:embed="rId3">
-            <a:alphaModFix/>
-          </a:blip>
-          <a:srcRect/>
-          <a:stretch/>
-        </p:blipFill>
-        <p:spPr>
-          <a:xfrm>
-            <a:off x="11072819" y="154753"/>
-            <a:ext cx="816174" cy="930568"/>
-          </a:xfrm>
-          <a:prstGeom prst="rect">
-            <a:avLst/>
-          </a:prstGeom>
-          <a:noFill/>
-          <a:ln>
-            <a:noFill/>
-          </a:ln>
-        </p:spPr>
-      </p:pic>
-      <p:sp>
-        <p:nvSpPr>
-          <p:cNvPr id="169" name="Google Shape;169;p7"/>
-          <p:cNvSpPr/>
-          <p:nvPr/>
-        </p:nvSpPr>
-        <p:spPr>
-          <a:xfrm>
-            <a:off x="21336" y="6356350"/>
-            <a:ext cx="7684389" cy="461665"/>
-          </a:xfrm>
-          <a:custGeom>
-            <a:avLst/>
-            <a:gdLst/>
-            <a:ahLst/>
-            <a:cxnLst/>
-            <a:rect l="l" t="t" r="r" b="b"/>
-            <a:pathLst>
-              <a:path w="6172200" h="369332" extrusionOk="0">
-                <a:moveTo>
-                  <a:pt x="0" y="0"/>
-                </a:moveTo>
-                <a:lnTo>
-                  <a:pt x="5791200" y="0"/>
-                </a:lnTo>
-                <a:lnTo>
-                  <a:pt x="6172200" y="369332"/>
-                </a:lnTo>
-                <a:lnTo>
-                  <a:pt x="0" y="369332"/>
-                </a:lnTo>
-                <a:lnTo>
-                  <a:pt x="0" y="0"/>
-                </a:lnTo>
-                <a:close/>
-              </a:path>
-            </a:pathLst>
-          </a:custGeom>
-          <a:solidFill>
-            <a:schemeClr val="accent1"/>
-          </a:solidFill>
-          <a:ln>
-            <a:noFill/>
-          </a:ln>
-        </p:spPr>
-        <p:txBody>
-          <a:bodyPr spcFirstLastPara="1" wrap="square" lIns="91425" tIns="45700" rIns="91425" bIns="45700" anchor="t" anchorCtr="0">
-            <a:spAutoFit/>
-          </a:bodyPr>
-          <a:lstStyle/>
-          <a:p>
-            <a:pPr marL="0" marR="0" lvl="0" indent="0" algn="ctr" rtl="0">
-              <a:spcBef>
-                <a:spcPts val="0"/>
-              </a:spcBef>
-              <a:spcAft>
-                <a:spcPts val="0"/>
-              </a:spcAft>
-              <a:buClr>
-                <a:schemeClr val="lt1"/>
-              </a:buClr>
-              <a:buSzPts val="2400"/>
-              <a:buFont typeface="Gill Sans"/>
-              <a:buNone/>
-            </a:pPr>
-            <a:r>
-              <a:rPr lang="en-US" sz="2400">
-                <a:solidFill>
-                  <a:schemeClr val="lt1"/>
-                </a:solidFill>
-                <a:latin typeface="Gill Sans"/>
-                <a:ea typeface="Gill Sans"/>
-                <a:cs typeface="Gill Sans"/>
-                <a:sym typeface="Gill Sans"/>
-              </a:rPr>
-              <a:t>LEARN . GROW . EXCEL</a:t>
-            </a:r>
-            <a:endParaRPr sz="1800">
-              <a:solidFill>
-                <a:schemeClr val="dk1"/>
-              </a:solidFill>
-              <a:latin typeface="Calibri"/>
-              <a:ea typeface="Calibri"/>
-              <a:cs typeface="Calibri"/>
-              <a:sym typeface="Calibri"/>
-            </a:endParaRPr>
           </a:p>
         </p:txBody>
       </p:sp>
@@ -16529,15 +14524,10 @@
               </a:spcAft>
               <a:buNone/>
             </a:pPr>
-            <a:r>
-              <a:rPr sz="1800" b="1">
-                <a:solidFill>
-                  <a:srgbClr val="0F172A"/>
-                </a:solidFill>
-                <a:latin typeface="Times New Roman"/>
-              </a:rPr>
+            <a:fld id="{00000000-1234-1234-1234-123412341234}" type="slidenum">
+              <a:rPr lang="en-US"/>
               <a:t>2</a:t>
-            </a:r>
+            </a:fld>
             <a:endParaRPr/>
           </a:p>
         </p:txBody>
@@ -16705,16 +14695,25 @@
               <a:buNone/>
             </a:pPr>
             <a:r>
-              <a:rPr sz="3400" b="1">
-                <a:solidFill>
-                  <a:srgbClr val="0F172A"/>
-                </a:solidFill>
-                <a:latin typeface="Times New Roman"/>
+              <a:rPr lang="en-US" sz="3400" b="1">
+                <a:solidFill>
+                  <a:srgbClr val="181C24"/>
+                </a:solidFill>
+                <a:highlight>
+                  <a:srgbClr val="FFFFFF"/>
+                </a:highlight>
+                <a:latin typeface="Times New Roman" panose="02020603050405020304" pitchFamily="18" charset="0"/>
+                <a:ea typeface="Times New Roman"/>
+                <a:cs typeface="Times New Roman"/>
+                <a:sym typeface="Times New Roman"/>
               </a:rPr>
               <a:t>INTRODUCTION</a:t>
             </a:r>
-            <a:endParaRPr sz="3600" b="1" dirty="0">
-              <a:latin typeface="Times New Roman"/>
+            <a:endParaRPr sz="3400" b="1" dirty="0">
+              <a:solidFill>
+                <a:srgbClr val="181C24"/>
+              </a:solidFill>
+              <a:latin typeface="Times New Roman" panose="02020603050405020304" pitchFamily="18" charset="0"/>
               <a:ea typeface="Times New Roman"/>
               <a:cs typeface="Times New Roman"/>
               <a:sym typeface="Times New Roman"/>
@@ -16751,14 +14750,20 @@
       </p:pic>
       <p:sp>
         <p:nvSpPr>
-          <p:cNvPr id="126" name="TextBox 125"/>
+          <p:cNvPr id="2" name="TextBox 1">
+            <a:extLst>
+              <a:ext uri="{FF2B5EF4-FFF2-40B4-BE49-F238E27FC236}">
+                <a16:creationId xmlns:a16="http://schemas.microsoft.com/office/drawing/2014/main" id="{CD30A1A3-16A9-404E-DC82-F6021C8DDC83}"/>
+              </a:ext>
+            </a:extLst>
+          </p:cNvPr>
           <p:cNvSpPr txBox="1"/>
           <p:nvPr/>
         </p:nvSpPr>
         <p:spPr>
           <a:xfrm>
-            <a:off x="731520" y="1920240"/>
-            <a:ext cx="10698480" cy="4114800"/>
+            <a:off x="635000" y="1778000"/>
+            <a:ext cx="9906000" cy="3616375"/>
           </a:xfrm>
           <a:prstGeom prst="rect">
             <a:avLst/>
@@ -16766,160 +14771,71 @@
           <a:noFill/>
         </p:spPr>
         <p:txBody>
-          <a:bodyPr wrap="square">
+          <a:bodyPr vert="horz" wrap="square" rtlCol="0">
             <a:spAutoFit/>
           </a:bodyPr>
           <a:lstStyle/>
           <a:p>
-            <a:pPr>
-              <a:spcBef>
-                <a:spcPts val="800"/>
-              </a:spcBef>
-              <a:spcAft>
-                <a:spcPts val="200"/>
-              </a:spcAft>
-            </a:pPr>
             <a:r>
-              <a:rPr sz="2200" b="1">
+              <a:rPr lang="en-IN" sz="1700" b="1">
                 <a:solidFill>
                   <a:srgbClr val="0284C7"/>
                 </a:solidFill>
-                <a:latin typeface="Times New Roman"/>
+                <a:latin typeface="Times New Roman" panose="02020603050405020304" pitchFamily="18" charset="0"/>
               </a:rPr>
               <a:t>Semiconductor Fabrication Complexity</a:t>
             </a:r>
-          </a:p>
-          <a:p>
-            <a:pPr>
-              <a:spcBef>
-                <a:spcPts val="200"/>
-              </a:spcBef>
-              <a:spcAft>
-                <a:spcPts val="400"/>
-              </a:spcAft>
-            </a:pPr>
             <a:r>
-              <a:rPr sz="1800" b="0">
-                <a:solidFill>
-                  <a:srgbClr val="1E293B"/>
-                </a:solidFill>
-                <a:latin typeface="Times New Roman"/>
+              <a:rPr lang="en-IN" sz="1500">
+                <a:solidFill>
+                  <a:srgbClr val="181C24"/>
+                </a:solidFill>
+                <a:latin typeface="Times New Roman" panose="02020603050405020304" pitchFamily="18" charset="0"/>
               </a:rPr>
-              <a:t>•  Modern integrated circuit fabrication operates at deep sub-micron nodes on 300 mm silicon wafers, spanning over 500 physical and chemical processing steps.</a:t>
+              <a:t>
+•  Modern integrated circuits are manufactured on 300 mm silicon wafers spanning 500+ delicate chemical-mechanical processing steps at sub-10 nm nodes.
+•  A single microscopic defect during lithography, etch, or chemical-mechanical planarization (CMP) compromises hundreds of microchips.
+</a:t>
             </a:r>
-          </a:p>
-          <a:p>
-            <a:pPr>
-              <a:spcBef>
-                <a:spcPts val="200"/>
-              </a:spcBef>
-              <a:spcAft>
-                <a:spcPts val="400"/>
-              </a:spcAft>
-            </a:pPr>
             <a:r>
-              <a:rPr sz="1800" b="0">
-                <a:solidFill>
-                  <a:srgbClr val="1E293B"/>
-                </a:solidFill>
-                <a:latin typeface="Times New Roman"/>
-              </a:rPr>
-              <a:t>•  A single microscopic defect during deposition, photolithography, or chemical-mechanical planarization (CMP) can render hundreds of chips inoperable.</a:t>
-            </a:r>
-          </a:p>
-          <a:p>
-            <a:pPr>
-              <a:spcBef>
-                <a:spcPts val="800"/>
-              </a:spcBef>
-              <a:spcAft>
-                <a:spcPts val="200"/>
-              </a:spcAft>
-            </a:pPr>
-            <a:r>
-              <a:rPr sz="2200" b="1">
+              <a:rPr lang="en-IN" sz="1700" b="1">
                 <a:solidFill>
                   <a:srgbClr val="0284C7"/>
                 </a:solidFill>
-                <a:latin typeface="Times New Roman"/>
+                <a:latin typeface="Times New Roman" panose="02020603050405020304" pitchFamily="18" charset="0"/>
               </a:rPr>
               <a:t>Spatial Wafer Defect Signatures &amp; WM-811K Benchmark</a:t>
             </a:r>
-          </a:p>
-          <a:p>
-            <a:pPr>
-              <a:spcBef>
-                <a:spcPts val="200"/>
-              </a:spcBef>
-              <a:spcAft>
-                <a:spcPts val="400"/>
-              </a:spcAft>
-            </a:pPr>
             <a:r>
-              <a:rPr sz="1800" b="0">
-                <a:solidFill>
-                  <a:srgbClr val="1E293B"/>
-                </a:solidFill>
-                <a:latin typeface="Times New Roman"/>
+              <a:rPr lang="en-IN" sz="1500">
+                <a:solidFill>
+                  <a:srgbClr val="181C24"/>
+                </a:solidFill>
+                <a:latin typeface="Times New Roman" panose="02020603050405020304" pitchFamily="18" charset="0"/>
               </a:rPr>
-              <a:t>•  Manufacturing tool failures manifest as systematic spatial defect clusters across the wafer disc (e.g., Center, Donut, Scratch, Edge-Ring, Loc).</a:t>
+              <a:t>
+•  Equipment failures deposit spatially correlated defective dies across the substrate, generating characteristic topological clusters (Center, Donut, Scratch, Edge-Ring, Loc).
+•  We utilize the real-world WM-811K dataset (811,457 commercial wafer maps) to capture authentic industrial semiconductor defect patterns.
+</a:t>
             </a:r>
-          </a:p>
-          <a:p>
-            <a:pPr>
-              <a:spcBef>
-                <a:spcPts val="200"/>
-              </a:spcBef>
-              <a:spcAft>
-                <a:spcPts val="400"/>
-              </a:spcAft>
-            </a:pPr>
             <a:r>
-              <a:rPr sz="1800" b="0">
-                <a:solidFill>
-                  <a:srgbClr val="1E293B"/>
-                </a:solidFill>
-                <a:latin typeface="Times New Roman"/>
+              <a:rPr lang="en-IN" sz="1700" b="1">
+                <a:solidFill>
+                  <a:srgbClr val="0284C7"/>
+                </a:solidFill>
+                <a:latin typeface="Times New Roman" panose="02020603050405020304" pitchFamily="18" charset="0"/>
               </a:rPr>
-              <a:t>•  We utilize the world-benchmark WM-811K industrial dataset (811,457 commercial wafer maps) to capture authentic semiconductor fabrication signatures.</a:t>
+              <a:t>Automated Optical Inspection (AOI)</a:t>
             </a:r>
-          </a:p>
-          <a:p>
-            <a:pPr>
-              <a:spcBef>
-                <a:spcPts val="800"/>
-              </a:spcBef>
-              <a:spcAft>
-                <a:spcPts val="200"/>
-              </a:spcAft>
-            </a:pPr>
             <a:r>
-              <a:rPr sz="2200" b="1">
-                <a:solidFill>
-                  <a:srgbClr val="0284C7"/>
-                </a:solidFill>
-                <a:latin typeface="Times New Roman"/>
+              <a:rPr lang="en-IN" sz="1500">
+                <a:solidFill>
+                  <a:srgbClr val="181C24"/>
+                </a:solidFill>
+                <a:latin typeface="Times New Roman" panose="02020603050405020304" pitchFamily="18" charset="0"/>
               </a:rPr>
-              <a:t>Role of Automated Optical Inspection (AOI)</a:t>
-            </a:r>
-          </a:p>
-          <a:p>
-            <a:pPr>
-              <a:spcBef>
-                <a:spcPts val="200"/>
-              </a:spcBef>
-              <a:spcAft>
-                <a:spcPts val="400"/>
-              </a:spcAft>
-            </a:pPr>
-            <a:r>
-              <a:rPr sz="1800" b="0">
-                <a:solidFill>
-                  <a:srgbClr val="1E293B"/>
-                </a:solidFill>
-                <a:latin typeface="Times New Roman"/>
-              </a:rPr>
-              <a:t>•  Automated defect classification enables immediate fabrication tool root-cause diagnosis, drastically minimizing wafer lot scrap and engineering turnaround time.</a:t>
+              <a:t>
+•  Instant automated defect classification enables immediate fabrication tool root-cause diagnosis, saving millions in scrap and engineering turnaround time.</a:t>
             </a:r>
           </a:p>
         </p:txBody>
@@ -16987,15 +14903,10 @@
               </a:spcAft>
               <a:buNone/>
             </a:pPr>
-            <a:r>
-              <a:rPr sz="1800" b="1">
-                <a:solidFill>
-                  <a:srgbClr val="0F172A"/>
-                </a:solidFill>
-                <a:latin typeface="Times New Roman"/>
-              </a:rPr>
+            <a:fld id="{00000000-1234-1234-1234-123412341234}" type="slidenum">
+              <a:rPr lang="en-US"/>
               <a:t>3</a:t>
-            </a:r>
+            </a:fld>
             <a:endParaRPr/>
           </a:p>
         </p:txBody>
@@ -17163,16 +15074,25 @@
               <a:buNone/>
             </a:pPr>
             <a:r>
-              <a:rPr sz="3400" b="1">
-                <a:solidFill>
-                  <a:srgbClr val="0F172A"/>
-                </a:solidFill>
-                <a:latin typeface="Times New Roman"/>
+              <a:rPr lang="en-US" sz="3400" b="1">
+                <a:solidFill>
+                  <a:srgbClr val="181C24"/>
+                </a:solidFill>
+                <a:highlight>
+                  <a:srgbClr val="FFFFFF"/>
+                </a:highlight>
+                <a:latin typeface="Times New Roman" panose="02020603050405020304" pitchFamily="18" charset="0"/>
+                <a:ea typeface="Times New Roman"/>
+                <a:cs typeface="Times New Roman"/>
+                <a:sym typeface="Times New Roman"/>
               </a:rPr>
               <a:t>PROBLEM STATEMENT</a:t>
             </a:r>
-            <a:endParaRPr sz="3600" b="1" dirty="0">
-              <a:latin typeface="Times New Roman"/>
+            <a:endParaRPr sz="3400" b="1" dirty="0">
+              <a:solidFill>
+                <a:srgbClr val="181C24"/>
+              </a:solidFill>
+              <a:latin typeface="Times New Roman" panose="02020603050405020304" pitchFamily="18" charset="0"/>
               <a:ea typeface="Times New Roman"/>
               <a:cs typeface="Times New Roman"/>
               <a:sym typeface="Times New Roman"/>
@@ -17209,14 +15129,20 @@
       </p:pic>
       <p:sp>
         <p:nvSpPr>
-          <p:cNvPr id="126" name="TextBox 125"/>
+          <p:cNvPr id="2" name="TextBox 1">
+            <a:extLst>
+              <a:ext uri="{FF2B5EF4-FFF2-40B4-BE49-F238E27FC236}">
+                <a16:creationId xmlns:a16="http://schemas.microsoft.com/office/drawing/2014/main" id="{85594A66-0345-E493-AB22-EBA62A81FD2F}"/>
+              </a:ext>
+            </a:extLst>
+          </p:cNvPr>
           <p:cNvSpPr txBox="1"/>
           <p:nvPr/>
         </p:nvSpPr>
         <p:spPr>
           <a:xfrm>
-            <a:off x="731520" y="1920240"/>
-            <a:ext cx="10698480" cy="4114800"/>
+            <a:off x="635000" y="1778000"/>
+            <a:ext cx="9906000" cy="3677930"/>
           </a:xfrm>
           <a:prstGeom prst="rect">
             <a:avLst/>
@@ -17224,161 +15150,96 @@
           <a:noFill/>
         </p:spPr>
         <p:txBody>
-          <a:bodyPr wrap="square">
+          <a:bodyPr vert="horz" wrap="square" rtlCol="0">
             <a:spAutoFit/>
           </a:bodyPr>
           <a:lstStyle/>
           <a:p>
-            <a:pPr>
-              <a:spcBef>
-                <a:spcPts val="800"/>
-              </a:spcBef>
-              <a:spcAft>
-                <a:spcPts val="200"/>
-              </a:spcAft>
-            </a:pPr>
             <a:r>
-              <a:rPr sz="2200" b="1">
+              <a:rPr lang="en-US" sz="1700" b="1">
                 <a:solidFill>
                   <a:srgbClr val="0284C7"/>
                 </a:solidFill>
-                <a:latin typeface="Times New Roman"/>
+                <a:latin typeface="Times New Roman" panose="02020603050405020304" pitchFamily="18" charset="0"/>
               </a:rPr>
               <a:t>High-Throughput Fabrication Bottlenecks</a:t>
             </a:r>
-          </a:p>
-          <a:p>
-            <a:pPr>
-              <a:spcBef>
-                <a:spcPts val="200"/>
-              </a:spcBef>
-              <a:spcAft>
-                <a:spcPts val="400"/>
-              </a:spcAft>
-            </a:pPr>
             <a:r>
-              <a:rPr sz="1800" b="0">
-                <a:solidFill>
-                  <a:srgbClr val="1E293B"/>
-                </a:solidFill>
-                <a:latin typeface="Times New Roman"/>
+              <a:rPr lang="en-US" sz="1500">
+                <a:solidFill>
+                  <a:srgbClr val="181C24"/>
+                </a:solidFill>
+                <a:latin typeface="Times New Roman" panose="02020603050405020304" pitchFamily="18" charset="0"/>
               </a:rPr>
-              <a:t>•  Modern fabs produce tens of thousands of wafers monthly; manual optical and scanning electron microscopy (SEM) inspection is slow, subjective, and prone to severe operator fatigue.</a:t>
+              <a:t>
+•  Commercial fabs produce tens of thousands of wafers monthly; manual optical and SEM microscopy inspection is slow, subjective, and prone to severe human fatigue.
+</a:t>
             </a:r>
-          </a:p>
-          <a:p>
-            <a:pPr>
-              <a:spcBef>
-                <a:spcPts val="800"/>
-              </a:spcBef>
-              <a:spcAft>
-                <a:spcPts val="200"/>
-              </a:spcAft>
-            </a:pPr>
             <a:r>
-              <a:rPr sz="2200" b="1">
+              <a:rPr lang="en-US" sz="1700" b="1">
                 <a:solidFill>
                   <a:srgbClr val="0284C7"/>
                 </a:solidFill>
-                <a:latin typeface="Times New Roman"/>
+                <a:latin typeface="Times New Roman" panose="02020603050405020304" pitchFamily="18" charset="0"/>
               </a:rPr>
               <a:t>Extreme Industrial Class Imbalance</a:t>
             </a:r>
-          </a:p>
-          <a:p>
-            <a:pPr>
-              <a:spcBef>
-                <a:spcPts val="200"/>
-              </a:spcBef>
-              <a:spcAft>
-                <a:spcPts val="400"/>
-              </a:spcAft>
-            </a:pPr>
             <a:r>
-              <a:rPr sz="1800" b="0">
-                <a:solidFill>
-                  <a:srgbClr val="1E293B"/>
-                </a:solidFill>
-                <a:latin typeface="Times New Roman"/>
+              <a:rPr lang="en-US" sz="1500">
+                <a:solidFill>
+                  <a:srgbClr val="181C24"/>
+                </a:solidFill>
+                <a:latin typeface="Times New Roman" panose="02020603050405020304" pitchFamily="18" charset="0"/>
               </a:rPr>
-              <a:t>•  In production environments, nominal (clean) wafers exceed 78% of all manufactured substrates, making minority defect topologies difficult for conventional algorithms to detect reliably.</a:t>
+              <a:t>
+•  In commercial fabrication, nominal (clean) wafers exceed 78% of production lots, leaving minority defect topologies difficult for conventional algorithms to detect reliably.
+</a:t>
             </a:r>
-          </a:p>
-          <a:p>
-            <a:pPr>
-              <a:spcBef>
-                <a:spcPts val="800"/>
-              </a:spcBef>
-              <a:spcAft>
-                <a:spcPts val="200"/>
-              </a:spcAft>
-            </a:pPr>
             <a:r>
-              <a:rPr sz="2200" b="1">
+              <a:rPr lang="en-US" sz="1700" b="1">
                 <a:solidFill>
                   <a:srgbClr val="0284C7"/>
                 </a:solidFill>
-                <a:latin typeface="Times New Roman"/>
+                <a:latin typeface="Times New Roman" panose="02020603050405020304" pitchFamily="18" charset="0"/>
               </a:rPr>
               <a:t>Edge Computational Constraints in Fab Lines</a:t>
             </a:r>
-          </a:p>
-          <a:p>
-            <a:pPr>
-              <a:spcBef>
-                <a:spcPts val="200"/>
-              </a:spcBef>
-              <a:spcAft>
-                <a:spcPts val="400"/>
-              </a:spcAft>
-            </a:pPr>
             <a:r>
-              <a:rPr sz="1800" b="0">
-                <a:solidFill>
-                  <a:srgbClr val="1E293B"/>
-                </a:solidFill>
-                <a:latin typeface="Times New Roman"/>
+              <a:rPr lang="en-US" sz="1500">
+                <a:solidFill>
+                  <a:srgbClr val="181C24"/>
+                </a:solidFill>
+                <a:latin typeface="Times New Roman" panose="02020603050405020304" pitchFamily="18" charset="0"/>
               </a:rPr>
-              <a:t>•  Traditional heavy deep learning architectures (e.g., ResNet-50, VGG-16) suffer from multi-hundred-megabyte footprints, heavy GPU dependence, and high inference latency (&gt;50 ms), making inline fab deployment infeasible.</a:t>
+              <a:t>
+•  Heavy deep learning backbones (e.g., ResNet-50, VGG-16) suffer from multi-hundred-megabyte footprints, heavy GPU dependence, and high inference latency (&gt;50 ms).
+</a:t>
             </a:r>
-          </a:p>
-          <a:p>
-            <a:pPr>
-              <a:spcBef>
-                <a:spcPts val="800"/>
-              </a:spcBef>
-              <a:spcAft>
-                <a:spcPts val="200"/>
-              </a:spcAft>
-            </a:pPr>
             <a:r>
-              <a:rPr sz="2200" b="1">
+              <a:rPr lang="en-US" sz="1700" b="1">
                 <a:solidFill>
                   <a:srgbClr val="0284C7"/>
                 </a:solidFill>
-                <a:latin typeface="Times New Roman"/>
+                <a:latin typeface="Times New Roman" panose="02020603050405020304" pitchFamily="18" charset="0"/>
               </a:rPr>
-              <a:t>Core Problem Definition</a:t>
+              <a:t>Core Problem Statement</a:t>
             </a:r>
-          </a:p>
-          <a:p>
-            <a:pPr>
-              <a:spcBef>
-                <a:spcPts val="200"/>
-              </a:spcBef>
-              <a:spcAft>
-                <a:spcPts val="400"/>
-              </a:spcAft>
-            </a:pPr>
             <a:r>
-              <a:rPr sz="1800" b="0">
-                <a:solidFill>
-                  <a:srgbClr val="1E293B"/>
-                </a:solidFill>
-                <a:latin typeface="Times New Roman"/>
+              <a:rPr lang="en-US" sz="1500">
+                <a:solidFill>
+                  <a:srgbClr val="181C24"/>
+                </a:solidFill>
+                <a:latin typeface="Times New Roman" panose="02020603050405020304" pitchFamily="18" charset="0"/>
               </a:rPr>
-              <a:t>•  Need for an ultra-lightweight, edge-deployable deep learning classification engine achieving &gt;98% accuracy and sub-2 ms latency across multi-class wafer defect topologies on standard CPU hardware.</a:t>
+              <a:t>
+•  Need for an ultra-lightweight, edge-deployable deep learning classification engine achieving &gt;98% accuracy and sub-2 ms latency across multi-class wafer defect topologies on standard CPU hardware.</a:t>
             </a:r>
+            <a:endParaRPr lang="en-IN" sz="1500">
+              <a:solidFill>
+                <a:srgbClr val="181C24"/>
+              </a:solidFill>
+              <a:latin typeface="Times New Roman" panose="02020603050405020304" pitchFamily="18" charset="0"/>
+            </a:endParaRPr>
           </a:p>
         </p:txBody>
       </p:sp>
@@ -17445,15 +15306,10 @@
               </a:spcAft>
               <a:buNone/>
             </a:pPr>
-            <a:r>
-              <a:rPr sz="1800" b="1">
-                <a:solidFill>
-                  <a:srgbClr val="0F172A"/>
-                </a:solidFill>
-                <a:latin typeface="Times New Roman"/>
-              </a:rPr>
+            <a:fld id="{00000000-1234-1234-1234-123412341234}" type="slidenum">
+              <a:rPr lang="en-US"/>
               <a:t>4</a:t>
-            </a:r>
+            </a:fld>
             <a:endParaRPr/>
           </a:p>
         </p:txBody>
@@ -17621,16 +15477,25 @@
               <a:buNone/>
             </a:pPr>
             <a:r>
-              <a:rPr sz="3400" b="1">
-                <a:solidFill>
-                  <a:srgbClr val="0F172A"/>
-                </a:solidFill>
-                <a:latin typeface="Times New Roman"/>
+              <a:rPr lang="en-US" sz="3400" b="1">
+                <a:solidFill>
+                  <a:srgbClr val="181C24"/>
+                </a:solidFill>
+                <a:highlight>
+                  <a:srgbClr val="FFFFFF"/>
+                </a:highlight>
+                <a:latin typeface="Times New Roman" panose="02020603050405020304" pitchFamily="18" charset="0"/>
+                <a:ea typeface="Times New Roman"/>
+                <a:cs typeface="Times New Roman"/>
+                <a:sym typeface="Times New Roman"/>
               </a:rPr>
               <a:t>NEED FOR THE PROJECT</a:t>
             </a:r>
-            <a:endParaRPr sz="3600" b="1" dirty="0">
-              <a:latin typeface="Times New Roman"/>
+            <a:endParaRPr sz="3400" b="1" dirty="0">
+              <a:solidFill>
+                <a:srgbClr val="181C24"/>
+              </a:solidFill>
+              <a:latin typeface="Times New Roman" panose="02020603050405020304" pitchFamily="18" charset="0"/>
               <a:ea typeface="Times New Roman"/>
               <a:cs typeface="Times New Roman"/>
               <a:sym typeface="Times New Roman"/>
@@ -17667,14 +15532,20 @@
       </p:pic>
       <p:sp>
         <p:nvSpPr>
-          <p:cNvPr id="126" name="TextBox 125"/>
+          <p:cNvPr id="2" name="TextBox 1">
+            <a:extLst>
+              <a:ext uri="{FF2B5EF4-FFF2-40B4-BE49-F238E27FC236}">
+                <a16:creationId xmlns:a16="http://schemas.microsoft.com/office/drawing/2014/main" id="{BB34BEFD-5999-0264-CBFB-51287454E1F7}"/>
+              </a:ext>
+            </a:extLst>
+          </p:cNvPr>
           <p:cNvSpPr txBox="1"/>
           <p:nvPr/>
         </p:nvSpPr>
         <p:spPr>
           <a:xfrm>
-            <a:off x="731520" y="1920240"/>
-            <a:ext cx="10698480" cy="4114800"/>
+            <a:off x="635000" y="1778000"/>
+            <a:ext cx="9906000" cy="3385542"/>
           </a:xfrm>
           <a:prstGeom prst="rect">
             <a:avLst/>
@@ -17682,198 +15553,73 @@
           <a:noFill/>
         </p:spPr>
         <p:txBody>
-          <a:bodyPr wrap="square">
+          <a:bodyPr vert="horz" wrap="square" rtlCol="0">
             <a:spAutoFit/>
           </a:bodyPr>
           <a:lstStyle/>
           <a:p>
-            <a:pPr>
-              <a:spcBef>
-                <a:spcPts val="800"/>
-              </a:spcBef>
-              <a:spcAft>
-                <a:spcPts val="200"/>
-              </a:spcAft>
-            </a:pPr>
             <a:r>
-              <a:rPr sz="2200" b="1">
+              <a:rPr lang="en-IN" sz="1700" b="1">
                 <a:solidFill>
                   <a:srgbClr val="0284C7"/>
                 </a:solidFill>
-                <a:latin typeface="Times New Roman"/>
+                <a:latin typeface="Times New Roman" panose="02020603050405020304" pitchFamily="18" charset="0"/>
               </a:rPr>
               <a:t>Critical Yield Economics &amp; Cost Reduction</a:t>
             </a:r>
-          </a:p>
-          <a:p>
-            <a:pPr>
-              <a:spcBef>
-                <a:spcPts val="200"/>
-              </a:spcBef>
-              <a:spcAft>
-                <a:spcPts val="400"/>
-              </a:spcAft>
-            </a:pPr>
             <a:r>
-              <a:rPr sz="1800" b="0">
-                <a:solidFill>
-                  <a:srgbClr val="1E293B"/>
-                </a:solidFill>
-                <a:latin typeface="Times New Roman"/>
+              <a:rPr lang="en-IN" sz="1500">
+                <a:solidFill>
+                  <a:srgbClr val="181C24"/>
+                </a:solidFill>
+                <a:latin typeface="Times New Roman" panose="02020603050405020304" pitchFamily="18" charset="0"/>
               </a:rPr>
-              <a:t>•  Defect detection at wafer probe testing prevents defective dies from progressing into expensive packaging, wire-bonding, and encapsulation phases, saving millions annually.</a:t>
+              <a:t>
+•  Defect detection at wafer probe testing prevents defective dies from progressing into expensive packaging, wire-bonding, and encapsulation phases, saving millions annually.
+</a:t>
             </a:r>
-          </a:p>
-          <a:p>
-            <a:pPr>
-              <a:spcBef>
-                <a:spcPts val="800"/>
-              </a:spcBef>
-              <a:spcAft>
-                <a:spcPts val="200"/>
-              </a:spcAft>
-            </a:pPr>
             <a:r>
-              <a:rPr sz="2200" b="1">
+              <a:rPr lang="en-IN" sz="1700" b="1">
                 <a:solidFill>
                   <a:srgbClr val="0284C7"/>
                 </a:solidFill>
-                <a:latin typeface="Times New Roman"/>
+                <a:latin typeface="Times New Roman" panose="02020603050405020304" pitchFamily="18" charset="0"/>
               </a:rPr>
               <a:t>Equipment Root-Cause Traceability</a:t>
             </a:r>
-          </a:p>
-          <a:p>
-            <a:pPr>
-              <a:spcBef>
-                <a:spcPts val="200"/>
-              </a:spcBef>
-              <a:spcAft>
-                <a:spcPts val="400"/>
-              </a:spcAft>
-            </a:pPr>
             <a:r>
-              <a:rPr sz="1800" b="0">
-                <a:solidFill>
-                  <a:srgbClr val="1E293B"/>
-                </a:solidFill>
-                <a:latin typeface="Times New Roman"/>
+              <a:rPr lang="en-IN" sz="1500">
+                <a:solidFill>
+                  <a:srgbClr val="181C24"/>
+                </a:solidFill>
+                <a:latin typeface="Times New Roman" panose="02020603050405020304" pitchFamily="18" charset="0"/>
               </a:rPr>
-              <a:t>•  Topological signatures correlate directly with specific fab tool malfunctions:</a:t>
+              <a:t>
+•  Topological signatures correlate directly with specific fab tool malfunctions:
+•    - Center Cluster: CMP slurry buildup or spin-coat nozzle misalignment.
+•    - Donut Ring: Radial thermal gradient during rapid thermal annealing (RTA).
+•    - Scratch: Mechanical robot end-effector abrasion or wafer cassette handling damage.
+•    - Edge-Ring: Plasma etching nonuniformity or edge-bead removal (EBR) solvent splash.
+</a:t>
             </a:r>
-          </a:p>
-          <a:p>
-            <a:pPr>
-              <a:spcBef>
-                <a:spcPts val="200"/>
-              </a:spcBef>
-              <a:spcAft>
-                <a:spcPts val="400"/>
-              </a:spcAft>
-            </a:pPr>
             <a:r>
-              <a:rPr sz="1800" b="0">
-                <a:solidFill>
-                  <a:srgbClr val="1E293B"/>
-                </a:solidFill>
-                <a:latin typeface="Times New Roman"/>
-              </a:rPr>
-              <a:t>•      - Center Cluster: CMP slurry buildup or spin-coat nozzle misalignment.</a:t>
-            </a:r>
-          </a:p>
-          <a:p>
-            <a:pPr>
-              <a:spcBef>
-                <a:spcPts val="200"/>
-              </a:spcBef>
-              <a:spcAft>
-                <a:spcPts val="400"/>
-              </a:spcAft>
-            </a:pPr>
-            <a:r>
-              <a:rPr sz="1800" b="0">
-                <a:solidFill>
-                  <a:srgbClr val="1E293B"/>
-                </a:solidFill>
-                <a:latin typeface="Times New Roman"/>
-              </a:rPr>
-              <a:t>•      - Donut Ring: Radial thermal gradient during rapid thermal annealing (RTA).</a:t>
-            </a:r>
-          </a:p>
-          <a:p>
-            <a:pPr>
-              <a:spcBef>
-                <a:spcPts val="200"/>
-              </a:spcBef>
-              <a:spcAft>
-                <a:spcPts val="400"/>
-              </a:spcAft>
-            </a:pPr>
-            <a:r>
-              <a:rPr sz="1800" b="0">
-                <a:solidFill>
-                  <a:srgbClr val="1E293B"/>
-                </a:solidFill>
-                <a:latin typeface="Times New Roman"/>
-              </a:rPr>
-              <a:t>•      - Scratch: Mechanical robot end-effector abrasion or automated wafer cassette handling damage.</a:t>
-            </a:r>
-          </a:p>
-          <a:p>
-            <a:pPr>
-              <a:spcBef>
-                <a:spcPts val="200"/>
-              </a:spcBef>
-              <a:spcAft>
-                <a:spcPts val="400"/>
-              </a:spcAft>
-            </a:pPr>
-            <a:r>
-              <a:rPr sz="1800" b="0">
-                <a:solidFill>
-                  <a:srgbClr val="1E293B"/>
-                </a:solidFill>
-                <a:latin typeface="Times New Roman"/>
-              </a:rPr>
-              <a:t>•      - Edge-Ring: Plasma etching nonuniformity or edge-bead removal (EBR) solvent splash.</a:t>
-            </a:r>
-          </a:p>
-          <a:p>
-            <a:pPr>
-              <a:spcBef>
-                <a:spcPts val="800"/>
-              </a:spcBef>
-              <a:spcAft>
-                <a:spcPts val="200"/>
-              </a:spcAft>
-            </a:pPr>
-            <a:r>
-              <a:rPr sz="2200" b="1">
+              <a:rPr lang="en-IN" sz="1700" b="1">
                 <a:solidFill>
                   <a:srgbClr val="0284C7"/>
                 </a:solidFill>
-                <a:latin typeface="Times New Roman"/>
+                <a:latin typeface="Times New Roman" panose="02020603050405020304" pitchFamily="18" charset="0"/>
               </a:rPr>
               <a:t>Edge Inline Autonomous Screening</a:t>
             </a:r>
-          </a:p>
-          <a:p>
-            <a:pPr>
-              <a:spcBef>
-                <a:spcPts val="200"/>
-              </a:spcBef>
-              <a:spcAft>
-                <a:spcPts val="400"/>
-              </a:spcAft>
-            </a:pPr>
             <a:r>
-              <a:rPr sz="1800" b="0">
-                <a:solidFill>
-                  <a:srgbClr val="1E293B"/>
-                </a:solidFill>
-                <a:latin typeface="Times New Roman"/>
+              <a:rPr lang="en-IN" sz="1500">
+                <a:solidFill>
+                  <a:srgbClr val="181C24"/>
+                </a:solidFill>
+                <a:latin typeface="Times New Roman" panose="02020603050405020304" pitchFamily="18" charset="0"/>
               </a:rPr>
-              <a:t>•  Eliminates bandwidth bottlenecks and cloud data-security risks by executing inference directly on local fab equipment controllers with zero cloud latency.</a:t>
+              <a:t>
+•  Eliminates bandwidth bottlenecks and cloud data-security risks by executing inference directly on local fab equipment controllers with zero cloud latency.</a:t>
             </a:r>
           </a:p>
         </p:txBody>
@@ -17941,15 +15687,10 @@
               </a:spcAft>
               <a:buNone/>
             </a:pPr>
-            <a:r>
-              <a:rPr sz="1800" b="1">
-                <a:solidFill>
-                  <a:srgbClr val="0F172A"/>
-                </a:solidFill>
-                <a:latin typeface="Times New Roman"/>
-              </a:rPr>
+            <a:fld id="{00000000-1234-1234-1234-123412341234}" type="slidenum">
+              <a:rPr lang="en-US"/>
               <a:t>5</a:t>
-            </a:r>
+            </a:fld>
             <a:endParaRPr/>
           </a:p>
         </p:txBody>
@@ -18117,16 +15858,25 @@
               <a:buNone/>
             </a:pPr>
             <a:r>
-              <a:rPr sz="3400" b="1">
-                <a:solidFill>
-                  <a:srgbClr val="0F172A"/>
-                </a:solidFill>
-                <a:latin typeface="Times New Roman"/>
+              <a:rPr lang="en-US" sz="3400" b="1">
+                <a:solidFill>
+                  <a:srgbClr val="181C24"/>
+                </a:solidFill>
+                <a:highlight>
+                  <a:srgbClr val="FFFFFF"/>
+                </a:highlight>
+                <a:latin typeface="Times New Roman" panose="02020603050405020304" pitchFamily="18" charset="0"/>
+                <a:ea typeface="Times New Roman"/>
+                <a:cs typeface="Times New Roman"/>
+                <a:sym typeface="Times New Roman"/>
               </a:rPr>
               <a:t>OBJECTIVES</a:t>
             </a:r>
-            <a:endParaRPr sz="3600" b="1" dirty="0">
-              <a:latin typeface="Times New Roman"/>
+            <a:endParaRPr sz="3400" b="1" dirty="0">
+              <a:solidFill>
+                <a:srgbClr val="181C24"/>
+              </a:solidFill>
+              <a:latin typeface="Times New Roman" panose="02020603050405020304" pitchFamily="18" charset="0"/>
               <a:ea typeface="Times New Roman"/>
               <a:cs typeface="Times New Roman"/>
               <a:sym typeface="Times New Roman"/>
@@ -18163,14 +15913,20 @@
       </p:pic>
       <p:sp>
         <p:nvSpPr>
-          <p:cNvPr id="126" name="TextBox 125"/>
+          <p:cNvPr id="2" name="TextBox 1">
+            <a:extLst>
+              <a:ext uri="{FF2B5EF4-FFF2-40B4-BE49-F238E27FC236}">
+                <a16:creationId xmlns:a16="http://schemas.microsoft.com/office/drawing/2014/main" id="{7362384C-F713-75B2-BD55-991755111F0C}"/>
+              </a:ext>
+            </a:extLst>
+          </p:cNvPr>
           <p:cNvSpPr txBox="1"/>
           <p:nvPr/>
         </p:nvSpPr>
         <p:spPr>
           <a:xfrm>
-            <a:off x="731520" y="1920240"/>
-            <a:ext cx="10698480" cy="4114800"/>
+            <a:off x="635000" y="1778000"/>
+            <a:ext cx="9906000" cy="2200602"/>
           </a:xfrm>
           <a:prstGeom prst="rect">
             <a:avLst/>
@@ -18178,103 +15934,32 @@
           <a:noFill/>
         </p:spPr>
         <p:txBody>
-          <a:bodyPr wrap="square">
+          <a:bodyPr vert="horz" wrap="square" rtlCol="0">
             <a:spAutoFit/>
           </a:bodyPr>
           <a:lstStyle/>
           <a:p>
-            <a:pPr>
-              <a:spcBef>
-                <a:spcPts val="800"/>
-              </a:spcBef>
-              <a:spcAft>
-                <a:spcPts val="200"/>
-              </a:spcAft>
-            </a:pPr>
             <a:r>
-              <a:rPr sz="2200" b="1">
+              <a:rPr lang="en-IN" sz="1700" b="1">
                 <a:solidFill>
                   <a:srgbClr val="0284C7"/>
                 </a:solidFill>
-                <a:latin typeface="Times New Roman"/>
+                <a:latin typeface="Times New Roman" panose="02020603050405020304" pitchFamily="18" charset="0"/>
               </a:rPr>
               <a:t>Primary Project Objectives</a:t>
             </a:r>
-          </a:p>
-          <a:p>
-            <a:pPr>
-              <a:spcBef>
-                <a:spcPts val="200"/>
-              </a:spcBef>
-              <a:spcAft>
-                <a:spcPts val="400"/>
-              </a:spcAft>
-            </a:pPr>
             <a:r>
-              <a:rPr sz="1800" b="0">
-                <a:solidFill>
-                  <a:srgbClr val="1E293B"/>
-                </a:solidFill>
-                <a:latin typeface="Times New Roman"/>
+              <a:rPr lang="en-IN" sz="1500">
+                <a:solidFill>
+                  <a:srgbClr val="181C24"/>
+                </a:solidFill>
+                <a:latin typeface="Times New Roman" panose="02020603050405020304" pitchFamily="18" charset="0"/>
               </a:rPr>
-              <a:t>•  Objective 1: Curate, filter, and normalize the large-scale WM-811K benchmark into balanced 8-class topological defect representations.</a:t>
-            </a:r>
-          </a:p>
-          <a:p>
-            <a:pPr>
-              <a:spcBef>
-                <a:spcPts val="200"/>
-              </a:spcBef>
-              <a:spcAft>
-                <a:spcPts val="400"/>
-              </a:spcAft>
-            </a:pPr>
-            <a:r>
-              <a:rPr sz="1800" b="0">
-                <a:solidFill>
-                  <a:srgbClr val="1E293B"/>
-                </a:solidFill>
-                <a:latin typeface="Times New Roman"/>
-              </a:rPr>
-              <a:t>•  Objective 2: Design and fine-tune an ultra-lightweight MobileNetV3-Small deep convolutional neural network leveraging depthwise separable convolutions and Squeeze-and-Excitation (SE) attention.</a:t>
-            </a:r>
-          </a:p>
-          <a:p>
-            <a:pPr>
-              <a:spcBef>
-                <a:spcPts val="200"/>
-              </a:spcBef>
-              <a:spcAft>
-                <a:spcPts val="400"/>
-              </a:spcAft>
-            </a:pPr>
-            <a:r>
-              <a:rPr sz="1800" b="0">
-                <a:solidFill>
-                  <a:srgbClr val="1E293B"/>
-                </a:solidFill>
-                <a:latin typeface="Times New Roman"/>
-              </a:rPr>
-              <a:t>•  Objective 3: Export and optimize the trained model into an ONNX runtime engine achieving sub-2 ms CPU inference latency and &lt;6 MB storage footprint.</a:t>
-            </a:r>
-          </a:p>
-          <a:p>
-            <a:pPr>
-              <a:spcBef>
-                <a:spcPts val="200"/>
-              </a:spcBef>
-              <a:spcAft>
-                <a:spcPts val="400"/>
-              </a:spcAft>
-            </a:pPr>
-            <a:r>
-              <a:rPr sz="1800" b="0">
-                <a:solidFill>
-                  <a:srgbClr val="1E293B"/>
-                </a:solidFill>
-                <a:latin typeface="Times New Roman"/>
-              </a:rPr>
-              <a:t>•  Objective 4: Build a full-stack, interactive AOI demonstration dashboard featuring live 300 mm wafer visualization, die pass/fail matrix telemetry, and automated 25-wafer lot screening.</a:t>
+              <a:t>
+•  Objective 1: Curate, filter, and normalize the large-scale WM-811K benchmark into balanced 8-class topological defect representations.
+•  Objective 2: Design and fine-tune an ultra-lightweight MobileNetV3-Small deep convolutional neural network leveraging depthwise separable convolutions and Squeeze-and-Excitation (SE) attention.
+•  Objective 3: Export and optimize the trained model into an ONNX runtime engine achieving sub-2 ms CPU inference latency and &lt;6 MB storage footprint.
+•  Objective 4: Build a full-stack, interactive AOI demonstration dashboard featuring live 300 mm wafer visualization, die pass/fail matrix telemetry, and automated inspection.</a:t>
             </a:r>
           </a:p>
         </p:txBody>
@@ -18288,1848 +15973,6 @@
 </file>
 
 <file path=ppt/slides/slide6.xml><?xml version="1.0" encoding="utf-8"?>
-<p:sld xmlns:a="http://schemas.openxmlformats.org/drawingml/2006/main" xmlns:r="http://schemas.openxmlformats.org/officeDocument/2006/relationships" xmlns:p="http://schemas.openxmlformats.org/presentationml/2006/main">
-  <p:cSld>
-    <p:spTree>
-      <p:nvGrpSpPr>
-        <p:cNvPr id="1" name="Shape 229">
-          <a:extLst>
-            <a:ext uri="{FF2B5EF4-FFF2-40B4-BE49-F238E27FC236}">
-              <a16:creationId xmlns:a16="http://schemas.microsoft.com/office/drawing/2014/main" id="{6AB9D21A-401F-71BA-BDF3-FF71F3B3AAB1}"/>
-            </a:ext>
-          </a:extLst>
-        </p:cNvPr>
-        <p:cNvGrpSpPr/>
-        <p:nvPr/>
-      </p:nvGrpSpPr>
-      <p:grpSpPr>
-        <a:xfrm>
-          <a:off x="0" y="0"/>
-          <a:ext cx="0" cy="0"/>
-          <a:chOff x="0" y="0"/>
-          <a:chExt cx="0" cy="0"/>
-        </a:xfrm>
-      </p:grpSpPr>
-      <p:sp>
-        <p:nvSpPr>
-          <p:cNvPr id="230" name="Google Shape;230;p11">
-            <a:extLst>
-              <a:ext uri="{FF2B5EF4-FFF2-40B4-BE49-F238E27FC236}">
-                <a16:creationId xmlns:a16="http://schemas.microsoft.com/office/drawing/2014/main" id="{D2259F83-F6F9-48B0-EF75-763D86890A10}"/>
-              </a:ext>
-            </a:extLst>
-          </p:cNvPr>
-          <p:cNvSpPr txBox="1">
-            <a:spLocks noGrp="1"/>
-          </p:cNvSpPr>
-          <p:nvPr>
-            <p:ph type="title"/>
-          </p:nvPr>
-        </p:nvSpPr>
-        <p:spPr>
-          <a:xfrm>
-            <a:off x="839788" y="457200"/>
-            <a:ext cx="7341688" cy="1600200"/>
-          </a:xfrm>
-          <a:prstGeom prst="rect">
-            <a:avLst/>
-          </a:prstGeom>
-          <a:noFill/>
-          <a:ln>
-            <a:noFill/>
-          </a:ln>
-        </p:spPr>
-        <p:txBody>
-          <a:bodyPr spcFirstLastPara="1" wrap="square" lIns="91425" tIns="45700" rIns="91425" bIns="45700" anchor="ctr" anchorCtr="0">
-            <a:normAutofit/>
-          </a:bodyPr>
-          <a:lstStyle/>
-          <a:p>
-            <a:pPr lvl="0">
-              <a:buSzPts val="4000"/>
-            </a:pPr>
-            <a:r>
-              <a:rPr sz="3400" b="1">
-                <a:solidFill>
-                  <a:srgbClr val="0F172A"/>
-                </a:solidFill>
-                <a:latin typeface="Times New Roman"/>
-              </a:rPr>
-              <a:t>END-TO-END SYSTEM ARCHITECTURE</a:t>
-            </a:r>
-            <a:endParaRPr sz="3600" b="1" dirty="0">
-              <a:latin typeface="Times New Roman" panose="02020603050405020304" pitchFamily="18" charset="0"/>
-              <a:cs typeface="Times New Roman" panose="02020603050405020304" pitchFamily="18" charset="0"/>
-            </a:endParaRPr>
-          </a:p>
-        </p:txBody>
-      </p:sp>
-      <p:sp>
-        <p:nvSpPr>
-          <p:cNvPr id="231" name="Google Shape;231;p11">
-            <a:extLst>
-              <a:ext uri="{FF2B5EF4-FFF2-40B4-BE49-F238E27FC236}">
-                <a16:creationId xmlns:a16="http://schemas.microsoft.com/office/drawing/2014/main" id="{CD7DDFB5-F9E3-7933-A782-CEAB8D5BDA8B}"/>
-              </a:ext>
-            </a:extLst>
-          </p:cNvPr>
-          <p:cNvSpPr txBox="1">
-            <a:spLocks noGrp="1"/>
-          </p:cNvSpPr>
-          <p:nvPr>
-            <p:ph type="body" idx="1"/>
-          </p:nvPr>
-        </p:nvSpPr>
-        <p:spPr>
-          <a:xfrm>
-            <a:off x="-18288000" y="1754042"/>
-            <a:ext cx="10955338" cy="4419668"/>
-          </a:xfrm>
-          <a:prstGeom prst="rect">
-            <a:avLst/>
-          </a:prstGeom>
-          <a:noFill/>
-          <a:ln>
-            <a:noFill/>
-          </a:ln>
-        </p:spPr>
-        <p:txBody>
-          <a:bodyPr spcFirstLastPara="1" wrap="square" lIns="91425" tIns="45700" rIns="91425" bIns="45700" anchor="t" anchorCtr="0">
-            <a:normAutofit/>
-          </a:bodyPr>
-          <a:lstStyle/>
-          <a:p>
-            <a:pPr marL="342900" lvl="0" indent="-342900" algn="l">
-              <a:lnSpc>
-                <a:spcPct val="100000"/>
-              </a:lnSpc>
-              <a:spcBef>
-                <a:spcPts val="1200"/>
-              </a:spcBef>
-              <a:buSzPts val="2600"/>
-              <a:buFont typeface="Noto Sans Symbols"/>
-              <a:buChar char="⮪"/>
-            </a:pPr>
-          </a:p>
-        </p:txBody>
-      </p:sp>
-      <p:sp>
-        <p:nvSpPr>
-          <p:cNvPr id="232" name="Google Shape;232;p11">
-            <a:extLst>
-              <a:ext uri="{FF2B5EF4-FFF2-40B4-BE49-F238E27FC236}">
-                <a16:creationId xmlns:a16="http://schemas.microsoft.com/office/drawing/2014/main" id="{29C676BD-83E3-41CC-B46A-9EB1B325BBD8}"/>
-              </a:ext>
-            </a:extLst>
-          </p:cNvPr>
-          <p:cNvSpPr txBox="1">
-            <a:spLocks noGrp="1"/>
-          </p:cNvSpPr>
-          <p:nvPr>
-            <p:ph type="sldNum" idx="12"/>
-          </p:nvPr>
-        </p:nvSpPr>
-        <p:spPr>
-          <a:prstGeom prst="rect">
-            <a:avLst/>
-          </a:prstGeom>
-          <a:noFill/>
-          <a:ln>
-            <a:noFill/>
-          </a:ln>
-        </p:spPr>
-        <p:txBody>
-          <a:bodyPr spcFirstLastPara="1" wrap="square" lIns="91425" tIns="45700" rIns="91425" bIns="45700" anchor="ctr" anchorCtr="0">
-            <a:noAutofit/>
-          </a:bodyPr>
-          <a:lstStyle/>
-          <a:p>
-            <a:pPr marL="0" lvl="0" indent="0" algn="r" rtl="0">
-              <a:spcBef>
-                <a:spcPts val="0"/>
-              </a:spcBef>
-              <a:spcAft>
-                <a:spcPts val="0"/>
-              </a:spcAft>
-              <a:buNone/>
-            </a:pPr>
-            <a:r>
-              <a:rPr sz="1800" b="1">
-                <a:solidFill>
-                  <a:srgbClr val="0F172A"/>
-                </a:solidFill>
-                <a:latin typeface="Times New Roman"/>
-              </a:rPr>
-              <a:t>6</a:t>
-            </a:r>
-            <a:endParaRPr/>
-          </a:p>
-        </p:txBody>
-      </p:sp>
-      <p:pic>
-        <p:nvPicPr>
-          <p:cNvPr id="233" name="Google Shape;233;p11">
-            <a:extLst>
-              <a:ext uri="{FF2B5EF4-FFF2-40B4-BE49-F238E27FC236}">
-                <a16:creationId xmlns:a16="http://schemas.microsoft.com/office/drawing/2014/main" id="{26AF934B-79FA-7925-6339-3EFCB00CC6C5}"/>
-              </a:ext>
-            </a:extLst>
-          </p:cNvPr>
-          <p:cNvPicPr preferRelativeResize="0"/>
-          <p:nvPr/>
-        </p:nvPicPr>
-        <p:blipFill rotWithShape="1">
-          <a:blip r:embed="rId2">
-            <a:alphaModFix/>
-          </a:blip>
-          <a:srcRect/>
-          <a:stretch/>
-        </p:blipFill>
-        <p:spPr>
-          <a:xfrm>
-            <a:off x="159971" y="211556"/>
-            <a:ext cx="3850555" cy="691125"/>
-          </a:xfrm>
-          <a:prstGeom prst="rect">
-            <a:avLst/>
-          </a:prstGeom>
-          <a:noFill/>
-          <a:ln>
-            <a:noFill/>
-          </a:ln>
-        </p:spPr>
-      </p:pic>
-      <p:pic>
-        <p:nvPicPr>
-          <p:cNvPr id="234" name="Google Shape;234;p11">
-            <a:extLst>
-              <a:ext uri="{FF2B5EF4-FFF2-40B4-BE49-F238E27FC236}">
-                <a16:creationId xmlns:a16="http://schemas.microsoft.com/office/drawing/2014/main" id="{6065A6D5-6961-04A9-F93B-D2CDFF552B96}"/>
-              </a:ext>
-            </a:extLst>
-          </p:cNvPr>
-          <p:cNvPicPr preferRelativeResize="0"/>
-          <p:nvPr/>
-        </p:nvPicPr>
-        <p:blipFill rotWithShape="1">
-          <a:blip r:embed="rId3">
-            <a:alphaModFix/>
-          </a:blip>
-          <a:srcRect/>
-          <a:stretch/>
-        </p:blipFill>
-        <p:spPr>
-          <a:xfrm>
-            <a:off x="11072819" y="154753"/>
-            <a:ext cx="816174" cy="930568"/>
-          </a:xfrm>
-          <a:prstGeom prst="rect">
-            <a:avLst/>
-          </a:prstGeom>
-          <a:noFill/>
-          <a:ln>
-            <a:noFill/>
-          </a:ln>
-        </p:spPr>
-      </p:pic>
-      <p:sp>
-        <p:nvSpPr>
-          <p:cNvPr id="235" name="Google Shape;235;p11">
-            <a:extLst>
-              <a:ext uri="{FF2B5EF4-FFF2-40B4-BE49-F238E27FC236}">
-                <a16:creationId xmlns:a16="http://schemas.microsoft.com/office/drawing/2014/main" id="{19008EE4-DC4F-00CC-8007-894E1A1AA8E7}"/>
-              </a:ext>
-            </a:extLst>
-          </p:cNvPr>
-          <p:cNvSpPr/>
-          <p:nvPr/>
-        </p:nvSpPr>
-        <p:spPr>
-          <a:xfrm>
-            <a:off x="0" y="6407689"/>
-            <a:ext cx="7684389" cy="461665"/>
-          </a:xfrm>
-          <a:custGeom>
-            <a:avLst/>
-            <a:gdLst/>
-            <a:ahLst/>
-            <a:cxnLst/>
-            <a:rect l="l" t="t" r="r" b="b"/>
-            <a:pathLst>
-              <a:path w="6172200" h="369332" extrusionOk="0">
-                <a:moveTo>
-                  <a:pt x="0" y="0"/>
-                </a:moveTo>
-                <a:lnTo>
-                  <a:pt x="5791200" y="0"/>
-                </a:lnTo>
-                <a:lnTo>
-                  <a:pt x="6172200" y="369332"/>
-                </a:lnTo>
-                <a:lnTo>
-                  <a:pt x="0" y="369332"/>
-                </a:lnTo>
-                <a:lnTo>
-                  <a:pt x="0" y="0"/>
-                </a:lnTo>
-                <a:close/>
-              </a:path>
-            </a:pathLst>
-          </a:custGeom>
-          <a:solidFill>
-            <a:schemeClr val="accent1"/>
-          </a:solidFill>
-          <a:ln>
-            <a:noFill/>
-          </a:ln>
-        </p:spPr>
-        <p:txBody>
-          <a:bodyPr spcFirstLastPara="1" wrap="square" lIns="91425" tIns="45700" rIns="91425" bIns="45700" anchor="t" anchorCtr="0">
-            <a:spAutoFit/>
-          </a:bodyPr>
-          <a:lstStyle/>
-          <a:p>
-            <a:pPr marL="0" marR="0" lvl="0" indent="0" algn="ctr" rtl="0">
-              <a:spcBef>
-                <a:spcPts val="0"/>
-              </a:spcBef>
-              <a:spcAft>
-                <a:spcPts val="0"/>
-              </a:spcAft>
-              <a:buClr>
-                <a:schemeClr val="lt1"/>
-              </a:buClr>
-              <a:buSzPts val="2400"/>
-              <a:buFont typeface="Gill Sans"/>
-              <a:buNone/>
-            </a:pPr>
-            <a:r>
-              <a:rPr lang="en-US" sz="2400">
-                <a:solidFill>
-                  <a:schemeClr val="lt1"/>
-                </a:solidFill>
-                <a:latin typeface="Gill Sans"/>
-                <a:ea typeface="Gill Sans"/>
-                <a:cs typeface="Gill Sans"/>
-                <a:sym typeface="Gill Sans"/>
-              </a:rPr>
-              <a:t>LEARN . GROW . EXCEL</a:t>
-            </a:r>
-            <a:endParaRPr sz="1800">
-              <a:solidFill>
-                <a:schemeClr val="dk1"/>
-              </a:solidFill>
-              <a:latin typeface="Calibri"/>
-              <a:ea typeface="Calibri"/>
-              <a:cs typeface="Calibri"/>
-              <a:sym typeface="Calibri"/>
-            </a:endParaRPr>
-          </a:p>
-        </p:txBody>
-      </p:sp>
-      <p:sp>
-        <p:nvSpPr>
-          <p:cNvPr id="236" name="Rounded Rectangle 235"/>
-          <p:cNvSpPr/>
-          <p:nvPr/>
-        </p:nvSpPr>
-        <p:spPr>
-          <a:xfrm>
-            <a:off x="548640" y="1828800"/>
-            <a:ext cx="2514600" cy="3291840"/>
-          </a:xfrm>
-          <a:prstGeom prst="roundRect">
-            <a:avLst/>
-          </a:prstGeom>
-          <a:solidFill>
-            <a:srgbClr val="F1F5F9"/>
-          </a:solidFill>
-          <a:ln w="19050">
-            <a:solidFill>
-              <a:srgbClr val="CBD5E1"/>
-            </a:solidFill>
-          </a:ln>
-        </p:spPr>
-        <p:style>
-          <a:lnRef idx="1">
-            <a:schemeClr val="accent1"/>
-          </a:lnRef>
-          <a:fillRef idx="3">
-            <a:schemeClr val="accent1"/>
-          </a:fillRef>
-          <a:effectRef idx="2">
-            <a:schemeClr val="accent1"/>
-          </a:effectRef>
-          <a:fontRef idx="minor">
-            <a:schemeClr val="lt1"/>
-          </a:fontRef>
-        </p:style>
-        <p:txBody>
-          <a:bodyPr rtlCol="0" anchor="ctr" wrap="square" lIns="137160" rIns="137160" tIns="164592"/>
-          <a:lstStyle/>
-          <a:p>
-            <a:pPr algn="ctr">
-              <a:spcAft>
-                <a:spcPts val="800"/>
-              </a:spcAft>
-            </a:pPr>
-            <a:r>
-              <a:rPr sz="1400" b="1">
-                <a:solidFill>
-                  <a:srgbClr val="0284C7"/>
-                </a:solidFill>
-                <a:latin typeface="Times New Roman"/>
-              </a:rPr>
-              <a:t>STAGE A: DATA PIPELINE</a:t>
-            </a:r>
-          </a:p>
-          <a:p>
-            <a:pPr>
-              <a:spcBef>
-                <a:spcPts val="300"/>
-              </a:spcBef>
-              <a:spcAft>
-                <a:spcPts val="300"/>
-              </a:spcAft>
-            </a:pPr>
-            <a:r>
-              <a:rPr sz="1200" b="0">
-                <a:solidFill>
-                  <a:srgbClr val="1E293B"/>
-                </a:solidFill>
-                <a:latin typeface="Times New Roman"/>
-              </a:rPr>
-              <a:t>• Raw LSWMD.pkl parsing</a:t>
-            </a:r>
-          </a:p>
-          <a:p>
-            <a:pPr>
-              <a:spcBef>
-                <a:spcPts val="300"/>
-              </a:spcBef>
-              <a:spcAft>
-                <a:spcPts val="300"/>
-              </a:spcAft>
-            </a:pPr>
-            <a:r>
-              <a:rPr sz="1200" b="0">
-                <a:solidFill>
-                  <a:srgbClr val="1E293B"/>
-                </a:solidFill>
-                <a:latin typeface="Times New Roman"/>
-              </a:rPr>
-              <a:t>• Pandas index patch</a:t>
-            </a:r>
-          </a:p>
-          <a:p>
-            <a:pPr>
-              <a:spcBef>
-                <a:spcPts val="300"/>
-              </a:spcBef>
-              <a:spcAft>
-                <a:spcPts val="300"/>
-              </a:spcAft>
-            </a:pPr>
-            <a:r>
-              <a:rPr sz="1200" b="0">
-                <a:solidFill>
-                  <a:srgbClr val="1E293B"/>
-                </a:solidFill>
-                <a:latin typeface="Times New Roman"/>
-              </a:rPr>
-              <a:t>• Bilinear resize to 224x224</a:t>
-            </a:r>
-          </a:p>
-          <a:p>
-            <a:pPr>
-              <a:spcBef>
-                <a:spcPts val="300"/>
-              </a:spcBef>
-              <a:spcAft>
-                <a:spcPts val="300"/>
-              </a:spcAft>
-            </a:pPr>
-            <a:r>
-              <a:rPr sz="1200" b="0">
-                <a:solidFill>
-                  <a:srgbClr val="1E293B"/>
-                </a:solidFill>
-                <a:latin typeface="Times New Roman"/>
-              </a:rPr>
-              <a:t>• Min-Max normalization (0-255)</a:t>
-            </a:r>
-          </a:p>
-          <a:p>
-            <a:pPr>
-              <a:spcBef>
-                <a:spcPts val="300"/>
-              </a:spcBef>
-              <a:spcAft>
-                <a:spcPts val="300"/>
-              </a:spcAft>
-            </a:pPr>
-            <a:r>
-              <a:rPr sz="1200" b="0">
-                <a:solidFill>
-                  <a:srgbClr val="1E293B"/>
-                </a:solidFill>
-                <a:latin typeface="Times New Roman"/>
-              </a:rPr>
-              <a:t>• 70% / 15% / 15% Stratified split</a:t>
-            </a:r>
-          </a:p>
-        </p:txBody>
-      </p:sp>
-      <p:sp>
-        <p:nvSpPr>
-          <p:cNvPr id="237" name="Rounded Rectangle 236"/>
-          <p:cNvSpPr/>
-          <p:nvPr/>
-        </p:nvSpPr>
-        <p:spPr>
-          <a:xfrm>
-            <a:off x="3246120" y="1828800"/>
-            <a:ext cx="2514600" cy="3291840"/>
-          </a:xfrm>
-          <a:prstGeom prst="roundRect">
-            <a:avLst/>
-          </a:prstGeom>
-          <a:solidFill>
-            <a:srgbClr val="F1F5F9"/>
-          </a:solidFill>
-          <a:ln w="19050">
-            <a:solidFill>
-              <a:srgbClr val="CBD5E1"/>
-            </a:solidFill>
-          </a:ln>
-        </p:spPr>
-        <p:style>
-          <a:lnRef idx="1">
-            <a:schemeClr val="accent1"/>
-          </a:lnRef>
-          <a:fillRef idx="3">
-            <a:schemeClr val="accent1"/>
-          </a:fillRef>
-          <a:effectRef idx="2">
-            <a:schemeClr val="accent1"/>
-          </a:effectRef>
-          <a:fontRef idx="minor">
-            <a:schemeClr val="lt1"/>
-          </a:fontRef>
-        </p:style>
-        <p:txBody>
-          <a:bodyPr rtlCol="0" anchor="ctr" wrap="square" lIns="137160" rIns="137160" tIns="164592"/>
-          <a:lstStyle/>
-          <a:p>
-            <a:pPr algn="ctr">
-              <a:spcAft>
-                <a:spcPts val="800"/>
-              </a:spcAft>
-            </a:pPr>
-            <a:r>
-              <a:rPr sz="1400" b="1">
-                <a:solidFill>
-                  <a:srgbClr val="0284C7"/>
-                </a:solidFill>
-                <a:latin typeface="Times New Roman"/>
-              </a:rPr>
-              <a:t>STAGE B: MODEL TRAINING</a:t>
-            </a:r>
-          </a:p>
-          <a:p>
-            <a:pPr>
-              <a:spcBef>
-                <a:spcPts val="300"/>
-              </a:spcBef>
-              <a:spcAft>
-                <a:spcPts val="300"/>
-              </a:spcAft>
-            </a:pPr>
-            <a:r>
-              <a:rPr sz="1200" b="0">
-                <a:solidFill>
-                  <a:srgbClr val="1E293B"/>
-                </a:solidFill>
-                <a:latin typeface="Times New Roman"/>
-              </a:rPr>
-              <a:t>• Backbone: MobileNetV3-Small</a:t>
-            </a:r>
-          </a:p>
-          <a:p>
-            <a:pPr>
-              <a:spcBef>
-                <a:spcPts val="300"/>
-              </a:spcBef>
-              <a:spcAft>
-                <a:spcPts val="300"/>
-              </a:spcAft>
-            </a:pPr>
-            <a:r>
-              <a:rPr sz="1200" b="0">
-                <a:solidFill>
-                  <a:srgbClr val="1E293B"/>
-                </a:solidFill>
-                <a:latin typeface="Times New Roman"/>
-              </a:rPr>
-              <a:t>• Inverted residual blocks + SE</a:t>
-            </a:r>
-          </a:p>
-          <a:p>
-            <a:pPr>
-              <a:spcBef>
-                <a:spcPts val="300"/>
-              </a:spcBef>
-              <a:spcAft>
-                <a:spcPts val="300"/>
-              </a:spcAft>
-            </a:pPr>
-            <a:r>
-              <a:rPr sz="1200" b="0">
-                <a:solidFill>
-                  <a:srgbClr val="1E293B"/>
-                </a:solidFill>
-                <a:latin typeface="Times New Roman"/>
-              </a:rPr>
-              <a:t>• Custom 8-class linear head</a:t>
-            </a:r>
-          </a:p>
-          <a:p>
-            <a:pPr>
-              <a:spcBef>
-                <a:spcPts val="300"/>
-              </a:spcBef>
-              <a:spcAft>
-                <a:spcPts val="300"/>
-              </a:spcAft>
-            </a:pPr>
-            <a:r>
-              <a:rPr sz="1200" b="0">
-                <a:solidFill>
-                  <a:srgbClr val="1E293B"/>
-                </a:solidFill>
-                <a:latin typeface="Times New Roman"/>
-              </a:rPr>
-              <a:t>• Adam optimizer (lr=3e-4)</a:t>
-            </a:r>
-          </a:p>
-          <a:p>
-            <a:pPr>
-              <a:spcBef>
-                <a:spcPts val="300"/>
-              </a:spcBef>
-              <a:spcAft>
-                <a:spcPts val="300"/>
-              </a:spcAft>
-            </a:pPr>
-            <a:r>
-              <a:rPr sz="1200" b="0">
-                <a:solidFill>
-                  <a:srgbClr val="1E293B"/>
-                </a:solidFill>
-                <a:latin typeface="Times New Roman"/>
-              </a:rPr>
-              <a:t>• Cross-Entropy loss over 8 epochs</a:t>
-            </a:r>
-          </a:p>
-        </p:txBody>
-      </p:sp>
-      <p:sp>
-        <p:nvSpPr>
-          <p:cNvPr id="238" name="Rounded Rectangle 237"/>
-          <p:cNvSpPr/>
-          <p:nvPr/>
-        </p:nvSpPr>
-        <p:spPr>
-          <a:xfrm>
-            <a:off x="5943600" y="1828800"/>
-            <a:ext cx="2514600" cy="3291840"/>
-          </a:xfrm>
-          <a:prstGeom prst="roundRect">
-            <a:avLst/>
-          </a:prstGeom>
-          <a:solidFill>
-            <a:srgbClr val="F1F5F9"/>
-          </a:solidFill>
-          <a:ln w="19050">
-            <a:solidFill>
-              <a:srgbClr val="CBD5E1"/>
-            </a:solidFill>
-          </a:ln>
-        </p:spPr>
-        <p:style>
-          <a:lnRef idx="1">
-            <a:schemeClr val="accent1"/>
-          </a:lnRef>
-          <a:fillRef idx="3">
-            <a:schemeClr val="accent1"/>
-          </a:fillRef>
-          <a:effectRef idx="2">
-            <a:schemeClr val="accent1"/>
-          </a:effectRef>
-          <a:fontRef idx="minor">
-            <a:schemeClr val="lt1"/>
-          </a:fontRef>
-        </p:style>
-        <p:txBody>
-          <a:bodyPr rtlCol="0" anchor="ctr" wrap="square" lIns="137160" rIns="137160" tIns="164592"/>
-          <a:lstStyle/>
-          <a:p>
-            <a:pPr algn="ctr">
-              <a:spcAft>
-                <a:spcPts val="800"/>
-              </a:spcAft>
-            </a:pPr>
-            <a:r>
-              <a:rPr sz="1400" b="1">
-                <a:solidFill>
-                  <a:srgbClr val="0284C7"/>
-                </a:solidFill>
-                <a:latin typeface="Times New Roman"/>
-              </a:rPr>
-              <a:t>STAGE C: ONNX OPTIMIZATION</a:t>
-            </a:r>
-          </a:p>
-          <a:p>
-            <a:pPr>
-              <a:spcBef>
-                <a:spcPts val="300"/>
-              </a:spcBef>
-              <a:spcAft>
-                <a:spcPts val="300"/>
-              </a:spcAft>
-            </a:pPr>
-            <a:r>
-              <a:rPr sz="1200" b="0">
-                <a:solidFill>
-                  <a:srgbClr val="1E293B"/>
-                </a:solidFill>
-                <a:latin typeface="Times New Roman"/>
-              </a:rPr>
-              <a:t>• PyTorch model graph trace</a:t>
-            </a:r>
-          </a:p>
-          <a:p>
-            <a:pPr>
-              <a:spcBef>
-                <a:spcPts val="300"/>
-              </a:spcBef>
-              <a:spcAft>
-                <a:spcPts val="300"/>
-              </a:spcAft>
-            </a:pPr>
-            <a:r>
-              <a:rPr sz="1200" b="0">
-                <a:solidFill>
-                  <a:srgbClr val="1E293B"/>
-                </a:solidFill>
-                <a:latin typeface="Times New Roman"/>
-              </a:rPr>
-              <a:t>• ONNX Opset 12 export</a:t>
-            </a:r>
-          </a:p>
-          <a:p>
-            <a:pPr>
-              <a:spcBef>
-                <a:spcPts val="300"/>
-              </a:spcBef>
-              <a:spcAft>
-                <a:spcPts val="300"/>
-              </a:spcAft>
-            </a:pPr>
-            <a:r>
-              <a:rPr sz="1200" b="0">
-                <a:solidFill>
-                  <a:srgbClr val="1E293B"/>
-                </a:solidFill>
-                <a:latin typeface="Times New Roman"/>
-              </a:rPr>
-              <a:t>• Constant folding &amp; prune</a:t>
-            </a:r>
-          </a:p>
-          <a:p>
-            <a:pPr>
-              <a:spcBef>
-                <a:spcPts val="300"/>
-              </a:spcBef>
-              <a:spcAft>
-                <a:spcPts val="300"/>
-              </a:spcAft>
-            </a:pPr>
-            <a:r>
-              <a:rPr sz="1200" b="0">
-                <a:solidFill>
-                  <a:srgbClr val="1E293B"/>
-                </a:solidFill>
-                <a:latin typeface="Times New Roman"/>
-              </a:rPr>
-              <a:t>• Dynamic batch dimension</a:t>
-            </a:r>
-          </a:p>
-          <a:p>
-            <a:pPr>
-              <a:spcBef>
-                <a:spcPts val="300"/>
-              </a:spcBef>
-              <a:spcAft>
-                <a:spcPts val="300"/>
-              </a:spcAft>
-            </a:pPr>
-            <a:r>
-              <a:rPr sz="1200" b="0">
-                <a:solidFill>
-                  <a:srgbClr val="1E293B"/>
-                </a:solidFill>
-                <a:latin typeface="Times New Roman"/>
-              </a:rPr>
-              <a:t>• Model size: 5.84 MB</a:t>
-            </a:r>
-          </a:p>
-        </p:txBody>
-      </p:sp>
-      <p:sp>
-        <p:nvSpPr>
-          <p:cNvPr id="239" name="Rounded Rectangle 238"/>
-          <p:cNvSpPr/>
-          <p:nvPr/>
-        </p:nvSpPr>
-        <p:spPr>
-          <a:xfrm>
-            <a:off x="8641080" y="1828800"/>
-            <a:ext cx="2514600" cy="3291840"/>
-          </a:xfrm>
-          <a:prstGeom prst="roundRect">
-            <a:avLst/>
-          </a:prstGeom>
-          <a:solidFill>
-            <a:srgbClr val="F1F5F9"/>
-          </a:solidFill>
-          <a:ln w="19050">
-            <a:solidFill>
-              <a:srgbClr val="CBD5E1"/>
-            </a:solidFill>
-          </a:ln>
-        </p:spPr>
-        <p:style>
-          <a:lnRef idx="1">
-            <a:schemeClr val="accent1"/>
-          </a:lnRef>
-          <a:fillRef idx="3">
-            <a:schemeClr val="accent1"/>
-          </a:fillRef>
-          <a:effectRef idx="2">
-            <a:schemeClr val="accent1"/>
-          </a:effectRef>
-          <a:fontRef idx="minor">
-            <a:schemeClr val="lt1"/>
-          </a:fontRef>
-        </p:style>
-        <p:txBody>
-          <a:bodyPr rtlCol="0" anchor="ctr" wrap="square" lIns="137160" rIns="137160" tIns="164592"/>
-          <a:lstStyle/>
-          <a:p>
-            <a:pPr algn="ctr">
-              <a:spcAft>
-                <a:spcPts val="800"/>
-              </a:spcAft>
-            </a:pPr>
-            <a:r>
-              <a:rPr sz="1400" b="1">
-                <a:solidFill>
-                  <a:srgbClr val="0284C7"/>
-                </a:solidFill>
-                <a:latin typeface="Times New Roman"/>
-              </a:rPr>
-              <a:t>STAGE D: EDGE INFERENCE</a:t>
-            </a:r>
-          </a:p>
-          <a:p>
-            <a:pPr>
-              <a:spcBef>
-                <a:spcPts val="300"/>
-              </a:spcBef>
-              <a:spcAft>
-                <a:spcPts val="300"/>
-              </a:spcAft>
-            </a:pPr>
-            <a:r>
-              <a:rPr sz="1200" b="0">
-                <a:solidFill>
-                  <a:srgbClr val="1E293B"/>
-                </a:solidFill>
-                <a:latin typeface="Times New Roman"/>
-              </a:rPr>
-              <a:t>• ONNX Runtime CPU engine</a:t>
-            </a:r>
-          </a:p>
-          <a:p>
-            <a:pPr>
-              <a:spcBef>
-                <a:spcPts val="300"/>
-              </a:spcBef>
-              <a:spcAft>
-                <a:spcPts val="300"/>
-              </a:spcAft>
-            </a:pPr>
-            <a:r>
-              <a:rPr sz="1200" b="0">
-                <a:solidFill>
-                  <a:srgbClr val="1E293B"/>
-                </a:solidFill>
-                <a:latin typeface="Times New Roman"/>
-              </a:rPr>
-              <a:t>• ImageNet tensor normalization</a:t>
-            </a:r>
-          </a:p>
-          <a:p>
-            <a:pPr>
-              <a:spcBef>
-                <a:spcPts val="300"/>
-              </a:spcBef>
-              <a:spcAft>
-                <a:spcPts val="300"/>
-              </a:spcAft>
-            </a:pPr>
-            <a:r>
-              <a:rPr sz="1200" b="0">
-                <a:solidFill>
-                  <a:srgbClr val="1E293B"/>
-                </a:solidFill>
-                <a:latin typeface="Times New Roman"/>
-              </a:rPr>
-              <a:t>• Top-3 confidence scoring</a:t>
-            </a:r>
-          </a:p>
-          <a:p>
-            <a:pPr>
-              <a:spcBef>
-                <a:spcPts val="300"/>
-              </a:spcBef>
-              <a:spcAft>
-                <a:spcPts val="300"/>
-              </a:spcAft>
-            </a:pPr>
-            <a:r>
-              <a:rPr sz="1200" b="0">
-                <a:solidFill>
-                  <a:srgbClr val="1E293B"/>
-                </a:solidFill>
-                <a:latin typeface="Times New Roman"/>
-              </a:rPr>
-              <a:t>• Sub-2ms inference latency</a:t>
-            </a:r>
-          </a:p>
-          <a:p>
-            <a:pPr>
-              <a:spcBef>
-                <a:spcPts val="300"/>
-              </a:spcBef>
-              <a:spcAft>
-                <a:spcPts val="300"/>
-              </a:spcAft>
-            </a:pPr>
-            <a:r>
-              <a:rPr sz="1200" b="0">
-                <a:solidFill>
-                  <a:srgbClr val="1E293B"/>
-                </a:solidFill>
-                <a:latin typeface="Times New Roman"/>
-              </a:rPr>
-              <a:t>• Web demo &amp; CLI runner</a:t>
-            </a:r>
-          </a:p>
-        </p:txBody>
-      </p:sp>
-      <p:sp>
-        <p:nvSpPr>
-          <p:cNvPr id="240" name="Rounded Rectangle 239"/>
-          <p:cNvSpPr/>
-          <p:nvPr/>
-        </p:nvSpPr>
-        <p:spPr>
-          <a:xfrm>
-            <a:off x="548640" y="5257800"/>
-            <a:ext cx="10607040" cy="594360"/>
-          </a:xfrm>
-          <a:prstGeom prst="roundRect">
-            <a:avLst/>
-          </a:prstGeom>
-          <a:solidFill>
-            <a:srgbClr val="0F172A"/>
-          </a:solidFill>
-          <a:ln w="12700">
-            <a:solidFill>
-              <a:srgbClr val="0284C7"/>
-            </a:solidFill>
-          </a:ln>
-        </p:spPr>
-        <p:style>
-          <a:lnRef idx="1">
-            <a:schemeClr val="accent1"/>
-          </a:lnRef>
-          <a:fillRef idx="3">
-            <a:schemeClr val="accent1"/>
-          </a:fillRef>
-          <a:effectRef idx="2">
-            <a:schemeClr val="accent1"/>
-          </a:effectRef>
-          <a:fontRef idx="minor">
-            <a:schemeClr val="lt1"/>
-          </a:fontRef>
-        </p:style>
-        <p:txBody>
-          <a:bodyPr rtlCol="0" anchor="ctr" wrap="square"/>
-          <a:lstStyle/>
-          <a:p>
-            <a:pPr algn="ctr"/>
-            <a:r>
-              <a:rPr sz="1200" b="1">
-                <a:solidFill>
-                  <a:srgbClr val="38BDF8"/>
-                </a:solidFill>
-                <a:latin typeface="Times New Roman"/>
-              </a:rPr>
-              <a:t>Target Defect Classes:  </a:t>
-            </a:r>
-            <a:r>
-              <a:rPr sz="1200" b="0">
-                <a:solidFill>
-                  <a:srgbClr val="F1F5F9"/>
-                </a:solidFill>
-                <a:latin typeface="Times New Roman"/>
-              </a:rPr>
-              <a:t>Center  |  Donut  |  Edge-Loc  |  Edge-Ring  |  Loc  |  Scratch  |  Other  |  Clean (Nominal)</a:t>
-            </a:r>
-          </a:p>
-        </p:txBody>
-      </p:sp>
-    </p:spTree>
-    <p:extLst>
-      <p:ext uri="{BB962C8B-B14F-4D97-AF65-F5344CB8AC3E}">
-        <p14:creationId xmlns:p14="http://schemas.microsoft.com/office/powerpoint/2010/main" val="4042837840"/>
-      </p:ext>
-    </p:extLst>
-  </p:cSld>
-  <p:clrMapOvr>
-    <a:masterClrMapping/>
-  </p:clrMapOvr>
-</p:sld>
-</file>
-
-<file path=ppt/slides/slide7.xml><?xml version="1.0" encoding="utf-8"?>
-<p:sld xmlns:a="http://schemas.openxmlformats.org/drawingml/2006/main" xmlns:r="http://schemas.openxmlformats.org/officeDocument/2006/relationships" xmlns:p="http://schemas.openxmlformats.org/presentationml/2006/main">
-  <p:cSld>
-    <p:spTree>
-      <p:nvGrpSpPr>
-        <p:cNvPr id="1" name="Shape 229">
-          <a:extLst>
-            <a:ext uri="{FF2B5EF4-FFF2-40B4-BE49-F238E27FC236}">
-              <a16:creationId xmlns:a16="http://schemas.microsoft.com/office/drawing/2014/main" id="{6AB9D21A-401F-71BA-BDF3-FF71F3B3AAB1}"/>
-            </a:ext>
-          </a:extLst>
-        </p:cNvPr>
-        <p:cNvGrpSpPr/>
-        <p:nvPr/>
-      </p:nvGrpSpPr>
-      <p:grpSpPr>
-        <a:xfrm>
-          <a:off x="0" y="0"/>
-          <a:ext cx="0" cy="0"/>
-          <a:chOff x="0" y="0"/>
-          <a:chExt cx="0" cy="0"/>
-        </a:xfrm>
-      </p:grpSpPr>
-      <p:sp>
-        <p:nvSpPr>
-          <p:cNvPr id="230" name="Google Shape;230;p11">
-            <a:extLst>
-              <a:ext uri="{FF2B5EF4-FFF2-40B4-BE49-F238E27FC236}">
-                <a16:creationId xmlns:a16="http://schemas.microsoft.com/office/drawing/2014/main" id="{D2259F83-F6F9-48B0-EF75-763D86890A10}"/>
-              </a:ext>
-            </a:extLst>
-          </p:cNvPr>
-          <p:cNvSpPr txBox="1">
-            <a:spLocks noGrp="1"/>
-          </p:cNvSpPr>
-          <p:nvPr>
-            <p:ph type="title"/>
-          </p:nvPr>
-        </p:nvSpPr>
-        <p:spPr>
-          <a:xfrm>
-            <a:off x="839788" y="457200"/>
-            <a:ext cx="5420335" cy="1600200"/>
-          </a:xfrm>
-          <a:prstGeom prst="rect">
-            <a:avLst/>
-          </a:prstGeom>
-          <a:noFill/>
-          <a:ln>
-            <a:noFill/>
-          </a:ln>
-        </p:spPr>
-        <p:txBody>
-          <a:bodyPr spcFirstLastPara="1" wrap="square" lIns="91425" tIns="45700" rIns="91425" bIns="45700" anchor="ctr" anchorCtr="0">
-            <a:normAutofit/>
-          </a:bodyPr>
-          <a:lstStyle/>
-          <a:p>
-            <a:pPr lvl="0">
-              <a:buSzPts val="4000"/>
-            </a:pPr>
-            <a:r>
-              <a:rPr sz="3400" b="1">
-                <a:solidFill>
-                  <a:srgbClr val="0F172A"/>
-                </a:solidFill>
-                <a:latin typeface="Times New Roman"/>
-              </a:rPr>
-              <a:t>WM-811K DATASET &amp; DEFECT PATTERNS</a:t>
-            </a:r>
-            <a:endParaRPr sz="3600" b="1" dirty="0">
-              <a:latin typeface="Times New Roman" panose="02020603050405020304" pitchFamily="18" charset="0"/>
-              <a:cs typeface="Times New Roman" panose="02020603050405020304" pitchFamily="18" charset="0"/>
-            </a:endParaRPr>
-          </a:p>
-        </p:txBody>
-      </p:sp>
-      <p:sp>
-        <p:nvSpPr>
-          <p:cNvPr id="231" name="Google Shape;231;p11">
-            <a:extLst>
-              <a:ext uri="{FF2B5EF4-FFF2-40B4-BE49-F238E27FC236}">
-                <a16:creationId xmlns:a16="http://schemas.microsoft.com/office/drawing/2014/main" id="{CD7DDFB5-F9E3-7933-A782-CEAB8D5BDA8B}"/>
-              </a:ext>
-            </a:extLst>
-          </p:cNvPr>
-          <p:cNvSpPr txBox="1">
-            <a:spLocks noGrp="1"/>
-          </p:cNvSpPr>
-          <p:nvPr>
-            <p:ph type="body" idx="1"/>
-          </p:nvPr>
-        </p:nvSpPr>
-        <p:spPr>
-          <a:xfrm>
-            <a:off x="-18288000" y="1627991"/>
-            <a:ext cx="10955338" cy="4419668"/>
-          </a:xfrm>
-          <a:prstGeom prst="rect">
-            <a:avLst/>
-          </a:prstGeom>
-          <a:noFill/>
-          <a:ln>
-            <a:noFill/>
-          </a:ln>
-        </p:spPr>
-        <p:txBody>
-          <a:bodyPr spcFirstLastPara="1" wrap="square" lIns="91425" tIns="45700" rIns="91425" bIns="45700" anchor="t" anchorCtr="0">
-            <a:normAutofit/>
-          </a:bodyPr>
-          <a:lstStyle/>
-          <a:p>
-            <a:pPr marL="342900" lvl="0" indent="-342900" algn="l">
-              <a:lnSpc>
-                <a:spcPct val="100000"/>
-              </a:lnSpc>
-              <a:spcBef>
-                <a:spcPts val="1200"/>
-              </a:spcBef>
-              <a:buSzPts val="2600"/>
-              <a:buFont typeface="Noto Sans Symbols"/>
-              <a:buChar char="⮪"/>
-            </a:pPr>
-          </a:p>
-        </p:txBody>
-      </p:sp>
-      <p:sp>
-        <p:nvSpPr>
-          <p:cNvPr id="232" name="Google Shape;232;p11">
-            <a:extLst>
-              <a:ext uri="{FF2B5EF4-FFF2-40B4-BE49-F238E27FC236}">
-                <a16:creationId xmlns:a16="http://schemas.microsoft.com/office/drawing/2014/main" id="{29C676BD-83E3-41CC-B46A-9EB1B325BBD8}"/>
-              </a:ext>
-            </a:extLst>
-          </p:cNvPr>
-          <p:cNvSpPr txBox="1">
-            <a:spLocks noGrp="1"/>
-          </p:cNvSpPr>
-          <p:nvPr>
-            <p:ph type="sldNum" idx="12"/>
-          </p:nvPr>
-        </p:nvSpPr>
-        <p:spPr>
-          <a:prstGeom prst="rect">
-            <a:avLst/>
-          </a:prstGeom>
-          <a:noFill/>
-          <a:ln>
-            <a:noFill/>
-          </a:ln>
-        </p:spPr>
-        <p:txBody>
-          <a:bodyPr spcFirstLastPara="1" wrap="square" lIns="91425" tIns="45700" rIns="91425" bIns="45700" anchor="ctr" anchorCtr="0">
-            <a:noAutofit/>
-          </a:bodyPr>
-          <a:lstStyle/>
-          <a:p>
-            <a:pPr marL="0" lvl="0" indent="0" algn="r" rtl="0">
-              <a:spcBef>
-                <a:spcPts val="0"/>
-              </a:spcBef>
-              <a:spcAft>
-                <a:spcPts val="0"/>
-              </a:spcAft>
-              <a:buNone/>
-            </a:pPr>
-            <a:r>
-              <a:rPr sz="1800" b="1">
-                <a:solidFill>
-                  <a:srgbClr val="0F172A"/>
-                </a:solidFill>
-                <a:latin typeface="Times New Roman"/>
-              </a:rPr>
-              <a:t>7</a:t>
-            </a:r>
-            <a:endParaRPr/>
-          </a:p>
-        </p:txBody>
-      </p:sp>
-      <p:pic>
-        <p:nvPicPr>
-          <p:cNvPr id="233" name="Google Shape;233;p11">
-            <a:extLst>
-              <a:ext uri="{FF2B5EF4-FFF2-40B4-BE49-F238E27FC236}">
-                <a16:creationId xmlns:a16="http://schemas.microsoft.com/office/drawing/2014/main" id="{26AF934B-79FA-7925-6339-3EFCB00CC6C5}"/>
-              </a:ext>
-            </a:extLst>
-          </p:cNvPr>
-          <p:cNvPicPr preferRelativeResize="0"/>
-          <p:nvPr/>
-        </p:nvPicPr>
-        <p:blipFill rotWithShape="1">
-          <a:blip r:embed="rId2">
-            <a:alphaModFix/>
-          </a:blip>
-          <a:srcRect/>
-          <a:stretch/>
-        </p:blipFill>
-        <p:spPr>
-          <a:xfrm>
-            <a:off x="159971" y="211556"/>
-            <a:ext cx="3850555" cy="691125"/>
-          </a:xfrm>
-          <a:prstGeom prst="rect">
-            <a:avLst/>
-          </a:prstGeom>
-          <a:noFill/>
-          <a:ln>
-            <a:noFill/>
-          </a:ln>
-        </p:spPr>
-      </p:pic>
-      <p:pic>
-        <p:nvPicPr>
-          <p:cNvPr id="234" name="Google Shape;234;p11">
-            <a:extLst>
-              <a:ext uri="{FF2B5EF4-FFF2-40B4-BE49-F238E27FC236}">
-                <a16:creationId xmlns:a16="http://schemas.microsoft.com/office/drawing/2014/main" id="{6065A6D5-6961-04A9-F93B-D2CDFF552B96}"/>
-              </a:ext>
-            </a:extLst>
-          </p:cNvPr>
-          <p:cNvPicPr preferRelativeResize="0"/>
-          <p:nvPr/>
-        </p:nvPicPr>
-        <p:blipFill rotWithShape="1">
-          <a:blip r:embed="rId3">
-            <a:alphaModFix/>
-          </a:blip>
-          <a:srcRect/>
-          <a:stretch/>
-        </p:blipFill>
-        <p:spPr>
-          <a:xfrm>
-            <a:off x="11072819" y="154753"/>
-            <a:ext cx="816174" cy="930568"/>
-          </a:xfrm>
-          <a:prstGeom prst="rect">
-            <a:avLst/>
-          </a:prstGeom>
-          <a:noFill/>
-          <a:ln>
-            <a:noFill/>
-          </a:ln>
-        </p:spPr>
-      </p:pic>
-      <p:sp>
-        <p:nvSpPr>
-          <p:cNvPr id="235" name="Google Shape;235;p11">
-            <a:extLst>
-              <a:ext uri="{FF2B5EF4-FFF2-40B4-BE49-F238E27FC236}">
-                <a16:creationId xmlns:a16="http://schemas.microsoft.com/office/drawing/2014/main" id="{19008EE4-DC4F-00CC-8007-894E1A1AA8E7}"/>
-              </a:ext>
-            </a:extLst>
-          </p:cNvPr>
-          <p:cNvSpPr/>
-          <p:nvPr/>
-        </p:nvSpPr>
-        <p:spPr>
-          <a:xfrm>
-            <a:off x="0" y="6407689"/>
-            <a:ext cx="7684389" cy="461665"/>
-          </a:xfrm>
-          <a:custGeom>
-            <a:avLst/>
-            <a:gdLst/>
-            <a:ahLst/>
-            <a:cxnLst/>
-            <a:rect l="l" t="t" r="r" b="b"/>
-            <a:pathLst>
-              <a:path w="6172200" h="369332" extrusionOk="0">
-                <a:moveTo>
-                  <a:pt x="0" y="0"/>
-                </a:moveTo>
-                <a:lnTo>
-                  <a:pt x="5791200" y="0"/>
-                </a:lnTo>
-                <a:lnTo>
-                  <a:pt x="6172200" y="369332"/>
-                </a:lnTo>
-                <a:lnTo>
-                  <a:pt x="0" y="369332"/>
-                </a:lnTo>
-                <a:lnTo>
-                  <a:pt x="0" y="0"/>
-                </a:lnTo>
-                <a:close/>
-              </a:path>
-            </a:pathLst>
-          </a:custGeom>
-          <a:solidFill>
-            <a:schemeClr val="accent1"/>
-          </a:solidFill>
-          <a:ln>
-            <a:noFill/>
-          </a:ln>
-        </p:spPr>
-        <p:txBody>
-          <a:bodyPr spcFirstLastPara="1" wrap="square" lIns="91425" tIns="45700" rIns="91425" bIns="45700" anchor="t" anchorCtr="0">
-            <a:spAutoFit/>
-          </a:bodyPr>
-          <a:lstStyle/>
-          <a:p>
-            <a:pPr marL="0" marR="0" lvl="0" indent="0" algn="ctr" rtl="0">
-              <a:spcBef>
-                <a:spcPts val="0"/>
-              </a:spcBef>
-              <a:spcAft>
-                <a:spcPts val="0"/>
-              </a:spcAft>
-              <a:buClr>
-                <a:schemeClr val="lt1"/>
-              </a:buClr>
-              <a:buSzPts val="2400"/>
-              <a:buFont typeface="Gill Sans"/>
-              <a:buNone/>
-            </a:pPr>
-            <a:r>
-              <a:rPr lang="en-US" sz="2400">
-                <a:solidFill>
-                  <a:schemeClr val="lt1"/>
-                </a:solidFill>
-                <a:latin typeface="Gill Sans"/>
-                <a:ea typeface="Gill Sans"/>
-                <a:cs typeface="Gill Sans"/>
-                <a:sym typeface="Gill Sans"/>
-              </a:rPr>
-              <a:t>LEARN . GROW . EXCEL</a:t>
-            </a:r>
-            <a:endParaRPr sz="1800">
-              <a:solidFill>
-                <a:schemeClr val="dk1"/>
-              </a:solidFill>
-              <a:latin typeface="Calibri"/>
-              <a:ea typeface="Calibri"/>
-              <a:cs typeface="Calibri"/>
-              <a:sym typeface="Calibri"/>
-            </a:endParaRPr>
-          </a:p>
-        </p:txBody>
-      </p:sp>
-      <p:sp>
-        <p:nvSpPr>
-          <p:cNvPr id="236" name="Rounded Rectangle 235"/>
-          <p:cNvSpPr/>
-          <p:nvPr/>
-        </p:nvSpPr>
-        <p:spPr>
-          <a:xfrm>
-            <a:off x="548640" y="1828800"/>
-            <a:ext cx="5303520" cy="3931920"/>
-          </a:xfrm>
-          <a:prstGeom prst="roundRect">
-            <a:avLst/>
-          </a:prstGeom>
-          <a:solidFill>
-            <a:srgbClr val="F1F5F9"/>
-          </a:solidFill>
-          <a:ln w="19050">
-            <a:solidFill>
-              <a:srgbClr val="CBD5E1"/>
-            </a:solidFill>
-          </a:ln>
-        </p:spPr>
-        <p:style>
-          <a:lnRef idx="1">
-            <a:schemeClr val="accent1"/>
-          </a:lnRef>
-          <a:fillRef idx="3">
-            <a:schemeClr val="accent1"/>
-          </a:fillRef>
-          <a:effectRef idx="2">
-            <a:schemeClr val="accent1"/>
-          </a:effectRef>
-          <a:fontRef idx="minor">
-            <a:schemeClr val="lt1"/>
-          </a:fontRef>
-        </p:style>
-        <p:txBody>
-          <a:bodyPr rtlCol="0" anchor="ctr" wrap="square" lIns="182880" tIns="182880"/>
-          <a:lstStyle/>
-          <a:p>
-            <a:pPr algn="ctr"/>
-            <a:r>
-              <a:rPr sz="1800" b="1">
-                <a:solidFill>
-                  <a:srgbClr val="0284C7"/>
-                </a:solidFill>
-                <a:latin typeface="Times New Roman"/>
-              </a:rPr>
-              <a:t>Dataset Profile &amp; Industrial Challenges</a:t>
-            </a:r>
-          </a:p>
-          <a:p>
-            <a:pPr>
-              <a:spcBef>
-                <a:spcPts val="200"/>
-              </a:spcBef>
-              <a:spcAft>
-                <a:spcPts val="200"/>
-              </a:spcAft>
-            </a:pPr>
-            <a:r>
-              <a:rPr sz="1250" b="0">
-                <a:solidFill>
-                  <a:srgbClr val="1E293B"/>
-                </a:solidFill>
-                <a:latin typeface="Times New Roman"/>
-              </a:rPr>
-              <a:t>• Total Records: 811,472 real semiconductor wafer maps collected from 46,393 fabrication lots.</a:t>
-            </a:r>
-          </a:p>
-          <a:p>
-            <a:pPr>
-              <a:spcBef>
-                <a:spcPts val="200"/>
-              </a:spcBef>
-              <a:spcAft>
-                <a:spcPts val="200"/>
-              </a:spcAft>
-            </a:pPr>
-            <a:r>
-              <a:rPr sz="1250" b="0">
-                <a:solidFill>
-                  <a:srgbClr val="1E293B"/>
-                </a:solidFill>
-                <a:latin typeface="Times New Roman"/>
-              </a:rPr>
-              <a:t>• Labeled Samples: ~172,950 annotated wafers with failure pattern labels.</a:t>
-            </a:r>
-          </a:p>
-          <a:p>
-            <a:pPr>
-              <a:spcBef>
-                <a:spcPts val="200"/>
-              </a:spcBef>
-              <a:spcAft>
-                <a:spcPts val="200"/>
-              </a:spcAft>
-            </a:pPr>
-            <a:r>
-              <a:rPr sz="1250" b="0">
-                <a:solidFill>
-                  <a:srgbClr val="1E293B"/>
-                </a:solidFill>
-                <a:latin typeface="Times New Roman"/>
-              </a:rPr>
-              <a:t>• Extreme Real-World Imbalance: Over 96% of manufactured wafers are defect-free (Clean).</a:t>
-            </a:r>
-          </a:p>
-          <a:p>
-            <a:pPr>
-              <a:spcBef>
-                <a:spcPts val="200"/>
-              </a:spcBef>
-              <a:spcAft>
-                <a:spcPts val="200"/>
-              </a:spcAft>
-            </a:pPr>
-            <a:r>
-              <a:rPr sz="1250" b="0">
-                <a:solidFill>
-                  <a:srgbClr val="1E293B"/>
-                </a:solidFill>
-                <a:latin typeface="Times New Roman"/>
-              </a:rPr>
-              <a:t>• 2D Array Representation: 0 = background/exterior, 1 = normal pass die, 2 = defect die.</a:t>
-            </a:r>
-          </a:p>
-          <a:p>
-            <a:pPr>
-              <a:spcBef>
-                <a:spcPts val="200"/>
-              </a:spcBef>
-              <a:spcAft>
-                <a:spcPts val="200"/>
-              </a:spcAft>
-            </a:pPr>
-            <a:r>
-              <a:rPr sz="1250" b="1">
-                <a:solidFill>
-                  <a:srgbClr val="1E293B"/>
-                </a:solidFill>
-                <a:latin typeface="Times New Roman"/>
-              </a:rPr>
-              <a:t>• Automated Preprocessing Pipeline:</a:t>
-            </a:r>
-          </a:p>
-          <a:p>
-            <a:pPr>
-              <a:spcBef>
-                <a:spcPts val="200"/>
-              </a:spcBef>
-              <a:spcAft>
-                <a:spcPts val="200"/>
-              </a:spcAft>
-            </a:pPr>
-            <a:r>
-              <a:rPr sz="1250" b="0">
-                <a:solidFill>
-                  <a:srgbClr val="1E293B"/>
-                </a:solidFill>
-                <a:latin typeface="Times New Roman"/>
-              </a:rPr>
-              <a:t>    1. Runtime patch for deprecated pandas Int64Index unpickling.</a:t>
-            </a:r>
-          </a:p>
-          <a:p>
-            <a:pPr>
-              <a:spcBef>
-                <a:spcPts val="200"/>
-              </a:spcBef>
-              <a:spcAft>
-                <a:spcPts val="200"/>
-              </a:spcAft>
-            </a:pPr>
-            <a:r>
-              <a:rPr sz="1250" b="0">
-                <a:solidFill>
-                  <a:srgbClr val="1E293B"/>
-                </a:solidFill>
-                <a:latin typeface="Times New Roman"/>
-              </a:rPr>
-              <a:t>    2. Standardize dimensions to 224x224 via bilinear interpolation.</a:t>
-            </a:r>
-          </a:p>
-          <a:p>
-            <a:pPr>
-              <a:spcBef>
-                <a:spcPts val="200"/>
-              </a:spcBef>
-              <a:spcAft>
-                <a:spcPts val="200"/>
-              </a:spcAft>
-            </a:pPr>
-            <a:r>
-              <a:rPr sz="1250" b="0">
-                <a:solidFill>
-                  <a:srgbClr val="1E293B"/>
-                </a:solidFill>
-                <a:latin typeface="Times New Roman"/>
-              </a:rPr>
-              <a:t>    3. Scale die values to 0-255 grayscale PNG images.</a:t>
-            </a:r>
-          </a:p>
-          <a:p>
-            <a:pPr>
-              <a:spcBef>
-                <a:spcPts val="200"/>
-              </a:spcBef>
-              <a:spcAft>
-                <a:spcPts val="200"/>
-              </a:spcAft>
-            </a:pPr>
-            <a:r>
-              <a:rPr sz="1250" b="0">
-                <a:solidFill>
-                  <a:srgbClr val="1E293B"/>
-                </a:solidFill>
-                <a:latin typeface="Times New Roman"/>
-              </a:rPr>
-              <a:t>    4. Stratified Train (70%), Validation (15%), Test (15%) partitions.</a:t>
-            </a:r>
-          </a:p>
-        </p:txBody>
-      </p:sp>
-      <p:pic>
-        <p:nvPicPr>
-          <p:cNvPr id="237" name="Picture 236" descr="image.png"/>
-          <p:cNvPicPr>
-            <a:picLocks noChangeAspect="1"/>
-          </p:cNvPicPr>
-          <p:nvPr/>
-        </p:nvPicPr>
-        <p:blipFill>
-          <a:blip r:embed="rId4"/>
-          <a:stretch>
-            <a:fillRect/>
-          </a:stretch>
-        </p:blipFill>
-        <p:spPr>
-          <a:xfrm>
-            <a:off x="6217920" y="1828800"/>
-            <a:ext cx="2103120" cy="1554480"/>
-          </a:xfrm>
-          <a:prstGeom prst="rect">
-            <a:avLst/>
-          </a:prstGeom>
-        </p:spPr>
-      </p:pic>
-      <p:sp>
-        <p:nvSpPr>
-          <p:cNvPr id="238" name="TextBox 237"/>
-          <p:cNvSpPr txBox="1"/>
-          <p:nvPr/>
-        </p:nvSpPr>
-        <p:spPr>
-          <a:xfrm>
-            <a:off x="6217920" y="3337560"/>
-            <a:ext cx="2103120" cy="320040"/>
-          </a:xfrm>
-          <a:prstGeom prst="rect">
-            <a:avLst/>
-          </a:prstGeom>
-          <a:noFill/>
-        </p:spPr>
-        <p:txBody>
-          <a:bodyPr wrap="none">
-            <a:spAutoFit/>
-          </a:bodyPr>
-          <a:lstStyle/>
-          <a:p>
-            <a:pPr algn="ctr"/>
-            <a:r>
-              <a:rPr sz="1300" b="1">
-                <a:solidFill>
-                  <a:srgbClr val="0F172A"/>
-                </a:solidFill>
-                <a:latin typeface="Times New Roman"/>
-              </a:rPr>
-              <a:t>Center Defect</a:t>
-            </a:r>
-          </a:p>
-        </p:txBody>
-      </p:sp>
-      <p:pic>
-        <p:nvPicPr>
-          <p:cNvPr id="239" name="Picture 238" descr="image.png"/>
-          <p:cNvPicPr>
-            <a:picLocks noChangeAspect="1"/>
-          </p:cNvPicPr>
-          <p:nvPr/>
-        </p:nvPicPr>
-        <p:blipFill>
-          <a:blip r:embed="rId5"/>
-          <a:stretch>
-            <a:fillRect/>
-          </a:stretch>
-        </p:blipFill>
-        <p:spPr>
-          <a:xfrm>
-            <a:off x="8503920" y="1828800"/>
-            <a:ext cx="2103120" cy="1554480"/>
-          </a:xfrm>
-          <a:prstGeom prst="rect">
-            <a:avLst/>
-          </a:prstGeom>
-        </p:spPr>
-      </p:pic>
-      <p:sp>
-        <p:nvSpPr>
-          <p:cNvPr id="240" name="TextBox 239"/>
-          <p:cNvSpPr txBox="1"/>
-          <p:nvPr/>
-        </p:nvSpPr>
-        <p:spPr>
-          <a:xfrm>
-            <a:off x="8503920" y="3337560"/>
-            <a:ext cx="2103120" cy="320040"/>
-          </a:xfrm>
-          <a:prstGeom prst="rect">
-            <a:avLst/>
-          </a:prstGeom>
-          <a:noFill/>
-        </p:spPr>
-        <p:txBody>
-          <a:bodyPr wrap="none">
-            <a:spAutoFit/>
-          </a:bodyPr>
-          <a:lstStyle/>
-          <a:p>
-            <a:pPr algn="ctr"/>
-            <a:r>
-              <a:rPr sz="1300" b="1">
-                <a:solidFill>
-                  <a:srgbClr val="0F172A"/>
-                </a:solidFill>
-                <a:latin typeface="Times New Roman"/>
-              </a:rPr>
-              <a:t>Donut Defect</a:t>
-            </a:r>
-          </a:p>
-        </p:txBody>
-      </p:sp>
-      <p:pic>
-        <p:nvPicPr>
-          <p:cNvPr id="241" name="Picture 240" descr="image.png"/>
-          <p:cNvPicPr>
-            <a:picLocks noChangeAspect="1"/>
-          </p:cNvPicPr>
-          <p:nvPr/>
-        </p:nvPicPr>
-        <p:blipFill>
-          <a:blip r:embed="rId6"/>
-          <a:stretch>
-            <a:fillRect/>
-          </a:stretch>
-        </p:blipFill>
-        <p:spPr>
-          <a:xfrm>
-            <a:off x="6217920" y="3840480"/>
-            <a:ext cx="2103120" cy="1554480"/>
-          </a:xfrm>
-          <a:prstGeom prst="rect">
-            <a:avLst/>
-          </a:prstGeom>
-        </p:spPr>
-      </p:pic>
-      <p:sp>
-        <p:nvSpPr>
-          <p:cNvPr id="242" name="TextBox 241"/>
-          <p:cNvSpPr txBox="1"/>
-          <p:nvPr/>
-        </p:nvSpPr>
-        <p:spPr>
-          <a:xfrm>
-            <a:off x="6217920" y="5349240"/>
-            <a:ext cx="2103120" cy="320040"/>
-          </a:xfrm>
-          <a:prstGeom prst="rect">
-            <a:avLst/>
-          </a:prstGeom>
-          <a:noFill/>
-        </p:spPr>
-        <p:txBody>
-          <a:bodyPr wrap="none">
-            <a:spAutoFit/>
-          </a:bodyPr>
-          <a:lstStyle/>
-          <a:p>
-            <a:pPr algn="ctr"/>
-            <a:r>
-              <a:rPr sz="1300" b="1">
-                <a:solidFill>
-                  <a:srgbClr val="0F172A"/>
-                </a:solidFill>
-                <a:latin typeface="Times New Roman"/>
-              </a:rPr>
-              <a:t>Edge-Loc Defect</a:t>
-            </a:r>
-          </a:p>
-        </p:txBody>
-      </p:sp>
-      <p:pic>
-        <p:nvPicPr>
-          <p:cNvPr id="243" name="Picture 242" descr="image.png"/>
-          <p:cNvPicPr>
-            <a:picLocks noChangeAspect="1"/>
-          </p:cNvPicPr>
-          <p:nvPr/>
-        </p:nvPicPr>
-        <p:blipFill>
-          <a:blip r:embed="rId7"/>
-          <a:stretch>
-            <a:fillRect/>
-          </a:stretch>
-        </p:blipFill>
-        <p:spPr>
-          <a:xfrm>
-            <a:off x="8503920" y="3840480"/>
-            <a:ext cx="2103120" cy="1554480"/>
-          </a:xfrm>
-          <a:prstGeom prst="rect">
-            <a:avLst/>
-          </a:prstGeom>
-        </p:spPr>
-      </p:pic>
-      <p:sp>
-        <p:nvSpPr>
-          <p:cNvPr id="244" name="TextBox 243"/>
-          <p:cNvSpPr txBox="1"/>
-          <p:nvPr/>
-        </p:nvSpPr>
-        <p:spPr>
-          <a:xfrm>
-            <a:off x="8503920" y="5349240"/>
-            <a:ext cx="2103120" cy="320040"/>
-          </a:xfrm>
-          <a:prstGeom prst="rect">
-            <a:avLst/>
-          </a:prstGeom>
-          <a:noFill/>
-        </p:spPr>
-        <p:txBody>
-          <a:bodyPr wrap="none">
-            <a:spAutoFit/>
-          </a:bodyPr>
-          <a:lstStyle/>
-          <a:p>
-            <a:pPr algn="ctr"/>
-            <a:r>
-              <a:rPr sz="1300" b="1">
-                <a:solidFill>
-                  <a:srgbClr val="0F172A"/>
-                </a:solidFill>
-                <a:latin typeface="Times New Roman"/>
-              </a:rPr>
-              <a:t>Scratch Defect</a:t>
-            </a:r>
-          </a:p>
-        </p:txBody>
-      </p:sp>
-    </p:spTree>
-    <p:extLst>
-      <p:ext uri="{BB962C8B-B14F-4D97-AF65-F5344CB8AC3E}">
-        <p14:creationId xmlns:p14="http://schemas.microsoft.com/office/powerpoint/2010/main" val="4042837840"/>
-      </p:ext>
-    </p:extLst>
-  </p:cSld>
-  <p:clrMapOvr>
-    <a:masterClrMapping/>
-  </p:clrMapOvr>
-</p:sld>
-</file>
-
-<file path=ppt/slides/slide8.xml><?xml version="1.0" encoding="utf-8"?>
 <p:sld xmlns:a="http://schemas.openxmlformats.org/drawingml/2006/main" xmlns:r="http://schemas.openxmlformats.org/officeDocument/2006/relationships" xmlns:p="http://schemas.openxmlformats.org/presentationml/2006/main">
   <p:cSld>
     <p:spTree>
@@ -20184,15 +16027,10 @@
               </a:spcAft>
               <a:buNone/>
             </a:pPr>
-            <a:r>
-              <a:rPr sz="1800" b="1">
-                <a:solidFill>
-                  <a:srgbClr val="0F172A"/>
-                </a:solidFill>
-                <a:latin typeface="Times New Roman"/>
-              </a:rPr>
-              <a:t>8</a:t>
-            </a:r>
+            <a:fld id="{00000000-1234-1234-1234-123412341234}" type="slidenum">
+              <a:rPr lang="en-US"/>
+              <a:t>6</a:t>
+            </a:fld>
             <a:endParaRPr/>
           </a:p>
         </p:txBody>
@@ -20360,208 +16198,29 @@
               <a:buNone/>
             </a:pPr>
             <a:r>
-              <a:rPr sz="3400" b="1">
-                <a:solidFill>
-                  <a:srgbClr val="0F172A"/>
-                </a:solidFill>
-                <a:latin typeface="Times New Roman"/>
+              <a:rPr lang="en-US" sz="3400" b="1">
+                <a:solidFill>
+                  <a:srgbClr val="181C24"/>
+                </a:solidFill>
+                <a:highlight>
+                  <a:srgbClr val="FFFFFF"/>
+                </a:highlight>
+                <a:latin typeface="Times New Roman" panose="02020603050405020304" pitchFamily="18" charset="0"/>
+                <a:ea typeface="Times New Roman"/>
+                <a:cs typeface="Times New Roman"/>
+                <a:sym typeface="Times New Roman"/>
               </a:rPr>
-              <a:t>METHODOLOGY &amp; WORKFLOW</a:t>
+              <a:t>END-TO-END SYSTEM ARCHITECTURE</a:t>
             </a:r>
-            <a:endParaRPr sz="3600" b="1" dirty="0">
-              <a:latin typeface="Times New Roman"/>
+            <a:endParaRPr sz="3400" b="1" dirty="0">
+              <a:solidFill>
+                <a:srgbClr val="181C24"/>
+              </a:solidFill>
+              <a:latin typeface="Times New Roman" panose="02020603050405020304" pitchFamily="18" charset="0"/>
               <a:ea typeface="Times New Roman"/>
               <a:cs typeface="Times New Roman"/>
               <a:sym typeface="Times New Roman"/>
             </a:endParaRPr>
-          </a:p>
-        </p:txBody>
-      </p:sp>
-      <p:sp>
-        <p:nvSpPr>
-          <p:cNvPr id="124" name="Google Shape;124;p3"/>
-          <p:cNvSpPr txBox="1">
-            <a:spLocks noGrp="1"/>
-          </p:cNvSpPr>
-          <p:nvPr>
-            <p:ph type="subTitle" idx="1"/>
-          </p:nvPr>
-        </p:nvSpPr>
-        <p:spPr>
-          <a:xfrm>
-            <a:off x="731520" y="1920240"/>
-            <a:ext cx="10698480" cy="4114800"/>
-          </a:xfrm>
-          <a:prstGeom prst="rect">
-            <a:avLst/>
-          </a:prstGeom>
-          <a:noFill/>
-          <a:ln>
-            <a:noFill/>
-          </a:ln>
-        </p:spPr>
-        <p:txBody>
-          <a:bodyPr spcFirstLastPara="1" wrap="square" lIns="91425" tIns="45700" rIns="91425" bIns="45700" anchor="t" anchorCtr="0">
-            <a:normAutofit/>
-          </a:bodyPr>
-          <a:lstStyle/>
-          <a:p>
-            <a:pPr marL="342900" lvl="0" indent="-342900" algn="l">
-              <a:lnSpc>
-                <a:spcPct val="100000"/>
-              </a:lnSpc>
-              <a:spcBef>
-                <a:spcPts val="800"/>
-              </a:spcBef>
-              <a:spcAft>
-                <a:spcPts val="200"/>
-              </a:spcAft>
-              <a:buSzPts val="2600"/>
-              <a:buFont typeface="Noto Sans Symbols"/>
-              <a:buChar char="⮪"/>
-            </a:pPr>
-            <a:r>
-              <a:rPr sz="2200" b="1">
-                <a:solidFill>
-                  <a:srgbClr val="0284C7"/>
-                </a:solidFill>
-                <a:latin typeface="Times New Roman"/>
-              </a:rPr>
-              <a:t>Phase 1: Dataset Curation &amp; Preprocessing</a:t>
-            </a:r>
-          </a:p>
-          <a:p>
-            <a:pPr>
-              <a:spcBef>
-                <a:spcPts val="200"/>
-              </a:spcBef>
-              <a:spcAft>
-                <a:spcPts val="400"/>
-              </a:spcAft>
-            </a:pPr>
-            <a:r>
-              <a:rPr sz="1800" b="0">
-                <a:solidFill>
-                  <a:srgbClr val="1E293B"/>
-                </a:solidFill>
-                <a:latin typeface="Times New Roman"/>
-              </a:rPr>
-              <a:t>•  Extracted wafer maps from the WM-811K benchmark; performed spatial bicubic/nearest resizing to 224x224 and tensor normalization (ImageNet mean &amp; std).</a:t>
-            </a:r>
-          </a:p>
-          <a:p>
-            <a:pPr>
-              <a:spcBef>
-                <a:spcPts val="800"/>
-              </a:spcBef>
-              <a:spcAft>
-                <a:spcPts val="200"/>
-              </a:spcAft>
-            </a:pPr>
-            <a:r>
-              <a:rPr sz="2200" b="1">
-                <a:solidFill>
-                  <a:srgbClr val="0284C7"/>
-                </a:solidFill>
-                <a:latin typeface="Times New Roman"/>
-              </a:rPr>
-              <a:t>Phase 2: Transfer Learning &amp; Model Fine-Tuning</a:t>
-            </a:r>
-          </a:p>
-          <a:p>
-            <a:pPr>
-              <a:spcBef>
-                <a:spcPts val="200"/>
-              </a:spcBef>
-              <a:spcAft>
-                <a:spcPts val="400"/>
-              </a:spcAft>
-            </a:pPr>
-            <a:r>
-              <a:rPr sz="1800" b="0">
-                <a:solidFill>
-                  <a:srgbClr val="1E293B"/>
-                </a:solidFill>
-                <a:latin typeface="Times New Roman"/>
-              </a:rPr>
-              <a:t>•  Utilized pre-trained MobileNetV3-Small backbone with inverted residual bottlenecks and Hard-Swish activations; replaced the classification head with an 8-output linear layer.</a:t>
-            </a:r>
-          </a:p>
-          <a:p>
-            <a:pPr>
-              <a:spcBef>
-                <a:spcPts val="800"/>
-              </a:spcBef>
-              <a:spcAft>
-                <a:spcPts val="200"/>
-              </a:spcAft>
-            </a:pPr>
-            <a:r>
-              <a:rPr sz="2200" b="1">
-                <a:solidFill>
-                  <a:srgbClr val="0284C7"/>
-                </a:solidFill>
-                <a:latin typeface="Times New Roman"/>
-              </a:rPr>
-              <a:t>Phase 3: Training &amp; Regularization Pipeline</a:t>
-            </a:r>
-          </a:p>
-          <a:p>
-            <a:pPr>
-              <a:spcBef>
-                <a:spcPts val="200"/>
-              </a:spcBef>
-              <a:spcAft>
-                <a:spcPts val="400"/>
-              </a:spcAft>
-            </a:pPr>
-            <a:r>
-              <a:rPr sz="1800" b="0">
-                <a:solidFill>
-                  <a:srgbClr val="1E293B"/>
-                </a:solidFill>
-                <a:latin typeface="Times New Roman"/>
-              </a:rPr>
-              <a:t>•  Trained using Adam optimizer, cross-entropy loss, dropout regularization (p=0.2), and early stopping to prevent overfitting on majority classes.</a:t>
-            </a:r>
-          </a:p>
-          <a:p>
-            <a:pPr>
-              <a:spcBef>
-                <a:spcPts val="800"/>
-              </a:spcBef>
-              <a:spcAft>
-                <a:spcPts val="200"/>
-              </a:spcAft>
-            </a:pPr>
-            <a:r>
-              <a:rPr sz="2200" b="1">
-                <a:solidFill>
-                  <a:srgbClr val="0284C7"/>
-                </a:solidFill>
-                <a:latin typeface="Times New Roman"/>
-              </a:rPr>
-              <a:t>Phase 4: ONNX Compilation &amp; Edge Integration</a:t>
-            </a:r>
-          </a:p>
-          <a:p>
-            <a:pPr>
-              <a:spcBef>
-                <a:spcPts val="200"/>
-              </a:spcBef>
-              <a:spcAft>
-                <a:spcPts val="400"/>
-              </a:spcAft>
-            </a:pPr>
-            <a:r>
-              <a:rPr sz="1800" b="0">
-                <a:solidFill>
-                  <a:srgbClr val="1E293B"/>
-                </a:solidFill>
-                <a:latin typeface="Times New Roman"/>
-              </a:rPr>
-              <a:t>•  Exported PyTorch computational graph to ONNX with CPU graph optimizations; integrated into a high-concurrency Python REST server and interactive web visualizer.</a:t>
-            </a:r>
           </a:p>
         </p:txBody>
       </p:sp>
@@ -20592,7 +16251,507 @@
           </a:ln>
         </p:spPr>
       </p:pic>
+      <p:sp>
+        <p:nvSpPr>
+          <p:cNvPr id="2" name="Rectangle: Rounded Corners 1">
+            <a:extLst>
+              <a:ext uri="{FF2B5EF4-FFF2-40B4-BE49-F238E27FC236}">
+                <a16:creationId xmlns:a16="http://schemas.microsoft.com/office/drawing/2014/main" id="{71EFA3A8-25C6-A4E8-1938-54FC94FDEC93}"/>
+              </a:ext>
+            </a:extLst>
+          </p:cNvPr>
+          <p:cNvSpPr/>
+          <p:nvPr/>
+        </p:nvSpPr>
+        <p:spPr>
+          <a:xfrm>
+            <a:off x="444500" y="1778000"/>
+            <a:ext cx="2349500" cy="2921000"/>
+          </a:xfrm>
+          <a:prstGeom prst="roundRect">
+            <a:avLst/>
+          </a:prstGeom>
+          <a:solidFill>
+            <a:srgbClr val="EBF0F5"/>
+          </a:solidFill>
+          <a:ln w="19050">
+            <a:solidFill>
+              <a:srgbClr val="0284C7"/>
+            </a:solidFill>
+          </a:ln>
+        </p:spPr>
+        <p:style>
+          <a:lnRef idx="2">
+            <a:schemeClr val="accent1">
+              <a:shade val="15000"/>
+            </a:schemeClr>
+          </a:lnRef>
+          <a:fillRef idx="1">
+            <a:schemeClr val="accent1"/>
+          </a:fillRef>
+          <a:effectRef idx="0">
+            <a:schemeClr val="accent1"/>
+          </a:effectRef>
+          <a:fontRef idx="minor">
+            <a:schemeClr val="lt1"/>
+          </a:fontRef>
+        </p:style>
+        <p:txBody>
+          <a:bodyPr rtlCol="0" anchor="ctr"/>
+          <a:lstStyle/>
+          <a:p>
+            <a:pPr algn="ctr"/>
+            <a:endParaRPr lang="en-IN"/>
+          </a:p>
+        </p:txBody>
+      </p:sp>
+      <p:sp>
+        <p:nvSpPr>
+          <p:cNvPr id="3" name="TextBox 2">
+            <a:extLst>
+              <a:ext uri="{FF2B5EF4-FFF2-40B4-BE49-F238E27FC236}">
+                <a16:creationId xmlns:a16="http://schemas.microsoft.com/office/drawing/2014/main" id="{CD19CE52-B06C-3905-AE93-BDF0C5DE7ADF}"/>
+              </a:ext>
+            </a:extLst>
+          </p:cNvPr>
+          <p:cNvSpPr txBox="1"/>
+          <p:nvPr/>
+        </p:nvSpPr>
+        <p:spPr>
+          <a:xfrm>
+            <a:off x="508000" y="1841500"/>
+            <a:ext cx="2222500" cy="1415772"/>
+          </a:xfrm>
+          <a:prstGeom prst="rect">
+            <a:avLst/>
+          </a:prstGeom>
+          <a:noFill/>
+        </p:spPr>
+        <p:txBody>
+          <a:bodyPr vert="horz" wrap="square" rtlCol="0">
+            <a:spAutoFit/>
+          </a:bodyPr>
+          <a:lstStyle/>
+          <a:p>
+            <a:r>
+              <a:rPr lang="en-IN" sz="1300" b="1">
+                <a:solidFill>
+                  <a:srgbClr val="0284C7"/>
+                </a:solidFill>
+                <a:latin typeface="Times New Roman" panose="02020603050405020304" pitchFamily="18" charset="0"/>
+              </a:rPr>
+              <a:t>STAGE A: DATA PIPELINE</a:t>
+            </a:r>
+            <a:r>
+              <a:rPr lang="en-IN" sz="1200">
+                <a:solidFill>
+                  <a:srgbClr val="181C24"/>
+                </a:solidFill>
+                <a:latin typeface="Times New Roman" panose="02020603050405020304" pitchFamily="18" charset="0"/>
+              </a:rPr>
+              <a:t>
+• Raw LSWMD.pkl parsing
+• Pandas index patch
+• Bilinear resize 224x224
+• Min-Max normalization
+• 70% / 15% / 15% Split</a:t>
+            </a:r>
+          </a:p>
+        </p:txBody>
+      </p:sp>
+      <p:sp>
+        <p:nvSpPr>
+          <p:cNvPr id="4" name="Rectangle: Rounded Corners 3">
+            <a:extLst>
+              <a:ext uri="{FF2B5EF4-FFF2-40B4-BE49-F238E27FC236}">
+                <a16:creationId xmlns:a16="http://schemas.microsoft.com/office/drawing/2014/main" id="{A7C0B31C-C168-9718-26B9-864DE3C1036B}"/>
+              </a:ext>
+            </a:extLst>
+          </p:cNvPr>
+          <p:cNvSpPr/>
+          <p:nvPr/>
+        </p:nvSpPr>
+        <p:spPr>
+          <a:xfrm>
+            <a:off x="2984500" y="1778000"/>
+            <a:ext cx="2349500" cy="2921000"/>
+          </a:xfrm>
+          <a:prstGeom prst="roundRect">
+            <a:avLst/>
+          </a:prstGeom>
+          <a:solidFill>
+            <a:srgbClr val="EBF0F5"/>
+          </a:solidFill>
+          <a:ln w="19050">
+            <a:solidFill>
+              <a:srgbClr val="0284C7"/>
+            </a:solidFill>
+          </a:ln>
+        </p:spPr>
+        <p:style>
+          <a:lnRef idx="2">
+            <a:schemeClr val="accent1">
+              <a:shade val="15000"/>
+            </a:schemeClr>
+          </a:lnRef>
+          <a:fillRef idx="1">
+            <a:schemeClr val="accent1"/>
+          </a:fillRef>
+          <a:effectRef idx="0">
+            <a:schemeClr val="accent1"/>
+          </a:effectRef>
+          <a:fontRef idx="minor">
+            <a:schemeClr val="lt1"/>
+          </a:fontRef>
+        </p:style>
+        <p:txBody>
+          <a:bodyPr rtlCol="0" anchor="ctr"/>
+          <a:lstStyle/>
+          <a:p>
+            <a:pPr algn="ctr"/>
+            <a:endParaRPr lang="en-IN"/>
+          </a:p>
+        </p:txBody>
+      </p:sp>
+      <p:sp>
+        <p:nvSpPr>
+          <p:cNvPr id="5" name="TextBox 4">
+            <a:extLst>
+              <a:ext uri="{FF2B5EF4-FFF2-40B4-BE49-F238E27FC236}">
+                <a16:creationId xmlns:a16="http://schemas.microsoft.com/office/drawing/2014/main" id="{60E5E6BD-1EA6-3EA9-956A-69A65C22E483}"/>
+              </a:ext>
+            </a:extLst>
+          </p:cNvPr>
+          <p:cNvSpPr txBox="1"/>
+          <p:nvPr/>
+        </p:nvSpPr>
+        <p:spPr>
+          <a:xfrm>
+            <a:off x="3048000" y="1841500"/>
+            <a:ext cx="2222500" cy="1415772"/>
+          </a:xfrm>
+          <a:prstGeom prst="rect">
+            <a:avLst/>
+          </a:prstGeom>
+          <a:noFill/>
+        </p:spPr>
+        <p:txBody>
+          <a:bodyPr vert="horz" wrap="square" rtlCol="0">
+            <a:spAutoFit/>
+          </a:bodyPr>
+          <a:lstStyle/>
+          <a:p>
+            <a:r>
+              <a:rPr lang="en-IN" sz="1300" b="1">
+                <a:solidFill>
+                  <a:srgbClr val="0284C7"/>
+                </a:solidFill>
+                <a:latin typeface="Times New Roman" panose="02020603050405020304" pitchFamily="18" charset="0"/>
+              </a:rPr>
+              <a:t>STAGE B: MODEL TRAINING</a:t>
+            </a:r>
+            <a:r>
+              <a:rPr lang="en-IN" sz="1200">
+                <a:solidFill>
+                  <a:srgbClr val="181C24"/>
+                </a:solidFill>
+                <a:latin typeface="Times New Roman" panose="02020603050405020304" pitchFamily="18" charset="0"/>
+              </a:rPr>
+              <a:t>
+• Backbone: MobileNetV3
+• Inverted residuals + SE
+• Custom 8-class linear head
+• Adam optimizer (3e-4)
+• Cross-Entropy loss</a:t>
+            </a:r>
+          </a:p>
+        </p:txBody>
+      </p:sp>
+      <p:sp>
+        <p:nvSpPr>
+          <p:cNvPr id="6" name="Rectangle: Rounded Corners 5">
+            <a:extLst>
+              <a:ext uri="{FF2B5EF4-FFF2-40B4-BE49-F238E27FC236}">
+                <a16:creationId xmlns:a16="http://schemas.microsoft.com/office/drawing/2014/main" id="{891426D9-CAAD-B915-E3F0-54749C6BFFA4}"/>
+              </a:ext>
+            </a:extLst>
+          </p:cNvPr>
+          <p:cNvSpPr/>
+          <p:nvPr/>
+        </p:nvSpPr>
+        <p:spPr>
+          <a:xfrm>
+            <a:off x="5524500" y="1778000"/>
+            <a:ext cx="2349500" cy="2921000"/>
+          </a:xfrm>
+          <a:prstGeom prst="roundRect">
+            <a:avLst/>
+          </a:prstGeom>
+          <a:solidFill>
+            <a:srgbClr val="EBF0F5"/>
+          </a:solidFill>
+          <a:ln w="19050">
+            <a:solidFill>
+              <a:srgbClr val="0284C7"/>
+            </a:solidFill>
+          </a:ln>
+        </p:spPr>
+        <p:style>
+          <a:lnRef idx="2">
+            <a:schemeClr val="accent1">
+              <a:shade val="15000"/>
+            </a:schemeClr>
+          </a:lnRef>
+          <a:fillRef idx="1">
+            <a:schemeClr val="accent1"/>
+          </a:fillRef>
+          <a:effectRef idx="0">
+            <a:schemeClr val="accent1"/>
+          </a:effectRef>
+          <a:fontRef idx="minor">
+            <a:schemeClr val="lt1"/>
+          </a:fontRef>
+        </p:style>
+        <p:txBody>
+          <a:bodyPr rtlCol="0" anchor="ctr"/>
+          <a:lstStyle/>
+          <a:p>
+            <a:pPr algn="ctr"/>
+            <a:endParaRPr lang="en-IN"/>
+          </a:p>
+        </p:txBody>
+      </p:sp>
+      <p:sp>
+        <p:nvSpPr>
+          <p:cNvPr id="7" name="TextBox 6">
+            <a:extLst>
+              <a:ext uri="{FF2B5EF4-FFF2-40B4-BE49-F238E27FC236}">
+                <a16:creationId xmlns:a16="http://schemas.microsoft.com/office/drawing/2014/main" id="{9908E801-B2A8-01B4-CBFC-330879DAA3B3}"/>
+              </a:ext>
+            </a:extLst>
+          </p:cNvPr>
+          <p:cNvSpPr txBox="1"/>
+          <p:nvPr/>
+        </p:nvSpPr>
+        <p:spPr>
+          <a:xfrm>
+            <a:off x="5588000" y="1841500"/>
+            <a:ext cx="2222500" cy="1215717"/>
+          </a:xfrm>
+          <a:prstGeom prst="rect">
+            <a:avLst/>
+          </a:prstGeom>
+          <a:noFill/>
+        </p:spPr>
+        <p:txBody>
+          <a:bodyPr vert="horz" wrap="square" rtlCol="0">
+            <a:spAutoFit/>
+          </a:bodyPr>
+          <a:lstStyle/>
+          <a:p>
+            <a:r>
+              <a:rPr lang="en-IN" sz="1300" b="1">
+                <a:solidFill>
+                  <a:srgbClr val="0284C7"/>
+                </a:solidFill>
+                <a:latin typeface="Times New Roman" panose="02020603050405020304" pitchFamily="18" charset="0"/>
+              </a:rPr>
+              <a:t>STAGE C: ONNX ENGINE</a:t>
+            </a:r>
+            <a:r>
+              <a:rPr lang="en-IN" sz="1200">
+                <a:solidFill>
+                  <a:srgbClr val="181C24"/>
+                </a:solidFill>
+                <a:latin typeface="Times New Roman" panose="02020603050405020304" pitchFamily="18" charset="0"/>
+              </a:rPr>
+              <a:t>
+• PyTorch model graph trace
+• ONNX Opset 12 export
+• Constant folding &amp; prune
+• Dynamic batch dimension
+• Model size: 5.84 MB</a:t>
+            </a:r>
+          </a:p>
+        </p:txBody>
+      </p:sp>
+      <p:sp>
+        <p:nvSpPr>
+          <p:cNvPr id="8" name="Rectangle: Rounded Corners 7">
+            <a:extLst>
+              <a:ext uri="{FF2B5EF4-FFF2-40B4-BE49-F238E27FC236}">
+                <a16:creationId xmlns:a16="http://schemas.microsoft.com/office/drawing/2014/main" id="{4A2619EE-FA65-9DB8-7D7A-B99DDA11DE45}"/>
+              </a:ext>
+            </a:extLst>
+          </p:cNvPr>
+          <p:cNvSpPr/>
+          <p:nvPr/>
+        </p:nvSpPr>
+        <p:spPr>
+          <a:xfrm>
+            <a:off x="8064500" y="1778000"/>
+            <a:ext cx="2349500" cy="2921000"/>
+          </a:xfrm>
+          <a:prstGeom prst="roundRect">
+            <a:avLst/>
+          </a:prstGeom>
+          <a:solidFill>
+            <a:srgbClr val="EBF0F5"/>
+          </a:solidFill>
+          <a:ln w="19050">
+            <a:solidFill>
+              <a:srgbClr val="0284C7"/>
+            </a:solidFill>
+          </a:ln>
+        </p:spPr>
+        <p:style>
+          <a:lnRef idx="2">
+            <a:schemeClr val="accent1">
+              <a:shade val="15000"/>
+            </a:schemeClr>
+          </a:lnRef>
+          <a:fillRef idx="1">
+            <a:schemeClr val="accent1"/>
+          </a:fillRef>
+          <a:effectRef idx="0">
+            <a:schemeClr val="accent1"/>
+          </a:effectRef>
+          <a:fontRef idx="minor">
+            <a:schemeClr val="lt1"/>
+          </a:fontRef>
+        </p:style>
+        <p:txBody>
+          <a:bodyPr rtlCol="0" anchor="ctr"/>
+          <a:lstStyle/>
+          <a:p>
+            <a:pPr algn="ctr"/>
+            <a:endParaRPr lang="en-IN"/>
+          </a:p>
+        </p:txBody>
+      </p:sp>
+      <p:sp>
+        <p:nvSpPr>
+          <p:cNvPr id="9" name="TextBox 8">
+            <a:extLst>
+              <a:ext uri="{FF2B5EF4-FFF2-40B4-BE49-F238E27FC236}">
+                <a16:creationId xmlns:a16="http://schemas.microsoft.com/office/drawing/2014/main" id="{E275F8B7-7001-14E2-0A30-83E7F67B3D1F}"/>
+              </a:ext>
+            </a:extLst>
+          </p:cNvPr>
+          <p:cNvSpPr txBox="1"/>
+          <p:nvPr/>
+        </p:nvSpPr>
+        <p:spPr>
+          <a:xfrm>
+            <a:off x="8128000" y="1841500"/>
+            <a:ext cx="2222500" cy="1415772"/>
+          </a:xfrm>
+          <a:prstGeom prst="rect">
+            <a:avLst/>
+          </a:prstGeom>
+          <a:noFill/>
+        </p:spPr>
+        <p:txBody>
+          <a:bodyPr vert="horz" wrap="square" rtlCol="0">
+            <a:spAutoFit/>
+          </a:bodyPr>
+          <a:lstStyle/>
+          <a:p>
+            <a:r>
+              <a:rPr lang="en-US" sz="1300" b="1">
+                <a:solidFill>
+                  <a:srgbClr val="0284C7"/>
+                </a:solidFill>
+                <a:latin typeface="Times New Roman" panose="02020603050405020304" pitchFamily="18" charset="0"/>
+              </a:rPr>
+              <a:t>STAGE D: EDGE INFERENCE</a:t>
+            </a:r>
+            <a:r>
+              <a:rPr lang="en-US" sz="1200">
+                <a:solidFill>
+                  <a:srgbClr val="181C24"/>
+                </a:solidFill>
+                <a:latin typeface="Times New Roman" panose="02020603050405020304" pitchFamily="18" charset="0"/>
+              </a:rPr>
+              <a:t>
+• ONNX Runtime CPU
+• ImageNet tensor norm
+• Top-3 confidence scoring
+• Sub-2ms inference latency
+• Standalone REST runner</a:t>
+            </a:r>
+            <a:endParaRPr lang="en-IN" sz="1200">
+              <a:solidFill>
+                <a:srgbClr val="181C24"/>
+              </a:solidFill>
+              <a:latin typeface="Times New Roman" panose="02020603050405020304" pitchFamily="18" charset="0"/>
+            </a:endParaRPr>
+          </a:p>
+        </p:txBody>
+      </p:sp>
+      <p:sp>
+        <p:nvSpPr>
+          <p:cNvPr id="10" name="Rectangle: Rounded Corners 9">
+            <a:extLst>
+              <a:ext uri="{FF2B5EF4-FFF2-40B4-BE49-F238E27FC236}">
+                <a16:creationId xmlns:a16="http://schemas.microsoft.com/office/drawing/2014/main" id="{A9ED1A95-4F40-321F-50ED-3858094C394C}"/>
+              </a:ext>
+            </a:extLst>
+          </p:cNvPr>
+          <p:cNvSpPr/>
+          <p:nvPr/>
+        </p:nvSpPr>
+        <p:spPr>
+          <a:xfrm>
+            <a:off x="444500" y="4889500"/>
+            <a:ext cx="9969500" cy="571500"/>
+          </a:xfrm>
+          <a:prstGeom prst="roundRect">
+            <a:avLst/>
+          </a:prstGeom>
+          <a:solidFill>
+            <a:srgbClr val="181C24"/>
+          </a:solidFill>
+        </p:spPr>
+        <p:style>
+          <a:lnRef idx="2">
+            <a:schemeClr val="accent1">
+              <a:shade val="15000"/>
+            </a:schemeClr>
+          </a:lnRef>
+          <a:fillRef idx="1">
+            <a:schemeClr val="accent1"/>
+          </a:fillRef>
+          <a:effectRef idx="0">
+            <a:schemeClr val="accent1"/>
+          </a:effectRef>
+          <a:fontRef idx="minor">
+            <a:schemeClr val="lt1"/>
+          </a:fontRef>
+        </p:style>
+        <p:txBody>
+          <a:bodyPr rtlCol="0" anchor="ctr"/>
+          <a:lstStyle/>
+          <a:p>
+            <a:pPr algn="ctr"/>
+            <a:r>
+              <a:rPr lang="en-IN" sz="1300" b="1">
+                <a:solidFill>
+                  <a:srgbClr val="FFFFFF"/>
+                </a:solidFill>
+                <a:latin typeface="Times New Roman" panose="02020603050405020304" pitchFamily="18" charset="0"/>
+              </a:rPr>
+              <a:t>Target Defect Classes:  Center  |  Donut  |  Edge-Loc  |  Edge-Ring  |  Loc  |  Scratch  |  Other  |  Clean (Nominal)</a:t>
+            </a:r>
+          </a:p>
+        </p:txBody>
+      </p:sp>
     </p:spTree>
+    <p:extLst>
+      <p:ext uri="{BB962C8B-B14F-4D97-AF65-F5344CB8AC3E}">
+        <p14:creationId xmlns:p14="http://schemas.microsoft.com/office/powerpoint/2010/main" val="498022090"/>
+      </p:ext>
+    </p:extLst>
   </p:cSld>
   <p:clrMapOvr>
     <a:masterClrMapping/>
@@ -20600,7 +16759,7 @@
 </p:sld>
 </file>
 
-<file path=ppt/slides/slide8.xml><?xml version="1.0" encoding="utf-8"?>
+<file path=ppt/slides/slide7.xml><?xml version="1.0" encoding="utf-8"?>
 <p:sld xmlns:a="http://schemas.openxmlformats.org/drawingml/2006/main" xmlns:r="http://schemas.openxmlformats.org/officeDocument/2006/relationships" xmlns:p="http://schemas.openxmlformats.org/presentationml/2006/main">
   <p:cSld>
     <p:spTree>
@@ -20655,15 +16814,10 @@
               </a:spcAft>
               <a:buNone/>
             </a:pPr>
-            <a:r>
-              <a:rPr sz="1800" b="1">
-                <a:solidFill>
-                  <a:srgbClr val="0F172A"/>
-                </a:solidFill>
-                <a:latin typeface="Times New Roman"/>
-              </a:rPr>
-              <a:t>8</a:t>
-            </a:r>
+            <a:fld id="{00000000-1234-1234-1234-123412341234}" type="slidenum">
+              <a:rPr lang="en-US"/>
+              <a:t>7</a:t>
+            </a:fld>
             <a:endParaRPr/>
           </a:p>
         </p:txBody>
@@ -20831,208 +16985,29 @@
               <a:buNone/>
             </a:pPr>
             <a:r>
-              <a:rPr sz="3400" b="1">
-                <a:solidFill>
-                  <a:srgbClr val="0F172A"/>
-                </a:solidFill>
-                <a:latin typeface="Times New Roman"/>
+              <a:rPr lang="en-US" sz="3400" b="1">
+                <a:solidFill>
+                  <a:srgbClr val="181C24"/>
+                </a:solidFill>
+                <a:highlight>
+                  <a:srgbClr val="FFFFFF"/>
+                </a:highlight>
+                <a:latin typeface="Times New Roman" panose="02020603050405020304" pitchFamily="18" charset="0"/>
+                <a:ea typeface="Times New Roman"/>
+                <a:cs typeface="Times New Roman"/>
+                <a:sym typeface="Times New Roman"/>
               </a:rPr>
-              <a:t>METHODOLOGY &amp; WORKFLOW</a:t>
+              <a:t>WM-811K DATASET &amp; DEFECT PATTERNS</a:t>
             </a:r>
-            <a:endParaRPr sz="3600" b="1" dirty="0">
-              <a:latin typeface="Times New Roman"/>
+            <a:endParaRPr sz="3400" b="1" dirty="0">
+              <a:solidFill>
+                <a:srgbClr val="181C24"/>
+              </a:solidFill>
+              <a:latin typeface="Times New Roman" panose="02020603050405020304" pitchFamily="18" charset="0"/>
               <a:ea typeface="Times New Roman"/>
               <a:cs typeface="Times New Roman"/>
               <a:sym typeface="Times New Roman"/>
             </a:endParaRPr>
-          </a:p>
-        </p:txBody>
-      </p:sp>
-      <p:sp>
-        <p:nvSpPr>
-          <p:cNvPr id="124" name="Google Shape;124;p3"/>
-          <p:cNvSpPr txBox="1">
-            <a:spLocks noGrp="1"/>
-          </p:cNvSpPr>
-          <p:nvPr>
-            <p:ph type="subTitle" idx="1"/>
-          </p:nvPr>
-        </p:nvSpPr>
-        <p:spPr>
-          <a:xfrm>
-            <a:off x="731520" y="1920240"/>
-            <a:ext cx="10698480" cy="4114800"/>
-          </a:xfrm>
-          <a:prstGeom prst="rect">
-            <a:avLst/>
-          </a:prstGeom>
-          <a:noFill/>
-          <a:ln>
-            <a:noFill/>
-          </a:ln>
-        </p:spPr>
-        <p:txBody>
-          <a:bodyPr spcFirstLastPara="1" wrap="square" lIns="91425" tIns="45700" rIns="91425" bIns="45700" anchor="t" anchorCtr="0">
-            <a:normAutofit/>
-          </a:bodyPr>
-          <a:lstStyle/>
-          <a:p>
-            <a:pPr marL="342900" lvl="0" indent="-342900" algn="l">
-              <a:lnSpc>
-                <a:spcPct val="100000"/>
-              </a:lnSpc>
-              <a:spcBef>
-                <a:spcPts val="800"/>
-              </a:spcBef>
-              <a:spcAft>
-                <a:spcPts val="200"/>
-              </a:spcAft>
-              <a:buSzPts val="2600"/>
-              <a:buFont typeface="Noto Sans Symbols"/>
-              <a:buChar char="⮪"/>
-            </a:pPr>
-            <a:r>
-              <a:rPr sz="2200" b="1">
-                <a:solidFill>
-                  <a:srgbClr val="0284C7"/>
-                </a:solidFill>
-                <a:latin typeface="Times New Roman"/>
-              </a:rPr>
-              <a:t>Phase 1: Dataset Curation &amp; Preprocessing</a:t>
-            </a:r>
-          </a:p>
-          <a:p>
-            <a:pPr>
-              <a:spcBef>
-                <a:spcPts val="200"/>
-              </a:spcBef>
-              <a:spcAft>
-                <a:spcPts val="400"/>
-              </a:spcAft>
-            </a:pPr>
-            <a:r>
-              <a:rPr sz="1800" b="0">
-                <a:solidFill>
-                  <a:srgbClr val="1E293B"/>
-                </a:solidFill>
-                <a:latin typeface="Times New Roman"/>
-              </a:rPr>
-              <a:t>•  Extracted wafer maps from the WM-811K benchmark; performed spatial bicubic/nearest resizing to 224x224 and tensor normalization (ImageNet mean &amp; std).</a:t>
-            </a:r>
-          </a:p>
-          <a:p>
-            <a:pPr>
-              <a:spcBef>
-                <a:spcPts val="800"/>
-              </a:spcBef>
-              <a:spcAft>
-                <a:spcPts val="200"/>
-              </a:spcAft>
-            </a:pPr>
-            <a:r>
-              <a:rPr sz="2200" b="1">
-                <a:solidFill>
-                  <a:srgbClr val="0284C7"/>
-                </a:solidFill>
-                <a:latin typeface="Times New Roman"/>
-              </a:rPr>
-              <a:t>Phase 2: Transfer Learning &amp; Model Fine-Tuning</a:t>
-            </a:r>
-          </a:p>
-          <a:p>
-            <a:pPr>
-              <a:spcBef>
-                <a:spcPts val="200"/>
-              </a:spcBef>
-              <a:spcAft>
-                <a:spcPts val="400"/>
-              </a:spcAft>
-            </a:pPr>
-            <a:r>
-              <a:rPr sz="1800" b="0">
-                <a:solidFill>
-                  <a:srgbClr val="1E293B"/>
-                </a:solidFill>
-                <a:latin typeface="Times New Roman"/>
-              </a:rPr>
-              <a:t>•  Utilized pre-trained MobileNetV3-Small backbone with inverted residual bottlenecks and Hard-Swish activations; replaced the classification head with an 8-output linear layer.</a:t>
-            </a:r>
-          </a:p>
-          <a:p>
-            <a:pPr>
-              <a:spcBef>
-                <a:spcPts val="800"/>
-              </a:spcBef>
-              <a:spcAft>
-                <a:spcPts val="200"/>
-              </a:spcAft>
-            </a:pPr>
-            <a:r>
-              <a:rPr sz="2200" b="1">
-                <a:solidFill>
-                  <a:srgbClr val="0284C7"/>
-                </a:solidFill>
-                <a:latin typeface="Times New Roman"/>
-              </a:rPr>
-              <a:t>Phase 3: Training &amp; Regularization Pipeline</a:t>
-            </a:r>
-          </a:p>
-          <a:p>
-            <a:pPr>
-              <a:spcBef>
-                <a:spcPts val="200"/>
-              </a:spcBef>
-              <a:spcAft>
-                <a:spcPts val="400"/>
-              </a:spcAft>
-            </a:pPr>
-            <a:r>
-              <a:rPr sz="1800" b="0">
-                <a:solidFill>
-                  <a:srgbClr val="1E293B"/>
-                </a:solidFill>
-                <a:latin typeface="Times New Roman"/>
-              </a:rPr>
-              <a:t>•  Trained using Adam optimizer, cross-entropy loss, dropout regularization (p=0.2), and early stopping to prevent overfitting on majority classes.</a:t>
-            </a:r>
-          </a:p>
-          <a:p>
-            <a:pPr>
-              <a:spcBef>
-                <a:spcPts val="800"/>
-              </a:spcBef>
-              <a:spcAft>
-                <a:spcPts val="200"/>
-              </a:spcAft>
-            </a:pPr>
-            <a:r>
-              <a:rPr sz="2200" b="1">
-                <a:solidFill>
-                  <a:srgbClr val="0284C7"/>
-                </a:solidFill>
-                <a:latin typeface="Times New Roman"/>
-              </a:rPr>
-              <a:t>Phase 4: ONNX Compilation &amp; Edge Integration</a:t>
-            </a:r>
-          </a:p>
-          <a:p>
-            <a:pPr>
-              <a:spcBef>
-                <a:spcPts val="200"/>
-              </a:spcBef>
-              <a:spcAft>
-                <a:spcPts val="400"/>
-              </a:spcAft>
-            </a:pPr>
-            <a:r>
-              <a:rPr sz="1800" b="0">
-                <a:solidFill>
-                  <a:srgbClr val="1E293B"/>
-                </a:solidFill>
-                <a:latin typeface="Times New Roman"/>
-              </a:rPr>
-              <a:t>•  Exported PyTorch computational graph to ONNX with CPU graph optimizations; integrated into a high-concurrency Python REST server and interactive web visualizer.</a:t>
-            </a:r>
           </a:p>
         </p:txBody>
       </p:sp>
@@ -21063,7 +17038,408 @@
           </a:ln>
         </p:spPr>
       </p:pic>
+      <p:sp>
+        <p:nvSpPr>
+          <p:cNvPr id="2" name="Rectangle: Rounded Corners 1">
+            <a:extLst>
+              <a:ext uri="{FF2B5EF4-FFF2-40B4-BE49-F238E27FC236}">
+                <a16:creationId xmlns:a16="http://schemas.microsoft.com/office/drawing/2014/main" id="{21617C98-09F1-D2F1-FF84-39E0D2C894E1}"/>
+              </a:ext>
+            </a:extLst>
+          </p:cNvPr>
+          <p:cNvSpPr/>
+          <p:nvPr/>
+        </p:nvSpPr>
+        <p:spPr>
+          <a:xfrm>
+            <a:off x="444500" y="1778000"/>
+            <a:ext cx="4699000" cy="3683000"/>
+          </a:xfrm>
+          <a:prstGeom prst="roundRect">
+            <a:avLst/>
+          </a:prstGeom>
+          <a:solidFill>
+            <a:srgbClr val="EBF0F5"/>
+          </a:solidFill>
+          <a:ln w="19050">
+            <a:solidFill>
+              <a:srgbClr val="0284C7"/>
+            </a:solidFill>
+          </a:ln>
+        </p:spPr>
+        <p:style>
+          <a:lnRef idx="2">
+            <a:schemeClr val="accent1">
+              <a:shade val="15000"/>
+            </a:schemeClr>
+          </a:lnRef>
+          <a:fillRef idx="1">
+            <a:schemeClr val="accent1"/>
+          </a:fillRef>
+          <a:effectRef idx="0">
+            <a:schemeClr val="accent1"/>
+          </a:effectRef>
+          <a:fontRef idx="minor">
+            <a:schemeClr val="lt1"/>
+          </a:fontRef>
+        </p:style>
+        <p:txBody>
+          <a:bodyPr rtlCol="0" anchor="ctr"/>
+          <a:lstStyle/>
+          <a:p>
+            <a:pPr algn="ctr"/>
+            <a:endParaRPr lang="en-IN"/>
+          </a:p>
+        </p:txBody>
+      </p:sp>
+      <p:sp>
+        <p:nvSpPr>
+          <p:cNvPr id="3" name="TextBox 2">
+            <a:extLst>
+              <a:ext uri="{FF2B5EF4-FFF2-40B4-BE49-F238E27FC236}">
+                <a16:creationId xmlns:a16="http://schemas.microsoft.com/office/drawing/2014/main" id="{7D964098-6E4F-8772-7242-0619ECB48DCA}"/>
+              </a:ext>
+            </a:extLst>
+          </p:cNvPr>
+          <p:cNvSpPr txBox="1"/>
+          <p:nvPr/>
+        </p:nvSpPr>
+        <p:spPr>
+          <a:xfrm>
+            <a:off x="571500" y="1841500"/>
+            <a:ext cx="4445000" cy="2523768"/>
+          </a:xfrm>
+          <a:prstGeom prst="rect">
+            <a:avLst/>
+          </a:prstGeom>
+          <a:noFill/>
+        </p:spPr>
+        <p:txBody>
+          <a:bodyPr vert="horz" wrap="square" rtlCol="0">
+            <a:spAutoFit/>
+          </a:bodyPr>
+          <a:lstStyle/>
+          <a:p>
+            <a:r>
+              <a:rPr lang="en-IN" b="1">
+                <a:solidFill>
+                  <a:srgbClr val="0284C7"/>
+                </a:solidFill>
+                <a:latin typeface="Times New Roman" panose="02020603050405020304" pitchFamily="18" charset="0"/>
+              </a:rPr>
+              <a:t>Dataset Profile &amp; Industrial Challenges</a:t>
+            </a:r>
+            <a:r>
+              <a:rPr lang="en-IN" sz="1200">
+                <a:solidFill>
+                  <a:srgbClr val="181C24"/>
+                </a:solidFill>
+                <a:latin typeface="Times New Roman" panose="02020603050405020304" pitchFamily="18" charset="0"/>
+              </a:rPr>
+              <a:t>
+• Total Records: 811,472 real semiconductor wafer maps from 46,393 lots.
+• Labeled Samples: ~172,950 annotated wafers with failure patterns.
+• Severe Imbalance: Over 96% of manufactured wafers are defect-free (Clean).
+• Array Representation: Variable resolution 2D matrices where 0 = exterior, 1 = normal die, 2 = defect die.
+• Preprocessing Pipeline:
+   1. Patch deprecated pandas Int64Index unpickling.
+   2. Map 9 raw labels to 8 standardized classes.
+   3. Standardize dimensions to 224x224 (bilinear).
+   4. 70% Train, 15% Validation, 15% Test split.</a:t>
+            </a:r>
+          </a:p>
+        </p:txBody>
+      </p:sp>
+      <p:pic>
+        <p:nvPicPr>
+          <p:cNvPr id="5" name="Picture 4">
+            <a:extLst>
+              <a:ext uri="{FF2B5EF4-FFF2-40B4-BE49-F238E27FC236}">
+                <a16:creationId xmlns:a16="http://schemas.microsoft.com/office/drawing/2014/main" id="{053E63D3-2F0C-90C1-094A-8FCF4EC0C5AA}"/>
+              </a:ext>
+            </a:extLst>
+          </p:cNvPr>
+          <p:cNvPicPr>
+            <a:picLocks/>
+          </p:cNvPicPr>
+          <p:nvPr/>
+        </p:nvPicPr>
+        <p:blipFill>
+          <a:blip r:embed="rId4"/>
+          <a:stretch>
+            <a:fillRect/>
+          </a:stretch>
+        </p:blipFill>
+        <p:spPr>
+          <a:xfrm>
+            <a:off x="5461000" y="1778000"/>
+            <a:ext cx="2222500" cy="1460500"/>
+          </a:xfrm>
+          <a:prstGeom prst="rect">
+            <a:avLst/>
+          </a:prstGeom>
+        </p:spPr>
+      </p:pic>
+      <p:sp>
+        <p:nvSpPr>
+          <p:cNvPr id="6" name="TextBox 5">
+            <a:extLst>
+              <a:ext uri="{FF2B5EF4-FFF2-40B4-BE49-F238E27FC236}">
+                <a16:creationId xmlns:a16="http://schemas.microsoft.com/office/drawing/2014/main" id="{3AB4E3BF-651A-8631-9579-2304149D62F4}"/>
+              </a:ext>
+            </a:extLst>
+          </p:cNvPr>
+          <p:cNvSpPr txBox="1"/>
+          <p:nvPr/>
+        </p:nvSpPr>
+        <p:spPr>
+          <a:xfrm>
+            <a:off x="5461000" y="3238500"/>
+            <a:ext cx="2222500" cy="261610"/>
+          </a:xfrm>
+          <a:prstGeom prst="rect">
+            <a:avLst/>
+          </a:prstGeom>
+          <a:noFill/>
+        </p:spPr>
+        <p:txBody>
+          <a:bodyPr vert="horz" rtlCol="0">
+            <a:spAutoFit/>
+          </a:bodyPr>
+          <a:lstStyle/>
+          <a:p>
+            <a:pPr algn="ctr"/>
+            <a:r>
+              <a:rPr lang="en-IN" sz="1100" b="1">
+                <a:solidFill>
+                  <a:srgbClr val="181C24"/>
+                </a:solidFill>
+                <a:latin typeface="Times New Roman" panose="02020603050405020304" pitchFamily="18" charset="0"/>
+              </a:rPr>
+              <a:t>Center Defect</a:t>
+            </a:r>
+          </a:p>
+        </p:txBody>
+      </p:sp>
+      <p:pic>
+        <p:nvPicPr>
+          <p:cNvPr id="8" name="Picture 7">
+            <a:extLst>
+              <a:ext uri="{FF2B5EF4-FFF2-40B4-BE49-F238E27FC236}">
+                <a16:creationId xmlns:a16="http://schemas.microsoft.com/office/drawing/2014/main" id="{511CF8B0-BE89-808E-9B2E-B259FF8C98BE}"/>
+              </a:ext>
+            </a:extLst>
+          </p:cNvPr>
+          <p:cNvPicPr>
+            <a:picLocks/>
+          </p:cNvPicPr>
+          <p:nvPr/>
+        </p:nvPicPr>
+        <p:blipFill>
+          <a:blip r:embed="rId5"/>
+          <a:stretch>
+            <a:fillRect/>
+          </a:stretch>
+        </p:blipFill>
+        <p:spPr>
+          <a:xfrm>
+            <a:off x="8001000" y="1778000"/>
+            <a:ext cx="2222500" cy="1460500"/>
+          </a:xfrm>
+          <a:prstGeom prst="rect">
+            <a:avLst/>
+          </a:prstGeom>
+        </p:spPr>
+      </p:pic>
+      <p:sp>
+        <p:nvSpPr>
+          <p:cNvPr id="9" name="TextBox 8">
+            <a:extLst>
+              <a:ext uri="{FF2B5EF4-FFF2-40B4-BE49-F238E27FC236}">
+                <a16:creationId xmlns:a16="http://schemas.microsoft.com/office/drawing/2014/main" id="{D69AA885-E8C8-BCE3-7313-16C19A5F6128}"/>
+              </a:ext>
+            </a:extLst>
+          </p:cNvPr>
+          <p:cNvSpPr txBox="1"/>
+          <p:nvPr/>
+        </p:nvSpPr>
+        <p:spPr>
+          <a:xfrm>
+            <a:off x="8001000" y="3238500"/>
+            <a:ext cx="2222500" cy="261610"/>
+          </a:xfrm>
+          <a:prstGeom prst="rect">
+            <a:avLst/>
+          </a:prstGeom>
+          <a:noFill/>
+        </p:spPr>
+        <p:txBody>
+          <a:bodyPr vert="horz" rtlCol="0">
+            <a:spAutoFit/>
+          </a:bodyPr>
+          <a:lstStyle/>
+          <a:p>
+            <a:pPr algn="ctr"/>
+            <a:r>
+              <a:rPr lang="en-IN" sz="1100" b="1">
+                <a:solidFill>
+                  <a:srgbClr val="181C24"/>
+                </a:solidFill>
+                <a:latin typeface="Times New Roman" panose="02020603050405020304" pitchFamily="18" charset="0"/>
+              </a:rPr>
+              <a:t>Donut Defect</a:t>
+            </a:r>
+          </a:p>
+        </p:txBody>
+      </p:sp>
+      <p:pic>
+        <p:nvPicPr>
+          <p:cNvPr id="11" name="Picture 10">
+            <a:extLst>
+              <a:ext uri="{FF2B5EF4-FFF2-40B4-BE49-F238E27FC236}">
+                <a16:creationId xmlns:a16="http://schemas.microsoft.com/office/drawing/2014/main" id="{D6E8F7B2-4274-98C8-386A-5567231804C6}"/>
+              </a:ext>
+            </a:extLst>
+          </p:cNvPr>
+          <p:cNvPicPr>
+            <a:picLocks/>
+          </p:cNvPicPr>
+          <p:nvPr/>
+        </p:nvPicPr>
+        <p:blipFill>
+          <a:blip r:embed="rId6"/>
+          <a:stretch>
+            <a:fillRect/>
+          </a:stretch>
+        </p:blipFill>
+        <p:spPr>
+          <a:xfrm>
+            <a:off x="5461000" y="3619500"/>
+            <a:ext cx="2222500" cy="1460500"/>
+          </a:xfrm>
+          <a:prstGeom prst="rect">
+            <a:avLst/>
+          </a:prstGeom>
+        </p:spPr>
+      </p:pic>
+      <p:sp>
+        <p:nvSpPr>
+          <p:cNvPr id="12" name="TextBox 11">
+            <a:extLst>
+              <a:ext uri="{FF2B5EF4-FFF2-40B4-BE49-F238E27FC236}">
+                <a16:creationId xmlns:a16="http://schemas.microsoft.com/office/drawing/2014/main" id="{E448046D-862C-0D40-7E9F-A7016EB0E795}"/>
+              </a:ext>
+            </a:extLst>
+          </p:cNvPr>
+          <p:cNvSpPr txBox="1"/>
+          <p:nvPr/>
+        </p:nvSpPr>
+        <p:spPr>
+          <a:xfrm>
+            <a:off x="5461000" y="5080000"/>
+            <a:ext cx="2222500" cy="261610"/>
+          </a:xfrm>
+          <a:prstGeom prst="rect">
+            <a:avLst/>
+          </a:prstGeom>
+          <a:noFill/>
+        </p:spPr>
+        <p:txBody>
+          <a:bodyPr vert="horz" rtlCol="0">
+            <a:spAutoFit/>
+          </a:bodyPr>
+          <a:lstStyle/>
+          <a:p>
+            <a:pPr algn="ctr"/>
+            <a:r>
+              <a:rPr lang="en-IN" sz="1100" b="1">
+                <a:solidFill>
+                  <a:srgbClr val="181C24"/>
+                </a:solidFill>
+                <a:latin typeface="Times New Roman" panose="02020603050405020304" pitchFamily="18" charset="0"/>
+              </a:rPr>
+              <a:t>Edge-Loc Defect</a:t>
+            </a:r>
+          </a:p>
+        </p:txBody>
+      </p:sp>
+      <p:pic>
+        <p:nvPicPr>
+          <p:cNvPr id="14" name="Picture 13">
+            <a:extLst>
+              <a:ext uri="{FF2B5EF4-FFF2-40B4-BE49-F238E27FC236}">
+                <a16:creationId xmlns:a16="http://schemas.microsoft.com/office/drawing/2014/main" id="{A56DE7C0-C6A6-A942-626B-33FD1B9FCD66}"/>
+              </a:ext>
+            </a:extLst>
+          </p:cNvPr>
+          <p:cNvPicPr>
+            <a:picLocks/>
+          </p:cNvPicPr>
+          <p:nvPr/>
+        </p:nvPicPr>
+        <p:blipFill>
+          <a:blip r:embed="rId7"/>
+          <a:stretch>
+            <a:fillRect/>
+          </a:stretch>
+        </p:blipFill>
+        <p:spPr>
+          <a:xfrm>
+            <a:off x="8001000" y="3619500"/>
+            <a:ext cx="2222500" cy="1460500"/>
+          </a:xfrm>
+          <a:prstGeom prst="rect">
+            <a:avLst/>
+          </a:prstGeom>
+        </p:spPr>
+      </p:pic>
+      <p:sp>
+        <p:nvSpPr>
+          <p:cNvPr id="15" name="TextBox 14">
+            <a:extLst>
+              <a:ext uri="{FF2B5EF4-FFF2-40B4-BE49-F238E27FC236}">
+                <a16:creationId xmlns:a16="http://schemas.microsoft.com/office/drawing/2014/main" id="{E8398ED3-7FD9-83F5-78D5-B37EB5E45ABE}"/>
+              </a:ext>
+            </a:extLst>
+          </p:cNvPr>
+          <p:cNvSpPr txBox="1"/>
+          <p:nvPr/>
+        </p:nvSpPr>
+        <p:spPr>
+          <a:xfrm>
+            <a:off x="8001000" y="5080000"/>
+            <a:ext cx="2222500" cy="261610"/>
+          </a:xfrm>
+          <a:prstGeom prst="rect">
+            <a:avLst/>
+          </a:prstGeom>
+          <a:noFill/>
+        </p:spPr>
+        <p:txBody>
+          <a:bodyPr vert="horz" rtlCol="0">
+            <a:spAutoFit/>
+          </a:bodyPr>
+          <a:lstStyle/>
+          <a:p>
+            <a:pPr algn="ctr"/>
+            <a:r>
+              <a:rPr lang="en-IN" sz="1100" b="1">
+                <a:solidFill>
+                  <a:srgbClr val="181C24"/>
+                </a:solidFill>
+                <a:latin typeface="Times New Roman" panose="02020603050405020304" pitchFamily="18" charset="0"/>
+              </a:rPr>
+              <a:t>Scratch Defect</a:t>
+            </a:r>
+          </a:p>
+        </p:txBody>
+      </p:sp>
     </p:spTree>
+    <p:extLst>
+      <p:ext uri="{BB962C8B-B14F-4D97-AF65-F5344CB8AC3E}">
+        <p14:creationId xmlns:p14="http://schemas.microsoft.com/office/powerpoint/2010/main" val="3019407778"/>
+      </p:ext>
+    </p:extLst>
   </p:cSld>
   <p:clrMapOvr>
     <a:masterClrMapping/>
@@ -21071,7 +17447,7 @@
 </p:sld>
 </file>
 
-<file path=ppt/slides/slide9.xml><?xml version="1.0" encoding="utf-8"?>
+<file path=ppt/slides/slide8.xml><?xml version="1.0" encoding="utf-8"?>
 <p:sld xmlns:a="http://schemas.openxmlformats.org/drawingml/2006/main" xmlns:r="http://schemas.openxmlformats.org/officeDocument/2006/relationships" xmlns:p="http://schemas.openxmlformats.org/presentationml/2006/main">
   <p:cSld>
     <p:spTree>
@@ -21126,15 +17502,10 @@
               </a:spcAft>
               <a:buNone/>
             </a:pPr>
-            <a:r>
-              <a:rPr sz="1800" b="1">
-                <a:solidFill>
-                  <a:srgbClr val="0F172A"/>
-                </a:solidFill>
-                <a:latin typeface="Times New Roman"/>
-              </a:rPr>
-              <a:t>9</a:t>
-            </a:r>
+            <a:fld id="{00000000-1234-1234-1234-123412341234}" type="slidenum">
+              <a:rPr lang="en-US"/>
+              <a:t>8</a:t>
+            </a:fld>
             <a:endParaRPr/>
           </a:p>
         </p:txBody>
@@ -21280,7 +17651,7 @@
         </p:spPr>
         <p:txBody>
           <a:bodyPr spcFirstLastPara="1" wrap="square" lIns="91425" tIns="45700" rIns="91425" bIns="45700" anchor="b" anchorCtr="0">
-            <a:normAutofit/>
+            <a:noAutofit/>
           </a:bodyPr>
           <a:lstStyle/>
           <a:p>
@@ -21302,265 +17673,29 @@
               <a:buNone/>
             </a:pPr>
             <a:r>
-              <a:rPr sz="3400" b="1">
-                <a:solidFill>
-                  <a:srgbClr val="0F172A"/>
-                </a:solidFill>
-                <a:latin typeface="Times New Roman"/>
+              <a:rPr lang="en-US" sz="3400" b="1">
+                <a:solidFill>
+                  <a:srgbClr val="181C24"/>
+                </a:solidFill>
+                <a:highlight>
+                  <a:srgbClr val="FFFFFF"/>
+                </a:highlight>
+                <a:latin typeface="Times New Roman" panose="02020603050405020304" pitchFamily="18" charset="0"/>
+                <a:ea typeface="Times New Roman"/>
+                <a:cs typeface="Times New Roman"/>
+                <a:sym typeface="Times New Roman"/>
               </a:rPr>
-              <a:t>EXPERIMENTAL RESULTS &amp; OUTCOMES</a:t>
+              <a:t>SOFTWARE REQUIREMENTS &amp; METHODOLOGY</a:t>
             </a:r>
-            <a:endParaRPr sz="3600" b="1" dirty="0">
-              <a:latin typeface="Times New Roman"/>
+            <a:endParaRPr sz="3400" b="1" dirty="0">
+              <a:solidFill>
+                <a:srgbClr val="181C24"/>
+              </a:solidFill>
+              <a:latin typeface="Times New Roman" panose="02020603050405020304" pitchFamily="18" charset="0"/>
               <a:ea typeface="Times New Roman"/>
               <a:cs typeface="Times New Roman"/>
               <a:sym typeface="Times New Roman"/>
             </a:endParaRPr>
-          </a:p>
-        </p:txBody>
-      </p:sp>
-      <p:sp>
-        <p:nvSpPr>
-          <p:cNvPr id="124" name="Google Shape;124;p3"/>
-          <p:cNvSpPr txBox="1">
-            <a:spLocks noGrp="1"/>
-          </p:cNvSpPr>
-          <p:nvPr>
-            <p:ph type="subTitle" idx="1"/>
-          </p:nvPr>
-        </p:nvSpPr>
-        <p:spPr>
-          <a:xfrm>
-            <a:off x="731520" y="1828800"/>
-            <a:ext cx="6217920" cy="4114800"/>
-          </a:xfrm>
-          <a:prstGeom prst="rect">
-            <a:avLst/>
-          </a:prstGeom>
-          <a:noFill/>
-          <a:ln>
-            <a:noFill/>
-          </a:ln>
-        </p:spPr>
-        <p:txBody>
-          <a:bodyPr spcFirstLastPara="1" wrap="square" lIns="91425" tIns="45700" rIns="91425" bIns="45700" anchor="t" anchorCtr="0">
-            <a:normAutofit/>
-          </a:bodyPr>
-          <a:lstStyle/>
-          <a:p>
-            <a:pPr marL="342900" lvl="0" indent="-342900" algn="l">
-              <a:lnSpc>
-                <a:spcPct val="100000"/>
-              </a:lnSpc>
-              <a:spcBef>
-                <a:spcPts val="600"/>
-              </a:spcBef>
-              <a:spcAft>
-                <a:spcPts val="200"/>
-              </a:spcAft>
-              <a:buSzPts val="2600"/>
-              <a:buFont typeface="Noto Sans Symbols"/>
-              <a:buChar char="⮪"/>
-            </a:pPr>
-            <a:r>
-              <a:rPr sz="2000" b="1">
-                <a:solidFill>
-                  <a:srgbClr val="0284C7"/>
-                </a:solidFill>
-                <a:latin typeface="Times New Roman"/>
-              </a:rPr>
-              <a:t>Key Performance Metrics</a:t>
-            </a:r>
-          </a:p>
-          <a:p>
-            <a:pPr>
-              <a:spcBef>
-                <a:spcPts val="200"/>
-              </a:spcBef>
-              <a:spcAft>
-                <a:spcPts val="300"/>
-              </a:spcAft>
-            </a:pPr>
-            <a:r>
-              <a:rPr sz="1500" b="0">
-                <a:solidFill>
-                  <a:srgbClr val="1E293B"/>
-                </a:solidFill>
-                <a:latin typeface="Times New Roman"/>
-              </a:rPr>
-              <a:t>•  Overall Test Set Accuracy: 98.02% across 121,719 test wafer samples.</a:t>
-            </a:r>
-          </a:p>
-          <a:p>
-            <a:pPr>
-              <a:spcBef>
-                <a:spcPts val="200"/>
-              </a:spcBef>
-              <a:spcAft>
-                <a:spcPts val="300"/>
-              </a:spcAft>
-            </a:pPr>
-            <a:r>
-              <a:rPr sz="1500" b="0">
-                <a:solidFill>
-                  <a:srgbClr val="1E293B"/>
-                </a:solidFill>
-                <a:latin typeface="Times New Roman"/>
-              </a:rPr>
-              <a:t>•  Macro Precision: 0.6897  |  Macro Recall: 0.6177</a:t>
-            </a:r>
-          </a:p>
-          <a:p>
-            <a:pPr>
-              <a:spcBef>
-                <a:spcPts val="200"/>
-              </a:spcBef>
-              <a:spcAft>
-                <a:spcPts val="300"/>
-              </a:spcAft>
-            </a:pPr>
-            <a:r>
-              <a:rPr sz="1500" b="0">
-                <a:solidFill>
-                  <a:srgbClr val="1E293B"/>
-                </a:solidFill>
-                <a:latin typeface="Times New Roman"/>
-              </a:rPr>
-              <a:t>•  Inference Latency: 1.53 ms on standard CPU (zero GPU requirement).</a:t>
-            </a:r>
-          </a:p>
-          <a:p>
-            <a:pPr>
-              <a:spcBef>
-                <a:spcPts val="200"/>
-              </a:spcBef>
-              <a:spcAft>
-                <a:spcPts val="300"/>
-              </a:spcAft>
-            </a:pPr>
-            <a:r>
-              <a:rPr sz="1500" b="0">
-                <a:solidFill>
-                  <a:srgbClr val="1E293B"/>
-                </a:solidFill>
-                <a:latin typeface="Times New Roman"/>
-              </a:rPr>
-              <a:t>•  Model Binary Footprint: 5.84 MB (ultra-compact ONNX engine).</a:t>
-            </a:r>
-          </a:p>
-          <a:p>
-            <a:pPr>
-              <a:spcBef>
-                <a:spcPts val="600"/>
-              </a:spcBef>
-              <a:spcAft>
-                <a:spcPts val="200"/>
-              </a:spcAft>
-            </a:pPr>
-            <a:r>
-              <a:rPr sz="2000" b="1">
-                <a:solidFill>
-                  <a:srgbClr val="0284C7"/>
-                </a:solidFill>
-                <a:latin typeface="Times New Roman"/>
-              </a:rPr>
-              <a:t>Per-Class Defect Verification Highlights</a:t>
-            </a:r>
-          </a:p>
-          <a:p>
-            <a:pPr>
-              <a:spcBef>
-                <a:spcPts val="200"/>
-              </a:spcBef>
-              <a:spcAft>
-                <a:spcPts val="300"/>
-              </a:spcAft>
-            </a:pPr>
-            <a:r>
-              <a:rPr sz="1500" b="0">
-                <a:solidFill>
-                  <a:srgbClr val="1E293B"/>
-                </a:solidFill>
-                <a:latin typeface="Times New Roman"/>
-              </a:rPr>
-              <a:t>•  Clean (Nominal): 99.98% Precision, 100% Detection Rate (Near-zero false alarms).</a:t>
-            </a:r>
-          </a:p>
-          <a:p>
-            <a:pPr>
-              <a:spcBef>
-                <a:spcPts val="200"/>
-              </a:spcBef>
-              <a:spcAft>
-                <a:spcPts val="300"/>
-              </a:spcAft>
-            </a:pPr>
-            <a:r>
-              <a:rPr sz="1500" b="0">
-                <a:solidFill>
-                  <a:srgbClr val="1E293B"/>
-                </a:solidFill>
-                <a:latin typeface="Times New Roman"/>
-              </a:rPr>
-              <a:t>•  Scratch: 99.92% Confidence with clear linear scratch isolation.</a:t>
-            </a:r>
-          </a:p>
-          <a:p>
-            <a:pPr>
-              <a:spcBef>
-                <a:spcPts val="200"/>
-              </a:spcBef>
-              <a:spcAft>
-                <a:spcPts val="300"/>
-              </a:spcAft>
-            </a:pPr>
-            <a:r>
-              <a:rPr sz="1500" b="0">
-                <a:solidFill>
-                  <a:srgbClr val="1E293B"/>
-                </a:solidFill>
-                <a:latin typeface="Times New Roman"/>
-              </a:rPr>
-              <a:t>•  Donut: 99.99% Confidence detecting radial thermal ring defects.</a:t>
-            </a:r>
-          </a:p>
-          <a:p>
-            <a:pPr>
-              <a:spcBef>
-                <a:spcPts val="200"/>
-              </a:spcBef>
-              <a:spcAft>
-                <a:spcPts val="300"/>
-              </a:spcAft>
-            </a:pPr>
-            <a:r>
-              <a:rPr sz="1500" b="0">
-                <a:solidFill>
-                  <a:srgbClr val="1E293B"/>
-                </a:solidFill>
-                <a:latin typeface="Times New Roman"/>
-              </a:rPr>
-              <a:t>•  Center Cluster: 98.01% Confidence detecting CMP slurry anomalies.</a:t>
-            </a:r>
-          </a:p>
-          <a:p>
-            <a:pPr>
-              <a:spcBef>
-                <a:spcPts val="200"/>
-              </a:spcBef>
-              <a:spcAft>
-                <a:spcPts val="300"/>
-              </a:spcAft>
-            </a:pPr>
-            <a:r>
-              <a:rPr sz="1500" b="0">
-                <a:solidFill>
-                  <a:srgbClr val="1E293B"/>
-                </a:solidFill>
-                <a:latin typeface="Times New Roman"/>
-              </a:rPr>
-              <a:t>•  Edge-Loc &amp; Loc: &gt;99.2% Confidence identifying localized clusters.</a:t>
-            </a:r>
           </a:p>
         </p:txBody>
       </p:sp>
@@ -21591,30 +17726,109 @@
           </a:ln>
         </p:spPr>
       </p:pic>
-      <p:pic>
-        <p:nvPicPr>
-          <p:cNvPr id="126" name="Picture 125" descr="confusion_matrix.png"/>
-          <p:cNvPicPr>
-            <a:picLocks noChangeAspect="1"/>
-          </p:cNvPicPr>
+      <p:sp>
+        <p:nvSpPr>
+          <p:cNvPr id="3" name="Subtitle 2">
+            <a:extLst>
+              <a:ext uri="{FF2B5EF4-FFF2-40B4-BE49-F238E27FC236}">
+                <a16:creationId xmlns:a16="http://schemas.microsoft.com/office/drawing/2014/main" id="{CAC11F36-6697-705E-113C-8397EC31B79C}"/>
+              </a:ext>
+            </a:extLst>
+          </p:cNvPr>
+          <p:cNvSpPr>
+            <a:spLocks noGrp="1"/>
+          </p:cNvSpPr>
+          <p:nvPr>
+            <p:ph type="subTitle" idx="1"/>
+          </p:nvPr>
+        </p:nvSpPr>
+        <p:spPr/>
+        <p:txBody>
+          <a:bodyPr/>
+          <a:lstStyle/>
+          <a:p>
+            <a:endParaRPr lang="en-IN"/>
+          </a:p>
+        </p:txBody>
+      </p:sp>
+      <p:sp>
+        <p:nvSpPr>
+          <p:cNvPr id="4" name="TextBox 3">
+            <a:extLst>
+              <a:ext uri="{FF2B5EF4-FFF2-40B4-BE49-F238E27FC236}">
+                <a16:creationId xmlns:a16="http://schemas.microsoft.com/office/drawing/2014/main" id="{C95CA6FA-040C-BD45-35A7-C745F2590D08}"/>
+              </a:ext>
+            </a:extLst>
+          </p:cNvPr>
+          <p:cNvSpPr txBox="1"/>
           <p:nvPr/>
-        </p:nvPicPr>
-        <p:blipFill>
-          <a:blip r:embed="rId4"/>
-          <a:stretch>
-            <a:fillRect/>
-          </a:stretch>
-        </p:blipFill>
+        </p:nvSpPr>
         <p:spPr>
           <a:xfrm>
-            <a:off x="7132320" y="1920240"/>
-            <a:ext cx="4206240" cy="3840480"/>
+            <a:off x="635000" y="1778000"/>
+            <a:ext cx="9906000" cy="3154710"/>
           </a:xfrm>
           <a:prstGeom prst="rect">
             <a:avLst/>
           </a:prstGeom>
+          <a:noFill/>
         </p:spPr>
-      </p:pic>
+        <p:txBody>
+          <a:bodyPr vert="horz" wrap="square" rtlCol="0">
+            <a:spAutoFit/>
+          </a:bodyPr>
+          <a:lstStyle/>
+          <a:p>
+            <a:r>
+              <a:rPr lang="en-IN" sz="1700" b="1">
+                <a:solidFill>
+                  <a:srgbClr val="0284C7"/>
+                </a:solidFill>
+                <a:latin typeface="Times New Roman" panose="02020603050405020304" pitchFamily="18" charset="0"/>
+              </a:rPr>
+              <a:t>Software Requirements &amp; Frameworks</a:t>
+            </a:r>
+            <a:r>
+              <a:rPr lang="en-IN" sz="1500">
+                <a:solidFill>
+                  <a:srgbClr val="181C24"/>
+                </a:solidFill>
+                <a:latin typeface="Times New Roman" panose="02020603050405020304" pitchFamily="18" charset="0"/>
+              </a:rPr>
+              <a:t>
+•  Operating System: Windows 11 / Linux (Ubuntu 22.04 LTS)
+•  Programming Language: Python 3.12 / 3.10
+•  Deep Learning Framework: PyTorch 2.x, Torchvision
+•  Edge Runtime Engine: ONNX Runtime 1.18+
+•  Computer Vision &amp; Analytics: OpenCV (cv2), NumPy, Scikit-learn, Matplotlib, Seaborn
+•  Web Application &amp; API: HTML5 Canvas, Vanilla CSS3, JavaScript ES6, Python HTTP Server
+</a:t>
+            </a:r>
+            <a:r>
+              <a:rPr lang="en-IN" sz="1700" b="1">
+                <a:solidFill>
+                  <a:srgbClr val="0284C7"/>
+                </a:solidFill>
+                <a:latin typeface="Times New Roman" panose="02020603050405020304" pitchFamily="18" charset="0"/>
+              </a:rPr>
+              <a:t>4-Phase Implementation Methodology</a:t>
+            </a:r>
+            <a:r>
+              <a:rPr lang="en-IN" sz="1500">
+                <a:solidFill>
+                  <a:srgbClr val="181C24"/>
+                </a:solidFill>
+                <a:latin typeface="Times New Roman" panose="02020603050405020304" pitchFamily="18" charset="0"/>
+              </a:rPr>
+              <a:t>
+•  Phase 1: Dataset Curation - WM-811K parsing, 224x224 bicubic resizing, ImageNet tensor normalization.
+•  Phase 2: Transfer Learning - Pre-trained MobileNetV3-Small backbone with custom 8-class linear head.
+•  Phase 3: Loss Optimization - Cross-entropy loss minimization with Adam optimizer (lr=3e-4) &amp; early stopping.
+•  Phase 4: ONNX Deployment - Model graph trace, CPU graph optimizations, and interactive web visualizer.</a:t>
+            </a:r>
+          </a:p>
+        </p:txBody>
+      </p:sp>
     </p:spTree>
   </p:cSld>
   <p:clrMapOvr>
@@ -21678,15 +17892,10 @@
               </a:spcAft>
               <a:buNone/>
             </a:pPr>
-            <a:r>
-              <a:rPr sz="1800" b="1">
-                <a:solidFill>
-                  <a:srgbClr val="0F172A"/>
-                </a:solidFill>
-                <a:latin typeface="Times New Roman"/>
-              </a:rPr>
+            <a:fld id="{00000000-1234-1234-1234-123412341234}" type="slidenum">
+              <a:rPr lang="en-US"/>
               <a:t>9</a:t>
-            </a:r>
+            </a:fld>
             <a:endParaRPr/>
           </a:p>
         </p:txBody>
@@ -21854,265 +18063,29 @@
               <a:buNone/>
             </a:pPr>
             <a:r>
-              <a:rPr sz="3400" b="1">
-                <a:solidFill>
-                  <a:srgbClr val="0F172A"/>
-                </a:solidFill>
-                <a:latin typeface="Times New Roman"/>
+              <a:rPr lang="en-US" sz="3400" b="1">
+                <a:solidFill>
+                  <a:srgbClr val="181C24"/>
+                </a:solidFill>
+                <a:highlight>
+                  <a:srgbClr val="FFFFFF"/>
+                </a:highlight>
+                <a:latin typeface="Times New Roman" panose="02020603050405020304" pitchFamily="18" charset="0"/>
+                <a:ea typeface="Times New Roman"/>
+                <a:cs typeface="Times New Roman"/>
+                <a:sym typeface="Times New Roman"/>
               </a:rPr>
               <a:t>EXPERIMENTAL RESULTS &amp; OUTCOMES</a:t>
             </a:r>
-            <a:endParaRPr sz="3600" b="1" dirty="0">
-              <a:latin typeface="Times New Roman"/>
+            <a:endParaRPr sz="3400" b="1" dirty="0">
+              <a:solidFill>
+                <a:srgbClr val="181C24"/>
+              </a:solidFill>
+              <a:latin typeface="Times New Roman" panose="02020603050405020304" pitchFamily="18" charset="0"/>
               <a:ea typeface="Times New Roman"/>
               <a:cs typeface="Times New Roman"/>
               <a:sym typeface="Times New Roman"/>
             </a:endParaRPr>
-          </a:p>
-        </p:txBody>
-      </p:sp>
-      <p:sp>
-        <p:nvSpPr>
-          <p:cNvPr id="124" name="Google Shape;124;p3"/>
-          <p:cNvSpPr txBox="1">
-            <a:spLocks noGrp="1"/>
-          </p:cNvSpPr>
-          <p:nvPr>
-            <p:ph type="subTitle" idx="1"/>
-          </p:nvPr>
-        </p:nvSpPr>
-        <p:spPr>
-          <a:xfrm>
-            <a:off x="731520" y="1828800"/>
-            <a:ext cx="6217920" cy="4114800"/>
-          </a:xfrm>
-          <a:prstGeom prst="rect">
-            <a:avLst/>
-          </a:prstGeom>
-          <a:noFill/>
-          <a:ln>
-            <a:noFill/>
-          </a:ln>
-        </p:spPr>
-        <p:txBody>
-          <a:bodyPr spcFirstLastPara="1" wrap="square" lIns="91425" tIns="45700" rIns="91425" bIns="45700" anchor="t" anchorCtr="0">
-            <a:normAutofit/>
-          </a:bodyPr>
-          <a:lstStyle/>
-          <a:p>
-            <a:pPr marL="342900" lvl="0" indent="-342900" algn="l">
-              <a:lnSpc>
-                <a:spcPct val="100000"/>
-              </a:lnSpc>
-              <a:spcBef>
-                <a:spcPts val="600"/>
-              </a:spcBef>
-              <a:spcAft>
-                <a:spcPts val="200"/>
-              </a:spcAft>
-              <a:buSzPts val="2600"/>
-              <a:buFont typeface="Noto Sans Symbols"/>
-              <a:buChar char="⮪"/>
-            </a:pPr>
-            <a:r>
-              <a:rPr sz="2000" b="1">
-                <a:solidFill>
-                  <a:srgbClr val="0284C7"/>
-                </a:solidFill>
-                <a:latin typeface="Times New Roman"/>
-              </a:rPr>
-              <a:t>Key Performance Metrics</a:t>
-            </a:r>
-          </a:p>
-          <a:p>
-            <a:pPr>
-              <a:spcBef>
-                <a:spcPts val="200"/>
-              </a:spcBef>
-              <a:spcAft>
-                <a:spcPts val="300"/>
-              </a:spcAft>
-            </a:pPr>
-            <a:r>
-              <a:rPr sz="1500" b="0">
-                <a:solidFill>
-                  <a:srgbClr val="1E293B"/>
-                </a:solidFill>
-                <a:latin typeface="Times New Roman"/>
-              </a:rPr>
-              <a:t>•  Overall Test Set Accuracy: 98.02% across 121,719 test wafer samples.</a:t>
-            </a:r>
-          </a:p>
-          <a:p>
-            <a:pPr>
-              <a:spcBef>
-                <a:spcPts val="200"/>
-              </a:spcBef>
-              <a:spcAft>
-                <a:spcPts val="300"/>
-              </a:spcAft>
-            </a:pPr>
-            <a:r>
-              <a:rPr sz="1500" b="0">
-                <a:solidFill>
-                  <a:srgbClr val="1E293B"/>
-                </a:solidFill>
-                <a:latin typeface="Times New Roman"/>
-              </a:rPr>
-              <a:t>•  Macro Precision: 0.6897  |  Macro Recall: 0.6177</a:t>
-            </a:r>
-          </a:p>
-          <a:p>
-            <a:pPr>
-              <a:spcBef>
-                <a:spcPts val="200"/>
-              </a:spcBef>
-              <a:spcAft>
-                <a:spcPts val="300"/>
-              </a:spcAft>
-            </a:pPr>
-            <a:r>
-              <a:rPr sz="1500" b="0">
-                <a:solidFill>
-                  <a:srgbClr val="1E293B"/>
-                </a:solidFill>
-                <a:latin typeface="Times New Roman"/>
-              </a:rPr>
-              <a:t>•  Inference Latency: 1.53 ms on standard CPU (zero GPU requirement).</a:t>
-            </a:r>
-          </a:p>
-          <a:p>
-            <a:pPr>
-              <a:spcBef>
-                <a:spcPts val="200"/>
-              </a:spcBef>
-              <a:spcAft>
-                <a:spcPts val="300"/>
-              </a:spcAft>
-            </a:pPr>
-            <a:r>
-              <a:rPr sz="1500" b="0">
-                <a:solidFill>
-                  <a:srgbClr val="1E293B"/>
-                </a:solidFill>
-                <a:latin typeface="Times New Roman"/>
-              </a:rPr>
-              <a:t>•  Model Binary Footprint: 5.84 MB (ultra-compact ONNX engine).</a:t>
-            </a:r>
-          </a:p>
-          <a:p>
-            <a:pPr>
-              <a:spcBef>
-                <a:spcPts val="600"/>
-              </a:spcBef>
-              <a:spcAft>
-                <a:spcPts val="200"/>
-              </a:spcAft>
-            </a:pPr>
-            <a:r>
-              <a:rPr sz="2000" b="1">
-                <a:solidFill>
-                  <a:srgbClr val="0284C7"/>
-                </a:solidFill>
-                <a:latin typeface="Times New Roman"/>
-              </a:rPr>
-              <a:t>Per-Class Defect Verification Highlights</a:t>
-            </a:r>
-          </a:p>
-          <a:p>
-            <a:pPr>
-              <a:spcBef>
-                <a:spcPts val="200"/>
-              </a:spcBef>
-              <a:spcAft>
-                <a:spcPts val="300"/>
-              </a:spcAft>
-            </a:pPr>
-            <a:r>
-              <a:rPr sz="1500" b="0">
-                <a:solidFill>
-                  <a:srgbClr val="1E293B"/>
-                </a:solidFill>
-                <a:latin typeface="Times New Roman"/>
-              </a:rPr>
-              <a:t>•  Clean (Nominal): 99.98% Precision, 100% Detection Rate (Near-zero false alarms).</a:t>
-            </a:r>
-          </a:p>
-          <a:p>
-            <a:pPr>
-              <a:spcBef>
-                <a:spcPts val="200"/>
-              </a:spcBef>
-              <a:spcAft>
-                <a:spcPts val="300"/>
-              </a:spcAft>
-            </a:pPr>
-            <a:r>
-              <a:rPr sz="1500" b="0">
-                <a:solidFill>
-                  <a:srgbClr val="1E293B"/>
-                </a:solidFill>
-                <a:latin typeface="Times New Roman"/>
-              </a:rPr>
-              <a:t>•  Scratch: 99.92% Confidence with clear linear scratch isolation.</a:t>
-            </a:r>
-          </a:p>
-          <a:p>
-            <a:pPr>
-              <a:spcBef>
-                <a:spcPts val="200"/>
-              </a:spcBef>
-              <a:spcAft>
-                <a:spcPts val="300"/>
-              </a:spcAft>
-            </a:pPr>
-            <a:r>
-              <a:rPr sz="1500" b="0">
-                <a:solidFill>
-                  <a:srgbClr val="1E293B"/>
-                </a:solidFill>
-                <a:latin typeface="Times New Roman"/>
-              </a:rPr>
-              <a:t>•  Donut: 99.99% Confidence detecting radial thermal ring defects.</a:t>
-            </a:r>
-          </a:p>
-          <a:p>
-            <a:pPr>
-              <a:spcBef>
-                <a:spcPts val="200"/>
-              </a:spcBef>
-              <a:spcAft>
-                <a:spcPts val="300"/>
-              </a:spcAft>
-            </a:pPr>
-            <a:r>
-              <a:rPr sz="1500" b="0">
-                <a:solidFill>
-                  <a:srgbClr val="1E293B"/>
-                </a:solidFill>
-                <a:latin typeface="Times New Roman"/>
-              </a:rPr>
-              <a:t>•  Center Cluster: 98.01% Confidence detecting CMP slurry anomalies.</a:t>
-            </a:r>
-          </a:p>
-          <a:p>
-            <a:pPr>
-              <a:spcBef>
-                <a:spcPts val="200"/>
-              </a:spcBef>
-              <a:spcAft>
-                <a:spcPts val="300"/>
-              </a:spcAft>
-            </a:pPr>
-            <a:r>
-              <a:rPr sz="1500" b="0">
-                <a:solidFill>
-                  <a:srgbClr val="1E293B"/>
-                </a:solidFill>
-                <a:latin typeface="Times New Roman"/>
-              </a:rPr>
-              <a:t>•  Edge-Loc &amp; Loc: &gt;99.2% Confidence identifying localized clusters.</a:t>
-            </a:r>
           </a:p>
         </p:txBody>
       </p:sp>
@@ -22143,11 +18116,119 @@
           </a:ln>
         </p:spPr>
       </p:pic>
+      <p:sp>
+        <p:nvSpPr>
+          <p:cNvPr id="3" name="Subtitle 2">
+            <a:extLst>
+              <a:ext uri="{FF2B5EF4-FFF2-40B4-BE49-F238E27FC236}">
+                <a16:creationId xmlns:a16="http://schemas.microsoft.com/office/drawing/2014/main" id="{9565EDF5-CDD2-8D5E-261A-375F37B22C6D}"/>
+              </a:ext>
+            </a:extLst>
+          </p:cNvPr>
+          <p:cNvSpPr>
+            <a:spLocks noGrp="1"/>
+          </p:cNvSpPr>
+          <p:nvPr>
+            <p:ph type="subTitle" idx="1"/>
+          </p:nvPr>
+        </p:nvSpPr>
+        <p:spPr/>
+        <p:txBody>
+          <a:bodyPr/>
+          <a:lstStyle/>
+          <a:p>
+            <a:endParaRPr lang="en-IN"/>
+          </a:p>
+        </p:txBody>
+      </p:sp>
+      <p:sp>
+        <p:nvSpPr>
+          <p:cNvPr id="4" name="TextBox 3">
+            <a:extLst>
+              <a:ext uri="{FF2B5EF4-FFF2-40B4-BE49-F238E27FC236}">
+                <a16:creationId xmlns:a16="http://schemas.microsoft.com/office/drawing/2014/main" id="{2F3542BE-C84D-A998-9FAD-5148687E0E5A}"/>
+              </a:ext>
+            </a:extLst>
+          </p:cNvPr>
+          <p:cNvSpPr txBox="1"/>
+          <p:nvPr/>
+        </p:nvSpPr>
+        <p:spPr>
+          <a:xfrm>
+            <a:off x="444500" y="1778000"/>
+            <a:ext cx="5461000" cy="2585323"/>
+          </a:xfrm>
+          <a:prstGeom prst="rect">
+            <a:avLst/>
+          </a:prstGeom>
+          <a:noFill/>
+        </p:spPr>
+        <p:txBody>
+          <a:bodyPr vert="horz" wrap="square" rtlCol="0">
+            <a:spAutoFit/>
+          </a:bodyPr>
+          <a:lstStyle/>
+          <a:p>
+            <a:r>
+              <a:rPr lang="en-IN" sz="1600" b="1">
+                <a:solidFill>
+                  <a:srgbClr val="0284C7"/>
+                </a:solidFill>
+                <a:latin typeface="Times New Roman" panose="02020603050405020304" pitchFamily="18" charset="0"/>
+              </a:rPr>
+              <a:t>Key Performance Metrics</a:t>
+            </a:r>
+            <a:r>
+              <a:rPr lang="en-IN" sz="1300">
+                <a:solidFill>
+                  <a:srgbClr val="181C24"/>
+                </a:solidFill>
+                <a:latin typeface="Times New Roman" panose="02020603050405020304" pitchFamily="18" charset="0"/>
+              </a:rPr>
+              <a:t>
+• Overall Test Set Accuracy: 98.02% (121,719 test wafers).
+• Macro Precision: 0.6897  |  Macro Recall: 0.6177
+• Inference Latency: 1.53 ms on CPU (zero GPU requirement).
+• Model Footprint: 5.84 MB (ultra-compact ONNX binary).
+</a:t>
+            </a:r>
+            <a:r>
+              <a:rPr lang="en-IN" sz="1600" b="1">
+                <a:solidFill>
+                  <a:srgbClr val="0284C7"/>
+                </a:solidFill>
+                <a:latin typeface="Times New Roman" panose="02020603050405020304" pitchFamily="18" charset="0"/>
+              </a:rPr>
+              <a:t>Per-Class Defect Verification Highlights</a:t>
+            </a:r>
+            <a:r>
+              <a:rPr lang="en-IN" sz="1300">
+                <a:solidFill>
+                  <a:srgbClr val="181C24"/>
+                </a:solidFill>
+                <a:latin typeface="Times New Roman" panose="02020603050405020304" pitchFamily="18" charset="0"/>
+              </a:rPr>
+              <a:t>
+• Clean (Nominal): 99.98% Precision, 100% Detection Rate.
+• Scratch: 99.92% Confidence with clear linear streak isolation.
+• Donut: 99.99% Confidence detecting radial thermal rings.
+• Center Cluster: 98.01% Confidence detecting CMP slurry anomalies.
+• Edge-Loc &amp; Loc: &gt;99.2% Confidence on localized boundary dies.</a:t>
+            </a:r>
+          </a:p>
+        </p:txBody>
+      </p:sp>
       <p:pic>
         <p:nvPicPr>
-          <p:cNvPr id="126" name="Picture 125" descr="confusion_matrix.png"/>
+          <p:cNvPr id="6" name="Picture 5">
+            <a:extLst>
+              <a:ext uri="{FF2B5EF4-FFF2-40B4-BE49-F238E27FC236}">
+                <a16:creationId xmlns:a16="http://schemas.microsoft.com/office/drawing/2014/main" id="{18D269B1-1888-7A6A-5033-FE113F22ECF0}"/>
+              </a:ext>
+            </a:extLst>
+          </p:cNvPr>
           <p:cNvPicPr>
-            <a:picLocks noChangeAspect="1"/>
+            <a:picLocks/>
           </p:cNvPicPr>
           <p:nvPr/>
         </p:nvPicPr>
@@ -22159,8 +18240,8 @@
         </p:blipFill>
         <p:spPr>
           <a:xfrm>
-            <a:off x="7132320" y="1920240"/>
-            <a:ext cx="4206240" cy="3840480"/>
+            <a:off x="6159500" y="1778000"/>
+            <a:ext cx="4254500" cy="3556000"/>
           </a:xfrm>
           <a:prstGeom prst="rect">
             <a:avLst/>
